--- a/submission/CricketShot_Presentation.pptx
+++ b/submission/CricketShot_Presentation.pptx
@@ -5,7 +5,7 @@
     <p:sldMasterId id="2147483648" r:id="rId1"/>
   </p:sldMasterIdLst>
   <p:notesMasterIdLst>
-    <p:notesMasterId r:id="rId18"/>
+    <p:notesMasterId r:id="rId19"/>
   </p:notesMasterIdLst>
   <p:sldIdLst>
     <p:sldId id="256" r:id="rId2"/>
@@ -24,6 +24,7 @@
     <p:sldId id="269" r:id="rId15"/>
     <p:sldId id="270" r:id="rId16"/>
     <p:sldId id="271" r:id="rId17"/>
+    <p:sldId id="272" r:id="rId18"/>
   </p:sldIdLst>
   <p:sldSz cx="12192000" cy="6858000"/>
   <p:notesSz cx="6858000" cy="9144000"/>
@@ -205,7 +206,7 @@
             </a:lvl1pPr>
           </a:lstStyle>
           <a:p>
-            <a:fld id="{0A0CB448-8CD0-43B2-873A-FF1FC171ACA2}" type="datetimeFigureOut">
+            <a:fld id="{2AB85FD1-3046-4769-AE0B-D618BF128588}" type="datetimeFigureOut">
               <a:rPr lang="en-IN" smtClean="0"/>
               <a:t>19-10-2026</a:t>
             </a:fld>
@@ -364,7 +365,7 @@
             </a:lvl1pPr>
           </a:lstStyle>
           <a:p>
-            <a:fld id="{CB6D05BF-3823-4251-85D6-8F40948E3712}" type="slidenum">
+            <a:fld id="{4AA5213A-272A-46DE-A19A-34290041A493}" type="slidenum">
               <a:rPr lang="en-IN" smtClean="0"/>
               <a:t>‹#›</a:t>
             </a:fld>
@@ -375,7 +376,7 @@
     </p:spTree>
     <p:extLst>
       <p:ext uri="{BB962C8B-B14F-4D97-AF65-F5344CB8AC3E}">
-        <p14:creationId xmlns:p14="http://schemas.microsoft.com/office/powerpoint/2010/main" val="2249882167"/>
+        <p14:creationId xmlns:p14="http://schemas.microsoft.com/office/powerpoint/2010/main" val="2188669798"/>
       </p:ext>
     </p:extLst>
   </p:cSld>
@@ -542,7 +543,7 @@
           <a:bodyPr/>
           <a:lstStyle/>
           <a:p>
-            <a:fld id="{CB6D05BF-3823-4251-85D6-8F40948E3712}" type="slidenum">
+            <a:fld id="{4AA5213A-272A-46DE-A19A-34290041A493}" type="slidenum">
               <a:rPr lang="en-IN" smtClean="0"/>
               <a:t>1</a:t>
             </a:fld>
@@ -553,7 +554,7 @@
     </p:spTree>
     <p:extLst>
       <p:ext uri="{BB962C8B-B14F-4D97-AF65-F5344CB8AC3E}">
-        <p14:creationId xmlns:p14="http://schemas.microsoft.com/office/powerpoint/2010/main" val="117299915"/>
+        <p14:creationId xmlns:p14="http://schemas.microsoft.com/office/powerpoint/2010/main" val="4194381756"/>
       </p:ext>
     </p:extLst>
   </p:cSld>
@@ -630,7 +631,7 @@
           <a:bodyPr/>
           <a:lstStyle/>
           <a:p>
-            <a:fld id="{CB6D05BF-3823-4251-85D6-8F40948E3712}" type="slidenum">
+            <a:fld id="{4AA5213A-272A-46DE-A19A-34290041A493}" type="slidenum">
               <a:rPr lang="en-IN" smtClean="0"/>
               <a:t>10</a:t>
             </a:fld>
@@ -641,7 +642,7 @@
     </p:spTree>
     <p:extLst>
       <p:ext uri="{BB962C8B-B14F-4D97-AF65-F5344CB8AC3E}">
-        <p14:creationId xmlns:p14="http://schemas.microsoft.com/office/powerpoint/2010/main" val="1800606735"/>
+        <p14:creationId xmlns:p14="http://schemas.microsoft.com/office/powerpoint/2010/main" val="1237195612"/>
       </p:ext>
     </p:extLst>
   </p:cSld>
@@ -718,7 +719,7 @@
           <a:bodyPr/>
           <a:lstStyle/>
           <a:p>
-            <a:fld id="{CB6D05BF-3823-4251-85D6-8F40948E3712}" type="slidenum">
+            <a:fld id="{4AA5213A-272A-46DE-A19A-34290041A493}" type="slidenum">
               <a:rPr lang="en-IN" smtClean="0"/>
               <a:t>11</a:t>
             </a:fld>
@@ -729,7 +730,7 @@
     </p:spTree>
     <p:extLst>
       <p:ext uri="{BB962C8B-B14F-4D97-AF65-F5344CB8AC3E}">
-        <p14:creationId xmlns:p14="http://schemas.microsoft.com/office/powerpoint/2010/main" val="2926563933"/>
+        <p14:creationId xmlns:p14="http://schemas.microsoft.com/office/powerpoint/2010/main" val="3210066702"/>
       </p:ext>
     </p:extLst>
   </p:cSld>
@@ -806,7 +807,7 @@
           <a:bodyPr/>
           <a:lstStyle/>
           <a:p>
-            <a:fld id="{CB6D05BF-3823-4251-85D6-8F40948E3712}" type="slidenum">
+            <a:fld id="{4AA5213A-272A-46DE-A19A-34290041A493}" type="slidenum">
               <a:rPr lang="en-IN" smtClean="0"/>
               <a:t>12</a:t>
             </a:fld>
@@ -817,7 +818,7 @@
     </p:spTree>
     <p:extLst>
       <p:ext uri="{BB962C8B-B14F-4D97-AF65-F5344CB8AC3E}">
-        <p14:creationId xmlns:p14="http://schemas.microsoft.com/office/powerpoint/2010/main" val="1865189731"/>
+        <p14:creationId xmlns:p14="http://schemas.microsoft.com/office/powerpoint/2010/main" val="2705128930"/>
       </p:ext>
     </p:extLst>
   </p:cSld>
@@ -894,7 +895,7 @@
           <a:bodyPr/>
           <a:lstStyle/>
           <a:p>
-            <a:fld id="{CB6D05BF-3823-4251-85D6-8F40948E3712}" type="slidenum">
+            <a:fld id="{4AA5213A-272A-46DE-A19A-34290041A493}" type="slidenum">
               <a:rPr lang="en-IN" smtClean="0"/>
               <a:t>13</a:t>
             </a:fld>
@@ -905,7 +906,7 @@
     </p:spTree>
     <p:extLst>
       <p:ext uri="{BB962C8B-B14F-4D97-AF65-F5344CB8AC3E}">
-        <p14:creationId xmlns:p14="http://schemas.microsoft.com/office/powerpoint/2010/main" val="3628834908"/>
+        <p14:creationId xmlns:p14="http://schemas.microsoft.com/office/powerpoint/2010/main" val="3932707134"/>
       </p:ext>
     </p:extLst>
   </p:cSld>
@@ -982,7 +983,7 @@
           <a:bodyPr/>
           <a:lstStyle/>
           <a:p>
-            <a:fld id="{CB6D05BF-3823-4251-85D6-8F40948E3712}" type="slidenum">
+            <a:fld id="{4AA5213A-272A-46DE-A19A-34290041A493}" type="slidenum">
               <a:rPr lang="en-IN" smtClean="0"/>
               <a:t>14</a:t>
             </a:fld>
@@ -993,7 +994,7 @@
     </p:spTree>
     <p:extLst>
       <p:ext uri="{BB962C8B-B14F-4D97-AF65-F5344CB8AC3E}">
-        <p14:creationId xmlns:p14="http://schemas.microsoft.com/office/powerpoint/2010/main" val="3278748687"/>
+        <p14:creationId xmlns:p14="http://schemas.microsoft.com/office/powerpoint/2010/main" val="561185659"/>
       </p:ext>
     </p:extLst>
   </p:cSld>
@@ -1070,7 +1071,7 @@
           <a:bodyPr/>
           <a:lstStyle/>
           <a:p>
-            <a:fld id="{CB6D05BF-3823-4251-85D6-8F40948E3712}" type="slidenum">
+            <a:fld id="{4AA5213A-272A-46DE-A19A-34290041A493}" type="slidenum">
               <a:rPr lang="en-IN" smtClean="0"/>
               <a:t>15</a:t>
             </a:fld>
@@ -1081,7 +1082,7 @@
     </p:spTree>
     <p:extLst>
       <p:ext uri="{BB962C8B-B14F-4D97-AF65-F5344CB8AC3E}">
-        <p14:creationId xmlns:p14="http://schemas.microsoft.com/office/powerpoint/2010/main" val="1485376136"/>
+        <p14:creationId xmlns:p14="http://schemas.microsoft.com/office/powerpoint/2010/main" val="4136491437"/>
       </p:ext>
     </p:extLst>
   </p:cSld>
@@ -1137,7 +1138,7 @@
           <a:p>
             <a:r>
               <a:rPr lang="en-US"/>
-              <a:t>Use only for questions. Equal 30.2% majority accuracy means weak video recognition, despite higher macro F1. Fixed crop followed pilot test feedback. Source: https://www.kaggle.com/datasets/amittalmale/cricket-shots . Image audit: pHash &lt;=6 bits with thumbnail MAD, rotations/mirrors, then 15 feature neighbors within cosine .20. ORB binary matching, .72 ratio, &gt;=16 matches, &gt;=12 RANSAC inliers, &gt;=65% inlier fraction, &gt;=8% hull coverage. These are evaluation tools, not a novel shot classifier. Other sources: https://github.com/onnx/models ; https://github.com/scikit-learn/scikit-learn ; https://github.com/microsoft/onnxruntime ; https://github.com/opencv/opencv ; https://arxiv.org/abs/1608.00859 . Full URLs, saved evidence and complete code appendix accompany the report.</a:t>
+              <a:t>Exploratory follow-up after original test results were known. Established mixture-of-experts idea: Jacobs et al. (1991), https://www.cs.toronto.edu/~hinton/absps/jjnh91.pdf . Three experts with C=10 and T=1. No new CNN pass or CNN training. Gate inputs: each expert entropy/log4, maximum and margin; pairwise total variation; embedding cosine distance. Training-only out-of-fold means/std standardize 13 inputs, std lower bound .05. Slopes/intercepts give42 coefficients. Class-balanced NLL, L2 slopes, unpenalized biases. Search L2 .01,.1,1,10, validation macro F1, stronger regularization wins ties. Constant control learns .176 global, nearly zero crop, .824 contrast. Adaptive and constant test predictions are identical. Adaptive minus contrast: -0.11 accuracy points, paired visual-group 95% interval [-.79,+.68]. Concat validation F1=79.6%, so the frozen deployment rule rejects this gate. This is not nested CV: C was selected in the earlier validation study. Stored fold lists, OOF scores, protocol, selection and test predictions are in results/fusion. No new architecture or reliable gain is claimed.</a:t>
             </a:r>
             <a:endParaRPr lang="en-IN"/>
           </a:p>
@@ -1158,7 +1159,7 @@
           <a:bodyPr/>
           <a:lstStyle/>
           <a:p>
-            <a:fld id="{CB6D05BF-3823-4251-85D6-8F40948E3712}" type="slidenum">
+            <a:fld id="{4AA5213A-272A-46DE-A19A-34290041A493}" type="slidenum">
               <a:rPr lang="en-IN" smtClean="0"/>
               <a:t>16</a:t>
             </a:fld>
@@ -1169,7 +1170,95 @@
     </p:spTree>
     <p:extLst>
       <p:ext uri="{BB962C8B-B14F-4D97-AF65-F5344CB8AC3E}">
-        <p14:creationId xmlns:p14="http://schemas.microsoft.com/office/powerpoint/2010/main" val="3125352997"/>
+        <p14:creationId xmlns:p14="http://schemas.microsoft.com/office/powerpoint/2010/main" val="397433071"/>
+      </p:ext>
+    </p:extLst>
+  </p:cSld>
+  <p:clrMapOvr>
+    <a:masterClrMapping/>
+  </p:clrMapOvr>
+</p:notes>
+</file>
+
+<file path=ppt/notesSlides/notesSlide17.xml><?xml version="1.0" encoding="utf-8"?>
+<p:notes xmlns:a="http://schemas.openxmlformats.org/drawingml/2006/main" xmlns:r="http://schemas.openxmlformats.org/officeDocument/2006/relationships" xmlns:p="http://schemas.openxmlformats.org/presentationml/2006/main">
+  <p:cSld>
+    <p:spTree>
+      <p:nvGrpSpPr>
+        <p:cNvPr id="1" name=""/>
+        <p:cNvGrpSpPr/>
+        <p:nvPr/>
+      </p:nvGrpSpPr>
+      <p:grpSpPr>
+        <a:xfrm>
+          <a:off x="0" y="0"/>
+          <a:ext cx="0" cy="0"/>
+          <a:chOff x="0" y="0"/>
+          <a:chExt cx="0" cy="0"/>
+        </a:xfrm>
+      </p:grpSpPr>
+      <p:sp>
+        <p:nvSpPr>
+          <p:cNvPr id="2" name="Slide Image Placeholder 1"/>
+          <p:cNvSpPr>
+            <a:spLocks noGrp="1" noRot="1" noChangeAspect="1"/>
+          </p:cNvSpPr>
+          <p:nvPr>
+            <p:ph type="sldImg"/>
+          </p:nvPr>
+        </p:nvSpPr>
+        <p:spPr/>
+      </p:sp>
+      <p:sp>
+        <p:nvSpPr>
+          <p:cNvPr id="3" name="Notes Placeholder 2"/>
+          <p:cNvSpPr>
+            <a:spLocks noGrp="1"/>
+          </p:cNvSpPr>
+          <p:nvPr>
+            <p:ph type="body" idx="1"/>
+          </p:nvPr>
+        </p:nvSpPr>
+        <p:spPr/>
+        <p:txBody>
+          <a:bodyPr/>
+          <a:lstStyle/>
+          <a:p>
+            <a:r>
+              <a:rPr lang="en-US"/>
+              <a:t>Use only for questions. Equal 30.2% majority accuracy means weak video recognition, despite higher macro F1. Fixed crop followed pilot test feedback. Source: https://www.kaggle.com/datasets/amittalmale/cricket-shots . Image audit: pHash &lt;=6 bits with thumbnail MAD, rotations/mirrors, then 15 feature neighbors within cosine .20. ORB binary matching, .72 ratio, &gt;=16 matches, &gt;=12 RANSAC inliers, &gt;=65% inlier fraction, &gt;=8% hull coverage. These are evaluation tools, not a novel shot classifier. Other sources: https://github.com/onnx/models ; https://github.com/scikit-learn/scikit-learn ; https://github.com/microsoft/onnxruntime ; https://github.com/opencv/opencv ; https://arxiv.org/abs/1608.00859 . Full URLs, saved evidence and complete code appendix accompany the report.</a:t>
+            </a:r>
+            <a:endParaRPr lang="en-IN"/>
+          </a:p>
+        </p:txBody>
+      </p:sp>
+      <p:sp>
+        <p:nvSpPr>
+          <p:cNvPr id="4" name="Slide Number Placeholder 3"/>
+          <p:cNvSpPr>
+            <a:spLocks noGrp="1"/>
+          </p:cNvSpPr>
+          <p:nvPr>
+            <p:ph type="sldNum" sz="quarter" idx="5"/>
+          </p:nvPr>
+        </p:nvSpPr>
+        <p:spPr/>
+        <p:txBody>
+          <a:bodyPr/>
+          <a:lstStyle/>
+          <a:p>
+            <a:fld id="{4AA5213A-272A-46DE-A19A-34290041A493}" type="slidenum">
+              <a:rPr lang="en-IN" smtClean="0"/>
+              <a:t>17</a:t>
+            </a:fld>
+            <a:endParaRPr lang="en-IN"/>
+          </a:p>
+        </p:txBody>
+      </p:sp>
+    </p:spTree>
+    <p:extLst>
+      <p:ext uri="{BB962C8B-B14F-4D97-AF65-F5344CB8AC3E}">
+        <p14:creationId xmlns:p14="http://schemas.microsoft.com/office/powerpoint/2010/main" val="1667817277"/>
       </p:ext>
     </p:extLst>
   </p:cSld>
@@ -1246,7 +1335,7 @@
           <a:bodyPr/>
           <a:lstStyle/>
           <a:p>
-            <a:fld id="{CB6D05BF-3823-4251-85D6-8F40948E3712}" type="slidenum">
+            <a:fld id="{4AA5213A-272A-46DE-A19A-34290041A493}" type="slidenum">
               <a:rPr lang="en-IN" smtClean="0"/>
               <a:t>2</a:t>
             </a:fld>
@@ -1257,7 +1346,7 @@
     </p:spTree>
     <p:extLst>
       <p:ext uri="{BB962C8B-B14F-4D97-AF65-F5344CB8AC3E}">
-        <p14:creationId xmlns:p14="http://schemas.microsoft.com/office/powerpoint/2010/main" val="1510356705"/>
+        <p14:creationId xmlns:p14="http://schemas.microsoft.com/office/powerpoint/2010/main" val="3201299443"/>
       </p:ext>
     </p:extLst>
   </p:cSld>
@@ -1333,7 +1422,7 @@
           <a:bodyPr/>
           <a:lstStyle/>
           <a:p>
-            <a:fld id="{CB6D05BF-3823-4251-85D6-8F40948E3712}" type="slidenum">
+            <a:fld id="{4AA5213A-272A-46DE-A19A-34290041A493}" type="slidenum">
               <a:rPr lang="en-IN" smtClean="0"/>
               <a:t>3</a:t>
             </a:fld>
@@ -1344,7 +1433,7 @@
     </p:spTree>
     <p:extLst>
       <p:ext uri="{BB962C8B-B14F-4D97-AF65-F5344CB8AC3E}">
-        <p14:creationId xmlns:p14="http://schemas.microsoft.com/office/powerpoint/2010/main" val="2884638227"/>
+        <p14:creationId xmlns:p14="http://schemas.microsoft.com/office/powerpoint/2010/main" val="864504012"/>
       </p:ext>
     </p:extLst>
   </p:cSld>
@@ -1421,7 +1510,7 @@
           <a:bodyPr/>
           <a:lstStyle/>
           <a:p>
-            <a:fld id="{CB6D05BF-3823-4251-85D6-8F40948E3712}" type="slidenum">
+            <a:fld id="{4AA5213A-272A-46DE-A19A-34290041A493}" type="slidenum">
               <a:rPr lang="en-IN" smtClean="0"/>
               <a:t>4</a:t>
             </a:fld>
@@ -1432,7 +1521,7 @@
     </p:spTree>
     <p:extLst>
       <p:ext uri="{BB962C8B-B14F-4D97-AF65-F5344CB8AC3E}">
-        <p14:creationId xmlns:p14="http://schemas.microsoft.com/office/powerpoint/2010/main" val="4069658076"/>
+        <p14:creationId xmlns:p14="http://schemas.microsoft.com/office/powerpoint/2010/main" val="2507618464"/>
       </p:ext>
     </p:extLst>
   </p:cSld>
@@ -1509,7 +1598,7 @@
           <a:bodyPr/>
           <a:lstStyle/>
           <a:p>
-            <a:fld id="{CB6D05BF-3823-4251-85D6-8F40948E3712}" type="slidenum">
+            <a:fld id="{4AA5213A-272A-46DE-A19A-34290041A493}" type="slidenum">
               <a:rPr lang="en-IN" smtClean="0"/>
               <a:t>5</a:t>
             </a:fld>
@@ -1520,7 +1609,7 @@
     </p:spTree>
     <p:extLst>
       <p:ext uri="{BB962C8B-B14F-4D97-AF65-F5344CB8AC3E}">
-        <p14:creationId xmlns:p14="http://schemas.microsoft.com/office/powerpoint/2010/main" val="2785798324"/>
+        <p14:creationId xmlns:p14="http://schemas.microsoft.com/office/powerpoint/2010/main" val="50751310"/>
       </p:ext>
     </p:extLst>
   </p:cSld>
@@ -1597,7 +1686,7 @@
           <a:bodyPr/>
           <a:lstStyle/>
           <a:p>
-            <a:fld id="{CB6D05BF-3823-4251-85D6-8F40948E3712}" type="slidenum">
+            <a:fld id="{4AA5213A-272A-46DE-A19A-34290041A493}" type="slidenum">
               <a:rPr lang="en-IN" smtClean="0"/>
               <a:t>6</a:t>
             </a:fld>
@@ -1608,7 +1697,7 @@
     </p:spTree>
     <p:extLst>
       <p:ext uri="{BB962C8B-B14F-4D97-AF65-F5344CB8AC3E}">
-        <p14:creationId xmlns:p14="http://schemas.microsoft.com/office/powerpoint/2010/main" val="1378751336"/>
+        <p14:creationId xmlns:p14="http://schemas.microsoft.com/office/powerpoint/2010/main" val="904135411"/>
       </p:ext>
     </p:extLst>
   </p:cSld>
@@ -1685,7 +1774,7 @@
           <a:bodyPr/>
           <a:lstStyle/>
           <a:p>
-            <a:fld id="{CB6D05BF-3823-4251-85D6-8F40948E3712}" type="slidenum">
+            <a:fld id="{4AA5213A-272A-46DE-A19A-34290041A493}" type="slidenum">
               <a:rPr lang="en-IN" smtClean="0"/>
               <a:t>7</a:t>
             </a:fld>
@@ -1696,7 +1785,7 @@
     </p:spTree>
     <p:extLst>
       <p:ext uri="{BB962C8B-B14F-4D97-AF65-F5344CB8AC3E}">
-        <p14:creationId xmlns:p14="http://schemas.microsoft.com/office/powerpoint/2010/main" val="2713292730"/>
+        <p14:creationId xmlns:p14="http://schemas.microsoft.com/office/powerpoint/2010/main" val="2450398750"/>
       </p:ext>
     </p:extLst>
   </p:cSld>
@@ -1773,7 +1862,7 @@
           <a:bodyPr/>
           <a:lstStyle/>
           <a:p>
-            <a:fld id="{CB6D05BF-3823-4251-85D6-8F40948E3712}" type="slidenum">
+            <a:fld id="{4AA5213A-272A-46DE-A19A-34290041A493}" type="slidenum">
               <a:rPr lang="en-IN" smtClean="0"/>
               <a:t>8</a:t>
             </a:fld>
@@ -1784,7 +1873,7 @@
     </p:spTree>
     <p:extLst>
       <p:ext uri="{BB962C8B-B14F-4D97-AF65-F5344CB8AC3E}">
-        <p14:creationId xmlns:p14="http://schemas.microsoft.com/office/powerpoint/2010/main" val="3950751163"/>
+        <p14:creationId xmlns:p14="http://schemas.microsoft.com/office/powerpoint/2010/main" val="4029942261"/>
       </p:ext>
     </p:extLst>
   </p:cSld>
@@ -1861,7 +1950,7 @@
           <a:bodyPr/>
           <a:lstStyle/>
           <a:p>
-            <a:fld id="{CB6D05BF-3823-4251-85D6-8F40948E3712}" type="slidenum">
+            <a:fld id="{4AA5213A-272A-46DE-A19A-34290041A493}" type="slidenum">
               <a:rPr lang="en-IN" smtClean="0"/>
               <a:t>9</a:t>
             </a:fld>
@@ -1872,7 +1961,7 @@
     </p:spTree>
     <p:extLst>
       <p:ext uri="{BB962C8B-B14F-4D97-AF65-F5344CB8AC3E}">
-        <p14:creationId xmlns:p14="http://schemas.microsoft.com/office/powerpoint/2010/main" val="3181840052"/>
+        <p14:creationId xmlns:p14="http://schemas.microsoft.com/office/powerpoint/2010/main" val="1013084671"/>
       </p:ext>
     </p:extLst>
   </p:cSld>
@@ -1904,7 +1993,7 @@
           <p:cNvPr id="2" name="Title 1">
             <a:extLst>
               <a:ext uri="{FF2B5EF4-FFF2-40B4-BE49-F238E27FC236}">
-                <a16:creationId xmlns:a16="http://schemas.microsoft.com/office/drawing/2014/main" id="{716E1839-1072-7A4C-2D15-0E56DE762A91}"/>
+                <a16:creationId xmlns:a16="http://schemas.microsoft.com/office/drawing/2014/main" id="{F481EC0F-7120-514A-8F49-A997FBADA31F}"/>
               </a:ext>
             </a:extLst>
           </p:cNvPr>
@@ -1942,7 +2031,7 @@
           <p:cNvPr id="3" name="Subtitle 2">
             <a:extLst>
               <a:ext uri="{FF2B5EF4-FFF2-40B4-BE49-F238E27FC236}">
-                <a16:creationId xmlns:a16="http://schemas.microsoft.com/office/drawing/2014/main" id="{958C9CD2-5793-CADE-5BDF-0EDDF318D910}"/>
+                <a16:creationId xmlns:a16="http://schemas.microsoft.com/office/drawing/2014/main" id="{491E7FF8-C664-9818-B1C1-44B09DCA81A1}"/>
               </a:ext>
             </a:extLst>
           </p:cNvPr>
@@ -2013,7 +2102,7 @@
           <p:cNvPr id="4" name="Date Placeholder 3">
             <a:extLst>
               <a:ext uri="{FF2B5EF4-FFF2-40B4-BE49-F238E27FC236}">
-                <a16:creationId xmlns:a16="http://schemas.microsoft.com/office/drawing/2014/main" id="{C7409789-81F8-7D59-1CD6-7CD2ECEBF96E}"/>
+                <a16:creationId xmlns:a16="http://schemas.microsoft.com/office/drawing/2014/main" id="{EA122A85-E50E-B6C1-55CB-983104B37036}"/>
               </a:ext>
             </a:extLst>
           </p:cNvPr>
@@ -2029,7 +2118,7 @@
           <a:bodyPr/>
           <a:lstStyle/>
           <a:p>
-            <a:fld id="{DDF74FE0-EBC5-4AB9-800B-A335A3F14358}" type="datetimeFigureOut">
+            <a:fld id="{E76C1D1B-AA06-4462-8688-FBED31F28147}" type="datetimeFigureOut">
               <a:rPr lang="en-IN" smtClean="0"/>
               <a:t>19-10-2026</a:t>
             </a:fld>
@@ -2042,7 +2131,7 @@
           <p:cNvPr id="5" name="Footer Placeholder 4">
             <a:extLst>
               <a:ext uri="{FF2B5EF4-FFF2-40B4-BE49-F238E27FC236}">
-                <a16:creationId xmlns:a16="http://schemas.microsoft.com/office/drawing/2014/main" id="{3CB5837B-90B8-A97E-536A-216B57C0542B}"/>
+                <a16:creationId xmlns:a16="http://schemas.microsoft.com/office/drawing/2014/main" id="{D21A4E10-B8BB-8588-4EEF-F3F72361960A}"/>
               </a:ext>
             </a:extLst>
           </p:cNvPr>
@@ -2067,7 +2156,7 @@
           <p:cNvPr id="6" name="Slide Number Placeholder 5">
             <a:extLst>
               <a:ext uri="{FF2B5EF4-FFF2-40B4-BE49-F238E27FC236}">
-                <a16:creationId xmlns:a16="http://schemas.microsoft.com/office/drawing/2014/main" id="{DBFC46DF-0B84-5467-E423-E5C925875079}"/>
+                <a16:creationId xmlns:a16="http://schemas.microsoft.com/office/drawing/2014/main" id="{B5C22462-5038-5229-C3C5-D64DB616C78F}"/>
               </a:ext>
             </a:extLst>
           </p:cNvPr>
@@ -2083,7 +2172,7 @@
           <a:bodyPr/>
           <a:lstStyle/>
           <a:p>
-            <a:fld id="{937938ED-2178-43B3-9AAE-1648119C4B05}" type="slidenum">
+            <a:fld id="{3A465F51-8CAF-4CA4-B81F-97E2B4F072C2}" type="slidenum">
               <a:rPr lang="en-IN" smtClean="0"/>
               <a:t>‹#›</a:t>
             </a:fld>
@@ -2094,7 +2183,7 @@
     </p:spTree>
     <p:extLst>
       <p:ext uri="{BB962C8B-B14F-4D97-AF65-F5344CB8AC3E}">
-        <p14:creationId xmlns:p14="http://schemas.microsoft.com/office/powerpoint/2010/main" val="875530539"/>
+        <p14:creationId xmlns:p14="http://schemas.microsoft.com/office/powerpoint/2010/main" val="3221950894"/>
       </p:ext>
     </p:extLst>
   </p:cSld>
@@ -2126,7 +2215,7 @@
           <p:cNvPr id="2" name="Title 1">
             <a:extLst>
               <a:ext uri="{FF2B5EF4-FFF2-40B4-BE49-F238E27FC236}">
-                <a16:creationId xmlns:a16="http://schemas.microsoft.com/office/drawing/2014/main" id="{197D6B74-C42C-BB25-F993-BD1D904CA05C}"/>
+                <a16:creationId xmlns:a16="http://schemas.microsoft.com/office/drawing/2014/main" id="{B0625B52-BBB6-F396-D12E-A5A3CF42B820}"/>
               </a:ext>
             </a:extLst>
           </p:cNvPr>
@@ -2155,7 +2244,7 @@
           <p:cNvPr id="3" name="Vertical Text Placeholder 2">
             <a:extLst>
               <a:ext uri="{FF2B5EF4-FFF2-40B4-BE49-F238E27FC236}">
-                <a16:creationId xmlns:a16="http://schemas.microsoft.com/office/drawing/2014/main" id="{1E102F80-0842-95B4-CA98-9821D94A7709}"/>
+                <a16:creationId xmlns:a16="http://schemas.microsoft.com/office/drawing/2014/main" id="{9C87811D-15D8-2E63-9951-AF6AC65269AE}"/>
               </a:ext>
             </a:extLst>
           </p:cNvPr>
@@ -2213,7 +2302,7 @@
           <p:cNvPr id="4" name="Date Placeholder 3">
             <a:extLst>
               <a:ext uri="{FF2B5EF4-FFF2-40B4-BE49-F238E27FC236}">
-                <a16:creationId xmlns:a16="http://schemas.microsoft.com/office/drawing/2014/main" id="{1497F151-1563-24F4-C39C-B7BC57FCD608}"/>
+                <a16:creationId xmlns:a16="http://schemas.microsoft.com/office/drawing/2014/main" id="{78058160-46E2-06D9-3645-485D8030144C}"/>
               </a:ext>
             </a:extLst>
           </p:cNvPr>
@@ -2229,7 +2318,7 @@
           <a:bodyPr/>
           <a:lstStyle/>
           <a:p>
-            <a:fld id="{DDF74FE0-EBC5-4AB9-800B-A335A3F14358}" type="datetimeFigureOut">
+            <a:fld id="{E76C1D1B-AA06-4462-8688-FBED31F28147}" type="datetimeFigureOut">
               <a:rPr lang="en-IN" smtClean="0"/>
               <a:t>19-10-2026</a:t>
             </a:fld>
@@ -2242,7 +2331,7 @@
           <p:cNvPr id="5" name="Footer Placeholder 4">
             <a:extLst>
               <a:ext uri="{FF2B5EF4-FFF2-40B4-BE49-F238E27FC236}">
-                <a16:creationId xmlns:a16="http://schemas.microsoft.com/office/drawing/2014/main" id="{B55E07A8-D1AB-FCDB-35F5-17583AF1DA31}"/>
+                <a16:creationId xmlns:a16="http://schemas.microsoft.com/office/drawing/2014/main" id="{CD74A6D5-C18C-C6E6-4761-885D2830B807}"/>
               </a:ext>
             </a:extLst>
           </p:cNvPr>
@@ -2267,7 +2356,7 @@
           <p:cNvPr id="6" name="Slide Number Placeholder 5">
             <a:extLst>
               <a:ext uri="{FF2B5EF4-FFF2-40B4-BE49-F238E27FC236}">
-                <a16:creationId xmlns:a16="http://schemas.microsoft.com/office/drawing/2014/main" id="{5AB74005-DA92-1D87-3E46-56465DE42343}"/>
+                <a16:creationId xmlns:a16="http://schemas.microsoft.com/office/drawing/2014/main" id="{F7FB4500-D7FB-1B19-C5EE-F114AF0720A6}"/>
               </a:ext>
             </a:extLst>
           </p:cNvPr>
@@ -2283,7 +2372,7 @@
           <a:bodyPr/>
           <a:lstStyle/>
           <a:p>
-            <a:fld id="{937938ED-2178-43B3-9AAE-1648119C4B05}" type="slidenum">
+            <a:fld id="{3A465F51-8CAF-4CA4-B81F-97E2B4F072C2}" type="slidenum">
               <a:rPr lang="en-IN" smtClean="0"/>
               <a:t>‹#›</a:t>
             </a:fld>
@@ -2294,7 +2383,7 @@
     </p:spTree>
     <p:extLst>
       <p:ext uri="{BB962C8B-B14F-4D97-AF65-F5344CB8AC3E}">
-        <p14:creationId xmlns:p14="http://schemas.microsoft.com/office/powerpoint/2010/main" val="638435247"/>
+        <p14:creationId xmlns:p14="http://schemas.microsoft.com/office/powerpoint/2010/main" val="3102081504"/>
       </p:ext>
     </p:extLst>
   </p:cSld>
@@ -2326,7 +2415,7 @@
           <p:cNvPr id="2" name="Vertical Title 1">
             <a:extLst>
               <a:ext uri="{FF2B5EF4-FFF2-40B4-BE49-F238E27FC236}">
-                <a16:creationId xmlns:a16="http://schemas.microsoft.com/office/drawing/2014/main" id="{AC75DA39-A18A-257C-FAB1-89C072B15CB1}"/>
+                <a16:creationId xmlns:a16="http://schemas.microsoft.com/office/drawing/2014/main" id="{CFC98674-F19F-9D15-B4CC-339B7440F265}"/>
               </a:ext>
             </a:extLst>
           </p:cNvPr>
@@ -2360,7 +2449,7 @@
           <p:cNvPr id="3" name="Vertical Text Placeholder 2">
             <a:extLst>
               <a:ext uri="{FF2B5EF4-FFF2-40B4-BE49-F238E27FC236}">
-                <a16:creationId xmlns:a16="http://schemas.microsoft.com/office/drawing/2014/main" id="{F1AEA553-26FB-E4C0-48A2-ADE4BBE19DD3}"/>
+                <a16:creationId xmlns:a16="http://schemas.microsoft.com/office/drawing/2014/main" id="{5E87178C-7669-D6CB-35C1-E5E998F03782}"/>
               </a:ext>
             </a:extLst>
           </p:cNvPr>
@@ -2423,7 +2512,7 @@
           <p:cNvPr id="4" name="Date Placeholder 3">
             <a:extLst>
               <a:ext uri="{FF2B5EF4-FFF2-40B4-BE49-F238E27FC236}">
-                <a16:creationId xmlns:a16="http://schemas.microsoft.com/office/drawing/2014/main" id="{E913954C-CFFF-6F6E-EFFC-078CF6808632}"/>
+                <a16:creationId xmlns:a16="http://schemas.microsoft.com/office/drawing/2014/main" id="{E5A105C8-4737-1F72-D9B1-9DC0A2A7C8F6}"/>
               </a:ext>
             </a:extLst>
           </p:cNvPr>
@@ -2439,7 +2528,7 @@
           <a:bodyPr/>
           <a:lstStyle/>
           <a:p>
-            <a:fld id="{DDF74FE0-EBC5-4AB9-800B-A335A3F14358}" type="datetimeFigureOut">
+            <a:fld id="{E76C1D1B-AA06-4462-8688-FBED31F28147}" type="datetimeFigureOut">
               <a:rPr lang="en-IN" smtClean="0"/>
               <a:t>19-10-2026</a:t>
             </a:fld>
@@ -2452,7 +2541,7 @@
           <p:cNvPr id="5" name="Footer Placeholder 4">
             <a:extLst>
               <a:ext uri="{FF2B5EF4-FFF2-40B4-BE49-F238E27FC236}">
-                <a16:creationId xmlns:a16="http://schemas.microsoft.com/office/drawing/2014/main" id="{F5C86339-98F0-7C36-60A3-999CEBE3FF6B}"/>
+                <a16:creationId xmlns:a16="http://schemas.microsoft.com/office/drawing/2014/main" id="{ECF44B8D-6392-93FF-4E29-0C906AEC7884}"/>
               </a:ext>
             </a:extLst>
           </p:cNvPr>
@@ -2477,7 +2566,7 @@
           <p:cNvPr id="6" name="Slide Number Placeholder 5">
             <a:extLst>
               <a:ext uri="{FF2B5EF4-FFF2-40B4-BE49-F238E27FC236}">
-                <a16:creationId xmlns:a16="http://schemas.microsoft.com/office/drawing/2014/main" id="{1359C2F5-1633-4372-5881-C9AA6C02A969}"/>
+                <a16:creationId xmlns:a16="http://schemas.microsoft.com/office/drawing/2014/main" id="{8D7CF9FF-4779-CAEF-E91D-6F0F3FDC138F}"/>
               </a:ext>
             </a:extLst>
           </p:cNvPr>
@@ -2493,7 +2582,7 @@
           <a:bodyPr/>
           <a:lstStyle/>
           <a:p>
-            <a:fld id="{937938ED-2178-43B3-9AAE-1648119C4B05}" type="slidenum">
+            <a:fld id="{3A465F51-8CAF-4CA4-B81F-97E2B4F072C2}" type="slidenum">
               <a:rPr lang="en-IN" smtClean="0"/>
               <a:t>‹#›</a:t>
             </a:fld>
@@ -2504,7 +2593,7 @@
     </p:spTree>
     <p:extLst>
       <p:ext uri="{BB962C8B-B14F-4D97-AF65-F5344CB8AC3E}">
-        <p14:creationId xmlns:p14="http://schemas.microsoft.com/office/powerpoint/2010/main" val="2139768494"/>
+        <p14:creationId xmlns:p14="http://schemas.microsoft.com/office/powerpoint/2010/main" val="385738295"/>
       </p:ext>
     </p:extLst>
   </p:cSld>
@@ -2536,7 +2625,7 @@
           <p:cNvPr id="2" name="Title 1">
             <a:extLst>
               <a:ext uri="{FF2B5EF4-FFF2-40B4-BE49-F238E27FC236}">
-                <a16:creationId xmlns:a16="http://schemas.microsoft.com/office/drawing/2014/main" id="{C546E4BA-E18C-F385-6FA9-05CCC4581F4D}"/>
+                <a16:creationId xmlns:a16="http://schemas.microsoft.com/office/drawing/2014/main" id="{8090D4BE-60E8-235A-190A-EA41B3A8D415}"/>
               </a:ext>
             </a:extLst>
           </p:cNvPr>
@@ -2565,7 +2654,7 @@
           <p:cNvPr id="3" name="Content Placeholder 2">
             <a:extLst>
               <a:ext uri="{FF2B5EF4-FFF2-40B4-BE49-F238E27FC236}">
-                <a16:creationId xmlns:a16="http://schemas.microsoft.com/office/drawing/2014/main" id="{59374049-31BC-9B20-9CC9-B0DED08E7DB6}"/>
+                <a16:creationId xmlns:a16="http://schemas.microsoft.com/office/drawing/2014/main" id="{E0F75527-3256-6DE3-4EE2-0161C0482179}"/>
               </a:ext>
             </a:extLst>
           </p:cNvPr>
@@ -2623,7 +2712,7 @@
           <p:cNvPr id="4" name="Date Placeholder 3">
             <a:extLst>
               <a:ext uri="{FF2B5EF4-FFF2-40B4-BE49-F238E27FC236}">
-                <a16:creationId xmlns:a16="http://schemas.microsoft.com/office/drawing/2014/main" id="{C70D595A-B3A4-B8C5-2AA7-EB25B2F0747B}"/>
+                <a16:creationId xmlns:a16="http://schemas.microsoft.com/office/drawing/2014/main" id="{45FABFEB-B6D0-D0A5-024A-4F5E9225A8F0}"/>
               </a:ext>
             </a:extLst>
           </p:cNvPr>
@@ -2639,7 +2728,7 @@
           <a:bodyPr/>
           <a:lstStyle/>
           <a:p>
-            <a:fld id="{DDF74FE0-EBC5-4AB9-800B-A335A3F14358}" type="datetimeFigureOut">
+            <a:fld id="{E76C1D1B-AA06-4462-8688-FBED31F28147}" type="datetimeFigureOut">
               <a:rPr lang="en-IN" smtClean="0"/>
               <a:t>19-10-2026</a:t>
             </a:fld>
@@ -2652,7 +2741,7 @@
           <p:cNvPr id="5" name="Footer Placeholder 4">
             <a:extLst>
               <a:ext uri="{FF2B5EF4-FFF2-40B4-BE49-F238E27FC236}">
-                <a16:creationId xmlns:a16="http://schemas.microsoft.com/office/drawing/2014/main" id="{84D3E644-AFA2-B637-4119-4C938D31322F}"/>
+                <a16:creationId xmlns:a16="http://schemas.microsoft.com/office/drawing/2014/main" id="{5109E4CC-52D8-49D6-1416-E4467DB3E11C}"/>
               </a:ext>
             </a:extLst>
           </p:cNvPr>
@@ -2677,7 +2766,7 @@
           <p:cNvPr id="6" name="Slide Number Placeholder 5">
             <a:extLst>
               <a:ext uri="{FF2B5EF4-FFF2-40B4-BE49-F238E27FC236}">
-                <a16:creationId xmlns:a16="http://schemas.microsoft.com/office/drawing/2014/main" id="{8C673581-0ECE-F0B1-A568-2489AFD3CAAE}"/>
+                <a16:creationId xmlns:a16="http://schemas.microsoft.com/office/drawing/2014/main" id="{D165522A-F974-011B-F7F2-C14AB7C54D7A}"/>
               </a:ext>
             </a:extLst>
           </p:cNvPr>
@@ -2693,7 +2782,7 @@
           <a:bodyPr/>
           <a:lstStyle/>
           <a:p>
-            <a:fld id="{937938ED-2178-43B3-9AAE-1648119C4B05}" type="slidenum">
+            <a:fld id="{3A465F51-8CAF-4CA4-B81F-97E2B4F072C2}" type="slidenum">
               <a:rPr lang="en-IN" smtClean="0"/>
               <a:t>‹#›</a:t>
             </a:fld>
@@ -2704,7 +2793,7 @@
     </p:spTree>
     <p:extLst>
       <p:ext uri="{BB962C8B-B14F-4D97-AF65-F5344CB8AC3E}">
-        <p14:creationId xmlns:p14="http://schemas.microsoft.com/office/powerpoint/2010/main" val="2935971010"/>
+        <p14:creationId xmlns:p14="http://schemas.microsoft.com/office/powerpoint/2010/main" val="4181409426"/>
       </p:ext>
     </p:extLst>
   </p:cSld>
@@ -2736,7 +2825,7 @@
           <p:cNvPr id="2" name="Title 1">
             <a:extLst>
               <a:ext uri="{FF2B5EF4-FFF2-40B4-BE49-F238E27FC236}">
-                <a16:creationId xmlns:a16="http://schemas.microsoft.com/office/drawing/2014/main" id="{7BDD5B24-70B0-E62B-77F8-1ED20A996A75}"/>
+                <a16:creationId xmlns:a16="http://schemas.microsoft.com/office/drawing/2014/main" id="{E043EAEA-B0C7-3E07-5FF3-CA088E9CB4E8}"/>
               </a:ext>
             </a:extLst>
           </p:cNvPr>
@@ -2774,7 +2863,7 @@
           <p:cNvPr id="3" name="Text Placeholder 2">
             <a:extLst>
               <a:ext uri="{FF2B5EF4-FFF2-40B4-BE49-F238E27FC236}">
-                <a16:creationId xmlns:a16="http://schemas.microsoft.com/office/drawing/2014/main" id="{46111E76-6FDF-1E45-BD50-BF45A6DD96F7}"/>
+                <a16:creationId xmlns:a16="http://schemas.microsoft.com/office/drawing/2014/main" id="{5C07B916-2EF4-B9EA-04CB-635DFC61E041}"/>
               </a:ext>
             </a:extLst>
           </p:cNvPr>
@@ -2899,7 +2988,7 @@
           <p:cNvPr id="4" name="Date Placeholder 3">
             <a:extLst>
               <a:ext uri="{FF2B5EF4-FFF2-40B4-BE49-F238E27FC236}">
-                <a16:creationId xmlns:a16="http://schemas.microsoft.com/office/drawing/2014/main" id="{A8D4240D-854D-28C5-F473-1CB104CD1230}"/>
+                <a16:creationId xmlns:a16="http://schemas.microsoft.com/office/drawing/2014/main" id="{4A2580D5-BC59-0A73-CCB5-AAC894ABE22E}"/>
               </a:ext>
             </a:extLst>
           </p:cNvPr>
@@ -2915,7 +3004,7 @@
           <a:bodyPr/>
           <a:lstStyle/>
           <a:p>
-            <a:fld id="{DDF74FE0-EBC5-4AB9-800B-A335A3F14358}" type="datetimeFigureOut">
+            <a:fld id="{E76C1D1B-AA06-4462-8688-FBED31F28147}" type="datetimeFigureOut">
               <a:rPr lang="en-IN" smtClean="0"/>
               <a:t>19-10-2026</a:t>
             </a:fld>
@@ -2928,7 +3017,7 @@
           <p:cNvPr id="5" name="Footer Placeholder 4">
             <a:extLst>
               <a:ext uri="{FF2B5EF4-FFF2-40B4-BE49-F238E27FC236}">
-                <a16:creationId xmlns:a16="http://schemas.microsoft.com/office/drawing/2014/main" id="{47F1E4DD-26A2-6215-D336-3FE193C0357E}"/>
+                <a16:creationId xmlns:a16="http://schemas.microsoft.com/office/drawing/2014/main" id="{24A00842-BE5A-C3FF-8F67-6D5A45466C21}"/>
               </a:ext>
             </a:extLst>
           </p:cNvPr>
@@ -2953,7 +3042,7 @@
           <p:cNvPr id="6" name="Slide Number Placeholder 5">
             <a:extLst>
               <a:ext uri="{FF2B5EF4-FFF2-40B4-BE49-F238E27FC236}">
-                <a16:creationId xmlns:a16="http://schemas.microsoft.com/office/drawing/2014/main" id="{6ECC9CA8-1873-7F27-C009-628D7A4DC97D}"/>
+                <a16:creationId xmlns:a16="http://schemas.microsoft.com/office/drawing/2014/main" id="{883D34F2-5435-D072-D47D-BCD076D5E04C}"/>
               </a:ext>
             </a:extLst>
           </p:cNvPr>
@@ -2969,7 +3058,7 @@
           <a:bodyPr/>
           <a:lstStyle/>
           <a:p>
-            <a:fld id="{937938ED-2178-43B3-9AAE-1648119C4B05}" type="slidenum">
+            <a:fld id="{3A465F51-8CAF-4CA4-B81F-97E2B4F072C2}" type="slidenum">
               <a:rPr lang="en-IN" smtClean="0"/>
               <a:t>‹#›</a:t>
             </a:fld>
@@ -2980,7 +3069,7 @@
     </p:spTree>
     <p:extLst>
       <p:ext uri="{BB962C8B-B14F-4D97-AF65-F5344CB8AC3E}">
-        <p14:creationId xmlns:p14="http://schemas.microsoft.com/office/powerpoint/2010/main" val="419232040"/>
+        <p14:creationId xmlns:p14="http://schemas.microsoft.com/office/powerpoint/2010/main" val="1588132546"/>
       </p:ext>
     </p:extLst>
   </p:cSld>
@@ -3012,7 +3101,7 @@
           <p:cNvPr id="2" name="Title 1">
             <a:extLst>
               <a:ext uri="{FF2B5EF4-FFF2-40B4-BE49-F238E27FC236}">
-                <a16:creationId xmlns:a16="http://schemas.microsoft.com/office/drawing/2014/main" id="{9B83FB1A-5C36-F56A-3280-05D03E966616}"/>
+                <a16:creationId xmlns:a16="http://schemas.microsoft.com/office/drawing/2014/main" id="{7960E171-542C-A5A8-0A10-B4E09F902D78}"/>
               </a:ext>
             </a:extLst>
           </p:cNvPr>
@@ -3041,7 +3130,7 @@
           <p:cNvPr id="3" name="Content Placeholder 2">
             <a:extLst>
               <a:ext uri="{FF2B5EF4-FFF2-40B4-BE49-F238E27FC236}">
-                <a16:creationId xmlns:a16="http://schemas.microsoft.com/office/drawing/2014/main" id="{39397153-FAF2-C048-2150-C094CB46595D}"/>
+                <a16:creationId xmlns:a16="http://schemas.microsoft.com/office/drawing/2014/main" id="{A94181B6-EA6F-B186-0702-772E0D57253D}"/>
               </a:ext>
             </a:extLst>
           </p:cNvPr>
@@ -3104,7 +3193,7 @@
           <p:cNvPr id="4" name="Content Placeholder 3">
             <a:extLst>
               <a:ext uri="{FF2B5EF4-FFF2-40B4-BE49-F238E27FC236}">
-                <a16:creationId xmlns:a16="http://schemas.microsoft.com/office/drawing/2014/main" id="{E89D5A36-93C7-1274-60BE-960883F3BB1E}"/>
+                <a16:creationId xmlns:a16="http://schemas.microsoft.com/office/drawing/2014/main" id="{BAFC398C-8661-D019-C3F4-4A976E2A64DA}"/>
               </a:ext>
             </a:extLst>
           </p:cNvPr>
@@ -3167,7 +3256,7 @@
           <p:cNvPr id="5" name="Date Placeholder 4">
             <a:extLst>
               <a:ext uri="{FF2B5EF4-FFF2-40B4-BE49-F238E27FC236}">
-                <a16:creationId xmlns:a16="http://schemas.microsoft.com/office/drawing/2014/main" id="{1FD054BA-7E9F-18CF-35DC-5740185E8B6C}"/>
+                <a16:creationId xmlns:a16="http://schemas.microsoft.com/office/drawing/2014/main" id="{7B59C235-830A-33D0-B137-4874C98ECD57}"/>
               </a:ext>
             </a:extLst>
           </p:cNvPr>
@@ -3183,7 +3272,7 @@
           <a:bodyPr/>
           <a:lstStyle/>
           <a:p>
-            <a:fld id="{DDF74FE0-EBC5-4AB9-800B-A335A3F14358}" type="datetimeFigureOut">
+            <a:fld id="{E76C1D1B-AA06-4462-8688-FBED31F28147}" type="datetimeFigureOut">
               <a:rPr lang="en-IN" smtClean="0"/>
               <a:t>19-10-2026</a:t>
             </a:fld>
@@ -3196,7 +3285,7 @@
           <p:cNvPr id="6" name="Footer Placeholder 5">
             <a:extLst>
               <a:ext uri="{FF2B5EF4-FFF2-40B4-BE49-F238E27FC236}">
-                <a16:creationId xmlns:a16="http://schemas.microsoft.com/office/drawing/2014/main" id="{83741CB5-1DF8-6133-8367-DBD600E9682E}"/>
+                <a16:creationId xmlns:a16="http://schemas.microsoft.com/office/drawing/2014/main" id="{DEA1105E-EA44-A3C4-20DE-5CF58D6B5C2F}"/>
               </a:ext>
             </a:extLst>
           </p:cNvPr>
@@ -3221,7 +3310,7 @@
           <p:cNvPr id="7" name="Slide Number Placeholder 6">
             <a:extLst>
               <a:ext uri="{FF2B5EF4-FFF2-40B4-BE49-F238E27FC236}">
-                <a16:creationId xmlns:a16="http://schemas.microsoft.com/office/drawing/2014/main" id="{691044BB-D95A-5721-CC29-1152D9B34110}"/>
+                <a16:creationId xmlns:a16="http://schemas.microsoft.com/office/drawing/2014/main" id="{048C5936-9FDC-26DF-8E45-85F8450B1254}"/>
               </a:ext>
             </a:extLst>
           </p:cNvPr>
@@ -3237,7 +3326,7 @@
           <a:bodyPr/>
           <a:lstStyle/>
           <a:p>
-            <a:fld id="{937938ED-2178-43B3-9AAE-1648119C4B05}" type="slidenum">
+            <a:fld id="{3A465F51-8CAF-4CA4-B81F-97E2B4F072C2}" type="slidenum">
               <a:rPr lang="en-IN" smtClean="0"/>
               <a:t>‹#›</a:t>
             </a:fld>
@@ -3248,7 +3337,7 @@
     </p:spTree>
     <p:extLst>
       <p:ext uri="{BB962C8B-B14F-4D97-AF65-F5344CB8AC3E}">
-        <p14:creationId xmlns:p14="http://schemas.microsoft.com/office/powerpoint/2010/main" val="3761249564"/>
+        <p14:creationId xmlns:p14="http://schemas.microsoft.com/office/powerpoint/2010/main" val="4146848975"/>
       </p:ext>
     </p:extLst>
   </p:cSld>
@@ -3280,7 +3369,7 @@
           <p:cNvPr id="2" name="Title 1">
             <a:extLst>
               <a:ext uri="{FF2B5EF4-FFF2-40B4-BE49-F238E27FC236}">
-                <a16:creationId xmlns:a16="http://schemas.microsoft.com/office/drawing/2014/main" id="{5332D856-4E70-D7A6-B7A8-D0A1491F86A0}"/>
+                <a16:creationId xmlns:a16="http://schemas.microsoft.com/office/drawing/2014/main" id="{060C36B3-B242-5C90-3C70-F26ABBFFBDB6}"/>
               </a:ext>
             </a:extLst>
           </p:cNvPr>
@@ -3314,7 +3403,7 @@
           <p:cNvPr id="3" name="Text Placeholder 2">
             <a:extLst>
               <a:ext uri="{FF2B5EF4-FFF2-40B4-BE49-F238E27FC236}">
-                <a16:creationId xmlns:a16="http://schemas.microsoft.com/office/drawing/2014/main" id="{A1ED72D7-1537-C151-6661-F4C47FC83DAD}"/>
+                <a16:creationId xmlns:a16="http://schemas.microsoft.com/office/drawing/2014/main" id="{A2857304-C8F2-CC8A-5B92-7795EEBBE454}"/>
               </a:ext>
             </a:extLst>
           </p:cNvPr>
@@ -3385,7 +3474,7 @@
           <p:cNvPr id="4" name="Content Placeholder 3">
             <a:extLst>
               <a:ext uri="{FF2B5EF4-FFF2-40B4-BE49-F238E27FC236}">
-                <a16:creationId xmlns:a16="http://schemas.microsoft.com/office/drawing/2014/main" id="{926F7022-DBE2-4700-D0EC-65E922AF0BB1}"/>
+                <a16:creationId xmlns:a16="http://schemas.microsoft.com/office/drawing/2014/main" id="{EBEBDF62-69E0-A7B4-C293-029E19DC749E}"/>
               </a:ext>
             </a:extLst>
           </p:cNvPr>
@@ -3448,7 +3537,7 @@
           <p:cNvPr id="5" name="Text Placeholder 4">
             <a:extLst>
               <a:ext uri="{FF2B5EF4-FFF2-40B4-BE49-F238E27FC236}">
-                <a16:creationId xmlns:a16="http://schemas.microsoft.com/office/drawing/2014/main" id="{7A9BE0F4-083D-B399-6B9C-99D005D8A1F7}"/>
+                <a16:creationId xmlns:a16="http://schemas.microsoft.com/office/drawing/2014/main" id="{FE69FAD4-746C-2697-0BA7-53199275EB8A}"/>
               </a:ext>
             </a:extLst>
           </p:cNvPr>
@@ -3519,7 +3608,7 @@
           <p:cNvPr id="6" name="Content Placeholder 5">
             <a:extLst>
               <a:ext uri="{FF2B5EF4-FFF2-40B4-BE49-F238E27FC236}">
-                <a16:creationId xmlns:a16="http://schemas.microsoft.com/office/drawing/2014/main" id="{AEDDB603-514C-9943-714B-4A00058D414D}"/>
+                <a16:creationId xmlns:a16="http://schemas.microsoft.com/office/drawing/2014/main" id="{98B45219-90A8-5C50-B01D-033830FA8D28}"/>
               </a:ext>
             </a:extLst>
           </p:cNvPr>
@@ -3582,7 +3671,7 @@
           <p:cNvPr id="7" name="Date Placeholder 6">
             <a:extLst>
               <a:ext uri="{FF2B5EF4-FFF2-40B4-BE49-F238E27FC236}">
-                <a16:creationId xmlns:a16="http://schemas.microsoft.com/office/drawing/2014/main" id="{4F279CAF-656E-7442-8FAC-111B1EC7C478}"/>
+                <a16:creationId xmlns:a16="http://schemas.microsoft.com/office/drawing/2014/main" id="{FC21A295-20E0-82C6-3957-E25FE9445FF6}"/>
               </a:ext>
             </a:extLst>
           </p:cNvPr>
@@ -3598,7 +3687,7 @@
           <a:bodyPr/>
           <a:lstStyle/>
           <a:p>
-            <a:fld id="{DDF74FE0-EBC5-4AB9-800B-A335A3F14358}" type="datetimeFigureOut">
+            <a:fld id="{E76C1D1B-AA06-4462-8688-FBED31F28147}" type="datetimeFigureOut">
               <a:rPr lang="en-IN" smtClean="0"/>
               <a:t>19-10-2026</a:t>
             </a:fld>
@@ -3611,7 +3700,7 @@
           <p:cNvPr id="8" name="Footer Placeholder 7">
             <a:extLst>
               <a:ext uri="{FF2B5EF4-FFF2-40B4-BE49-F238E27FC236}">
-                <a16:creationId xmlns:a16="http://schemas.microsoft.com/office/drawing/2014/main" id="{17AC5EE4-8A79-B4EC-C29D-A077EA258042}"/>
+                <a16:creationId xmlns:a16="http://schemas.microsoft.com/office/drawing/2014/main" id="{1415EE14-FF03-61CF-0C53-7DD9C104FF1D}"/>
               </a:ext>
             </a:extLst>
           </p:cNvPr>
@@ -3636,7 +3725,7 @@
           <p:cNvPr id="9" name="Slide Number Placeholder 8">
             <a:extLst>
               <a:ext uri="{FF2B5EF4-FFF2-40B4-BE49-F238E27FC236}">
-                <a16:creationId xmlns:a16="http://schemas.microsoft.com/office/drawing/2014/main" id="{DCAF8873-4FD6-DBCD-51F8-B0CB069C9755}"/>
+                <a16:creationId xmlns:a16="http://schemas.microsoft.com/office/drawing/2014/main" id="{CFC3DD40-7048-5588-0370-67DEC622C548}"/>
               </a:ext>
             </a:extLst>
           </p:cNvPr>
@@ -3652,7 +3741,7 @@
           <a:bodyPr/>
           <a:lstStyle/>
           <a:p>
-            <a:fld id="{937938ED-2178-43B3-9AAE-1648119C4B05}" type="slidenum">
+            <a:fld id="{3A465F51-8CAF-4CA4-B81F-97E2B4F072C2}" type="slidenum">
               <a:rPr lang="en-IN" smtClean="0"/>
               <a:t>‹#›</a:t>
             </a:fld>
@@ -3663,7 +3752,7 @@
     </p:spTree>
     <p:extLst>
       <p:ext uri="{BB962C8B-B14F-4D97-AF65-F5344CB8AC3E}">
-        <p14:creationId xmlns:p14="http://schemas.microsoft.com/office/powerpoint/2010/main" val="4212934535"/>
+        <p14:creationId xmlns:p14="http://schemas.microsoft.com/office/powerpoint/2010/main" val="1639068902"/>
       </p:ext>
     </p:extLst>
   </p:cSld>
@@ -3695,7 +3784,7 @@
           <p:cNvPr id="2" name="Title 1">
             <a:extLst>
               <a:ext uri="{FF2B5EF4-FFF2-40B4-BE49-F238E27FC236}">
-                <a16:creationId xmlns:a16="http://schemas.microsoft.com/office/drawing/2014/main" id="{C3F2EB36-9AA5-4E32-525C-9BC8F998E0FB}"/>
+                <a16:creationId xmlns:a16="http://schemas.microsoft.com/office/drawing/2014/main" id="{70106098-9544-AD2B-E8D6-117B313BA5FD}"/>
               </a:ext>
             </a:extLst>
           </p:cNvPr>
@@ -3724,7 +3813,7 @@
           <p:cNvPr id="3" name="Date Placeholder 2">
             <a:extLst>
               <a:ext uri="{FF2B5EF4-FFF2-40B4-BE49-F238E27FC236}">
-                <a16:creationId xmlns:a16="http://schemas.microsoft.com/office/drawing/2014/main" id="{7793E4B8-9D2E-0387-88BE-41905B369BB3}"/>
+                <a16:creationId xmlns:a16="http://schemas.microsoft.com/office/drawing/2014/main" id="{B4E4F078-BBBF-2A9E-B202-A35BDE64D079}"/>
               </a:ext>
             </a:extLst>
           </p:cNvPr>
@@ -3740,7 +3829,7 @@
           <a:bodyPr/>
           <a:lstStyle/>
           <a:p>
-            <a:fld id="{DDF74FE0-EBC5-4AB9-800B-A335A3F14358}" type="datetimeFigureOut">
+            <a:fld id="{E76C1D1B-AA06-4462-8688-FBED31F28147}" type="datetimeFigureOut">
               <a:rPr lang="en-IN" smtClean="0"/>
               <a:t>19-10-2026</a:t>
             </a:fld>
@@ -3753,7 +3842,7 @@
           <p:cNvPr id="4" name="Footer Placeholder 3">
             <a:extLst>
               <a:ext uri="{FF2B5EF4-FFF2-40B4-BE49-F238E27FC236}">
-                <a16:creationId xmlns:a16="http://schemas.microsoft.com/office/drawing/2014/main" id="{F4F92089-0110-EA24-78B2-ED1589208531}"/>
+                <a16:creationId xmlns:a16="http://schemas.microsoft.com/office/drawing/2014/main" id="{75D3D041-4580-3A0D-BD4B-00DE3E786978}"/>
               </a:ext>
             </a:extLst>
           </p:cNvPr>
@@ -3778,7 +3867,7 @@
           <p:cNvPr id="5" name="Slide Number Placeholder 4">
             <a:extLst>
               <a:ext uri="{FF2B5EF4-FFF2-40B4-BE49-F238E27FC236}">
-                <a16:creationId xmlns:a16="http://schemas.microsoft.com/office/drawing/2014/main" id="{5084F1AA-3F7D-243F-149D-7874AB6C7DF8}"/>
+                <a16:creationId xmlns:a16="http://schemas.microsoft.com/office/drawing/2014/main" id="{E78875B9-E67A-3C22-EF2B-6B8FBB204F0B}"/>
               </a:ext>
             </a:extLst>
           </p:cNvPr>
@@ -3794,7 +3883,7 @@
           <a:bodyPr/>
           <a:lstStyle/>
           <a:p>
-            <a:fld id="{937938ED-2178-43B3-9AAE-1648119C4B05}" type="slidenum">
+            <a:fld id="{3A465F51-8CAF-4CA4-B81F-97E2B4F072C2}" type="slidenum">
               <a:rPr lang="en-IN" smtClean="0"/>
               <a:t>‹#›</a:t>
             </a:fld>
@@ -3805,7 +3894,7 @@
     </p:spTree>
     <p:extLst>
       <p:ext uri="{BB962C8B-B14F-4D97-AF65-F5344CB8AC3E}">
-        <p14:creationId xmlns:p14="http://schemas.microsoft.com/office/powerpoint/2010/main" val="1447700378"/>
+        <p14:creationId xmlns:p14="http://schemas.microsoft.com/office/powerpoint/2010/main" val="488765615"/>
       </p:ext>
     </p:extLst>
   </p:cSld>
@@ -3837,7 +3926,7 @@
           <p:cNvPr id="2" name="Date Placeholder 1">
             <a:extLst>
               <a:ext uri="{FF2B5EF4-FFF2-40B4-BE49-F238E27FC236}">
-                <a16:creationId xmlns:a16="http://schemas.microsoft.com/office/drawing/2014/main" id="{9136E848-83C7-8824-3787-BA012C0C1EEA}"/>
+                <a16:creationId xmlns:a16="http://schemas.microsoft.com/office/drawing/2014/main" id="{A39D0E0A-3314-27A2-83A4-738DFC77C56B}"/>
               </a:ext>
             </a:extLst>
           </p:cNvPr>
@@ -3853,7 +3942,7 @@
           <a:bodyPr/>
           <a:lstStyle/>
           <a:p>
-            <a:fld id="{DDF74FE0-EBC5-4AB9-800B-A335A3F14358}" type="datetimeFigureOut">
+            <a:fld id="{E76C1D1B-AA06-4462-8688-FBED31F28147}" type="datetimeFigureOut">
               <a:rPr lang="en-IN" smtClean="0"/>
               <a:t>19-10-2026</a:t>
             </a:fld>
@@ -3866,7 +3955,7 @@
           <p:cNvPr id="3" name="Footer Placeholder 2">
             <a:extLst>
               <a:ext uri="{FF2B5EF4-FFF2-40B4-BE49-F238E27FC236}">
-                <a16:creationId xmlns:a16="http://schemas.microsoft.com/office/drawing/2014/main" id="{EF2598AE-3ECB-A026-C5BA-8485B15A4896}"/>
+                <a16:creationId xmlns:a16="http://schemas.microsoft.com/office/drawing/2014/main" id="{056F6249-FB37-F794-0563-FBE6EFE13F39}"/>
               </a:ext>
             </a:extLst>
           </p:cNvPr>
@@ -3891,7 +3980,7 @@
           <p:cNvPr id="4" name="Slide Number Placeholder 3">
             <a:extLst>
               <a:ext uri="{FF2B5EF4-FFF2-40B4-BE49-F238E27FC236}">
-                <a16:creationId xmlns:a16="http://schemas.microsoft.com/office/drawing/2014/main" id="{E6D6FB99-65E0-5A40-BFC0-1BBB89FE8E20}"/>
+                <a16:creationId xmlns:a16="http://schemas.microsoft.com/office/drawing/2014/main" id="{2DFF9891-773F-5281-3EB9-584D3A71500B}"/>
               </a:ext>
             </a:extLst>
           </p:cNvPr>
@@ -3907,7 +3996,7 @@
           <a:bodyPr/>
           <a:lstStyle/>
           <a:p>
-            <a:fld id="{937938ED-2178-43B3-9AAE-1648119C4B05}" type="slidenum">
+            <a:fld id="{3A465F51-8CAF-4CA4-B81F-97E2B4F072C2}" type="slidenum">
               <a:rPr lang="en-IN" smtClean="0"/>
               <a:t>‹#›</a:t>
             </a:fld>
@@ -3918,7 +4007,7 @@
     </p:spTree>
     <p:extLst>
       <p:ext uri="{BB962C8B-B14F-4D97-AF65-F5344CB8AC3E}">
-        <p14:creationId xmlns:p14="http://schemas.microsoft.com/office/powerpoint/2010/main" val="3663843266"/>
+        <p14:creationId xmlns:p14="http://schemas.microsoft.com/office/powerpoint/2010/main" val="1606054591"/>
       </p:ext>
     </p:extLst>
   </p:cSld>
@@ -3950,7 +4039,7 @@
           <p:cNvPr id="2" name="Title 1">
             <a:extLst>
               <a:ext uri="{FF2B5EF4-FFF2-40B4-BE49-F238E27FC236}">
-                <a16:creationId xmlns:a16="http://schemas.microsoft.com/office/drawing/2014/main" id="{C3DDFAC1-8FF1-6E12-9287-26821641BD73}"/>
+                <a16:creationId xmlns:a16="http://schemas.microsoft.com/office/drawing/2014/main" id="{CA0759EB-FF34-EFA3-D28D-1AF68A428827}"/>
               </a:ext>
             </a:extLst>
           </p:cNvPr>
@@ -3988,7 +4077,7 @@
           <p:cNvPr id="3" name="Content Placeholder 2">
             <a:extLst>
               <a:ext uri="{FF2B5EF4-FFF2-40B4-BE49-F238E27FC236}">
-                <a16:creationId xmlns:a16="http://schemas.microsoft.com/office/drawing/2014/main" id="{4CB339A6-0CE1-C3C8-1D53-41638E42DCD4}"/>
+                <a16:creationId xmlns:a16="http://schemas.microsoft.com/office/drawing/2014/main" id="{783D45A6-B26F-DC44-B07E-24DC1BAEA426}"/>
               </a:ext>
             </a:extLst>
           </p:cNvPr>
@@ -4079,7 +4168,7 @@
           <p:cNvPr id="4" name="Text Placeholder 3">
             <a:extLst>
               <a:ext uri="{FF2B5EF4-FFF2-40B4-BE49-F238E27FC236}">
-                <a16:creationId xmlns:a16="http://schemas.microsoft.com/office/drawing/2014/main" id="{DFF9F2B1-FE21-907F-2BBA-26250902752E}"/>
+                <a16:creationId xmlns:a16="http://schemas.microsoft.com/office/drawing/2014/main" id="{8891B74B-843D-DDB7-C2C3-A34AAAF0B65B}"/>
               </a:ext>
             </a:extLst>
           </p:cNvPr>
@@ -4150,7 +4239,7 @@
           <p:cNvPr id="5" name="Date Placeholder 4">
             <a:extLst>
               <a:ext uri="{FF2B5EF4-FFF2-40B4-BE49-F238E27FC236}">
-                <a16:creationId xmlns:a16="http://schemas.microsoft.com/office/drawing/2014/main" id="{12385E95-8A70-DED0-4A2E-3F27278ACFC9}"/>
+                <a16:creationId xmlns:a16="http://schemas.microsoft.com/office/drawing/2014/main" id="{410222DD-ACE3-4D6C-E5C0-B5819DA87812}"/>
               </a:ext>
             </a:extLst>
           </p:cNvPr>
@@ -4166,7 +4255,7 @@
           <a:bodyPr/>
           <a:lstStyle/>
           <a:p>
-            <a:fld id="{DDF74FE0-EBC5-4AB9-800B-A335A3F14358}" type="datetimeFigureOut">
+            <a:fld id="{E76C1D1B-AA06-4462-8688-FBED31F28147}" type="datetimeFigureOut">
               <a:rPr lang="en-IN" smtClean="0"/>
               <a:t>19-10-2026</a:t>
             </a:fld>
@@ -4179,7 +4268,7 @@
           <p:cNvPr id="6" name="Footer Placeholder 5">
             <a:extLst>
               <a:ext uri="{FF2B5EF4-FFF2-40B4-BE49-F238E27FC236}">
-                <a16:creationId xmlns:a16="http://schemas.microsoft.com/office/drawing/2014/main" id="{02FBCBB6-0787-B8B4-40CC-50524AB64320}"/>
+                <a16:creationId xmlns:a16="http://schemas.microsoft.com/office/drawing/2014/main" id="{59C84945-50BF-4249-9992-70DE0088B285}"/>
               </a:ext>
             </a:extLst>
           </p:cNvPr>
@@ -4204,7 +4293,7 @@
           <p:cNvPr id="7" name="Slide Number Placeholder 6">
             <a:extLst>
               <a:ext uri="{FF2B5EF4-FFF2-40B4-BE49-F238E27FC236}">
-                <a16:creationId xmlns:a16="http://schemas.microsoft.com/office/drawing/2014/main" id="{D7AE41E5-BD29-497F-9AE2-DF77513B4C95}"/>
+                <a16:creationId xmlns:a16="http://schemas.microsoft.com/office/drawing/2014/main" id="{A90EA504-CE8C-5F3B-0528-6E0DF79CC98F}"/>
               </a:ext>
             </a:extLst>
           </p:cNvPr>
@@ -4220,7 +4309,7 @@
           <a:bodyPr/>
           <a:lstStyle/>
           <a:p>
-            <a:fld id="{937938ED-2178-43B3-9AAE-1648119C4B05}" type="slidenum">
+            <a:fld id="{3A465F51-8CAF-4CA4-B81F-97E2B4F072C2}" type="slidenum">
               <a:rPr lang="en-IN" smtClean="0"/>
               <a:t>‹#›</a:t>
             </a:fld>
@@ -4231,7 +4320,7 @@
     </p:spTree>
     <p:extLst>
       <p:ext uri="{BB962C8B-B14F-4D97-AF65-F5344CB8AC3E}">
-        <p14:creationId xmlns:p14="http://schemas.microsoft.com/office/powerpoint/2010/main" val="750196848"/>
+        <p14:creationId xmlns:p14="http://schemas.microsoft.com/office/powerpoint/2010/main" val="3832691587"/>
       </p:ext>
     </p:extLst>
   </p:cSld>
@@ -4263,7 +4352,7 @@
           <p:cNvPr id="2" name="Title 1">
             <a:extLst>
               <a:ext uri="{FF2B5EF4-FFF2-40B4-BE49-F238E27FC236}">
-                <a16:creationId xmlns:a16="http://schemas.microsoft.com/office/drawing/2014/main" id="{76B1844E-6807-0DC0-5F5F-DFA4493F629A}"/>
+                <a16:creationId xmlns:a16="http://schemas.microsoft.com/office/drawing/2014/main" id="{53EF4962-DD4B-AC57-BB5C-452EEA6C16E2}"/>
               </a:ext>
             </a:extLst>
           </p:cNvPr>
@@ -4301,7 +4390,7 @@
           <p:cNvPr id="3" name="Picture Placeholder 2">
             <a:extLst>
               <a:ext uri="{FF2B5EF4-FFF2-40B4-BE49-F238E27FC236}">
-                <a16:creationId xmlns:a16="http://schemas.microsoft.com/office/drawing/2014/main" id="{26335A1E-405F-5FF7-801A-87F5204EE284}"/>
+                <a16:creationId xmlns:a16="http://schemas.microsoft.com/office/drawing/2014/main" id="{5F7B1136-CA26-6BC6-DFED-46F0B3DD82C0}"/>
               </a:ext>
             </a:extLst>
           </p:cNvPr>
@@ -4368,7 +4457,7 @@
           <p:cNvPr id="4" name="Text Placeholder 3">
             <a:extLst>
               <a:ext uri="{FF2B5EF4-FFF2-40B4-BE49-F238E27FC236}">
-                <a16:creationId xmlns:a16="http://schemas.microsoft.com/office/drawing/2014/main" id="{98934909-4665-7513-8C7B-DADF28F6094B}"/>
+                <a16:creationId xmlns:a16="http://schemas.microsoft.com/office/drawing/2014/main" id="{D9F5B096-3152-8E97-F2DA-43CB4A082CA7}"/>
               </a:ext>
             </a:extLst>
           </p:cNvPr>
@@ -4439,7 +4528,7 @@
           <p:cNvPr id="5" name="Date Placeholder 4">
             <a:extLst>
               <a:ext uri="{FF2B5EF4-FFF2-40B4-BE49-F238E27FC236}">
-                <a16:creationId xmlns:a16="http://schemas.microsoft.com/office/drawing/2014/main" id="{528AED3E-95FB-F3EE-0D85-83423F738A18}"/>
+                <a16:creationId xmlns:a16="http://schemas.microsoft.com/office/drawing/2014/main" id="{C93B5233-AD25-EF7C-91B7-61AF9980A7F8}"/>
               </a:ext>
             </a:extLst>
           </p:cNvPr>
@@ -4455,7 +4544,7 @@
           <a:bodyPr/>
           <a:lstStyle/>
           <a:p>
-            <a:fld id="{DDF74FE0-EBC5-4AB9-800B-A335A3F14358}" type="datetimeFigureOut">
+            <a:fld id="{E76C1D1B-AA06-4462-8688-FBED31F28147}" type="datetimeFigureOut">
               <a:rPr lang="en-IN" smtClean="0"/>
               <a:t>19-10-2026</a:t>
             </a:fld>
@@ -4468,7 +4557,7 @@
           <p:cNvPr id="6" name="Footer Placeholder 5">
             <a:extLst>
               <a:ext uri="{FF2B5EF4-FFF2-40B4-BE49-F238E27FC236}">
-                <a16:creationId xmlns:a16="http://schemas.microsoft.com/office/drawing/2014/main" id="{097210E7-43AF-25AC-35E8-2EA04B64262C}"/>
+                <a16:creationId xmlns:a16="http://schemas.microsoft.com/office/drawing/2014/main" id="{80668771-472C-DC65-EAE6-1CA858D719BF}"/>
               </a:ext>
             </a:extLst>
           </p:cNvPr>
@@ -4493,7 +4582,7 @@
           <p:cNvPr id="7" name="Slide Number Placeholder 6">
             <a:extLst>
               <a:ext uri="{FF2B5EF4-FFF2-40B4-BE49-F238E27FC236}">
-                <a16:creationId xmlns:a16="http://schemas.microsoft.com/office/drawing/2014/main" id="{F2A07760-7CB4-F427-3B98-A1FC6CEB8954}"/>
+                <a16:creationId xmlns:a16="http://schemas.microsoft.com/office/drawing/2014/main" id="{20737601-30BA-1686-4098-79ACE49DA681}"/>
               </a:ext>
             </a:extLst>
           </p:cNvPr>
@@ -4509,7 +4598,7 @@
           <a:bodyPr/>
           <a:lstStyle/>
           <a:p>
-            <a:fld id="{937938ED-2178-43B3-9AAE-1648119C4B05}" type="slidenum">
+            <a:fld id="{3A465F51-8CAF-4CA4-B81F-97E2B4F072C2}" type="slidenum">
               <a:rPr lang="en-IN" smtClean="0"/>
               <a:t>‹#›</a:t>
             </a:fld>
@@ -4520,7 +4609,7 @@
     </p:spTree>
     <p:extLst>
       <p:ext uri="{BB962C8B-B14F-4D97-AF65-F5344CB8AC3E}">
-        <p14:creationId xmlns:p14="http://schemas.microsoft.com/office/powerpoint/2010/main" val="2596804219"/>
+        <p14:creationId xmlns:p14="http://schemas.microsoft.com/office/powerpoint/2010/main" val="1552822637"/>
       </p:ext>
     </p:extLst>
   </p:cSld>
@@ -4557,7 +4646,7 @@
           <p:cNvPr id="2" name="Title Placeholder 1">
             <a:extLst>
               <a:ext uri="{FF2B5EF4-FFF2-40B4-BE49-F238E27FC236}">
-                <a16:creationId xmlns:a16="http://schemas.microsoft.com/office/drawing/2014/main" id="{F8755496-C3F6-EC84-C90D-24DDCD3B75A5}"/>
+                <a16:creationId xmlns:a16="http://schemas.microsoft.com/office/drawing/2014/main" id="{9E2BD6C4-6030-8606-BA11-B9BFB401C523}"/>
               </a:ext>
             </a:extLst>
           </p:cNvPr>
@@ -4596,7 +4685,7 @@
           <p:cNvPr id="3" name="Text Placeholder 2">
             <a:extLst>
               <a:ext uri="{FF2B5EF4-FFF2-40B4-BE49-F238E27FC236}">
-                <a16:creationId xmlns:a16="http://schemas.microsoft.com/office/drawing/2014/main" id="{C70B77BE-6685-7309-6733-90B70D460DEC}"/>
+                <a16:creationId xmlns:a16="http://schemas.microsoft.com/office/drawing/2014/main" id="{EEE2270F-3E22-9401-518E-F5BBF3DABF0B}"/>
               </a:ext>
             </a:extLst>
           </p:cNvPr>
@@ -4664,7 +4753,7 @@
           <p:cNvPr id="4" name="Date Placeholder 3">
             <a:extLst>
               <a:ext uri="{FF2B5EF4-FFF2-40B4-BE49-F238E27FC236}">
-                <a16:creationId xmlns:a16="http://schemas.microsoft.com/office/drawing/2014/main" id="{788A17BD-55F8-AA8F-E794-60DEB4F638D9}"/>
+                <a16:creationId xmlns:a16="http://schemas.microsoft.com/office/drawing/2014/main" id="{3C893608-AAF1-8E92-E8E6-8CC1D04AFA33}"/>
               </a:ext>
             </a:extLst>
           </p:cNvPr>
@@ -4698,7 +4787,7 @@
             </a:lvl1pPr>
           </a:lstStyle>
           <a:p>
-            <a:fld id="{DDF74FE0-EBC5-4AB9-800B-A335A3F14358}" type="datetimeFigureOut">
+            <a:fld id="{E76C1D1B-AA06-4462-8688-FBED31F28147}" type="datetimeFigureOut">
               <a:rPr lang="en-IN" smtClean="0"/>
               <a:t>19-10-2026</a:t>
             </a:fld>
@@ -4711,7 +4800,7 @@
           <p:cNvPr id="5" name="Footer Placeholder 4">
             <a:extLst>
               <a:ext uri="{FF2B5EF4-FFF2-40B4-BE49-F238E27FC236}">
-                <a16:creationId xmlns:a16="http://schemas.microsoft.com/office/drawing/2014/main" id="{EE2F4C87-7EB0-2068-9617-B7B3A9C43335}"/>
+                <a16:creationId xmlns:a16="http://schemas.microsoft.com/office/drawing/2014/main" id="{46730A2E-EA64-39CD-2EF4-78040EF0B731}"/>
               </a:ext>
             </a:extLst>
           </p:cNvPr>
@@ -4754,7 +4843,7 @@
           <p:cNvPr id="6" name="Slide Number Placeholder 5">
             <a:extLst>
               <a:ext uri="{FF2B5EF4-FFF2-40B4-BE49-F238E27FC236}">
-                <a16:creationId xmlns:a16="http://schemas.microsoft.com/office/drawing/2014/main" id="{D508284D-AA35-D54C-6D60-B47373BCE903}"/>
+                <a16:creationId xmlns:a16="http://schemas.microsoft.com/office/drawing/2014/main" id="{721FBA20-BB44-7CC1-3DD8-3A3C7B601D82}"/>
               </a:ext>
             </a:extLst>
           </p:cNvPr>
@@ -4788,7 +4877,7 @@
             </a:lvl1pPr>
           </a:lstStyle>
           <a:p>
-            <a:fld id="{937938ED-2178-43B3-9AAE-1648119C4B05}" type="slidenum">
+            <a:fld id="{3A465F51-8CAF-4CA4-B81F-97E2B4F072C2}" type="slidenum">
               <a:rPr lang="en-IN" smtClean="0"/>
               <a:t>‹#›</a:t>
             </a:fld>
@@ -4799,7 +4888,7 @@
     </p:spTree>
     <p:extLst>
       <p:ext uri="{BB962C8B-B14F-4D97-AF65-F5344CB8AC3E}">
-        <p14:creationId xmlns:p14="http://schemas.microsoft.com/office/powerpoint/2010/main" val="3866621658"/>
+        <p14:creationId xmlns:p14="http://schemas.microsoft.com/office/powerpoint/2010/main" val="1567021486"/>
       </p:ext>
     </p:extLst>
   </p:cSld>
@@ -5130,7 +5219,7 @@
           <p:cNvPr id="2" name="TextBox 1">
             <a:extLst>
               <a:ext uri="{FF2B5EF4-FFF2-40B4-BE49-F238E27FC236}">
-                <a16:creationId xmlns:a16="http://schemas.microsoft.com/office/drawing/2014/main" id="{729CD704-1229-AEBB-CD0B-BF095760F9D4}"/>
+                <a16:creationId xmlns:a16="http://schemas.microsoft.com/office/drawing/2014/main" id="{CF54EC84-BB02-78AB-D98E-82FA50F39018}"/>
               </a:ext>
             </a:extLst>
           </p:cNvPr>
@@ -5175,7 +5264,7 @@
           <p:cNvPr id="3" name="TextBox 2">
             <a:extLst>
               <a:ext uri="{FF2B5EF4-FFF2-40B4-BE49-F238E27FC236}">
-                <a16:creationId xmlns:a16="http://schemas.microsoft.com/office/drawing/2014/main" id="{5A45F18B-61E9-0A96-059C-DFECECAEF07B}"/>
+                <a16:creationId xmlns:a16="http://schemas.microsoft.com/office/drawing/2014/main" id="{BCC0291C-D964-CB1F-612F-39544EBA1F3B}"/>
               </a:ext>
             </a:extLst>
           </p:cNvPr>
@@ -5221,7 +5310,7 @@
           <p:cNvPr id="4" name="TextBox 3">
             <a:extLst>
               <a:ext uri="{FF2B5EF4-FFF2-40B4-BE49-F238E27FC236}">
-                <a16:creationId xmlns:a16="http://schemas.microsoft.com/office/drawing/2014/main" id="{C746DE91-3620-0AD8-EEF9-74CD01893F48}"/>
+                <a16:creationId xmlns:a16="http://schemas.microsoft.com/office/drawing/2014/main" id="{0E90A975-EF49-CA29-0013-E0AEDB18FF3E}"/>
               </a:ext>
             </a:extLst>
           </p:cNvPr>
@@ -5273,7 +5362,7 @@
           <p:cNvPr id="6" name="Picture 5">
             <a:extLst>
               <a:ext uri="{FF2B5EF4-FFF2-40B4-BE49-F238E27FC236}">
-                <a16:creationId xmlns:a16="http://schemas.microsoft.com/office/drawing/2014/main" id="{85E74406-9F7F-535D-20E6-EE7DD43EBB9C}"/>
+                <a16:creationId xmlns:a16="http://schemas.microsoft.com/office/drawing/2014/main" id="{15AFFA4A-A5D4-D3D4-50A9-F1D7D6D6AF2F}"/>
               </a:ext>
             </a:extLst>
           </p:cNvPr>
@@ -5309,7 +5398,7 @@
           <p:cNvPr id="7" name="TextBox 6">
             <a:extLst>
               <a:ext uri="{FF2B5EF4-FFF2-40B4-BE49-F238E27FC236}">
-                <a16:creationId xmlns:a16="http://schemas.microsoft.com/office/drawing/2014/main" id="{1DBB3ED9-50FE-B727-25F6-15EA65EBBB03}"/>
+                <a16:creationId xmlns:a16="http://schemas.microsoft.com/office/drawing/2014/main" id="{68AF3DC9-27B6-DDC1-306E-BF342A82796E}"/>
               </a:ext>
             </a:extLst>
           </p:cNvPr>
@@ -5356,7 +5445,7 @@
           <p:cNvPr id="8" name="TextBox 7">
             <a:extLst>
               <a:ext uri="{FF2B5EF4-FFF2-40B4-BE49-F238E27FC236}">
-                <a16:creationId xmlns:a16="http://schemas.microsoft.com/office/drawing/2014/main" id="{B7BAE007-3F78-CB78-7A6E-3384BFE0574D}"/>
+                <a16:creationId xmlns:a16="http://schemas.microsoft.com/office/drawing/2014/main" id="{BAF1F141-19FC-5A39-61C1-458B440406F5}"/>
               </a:ext>
             </a:extLst>
           </p:cNvPr>
@@ -5399,7 +5488,7 @@
     </p:spTree>
     <p:extLst>
       <p:ext uri="{BB962C8B-B14F-4D97-AF65-F5344CB8AC3E}">
-        <p14:creationId xmlns:p14="http://schemas.microsoft.com/office/powerpoint/2010/main" val="60809029"/>
+        <p14:creationId xmlns:p14="http://schemas.microsoft.com/office/powerpoint/2010/main" val="3609827800"/>
       </p:ext>
     </p:extLst>
   </p:cSld>
@@ -5439,7 +5528,7 @@
           <p:cNvPr id="2" name="TextBox 1">
             <a:extLst>
               <a:ext uri="{FF2B5EF4-FFF2-40B4-BE49-F238E27FC236}">
-                <a16:creationId xmlns:a16="http://schemas.microsoft.com/office/drawing/2014/main" id="{5AFC735A-4FBE-2606-8A32-ED6425752295}"/>
+                <a16:creationId xmlns:a16="http://schemas.microsoft.com/office/drawing/2014/main" id="{AAAA0061-7AE8-D7A6-0549-9DE172A21843}"/>
               </a:ext>
             </a:extLst>
           </p:cNvPr>
@@ -5484,7 +5573,7 @@
           <p:cNvPr id="3" name="TextBox 2">
             <a:extLst>
               <a:ext uri="{FF2B5EF4-FFF2-40B4-BE49-F238E27FC236}">
-                <a16:creationId xmlns:a16="http://schemas.microsoft.com/office/drawing/2014/main" id="{38A509CC-B27B-5C8D-6344-F9FA4799FD47}"/>
+                <a16:creationId xmlns:a16="http://schemas.microsoft.com/office/drawing/2014/main" id="{D9466E73-238D-F574-6D76-0CB732EBE4CA}"/>
               </a:ext>
             </a:extLst>
           </p:cNvPr>
@@ -5535,7 +5624,7 @@
           <p:cNvPr id="4" name="TextBox 3">
             <a:extLst>
               <a:ext uri="{FF2B5EF4-FFF2-40B4-BE49-F238E27FC236}">
-                <a16:creationId xmlns:a16="http://schemas.microsoft.com/office/drawing/2014/main" id="{2DD2C4B0-6BBF-D3A6-E95E-F93FD04CF4F7}"/>
+                <a16:creationId xmlns:a16="http://schemas.microsoft.com/office/drawing/2014/main" id="{A98D82D2-F617-5BE1-03CD-32DE3C7255A3}"/>
               </a:ext>
             </a:extLst>
           </p:cNvPr>
@@ -5587,7 +5676,7 @@
           <p:cNvPr id="5" name="Table 4">
             <a:extLst>
               <a:ext uri="{FF2B5EF4-FFF2-40B4-BE49-F238E27FC236}">
-                <a16:creationId xmlns:a16="http://schemas.microsoft.com/office/drawing/2014/main" id="{6E131E8E-AD7B-9095-4DE7-FD5550397641}"/>
+                <a16:creationId xmlns:a16="http://schemas.microsoft.com/office/drawing/2014/main" id="{97CA1E1D-A110-B33E-EB6A-74A082242EFB}"/>
               </a:ext>
             </a:extLst>
           </p:cNvPr>
@@ -5597,7 +5686,7 @@
           <p:nvPr>
             <p:extLst>
               <p:ext uri="{D42A27DB-BD31-4B8C-83A1-F6EECF244321}">
-                <p14:modId xmlns:p14="http://schemas.microsoft.com/office/powerpoint/2010/main" val="4106356954"/>
+                <p14:modId xmlns:p14="http://schemas.microsoft.com/office/powerpoint/2010/main" val="687454500"/>
               </p:ext>
             </p:extLst>
           </p:nvPr>
@@ -5616,28 +5705,28 @@
                 <a:gridCol w="4064000">
                   <a:extLst>
                     <a:ext uri="{9D8B030D-6E8A-4147-A177-3AD203B41FA5}">
-                      <a16:colId xmlns:a16="http://schemas.microsoft.com/office/drawing/2014/main" val="942351640"/>
+                      <a16:colId xmlns:a16="http://schemas.microsoft.com/office/drawing/2014/main" val="4291281191"/>
                     </a:ext>
                   </a:extLst>
                 </a:gridCol>
                 <a:gridCol w="1524000">
                   <a:extLst>
                     <a:ext uri="{9D8B030D-6E8A-4147-A177-3AD203B41FA5}">
-                      <a16:colId xmlns:a16="http://schemas.microsoft.com/office/drawing/2014/main" val="3131021289"/>
+                      <a16:colId xmlns:a16="http://schemas.microsoft.com/office/drawing/2014/main" val="3223815234"/>
                     </a:ext>
                   </a:extLst>
                 </a:gridCol>
                 <a:gridCol w="2667000">
                   <a:extLst>
                     <a:ext uri="{9D8B030D-6E8A-4147-A177-3AD203B41FA5}">
-                      <a16:colId xmlns:a16="http://schemas.microsoft.com/office/drawing/2014/main" val="2012984853"/>
+                      <a16:colId xmlns:a16="http://schemas.microsoft.com/office/drawing/2014/main" val="312261753"/>
                     </a:ext>
                   </a:extLst>
                 </a:gridCol>
                 <a:gridCol w="2667000">
                   <a:extLst>
                     <a:ext uri="{9D8B030D-6E8A-4147-A177-3AD203B41FA5}">
-                      <a16:colId xmlns:a16="http://schemas.microsoft.com/office/drawing/2014/main" val="3809571636"/>
+                      <a16:colId xmlns:a16="http://schemas.microsoft.com/office/drawing/2014/main" val="3638284303"/>
                     </a:ext>
                   </a:extLst>
                 </a:gridCol>
@@ -5813,7 +5902,7 @@
                 </a:tc>
                 <a:extLst>
                   <a:ext uri="{0D108BD9-81ED-4DB2-BD59-A6C34878D82A}">
-                    <a16:rowId xmlns:a16="http://schemas.microsoft.com/office/drawing/2014/main" val="482410368"/>
+                    <a16:rowId xmlns:a16="http://schemas.microsoft.com/office/drawing/2014/main" val="3053548314"/>
                   </a:ext>
                 </a:extLst>
               </a:tr>
@@ -5988,7 +6077,7 @@
                 </a:tc>
                 <a:extLst>
                   <a:ext uri="{0D108BD9-81ED-4DB2-BD59-A6C34878D82A}">
-                    <a16:rowId xmlns:a16="http://schemas.microsoft.com/office/drawing/2014/main" val="3692162954"/>
+                    <a16:rowId xmlns:a16="http://schemas.microsoft.com/office/drawing/2014/main" val="1295736332"/>
                   </a:ext>
                 </a:extLst>
               </a:tr>
@@ -6163,7 +6252,7 @@
                 </a:tc>
                 <a:extLst>
                   <a:ext uri="{0D108BD9-81ED-4DB2-BD59-A6C34878D82A}">
-                    <a16:rowId xmlns:a16="http://schemas.microsoft.com/office/drawing/2014/main" val="2706094569"/>
+                    <a16:rowId xmlns:a16="http://schemas.microsoft.com/office/drawing/2014/main" val="1441638651"/>
                   </a:ext>
                 </a:extLst>
               </a:tr>
@@ -6338,7 +6427,7 @@
                 </a:tc>
                 <a:extLst>
                   <a:ext uri="{0D108BD9-81ED-4DB2-BD59-A6C34878D82A}">
-                    <a16:rowId xmlns:a16="http://schemas.microsoft.com/office/drawing/2014/main" val="4008685344"/>
+                    <a16:rowId xmlns:a16="http://schemas.microsoft.com/office/drawing/2014/main" val="1938105937"/>
                   </a:ext>
                 </a:extLst>
               </a:tr>
@@ -6351,7 +6440,7 @@
           <p:cNvPr id="6" name="TextBox 5">
             <a:extLst>
               <a:ext uri="{FF2B5EF4-FFF2-40B4-BE49-F238E27FC236}">
-                <a16:creationId xmlns:a16="http://schemas.microsoft.com/office/drawing/2014/main" id="{B17446E6-BF90-88A9-0179-D0329016279A}"/>
+                <a16:creationId xmlns:a16="http://schemas.microsoft.com/office/drawing/2014/main" id="{992E9BD8-3AD0-70CA-E773-64FCF9746E66}"/>
               </a:ext>
             </a:extLst>
           </p:cNvPr>
@@ -6402,7 +6491,7 @@
           <p:cNvPr id="7" name="TextBox 6">
             <a:extLst>
               <a:ext uri="{FF2B5EF4-FFF2-40B4-BE49-F238E27FC236}">
-                <a16:creationId xmlns:a16="http://schemas.microsoft.com/office/drawing/2014/main" id="{632B2B50-C543-4818-711B-7B66228A660A}"/>
+                <a16:creationId xmlns:a16="http://schemas.microsoft.com/office/drawing/2014/main" id="{0863A5CC-C14D-63D2-C973-6CCF6CF9794F}"/>
               </a:ext>
             </a:extLst>
           </p:cNvPr>
@@ -6447,7 +6536,7 @@
           <p:cNvPr id="8" name="TextBox 7">
             <a:extLst>
               <a:ext uri="{FF2B5EF4-FFF2-40B4-BE49-F238E27FC236}">
-                <a16:creationId xmlns:a16="http://schemas.microsoft.com/office/drawing/2014/main" id="{A9D46563-8159-ADCC-E300-E56D019E635E}"/>
+                <a16:creationId xmlns:a16="http://schemas.microsoft.com/office/drawing/2014/main" id="{C670EDE1-2111-C967-9778-97214F2CAFD2}"/>
               </a:ext>
             </a:extLst>
           </p:cNvPr>
@@ -6490,7 +6579,7 @@
     </p:spTree>
     <p:extLst>
       <p:ext uri="{BB962C8B-B14F-4D97-AF65-F5344CB8AC3E}">
-        <p14:creationId xmlns:p14="http://schemas.microsoft.com/office/powerpoint/2010/main" val="2075331251"/>
+        <p14:creationId xmlns:p14="http://schemas.microsoft.com/office/powerpoint/2010/main" val="4246246519"/>
       </p:ext>
     </p:extLst>
   </p:cSld>
@@ -6530,7 +6619,7 @@
           <p:cNvPr id="2" name="TextBox 1">
             <a:extLst>
               <a:ext uri="{FF2B5EF4-FFF2-40B4-BE49-F238E27FC236}">
-                <a16:creationId xmlns:a16="http://schemas.microsoft.com/office/drawing/2014/main" id="{5DB52067-7CCD-7FBA-E31E-DA005B4F3124}"/>
+                <a16:creationId xmlns:a16="http://schemas.microsoft.com/office/drawing/2014/main" id="{F9071AB0-AF21-FD95-C3EF-44E73417630A}"/>
               </a:ext>
             </a:extLst>
           </p:cNvPr>
@@ -6575,7 +6664,7 @@
           <p:cNvPr id="3" name="TextBox 2">
             <a:extLst>
               <a:ext uri="{FF2B5EF4-FFF2-40B4-BE49-F238E27FC236}">
-                <a16:creationId xmlns:a16="http://schemas.microsoft.com/office/drawing/2014/main" id="{D1D58F2D-FEB3-B9B9-2619-C36B285C03D0}"/>
+                <a16:creationId xmlns:a16="http://schemas.microsoft.com/office/drawing/2014/main" id="{23906536-AD6B-E1E5-E3A5-F1B12D8D250C}"/>
               </a:ext>
             </a:extLst>
           </p:cNvPr>
@@ -6626,7 +6715,7 @@
           <p:cNvPr id="4" name="Table 3">
             <a:extLst>
               <a:ext uri="{FF2B5EF4-FFF2-40B4-BE49-F238E27FC236}">
-                <a16:creationId xmlns:a16="http://schemas.microsoft.com/office/drawing/2014/main" id="{8092B2EC-4FC7-6AD1-E7CA-AEE15E4248C1}"/>
+                <a16:creationId xmlns:a16="http://schemas.microsoft.com/office/drawing/2014/main" id="{15C3F325-02F1-E6EF-D658-4885C36CF605}"/>
               </a:ext>
             </a:extLst>
           </p:cNvPr>
@@ -6636,7 +6725,7 @@
           <p:nvPr>
             <p:extLst>
               <p:ext uri="{D42A27DB-BD31-4B8C-83A1-F6EECF244321}">
-                <p14:modId xmlns:p14="http://schemas.microsoft.com/office/powerpoint/2010/main" val="2084035532"/>
+                <p14:modId xmlns:p14="http://schemas.microsoft.com/office/powerpoint/2010/main" val="1094621118"/>
               </p:ext>
             </p:extLst>
           </p:nvPr>
@@ -6655,35 +6744,35 @@
                 <a:gridCol w="3302000">
                   <a:extLst>
                     <a:ext uri="{9D8B030D-6E8A-4147-A177-3AD203B41FA5}">
-                      <a16:colId xmlns:a16="http://schemas.microsoft.com/office/drawing/2014/main" val="505685940"/>
+                      <a16:colId xmlns:a16="http://schemas.microsoft.com/office/drawing/2014/main" val="1032132936"/>
                     </a:ext>
                   </a:extLst>
                 </a:gridCol>
                 <a:gridCol w="1905000">
                   <a:extLst>
                     <a:ext uri="{9D8B030D-6E8A-4147-A177-3AD203B41FA5}">
-                      <a16:colId xmlns:a16="http://schemas.microsoft.com/office/drawing/2014/main" val="2875457233"/>
+                      <a16:colId xmlns:a16="http://schemas.microsoft.com/office/drawing/2014/main" val="3016329069"/>
                     </a:ext>
                   </a:extLst>
                 </a:gridCol>
                 <a:gridCol w="1905000">
                   <a:extLst>
                     <a:ext uri="{9D8B030D-6E8A-4147-A177-3AD203B41FA5}">
-                      <a16:colId xmlns:a16="http://schemas.microsoft.com/office/drawing/2014/main" val="12305160"/>
+                      <a16:colId xmlns:a16="http://schemas.microsoft.com/office/drawing/2014/main" val="2111555908"/>
                     </a:ext>
                   </a:extLst>
                 </a:gridCol>
                 <a:gridCol w="1905000">
                   <a:extLst>
                     <a:ext uri="{9D8B030D-6E8A-4147-A177-3AD203B41FA5}">
-                      <a16:colId xmlns:a16="http://schemas.microsoft.com/office/drawing/2014/main" val="2517738048"/>
+                      <a16:colId xmlns:a16="http://schemas.microsoft.com/office/drawing/2014/main" val="1647208920"/>
                     </a:ext>
                   </a:extLst>
                 </a:gridCol>
                 <a:gridCol w="1905000">
                   <a:extLst>
                     <a:ext uri="{9D8B030D-6E8A-4147-A177-3AD203B41FA5}">
-                      <a16:colId xmlns:a16="http://schemas.microsoft.com/office/drawing/2014/main" val="4292797885"/>
+                      <a16:colId xmlns:a16="http://schemas.microsoft.com/office/drawing/2014/main" val="100652350"/>
                     </a:ext>
                   </a:extLst>
                 </a:gridCol>
@@ -6901,7 +6990,7 @@
                 </a:tc>
                 <a:extLst>
                   <a:ext uri="{0D108BD9-81ED-4DB2-BD59-A6C34878D82A}">
-                    <a16:rowId xmlns:a16="http://schemas.microsoft.com/office/drawing/2014/main" val="615875965"/>
+                    <a16:rowId xmlns:a16="http://schemas.microsoft.com/office/drawing/2014/main" val="1378814693"/>
                   </a:ext>
                 </a:extLst>
               </a:tr>
@@ -7118,7 +7207,7 @@
                 </a:tc>
                 <a:extLst>
                   <a:ext uri="{0D108BD9-81ED-4DB2-BD59-A6C34878D82A}">
-                    <a16:rowId xmlns:a16="http://schemas.microsoft.com/office/drawing/2014/main" val="3360513813"/>
+                    <a16:rowId xmlns:a16="http://schemas.microsoft.com/office/drawing/2014/main" val="1904894850"/>
                   </a:ext>
                 </a:extLst>
               </a:tr>
@@ -7335,7 +7424,7 @@
                 </a:tc>
                 <a:extLst>
                   <a:ext uri="{0D108BD9-81ED-4DB2-BD59-A6C34878D82A}">
-                    <a16:rowId xmlns:a16="http://schemas.microsoft.com/office/drawing/2014/main" val="4029551806"/>
+                    <a16:rowId xmlns:a16="http://schemas.microsoft.com/office/drawing/2014/main" val="945078319"/>
                   </a:ext>
                 </a:extLst>
               </a:tr>
@@ -7552,7 +7641,7 @@
                 </a:tc>
                 <a:extLst>
                   <a:ext uri="{0D108BD9-81ED-4DB2-BD59-A6C34878D82A}">
-                    <a16:rowId xmlns:a16="http://schemas.microsoft.com/office/drawing/2014/main" val="1453545393"/>
+                    <a16:rowId xmlns:a16="http://schemas.microsoft.com/office/drawing/2014/main" val="1622647789"/>
                   </a:ext>
                 </a:extLst>
               </a:tr>
@@ -7769,7 +7858,7 @@
                 </a:tc>
                 <a:extLst>
                   <a:ext uri="{0D108BD9-81ED-4DB2-BD59-A6C34878D82A}">
-                    <a16:rowId xmlns:a16="http://schemas.microsoft.com/office/drawing/2014/main" val="3623195443"/>
+                    <a16:rowId xmlns:a16="http://schemas.microsoft.com/office/drawing/2014/main" val="339253623"/>
                   </a:ext>
                 </a:extLst>
               </a:tr>
@@ -7782,7 +7871,7 @@
           <p:cNvPr id="5" name="TextBox 4">
             <a:extLst>
               <a:ext uri="{FF2B5EF4-FFF2-40B4-BE49-F238E27FC236}">
-                <a16:creationId xmlns:a16="http://schemas.microsoft.com/office/drawing/2014/main" id="{03FAC8D3-749D-BA85-32CE-E2136B2EB22D}"/>
+                <a16:creationId xmlns:a16="http://schemas.microsoft.com/office/drawing/2014/main" id="{65C7C97A-B137-9102-7B74-ACE2BE87D510}"/>
               </a:ext>
             </a:extLst>
           </p:cNvPr>
@@ -7833,7 +7922,7 @@
           <p:cNvPr id="6" name="TextBox 5">
             <a:extLst>
               <a:ext uri="{FF2B5EF4-FFF2-40B4-BE49-F238E27FC236}">
-                <a16:creationId xmlns:a16="http://schemas.microsoft.com/office/drawing/2014/main" id="{0B6899BD-3994-087C-D841-87594CEF31E3}"/>
+                <a16:creationId xmlns:a16="http://schemas.microsoft.com/office/drawing/2014/main" id="{54575D9B-AC45-C6AE-B3D8-B1F0FFC0E12B}"/>
               </a:ext>
             </a:extLst>
           </p:cNvPr>
@@ -7878,7 +7967,7 @@
           <p:cNvPr id="7" name="TextBox 6">
             <a:extLst>
               <a:ext uri="{FF2B5EF4-FFF2-40B4-BE49-F238E27FC236}">
-                <a16:creationId xmlns:a16="http://schemas.microsoft.com/office/drawing/2014/main" id="{E9606B1E-8A42-324B-A863-7DCFD671C319}"/>
+                <a16:creationId xmlns:a16="http://schemas.microsoft.com/office/drawing/2014/main" id="{77827A39-F56C-973F-902F-013CAE7309A1}"/>
               </a:ext>
             </a:extLst>
           </p:cNvPr>
@@ -7921,7 +8010,7 @@
     </p:spTree>
     <p:extLst>
       <p:ext uri="{BB962C8B-B14F-4D97-AF65-F5344CB8AC3E}">
-        <p14:creationId xmlns:p14="http://schemas.microsoft.com/office/powerpoint/2010/main" val="1602161767"/>
+        <p14:creationId xmlns:p14="http://schemas.microsoft.com/office/powerpoint/2010/main" val="3271634043"/>
       </p:ext>
     </p:extLst>
   </p:cSld>
@@ -7961,7 +8050,7 @@
           <p:cNvPr id="2" name="TextBox 1">
             <a:extLst>
               <a:ext uri="{FF2B5EF4-FFF2-40B4-BE49-F238E27FC236}">
-                <a16:creationId xmlns:a16="http://schemas.microsoft.com/office/drawing/2014/main" id="{74784183-0EBA-EF83-D6D7-31C8AC8E5541}"/>
+                <a16:creationId xmlns:a16="http://schemas.microsoft.com/office/drawing/2014/main" id="{3D8F2EF2-3348-CA48-AD92-8F355BF070D7}"/>
               </a:ext>
             </a:extLst>
           </p:cNvPr>
@@ -8012,7 +8101,7 @@
           <p:cNvPr id="3" name="TextBox 2">
             <a:extLst>
               <a:ext uri="{FF2B5EF4-FFF2-40B4-BE49-F238E27FC236}">
-                <a16:creationId xmlns:a16="http://schemas.microsoft.com/office/drawing/2014/main" id="{ADDFDC27-1B53-BA66-10D7-CD97038D0953}"/>
+                <a16:creationId xmlns:a16="http://schemas.microsoft.com/office/drawing/2014/main" id="{A98F7637-CE1E-26DE-2ED1-DF0F3FB081AA}"/>
               </a:ext>
             </a:extLst>
           </p:cNvPr>
@@ -8063,7 +8152,7 @@
           <p:cNvPr id="4" name="TextBox 3">
             <a:extLst>
               <a:ext uri="{FF2B5EF4-FFF2-40B4-BE49-F238E27FC236}">
-                <a16:creationId xmlns:a16="http://schemas.microsoft.com/office/drawing/2014/main" id="{50CE65C1-2569-1742-EE12-CF24070597A7}"/>
+                <a16:creationId xmlns:a16="http://schemas.microsoft.com/office/drawing/2014/main" id="{42A6280B-9E90-CEF0-C21A-55C56DFC8404}"/>
               </a:ext>
             </a:extLst>
           </p:cNvPr>
@@ -8117,7 +8206,7 @@
           <p:cNvPr id="5" name="TextBox 4">
             <a:extLst>
               <a:ext uri="{FF2B5EF4-FFF2-40B4-BE49-F238E27FC236}">
-                <a16:creationId xmlns:a16="http://schemas.microsoft.com/office/drawing/2014/main" id="{BD825728-46F2-A4FF-72F3-13F6C427FEBB}"/>
+                <a16:creationId xmlns:a16="http://schemas.microsoft.com/office/drawing/2014/main" id="{B5CBFC1B-64E3-5327-00D4-1491A903FA32}"/>
               </a:ext>
             </a:extLst>
           </p:cNvPr>
@@ -8169,7 +8258,7 @@
           <p:cNvPr id="6" name="Table 5">
             <a:extLst>
               <a:ext uri="{FF2B5EF4-FFF2-40B4-BE49-F238E27FC236}">
-                <a16:creationId xmlns:a16="http://schemas.microsoft.com/office/drawing/2014/main" id="{DCF0D178-77D6-2751-0385-37E3870F0614}"/>
+                <a16:creationId xmlns:a16="http://schemas.microsoft.com/office/drawing/2014/main" id="{F9B2B38B-DF79-0ADA-7024-EFF59663863A}"/>
               </a:ext>
             </a:extLst>
           </p:cNvPr>
@@ -8179,7 +8268,7 @@
           <p:nvPr>
             <p:extLst>
               <p:ext uri="{D42A27DB-BD31-4B8C-83A1-F6EECF244321}">
-                <p14:modId xmlns:p14="http://schemas.microsoft.com/office/powerpoint/2010/main" val="3851198020"/>
+                <p14:modId xmlns:p14="http://schemas.microsoft.com/office/powerpoint/2010/main" val="1851722445"/>
               </p:ext>
             </p:extLst>
           </p:nvPr>
@@ -8198,21 +8287,21 @@
                 <a:gridCol w="2540000">
                   <a:extLst>
                     <a:ext uri="{9D8B030D-6E8A-4147-A177-3AD203B41FA5}">
-                      <a16:colId xmlns:a16="http://schemas.microsoft.com/office/drawing/2014/main" val="4083259485"/>
+                      <a16:colId xmlns:a16="http://schemas.microsoft.com/office/drawing/2014/main" val="3163166481"/>
                     </a:ext>
                   </a:extLst>
                 </a:gridCol>
                 <a:gridCol w="1397000">
                   <a:extLst>
                     <a:ext uri="{9D8B030D-6E8A-4147-A177-3AD203B41FA5}">
-                      <a16:colId xmlns:a16="http://schemas.microsoft.com/office/drawing/2014/main" val="2604777657"/>
+                      <a16:colId xmlns:a16="http://schemas.microsoft.com/office/drawing/2014/main" val="3557314426"/>
                     </a:ext>
                   </a:extLst>
                 </a:gridCol>
                 <a:gridCol w="1397000">
                   <a:extLst>
                     <a:ext uri="{9D8B030D-6E8A-4147-A177-3AD203B41FA5}">
-                      <a16:colId xmlns:a16="http://schemas.microsoft.com/office/drawing/2014/main" val="4278163778"/>
+                      <a16:colId xmlns:a16="http://schemas.microsoft.com/office/drawing/2014/main" val="2985992820"/>
                     </a:ext>
                   </a:extLst>
                 </a:gridCol>
@@ -8346,7 +8435,7 @@
                 </a:tc>
                 <a:extLst>
                   <a:ext uri="{0D108BD9-81ED-4DB2-BD59-A6C34878D82A}">
-                    <a16:rowId xmlns:a16="http://schemas.microsoft.com/office/drawing/2014/main" val="4197451786"/>
+                    <a16:rowId xmlns:a16="http://schemas.microsoft.com/office/drawing/2014/main" val="2426389894"/>
                   </a:ext>
                 </a:extLst>
               </a:tr>
@@ -8479,7 +8568,7 @@
                 </a:tc>
                 <a:extLst>
                   <a:ext uri="{0D108BD9-81ED-4DB2-BD59-A6C34878D82A}">
-                    <a16:rowId xmlns:a16="http://schemas.microsoft.com/office/drawing/2014/main" val="1407413560"/>
+                    <a16:rowId xmlns:a16="http://schemas.microsoft.com/office/drawing/2014/main" val="1634184537"/>
                   </a:ext>
                 </a:extLst>
               </a:tr>
@@ -8612,7 +8701,7 @@
                 </a:tc>
                 <a:extLst>
                   <a:ext uri="{0D108BD9-81ED-4DB2-BD59-A6C34878D82A}">
-                    <a16:rowId xmlns:a16="http://schemas.microsoft.com/office/drawing/2014/main" val="646978135"/>
+                    <a16:rowId xmlns:a16="http://schemas.microsoft.com/office/drawing/2014/main" val="171385201"/>
                   </a:ext>
                 </a:extLst>
               </a:tr>
@@ -8625,7 +8714,7 @@
           <p:cNvPr id="7" name="TextBox 6">
             <a:extLst>
               <a:ext uri="{FF2B5EF4-FFF2-40B4-BE49-F238E27FC236}">
-                <a16:creationId xmlns:a16="http://schemas.microsoft.com/office/drawing/2014/main" id="{4047BFC7-22ED-6016-89BE-F28D78369A78}"/>
+                <a16:creationId xmlns:a16="http://schemas.microsoft.com/office/drawing/2014/main" id="{54CB9CA4-2741-0F05-53BF-BD6DEF153367}"/>
               </a:ext>
             </a:extLst>
           </p:cNvPr>
@@ -8676,7 +8765,7 @@
           <p:cNvPr id="8" name="TextBox 7">
             <a:extLst>
               <a:ext uri="{FF2B5EF4-FFF2-40B4-BE49-F238E27FC236}">
-                <a16:creationId xmlns:a16="http://schemas.microsoft.com/office/drawing/2014/main" id="{AFC8FFA2-07E6-3C94-98F3-E25BDB908D1C}"/>
+                <a16:creationId xmlns:a16="http://schemas.microsoft.com/office/drawing/2014/main" id="{FF7804B9-57E8-3625-1FA9-E142E39D6090}"/>
               </a:ext>
             </a:extLst>
           </p:cNvPr>
@@ -8721,7 +8810,7 @@
           <p:cNvPr id="9" name="TextBox 8">
             <a:extLst>
               <a:ext uri="{FF2B5EF4-FFF2-40B4-BE49-F238E27FC236}">
-                <a16:creationId xmlns:a16="http://schemas.microsoft.com/office/drawing/2014/main" id="{9D024A44-7FCF-F1D8-83D6-B0B6AF135A90}"/>
+                <a16:creationId xmlns:a16="http://schemas.microsoft.com/office/drawing/2014/main" id="{816E09EE-F6B5-3A39-6F89-D7C2A5BC9C7B}"/>
               </a:ext>
             </a:extLst>
           </p:cNvPr>
@@ -8764,7 +8853,7 @@
     </p:spTree>
     <p:extLst>
       <p:ext uri="{BB962C8B-B14F-4D97-AF65-F5344CB8AC3E}">
-        <p14:creationId xmlns:p14="http://schemas.microsoft.com/office/powerpoint/2010/main" val="4142419670"/>
+        <p14:creationId xmlns:p14="http://schemas.microsoft.com/office/powerpoint/2010/main" val="2856316675"/>
       </p:ext>
     </p:extLst>
   </p:cSld>
@@ -8804,7 +8893,7 @@
           <p:cNvPr id="2" name="TextBox 1">
             <a:extLst>
               <a:ext uri="{FF2B5EF4-FFF2-40B4-BE49-F238E27FC236}">
-                <a16:creationId xmlns:a16="http://schemas.microsoft.com/office/drawing/2014/main" id="{6F2E402F-788C-177D-DD1A-6E53A9983AB6}"/>
+                <a16:creationId xmlns:a16="http://schemas.microsoft.com/office/drawing/2014/main" id="{357C8219-BEE7-C29E-D696-DE8A97687D37}"/>
               </a:ext>
             </a:extLst>
           </p:cNvPr>
@@ -8855,7 +8944,7 @@
           <p:cNvPr id="3" name="TextBox 2">
             <a:extLst>
               <a:ext uri="{FF2B5EF4-FFF2-40B4-BE49-F238E27FC236}">
-                <a16:creationId xmlns:a16="http://schemas.microsoft.com/office/drawing/2014/main" id="{3E6C5B41-E91C-40E5-35E9-0D56919086D1}"/>
+                <a16:creationId xmlns:a16="http://schemas.microsoft.com/office/drawing/2014/main" id="{9875FD38-A847-F8E7-EF99-9A78574BC466}"/>
               </a:ext>
             </a:extLst>
           </p:cNvPr>
@@ -8906,7 +8995,7 @@
           <p:cNvPr id="5" name="Picture 4">
             <a:extLst>
               <a:ext uri="{FF2B5EF4-FFF2-40B4-BE49-F238E27FC236}">
-                <a16:creationId xmlns:a16="http://schemas.microsoft.com/office/drawing/2014/main" id="{33C2030B-463D-33B4-2EE4-6D74086009B3}"/>
+                <a16:creationId xmlns:a16="http://schemas.microsoft.com/office/drawing/2014/main" id="{460A03D5-5738-0975-E50C-77923D13EDA2}"/>
               </a:ext>
             </a:extLst>
           </p:cNvPr>
@@ -8942,7 +9031,7 @@
           <p:cNvPr id="6" name="TextBox 5">
             <a:extLst>
               <a:ext uri="{FF2B5EF4-FFF2-40B4-BE49-F238E27FC236}">
-                <a16:creationId xmlns:a16="http://schemas.microsoft.com/office/drawing/2014/main" id="{5E14F40B-108A-C2DB-0183-0014FF688967}"/>
+                <a16:creationId xmlns:a16="http://schemas.microsoft.com/office/drawing/2014/main" id="{945F4A17-7DBC-4404-B0F9-6B87B5A947B4}"/>
               </a:ext>
             </a:extLst>
           </p:cNvPr>
@@ -8993,7 +9082,7 @@
           <p:cNvPr id="7" name="TextBox 6">
             <a:extLst>
               <a:ext uri="{FF2B5EF4-FFF2-40B4-BE49-F238E27FC236}">
-                <a16:creationId xmlns:a16="http://schemas.microsoft.com/office/drawing/2014/main" id="{9A30C9A4-60D8-48AC-3BFE-9A6BF332EBCD}"/>
+                <a16:creationId xmlns:a16="http://schemas.microsoft.com/office/drawing/2014/main" id="{8ECF35A7-B228-947B-CBD3-A120AA39AB83}"/>
               </a:ext>
             </a:extLst>
           </p:cNvPr>
@@ -9038,7 +9127,7 @@
           <p:cNvPr id="8" name="TextBox 7">
             <a:extLst>
               <a:ext uri="{FF2B5EF4-FFF2-40B4-BE49-F238E27FC236}">
-                <a16:creationId xmlns:a16="http://schemas.microsoft.com/office/drawing/2014/main" id="{81C2B6A7-4AE8-F1F8-EA12-AC4BA114751D}"/>
+                <a16:creationId xmlns:a16="http://schemas.microsoft.com/office/drawing/2014/main" id="{DA6C8472-5042-EE9E-1844-2FDEB24CA342}"/>
               </a:ext>
             </a:extLst>
           </p:cNvPr>
@@ -9081,7 +9170,7 @@
     </p:spTree>
     <p:extLst>
       <p:ext uri="{BB962C8B-B14F-4D97-AF65-F5344CB8AC3E}">
-        <p14:creationId xmlns:p14="http://schemas.microsoft.com/office/powerpoint/2010/main" val="2921581798"/>
+        <p14:creationId xmlns:p14="http://schemas.microsoft.com/office/powerpoint/2010/main" val="3072076701"/>
       </p:ext>
     </p:extLst>
   </p:cSld>
@@ -9121,7 +9210,7 @@
           <p:cNvPr id="2" name="TextBox 1">
             <a:extLst>
               <a:ext uri="{FF2B5EF4-FFF2-40B4-BE49-F238E27FC236}">
-                <a16:creationId xmlns:a16="http://schemas.microsoft.com/office/drawing/2014/main" id="{78FD4821-6AEB-BBB1-BBB7-395E3B0EAC73}"/>
+                <a16:creationId xmlns:a16="http://schemas.microsoft.com/office/drawing/2014/main" id="{1C7F8CC0-6D08-7B45-59F3-BBF15392E154}"/>
               </a:ext>
             </a:extLst>
           </p:cNvPr>
@@ -9166,7 +9255,7 @@
           <p:cNvPr id="3" name="TextBox 2">
             <a:extLst>
               <a:ext uri="{FF2B5EF4-FFF2-40B4-BE49-F238E27FC236}">
-                <a16:creationId xmlns:a16="http://schemas.microsoft.com/office/drawing/2014/main" id="{F5F242B6-6AC7-7DFF-154F-34B6F5182110}"/>
+                <a16:creationId xmlns:a16="http://schemas.microsoft.com/office/drawing/2014/main" id="{74AFFD9F-F7A0-588D-72FA-B46DFAF9F436}"/>
               </a:ext>
             </a:extLst>
           </p:cNvPr>
@@ -9217,7 +9306,7 @@
           <p:cNvPr id="5" name="Picture 4">
             <a:extLst>
               <a:ext uri="{FF2B5EF4-FFF2-40B4-BE49-F238E27FC236}">
-                <a16:creationId xmlns:a16="http://schemas.microsoft.com/office/drawing/2014/main" id="{2C451886-180E-E11B-D55E-84FDF83086B0}"/>
+                <a16:creationId xmlns:a16="http://schemas.microsoft.com/office/drawing/2014/main" id="{E869BD7C-B754-B0AE-EB5F-C296E30F7171}"/>
               </a:ext>
             </a:extLst>
           </p:cNvPr>
@@ -9253,7 +9342,7 @@
           <p:cNvPr id="6" name="TextBox 5">
             <a:extLst>
               <a:ext uri="{FF2B5EF4-FFF2-40B4-BE49-F238E27FC236}">
-                <a16:creationId xmlns:a16="http://schemas.microsoft.com/office/drawing/2014/main" id="{1F826171-4730-F2D7-F782-42A41A222B61}"/>
+                <a16:creationId xmlns:a16="http://schemas.microsoft.com/office/drawing/2014/main" id="{E29206BC-A879-BDD0-25B5-0353882B28DF}"/>
               </a:ext>
             </a:extLst>
           </p:cNvPr>
@@ -9298,7 +9387,7 @@
           <p:cNvPr id="7" name="TextBox 6">
             <a:extLst>
               <a:ext uri="{FF2B5EF4-FFF2-40B4-BE49-F238E27FC236}">
-                <a16:creationId xmlns:a16="http://schemas.microsoft.com/office/drawing/2014/main" id="{30D698A3-3B30-B677-3C74-B3FE874BA7A8}"/>
+                <a16:creationId xmlns:a16="http://schemas.microsoft.com/office/drawing/2014/main" id="{5B86DCB1-F89E-8B1D-0B92-C5C266FB8956}"/>
               </a:ext>
             </a:extLst>
           </p:cNvPr>
@@ -9341,7 +9430,7 @@
     </p:spTree>
     <p:extLst>
       <p:ext uri="{BB962C8B-B14F-4D97-AF65-F5344CB8AC3E}">
-        <p14:creationId xmlns:p14="http://schemas.microsoft.com/office/powerpoint/2010/main" val="2301701190"/>
+        <p14:creationId xmlns:p14="http://schemas.microsoft.com/office/powerpoint/2010/main" val="3088250902"/>
       </p:ext>
     </p:extLst>
   </p:cSld>
@@ -9381,7 +9470,7 @@
           <p:cNvPr id="2" name="TextBox 1">
             <a:extLst>
               <a:ext uri="{FF2B5EF4-FFF2-40B4-BE49-F238E27FC236}">
-                <a16:creationId xmlns:a16="http://schemas.microsoft.com/office/drawing/2014/main" id="{1B6C508C-1A08-18AA-4F2E-E145E495D6CE}"/>
+                <a16:creationId xmlns:a16="http://schemas.microsoft.com/office/drawing/2014/main" id="{F6514883-074A-C1E8-AEF0-8FFE749FB1A1}"/>
               </a:ext>
             </a:extLst>
           </p:cNvPr>
@@ -9426,7 +9515,7 @@
           <p:cNvPr id="3" name="TextBox 2">
             <a:extLst>
               <a:ext uri="{FF2B5EF4-FFF2-40B4-BE49-F238E27FC236}">
-                <a16:creationId xmlns:a16="http://schemas.microsoft.com/office/drawing/2014/main" id="{32A29767-2F1D-4776-1449-12F6012203D7}"/>
+                <a16:creationId xmlns:a16="http://schemas.microsoft.com/office/drawing/2014/main" id="{8E183417-994D-5ECA-0FB8-79662CB9B9F6}"/>
               </a:ext>
             </a:extLst>
           </p:cNvPr>
@@ -9477,7 +9566,7 @@
           <p:cNvPr id="4" name="TextBox 3">
             <a:extLst>
               <a:ext uri="{FF2B5EF4-FFF2-40B4-BE49-F238E27FC236}">
-                <a16:creationId xmlns:a16="http://schemas.microsoft.com/office/drawing/2014/main" id="{E4D2DDD1-E796-0A4D-F852-FD8481D66D85}"/>
+                <a16:creationId xmlns:a16="http://schemas.microsoft.com/office/drawing/2014/main" id="{07F4ED5E-8D6A-7F32-D849-F951948BD9B4}"/>
               </a:ext>
             </a:extLst>
           </p:cNvPr>
@@ -9522,7 +9611,7 @@
           <p:cNvPr id="5" name="TextBox 4">
             <a:extLst>
               <a:ext uri="{FF2B5EF4-FFF2-40B4-BE49-F238E27FC236}">
-                <a16:creationId xmlns:a16="http://schemas.microsoft.com/office/drawing/2014/main" id="{EF4CB36F-39BC-5AB2-2C78-793A5DF728DC}"/>
+                <a16:creationId xmlns:a16="http://schemas.microsoft.com/office/drawing/2014/main" id="{7C99308F-E152-857D-05FB-BFB82ADD489C}"/>
               </a:ext>
             </a:extLst>
           </p:cNvPr>
@@ -9573,7 +9662,7 @@
           <p:cNvPr id="6" name="TextBox 5">
             <a:extLst>
               <a:ext uri="{FF2B5EF4-FFF2-40B4-BE49-F238E27FC236}">
-                <a16:creationId xmlns:a16="http://schemas.microsoft.com/office/drawing/2014/main" id="{6C65F6A9-F98A-33FE-CEA3-A81BED7C4E3A}"/>
+                <a16:creationId xmlns:a16="http://schemas.microsoft.com/office/drawing/2014/main" id="{B2672A35-1A0C-C8B6-091E-AE929FC38D46}"/>
               </a:ext>
             </a:extLst>
           </p:cNvPr>
@@ -9618,7 +9707,7 @@
           <p:cNvPr id="7" name="TextBox 6">
             <a:extLst>
               <a:ext uri="{FF2B5EF4-FFF2-40B4-BE49-F238E27FC236}">
-                <a16:creationId xmlns:a16="http://schemas.microsoft.com/office/drawing/2014/main" id="{F364155C-3E1D-AECE-4449-64D33C278D5B}"/>
+                <a16:creationId xmlns:a16="http://schemas.microsoft.com/office/drawing/2014/main" id="{578022A8-64FD-026D-F893-09BABC198D16}"/>
               </a:ext>
             </a:extLst>
           </p:cNvPr>
@@ -9670,7 +9759,7 @@
           <p:cNvPr id="8" name="TextBox 7">
             <a:extLst>
               <a:ext uri="{FF2B5EF4-FFF2-40B4-BE49-F238E27FC236}">
-                <a16:creationId xmlns:a16="http://schemas.microsoft.com/office/drawing/2014/main" id="{4E96263D-58D9-9B7F-DFDF-08243ABE0364}"/>
+                <a16:creationId xmlns:a16="http://schemas.microsoft.com/office/drawing/2014/main" id="{382F9EF9-98A1-A6E5-8E6D-2198B851FEC7}"/>
               </a:ext>
             </a:extLst>
           </p:cNvPr>
@@ -9721,7 +9810,7 @@
           <p:cNvPr id="9" name="TextBox 8">
             <a:extLst>
               <a:ext uri="{FF2B5EF4-FFF2-40B4-BE49-F238E27FC236}">
-                <a16:creationId xmlns:a16="http://schemas.microsoft.com/office/drawing/2014/main" id="{B5568FF6-CD7B-CBED-F139-1E9B305F8384}"/>
+                <a16:creationId xmlns:a16="http://schemas.microsoft.com/office/drawing/2014/main" id="{27C57052-94AC-A0EF-6D20-BFDC914C4B17}"/>
               </a:ext>
             </a:extLst>
           </p:cNvPr>
@@ -9766,7 +9855,7 @@
           <p:cNvPr id="10" name="TextBox 9">
             <a:extLst>
               <a:ext uri="{FF2B5EF4-FFF2-40B4-BE49-F238E27FC236}">
-                <a16:creationId xmlns:a16="http://schemas.microsoft.com/office/drawing/2014/main" id="{1616F366-AC7F-DF17-2817-16BEAE057A35}"/>
+                <a16:creationId xmlns:a16="http://schemas.microsoft.com/office/drawing/2014/main" id="{71C67DD4-E9B5-E320-069B-4CBA2F66EEE0}"/>
               </a:ext>
             </a:extLst>
           </p:cNvPr>
@@ -9809,7 +9898,7 @@
     </p:spTree>
     <p:extLst>
       <p:ext uri="{BB962C8B-B14F-4D97-AF65-F5344CB8AC3E}">
-        <p14:creationId xmlns:p14="http://schemas.microsoft.com/office/powerpoint/2010/main" val="2627644674"/>
+        <p14:creationId xmlns:p14="http://schemas.microsoft.com/office/powerpoint/2010/main" val="1374742027"/>
       </p:ext>
     </p:extLst>
   </p:cSld>
@@ -9849,7 +9938,1099 @@
           <p:cNvPr id="2" name="TextBox 1">
             <a:extLst>
               <a:ext uri="{FF2B5EF4-FFF2-40B4-BE49-F238E27FC236}">
-                <a16:creationId xmlns:a16="http://schemas.microsoft.com/office/drawing/2014/main" id="{8B689E3D-9D27-3993-6C68-EA2768A436E8}"/>
+                <a16:creationId xmlns:a16="http://schemas.microsoft.com/office/drawing/2014/main" id="{382F05F2-EBA0-7025-C5FD-E7D11816180D}"/>
+              </a:ext>
+            </a:extLst>
+          </p:cNvPr>
+          <p:cNvSpPr txBox="1"/>
+          <p:nvPr/>
+        </p:nvSpPr>
+        <p:spPr>
+          <a:xfrm>
+            <a:off x="609600" y="406399"/>
+            <a:ext cx="10985500" cy="609600"/>
+          </a:xfrm>
+          <a:prstGeom prst="rect">
+            <a:avLst/>
+          </a:prstGeom>
+          <a:noFill/>
+        </p:spPr>
+        <p:txBody>
+          <a:bodyPr vert="horz" wrap="square" lIns="0" tIns="0" rIns="0" bIns="0" rtlCol="0">
+            <a:noAutofit/>
+          </a:bodyPr>
+          <a:lstStyle/>
+          <a:p>
+            <a:pPr>
+              <a:spcAft>
+                <a:spcPts val="800"/>
+              </a:spcAft>
+            </a:pPr>
+            <a:r>
+              <a:rPr lang="en-IN" sz="3200" b="1">
+                <a:solidFill>
+                  <a:srgbClr val="20382A"/>
+                </a:solidFill>
+                <a:latin typeface="Arial" panose="020B0604020202020204" pitchFamily="34" charset="0"/>
+              </a:rPr>
+              <a:t>Backup: learned view weighting</a:t>
+            </a:r>
+          </a:p>
+        </p:txBody>
+      </p:sp>
+      <p:sp>
+        <p:nvSpPr>
+          <p:cNvPr id="3" name="TextBox 2">
+            <a:extLst>
+              <a:ext uri="{FF2B5EF4-FFF2-40B4-BE49-F238E27FC236}">
+                <a16:creationId xmlns:a16="http://schemas.microsoft.com/office/drawing/2014/main" id="{CA4C4C49-3F61-C3A1-9F8E-171561739717}"/>
+              </a:ext>
+            </a:extLst>
+          </p:cNvPr>
+          <p:cNvSpPr txBox="1"/>
+          <p:nvPr/>
+        </p:nvSpPr>
+        <p:spPr>
+          <a:xfrm>
+            <a:off x="622300" y="1142999"/>
+            <a:ext cx="10858500" cy="558800"/>
+          </a:xfrm>
+          <a:prstGeom prst="rect">
+            <a:avLst/>
+          </a:prstGeom>
+          <a:noFill/>
+        </p:spPr>
+        <p:txBody>
+          <a:bodyPr vert="horz" wrap="square" lIns="0" tIns="0" rIns="0" bIns="0" rtlCol="0">
+            <a:noAutofit/>
+          </a:bodyPr>
+          <a:lstStyle/>
+          <a:p>
+            <a:pPr>
+              <a:spcAft>
+                <a:spcPts val="800"/>
+              </a:spcAft>
+            </a:pPr>
+            <a:r>
+              <a:rPr lang="en-US" sz="1500">
+                <a:solidFill>
+                  <a:srgbClr val="72806B"/>
+                </a:solidFill>
+                <a:latin typeface="Arial" panose="020B0604020202020204" pitchFamily="34" charset="0"/>
+              </a:rPr>
+              <a:t>A 42-parameter gate over global, crop and contrast scores</a:t>
+            </a:r>
+            <a:endParaRPr lang="en-IN" sz="1500">
+              <a:solidFill>
+                <a:srgbClr val="72806B"/>
+              </a:solidFill>
+              <a:latin typeface="Arial" panose="020B0604020202020204" pitchFamily="34" charset="0"/>
+            </a:endParaRPr>
+          </a:p>
+        </p:txBody>
+      </p:sp>
+      <p:sp>
+        <p:nvSpPr>
+          <p:cNvPr id="4" name="TextBox 3">
+            <a:extLst>
+              <a:ext uri="{FF2B5EF4-FFF2-40B4-BE49-F238E27FC236}">
+                <a16:creationId xmlns:a16="http://schemas.microsoft.com/office/drawing/2014/main" id="{87B5A1B1-B507-6372-3BD4-1CD97B9F7A3A}"/>
+              </a:ext>
+            </a:extLst>
+          </p:cNvPr>
+          <p:cNvSpPr txBox="1"/>
+          <p:nvPr/>
+        </p:nvSpPr>
+        <p:spPr>
+          <a:xfrm>
+            <a:off x="635000" y="4571999"/>
+            <a:ext cx="10795000" cy="1079500"/>
+          </a:xfrm>
+          <a:prstGeom prst="rect">
+            <a:avLst/>
+          </a:prstGeom>
+          <a:noFill/>
+        </p:spPr>
+        <p:txBody>
+          <a:bodyPr vert="horz" wrap="square" lIns="0" tIns="0" rIns="0" bIns="0" rtlCol="0">
+            <a:noAutofit/>
+          </a:bodyPr>
+          <a:lstStyle/>
+          <a:p>
+            <a:pPr>
+              <a:spcAft>
+                <a:spcPts val="800"/>
+              </a:spcAft>
+            </a:pPr>
+            <a:r>
+              <a:rPr lang="en-US">
+                <a:solidFill>
+                  <a:srgbClr val="20382A"/>
+                </a:solidFill>
+                <a:latin typeface="Arial" panose="020B0604020202020204" pitchFamily="34" charset="0"/>
+              </a:rPr>
+              <a:t>Training: five separate visual-group folds provide gate inputs.
+Validation selects L2 = 10 before this test evaluation.
+Adaptive and constant weights make identical test decisions (618/945).</a:t>
+            </a:r>
+            <a:endParaRPr lang="en-IN">
+              <a:solidFill>
+                <a:srgbClr val="20382A"/>
+              </a:solidFill>
+              <a:latin typeface="Arial" panose="020B0604020202020204" pitchFamily="34" charset="0"/>
+            </a:endParaRPr>
+          </a:p>
+        </p:txBody>
+      </p:sp>
+      <p:graphicFrame>
+        <p:nvGraphicFramePr>
+          <p:cNvPr id="5" name="Table 4">
+            <a:extLst>
+              <a:ext uri="{FF2B5EF4-FFF2-40B4-BE49-F238E27FC236}">
+                <a16:creationId xmlns:a16="http://schemas.microsoft.com/office/drawing/2014/main" id="{9779DB11-F67A-7097-61DD-8EF7CC531FD3}"/>
+              </a:ext>
+            </a:extLst>
+          </p:cNvPr>
+          <p:cNvGraphicFramePr>
+            <a:graphicFrameLocks noGrp="1"/>
+          </p:cNvGraphicFramePr>
+          <p:nvPr>
+            <p:extLst>
+              <p:ext uri="{D42A27DB-BD31-4B8C-83A1-F6EECF244321}">
+                <p14:modId xmlns:p14="http://schemas.microsoft.com/office/powerpoint/2010/main" val="3293800946"/>
+              </p:ext>
+            </p:extLst>
+          </p:nvPr>
+        </p:nvGraphicFramePr>
+        <p:xfrm>
+          <a:off x="635000" y="1841500"/>
+          <a:ext cx="10922000" cy="2603500"/>
+        </p:xfrm>
+        <a:graphic>
+          <a:graphicData uri="http://schemas.openxmlformats.org/drawingml/2006/table">
+            <a:tbl>
+              <a:tblPr firstRow="1" bandRow="1">
+                <a:tableStyleId>{5C22544A-7EE6-4342-B048-85BDC9FD1C3A}</a:tableStyleId>
+              </a:tblPr>
+              <a:tblGrid>
+                <a:gridCol w="4445000">
+                  <a:extLst>
+                    <a:ext uri="{9D8B030D-6E8A-4147-A177-3AD203B41FA5}">
+                      <a16:colId xmlns:a16="http://schemas.microsoft.com/office/drawing/2014/main" val="386033133"/>
+                    </a:ext>
+                  </a:extLst>
+                </a:gridCol>
+                <a:gridCol w="2159000">
+                  <a:extLst>
+                    <a:ext uri="{9D8B030D-6E8A-4147-A177-3AD203B41FA5}">
+                      <a16:colId xmlns:a16="http://schemas.microsoft.com/office/drawing/2014/main" val="3552618037"/>
+                    </a:ext>
+                  </a:extLst>
+                </a:gridCol>
+                <a:gridCol w="2159000">
+                  <a:extLst>
+                    <a:ext uri="{9D8B030D-6E8A-4147-A177-3AD203B41FA5}">
+                      <a16:colId xmlns:a16="http://schemas.microsoft.com/office/drawing/2014/main" val="4127341031"/>
+                    </a:ext>
+                  </a:extLst>
+                </a:gridCol>
+                <a:gridCol w="2159000">
+                  <a:extLst>
+                    <a:ext uri="{9D8B030D-6E8A-4147-A177-3AD203B41FA5}">
+                      <a16:colId xmlns:a16="http://schemas.microsoft.com/office/drawing/2014/main" val="60147"/>
+                    </a:ext>
+                  </a:extLst>
+                </a:gridCol>
+              </a:tblGrid>
+              <a:tr h="650875">
+                <a:tc>
+                  <a:txBody>
+                    <a:bodyPr/>
+                    <a:lstStyle/>
+                    <a:p>
+                      <a:r>
+                        <a:rPr lang="en-IN" sz="1800" b="1">
+                          <a:solidFill>
+                            <a:srgbClr val="FFFFFF"/>
+                          </a:solidFill>
+                          <a:latin typeface="Arial" panose="020B0604020202020204" pitchFamily="34" charset="0"/>
+                        </a:rPr>
+                        <a:t>Fusion</a:t>
+                      </a:r>
+                    </a:p>
+                  </a:txBody>
+                  <a:tcPr marL="114300" marR="76200" marT="63500" marB="50800" anchor="ctr">
+                    <a:lnL w="6350" cmpd="sng">
+                      <a:solidFill>
+                        <a:srgbClr val="D8DFD0"/>
+                      </a:solidFill>
+                    </a:lnL>
+                    <a:lnR w="6350" cmpd="sng">
+                      <a:solidFill>
+                        <a:srgbClr val="D8DFD0"/>
+                      </a:solidFill>
+                    </a:lnR>
+                    <a:lnT w="6350" cmpd="sng">
+                      <a:solidFill>
+                        <a:srgbClr val="D8DFD0"/>
+                      </a:solidFill>
+                    </a:lnT>
+                    <a:lnB w="6350" cmpd="sng">
+                      <a:solidFill>
+                        <a:srgbClr val="D8DFD0"/>
+                      </a:solidFill>
+                    </a:lnB>
+                    <a:solidFill>
+                      <a:srgbClr val="20382A"/>
+                    </a:solidFill>
+                  </a:tcPr>
+                </a:tc>
+                <a:tc>
+                  <a:txBody>
+                    <a:bodyPr/>
+                    <a:lstStyle/>
+                    <a:p>
+                      <a:r>
+                        <a:rPr lang="en-IN" sz="1800" b="1">
+                          <a:solidFill>
+                            <a:srgbClr val="FFFFFF"/>
+                          </a:solidFill>
+                          <a:latin typeface="Arial" panose="020B0604020202020204" pitchFamily="34" charset="0"/>
+                        </a:rPr>
+                        <a:t>Val. F1</a:t>
+                      </a:r>
+                    </a:p>
+                  </a:txBody>
+                  <a:tcPr marL="114300" marR="76200" marT="63500" marB="50800" anchor="ctr">
+                    <a:lnL w="6350" cmpd="sng">
+                      <a:solidFill>
+                        <a:srgbClr val="D8DFD0"/>
+                      </a:solidFill>
+                    </a:lnL>
+                    <a:lnR w="6350" cmpd="sng">
+                      <a:solidFill>
+                        <a:srgbClr val="D8DFD0"/>
+                      </a:solidFill>
+                    </a:lnR>
+                    <a:lnT w="6350" cmpd="sng">
+                      <a:solidFill>
+                        <a:srgbClr val="D8DFD0"/>
+                      </a:solidFill>
+                    </a:lnT>
+                    <a:lnB w="6350" cmpd="sng">
+                      <a:solidFill>
+                        <a:srgbClr val="D8DFD0"/>
+                      </a:solidFill>
+                    </a:lnB>
+                    <a:solidFill>
+                      <a:srgbClr val="20382A"/>
+                    </a:solidFill>
+                  </a:tcPr>
+                </a:tc>
+                <a:tc>
+                  <a:txBody>
+                    <a:bodyPr/>
+                    <a:lstStyle/>
+                    <a:p>
+                      <a:r>
+                        <a:rPr lang="en-IN" sz="1800" b="1">
+                          <a:solidFill>
+                            <a:srgbClr val="FFFFFF"/>
+                          </a:solidFill>
+                          <a:latin typeface="Arial" panose="020B0604020202020204" pitchFamily="34" charset="0"/>
+                        </a:rPr>
+                        <a:t>Test acc.</a:t>
+                      </a:r>
+                    </a:p>
+                  </a:txBody>
+                  <a:tcPr marL="114300" marR="76200" marT="63500" marB="50800" anchor="ctr">
+                    <a:lnL w="6350" cmpd="sng">
+                      <a:solidFill>
+                        <a:srgbClr val="D8DFD0"/>
+                      </a:solidFill>
+                    </a:lnL>
+                    <a:lnR w="6350" cmpd="sng">
+                      <a:solidFill>
+                        <a:srgbClr val="D8DFD0"/>
+                      </a:solidFill>
+                    </a:lnR>
+                    <a:lnT w="6350" cmpd="sng">
+                      <a:solidFill>
+                        <a:srgbClr val="D8DFD0"/>
+                      </a:solidFill>
+                    </a:lnT>
+                    <a:lnB w="6350" cmpd="sng">
+                      <a:solidFill>
+                        <a:srgbClr val="D8DFD0"/>
+                      </a:solidFill>
+                    </a:lnB>
+                    <a:solidFill>
+                      <a:srgbClr val="20382A"/>
+                    </a:solidFill>
+                  </a:tcPr>
+                </a:tc>
+                <a:tc>
+                  <a:txBody>
+                    <a:bodyPr/>
+                    <a:lstStyle/>
+                    <a:p>
+                      <a:r>
+                        <a:rPr lang="en-IN" sz="1800" b="1">
+                          <a:solidFill>
+                            <a:srgbClr val="FFFFFF"/>
+                          </a:solidFill>
+                          <a:latin typeface="Arial" panose="020B0604020202020204" pitchFamily="34" charset="0"/>
+                        </a:rPr>
+                        <a:t>Test F1</a:t>
+                      </a:r>
+                    </a:p>
+                  </a:txBody>
+                  <a:tcPr marL="114300" marR="76200" marT="63500" marB="50800" anchor="ctr">
+                    <a:lnL w="6350" cmpd="sng">
+                      <a:solidFill>
+                        <a:srgbClr val="D8DFD0"/>
+                      </a:solidFill>
+                    </a:lnL>
+                    <a:lnR w="6350" cmpd="sng">
+                      <a:solidFill>
+                        <a:srgbClr val="D8DFD0"/>
+                      </a:solidFill>
+                    </a:lnR>
+                    <a:lnT w="6350" cmpd="sng">
+                      <a:solidFill>
+                        <a:srgbClr val="D8DFD0"/>
+                      </a:solidFill>
+                    </a:lnT>
+                    <a:lnB w="6350" cmpd="sng">
+                      <a:solidFill>
+                        <a:srgbClr val="D8DFD0"/>
+                      </a:solidFill>
+                    </a:lnB>
+                    <a:solidFill>
+                      <a:srgbClr val="20382A"/>
+                    </a:solidFill>
+                  </a:tcPr>
+                </a:tc>
+                <a:extLst>
+                  <a:ext uri="{0D108BD9-81ED-4DB2-BD59-A6C34878D82A}">
+                    <a16:rowId xmlns:a16="http://schemas.microsoft.com/office/drawing/2014/main" val="1550704346"/>
+                  </a:ext>
+                </a:extLst>
+              </a:tr>
+              <a:tr h="650875">
+                <a:tc>
+                  <a:txBody>
+                    <a:bodyPr/>
+                    <a:lstStyle/>
+                    <a:p>
+                      <a:r>
+                        <a:rPr lang="en-IN" sz="1800" b="0">
+                          <a:solidFill>
+                            <a:srgbClr val="20382A"/>
+                          </a:solidFill>
+                          <a:latin typeface="Arial" panose="020B0604020202020204" pitchFamily="34" charset="0"/>
+                        </a:rPr>
+                        <a:t>Uniform weights</a:t>
+                      </a:r>
+                    </a:p>
+                  </a:txBody>
+                  <a:tcPr marL="114300" marR="76200" marT="63500" marB="50800" anchor="ctr">
+                    <a:lnL w="6350" cmpd="sng">
+                      <a:solidFill>
+                        <a:srgbClr val="D8DFD0"/>
+                      </a:solidFill>
+                    </a:lnL>
+                    <a:lnR w="6350" cmpd="sng">
+                      <a:solidFill>
+                        <a:srgbClr val="D8DFD0"/>
+                      </a:solidFill>
+                    </a:lnR>
+                    <a:lnT w="6350" cmpd="sng">
+                      <a:solidFill>
+                        <a:srgbClr val="D8DFD0"/>
+                      </a:solidFill>
+                    </a:lnT>
+                    <a:lnB w="6350" cmpd="sng">
+                      <a:solidFill>
+                        <a:srgbClr val="D8DFD0"/>
+                      </a:solidFill>
+                    </a:lnB>
+                    <a:solidFill>
+                      <a:srgbClr val="FFFFFF"/>
+                    </a:solidFill>
+                  </a:tcPr>
+                </a:tc>
+                <a:tc>
+                  <a:txBody>
+                    <a:bodyPr/>
+                    <a:lstStyle/>
+                    <a:p>
+                      <a:r>
+                        <a:rPr lang="en-IN" sz="1800" b="0">
+                          <a:solidFill>
+                            <a:srgbClr val="20382A"/>
+                          </a:solidFill>
+                          <a:latin typeface="Arial" panose="020B0604020202020204" pitchFamily="34" charset="0"/>
+                        </a:rPr>
+                        <a:t>78.6%</a:t>
+                      </a:r>
+                    </a:p>
+                  </a:txBody>
+                  <a:tcPr marL="114300" marR="76200" marT="63500" marB="50800" anchor="ctr">
+                    <a:lnL w="6350" cmpd="sng">
+                      <a:solidFill>
+                        <a:srgbClr val="D8DFD0"/>
+                      </a:solidFill>
+                    </a:lnL>
+                    <a:lnR w="6350" cmpd="sng">
+                      <a:solidFill>
+                        <a:srgbClr val="D8DFD0"/>
+                      </a:solidFill>
+                    </a:lnR>
+                    <a:lnT w="6350" cmpd="sng">
+                      <a:solidFill>
+                        <a:srgbClr val="D8DFD0"/>
+                      </a:solidFill>
+                    </a:lnT>
+                    <a:lnB w="6350" cmpd="sng">
+                      <a:solidFill>
+                        <a:srgbClr val="D8DFD0"/>
+                      </a:solidFill>
+                    </a:lnB>
+                    <a:solidFill>
+                      <a:srgbClr val="FFFFFF"/>
+                    </a:solidFill>
+                  </a:tcPr>
+                </a:tc>
+                <a:tc>
+                  <a:txBody>
+                    <a:bodyPr/>
+                    <a:lstStyle/>
+                    <a:p>
+                      <a:r>
+                        <a:rPr lang="en-IN" sz="1800" b="0">
+                          <a:solidFill>
+                            <a:srgbClr val="20382A"/>
+                          </a:solidFill>
+                          <a:latin typeface="Arial" panose="020B0604020202020204" pitchFamily="34" charset="0"/>
+                        </a:rPr>
+                        <a:t>65.1%</a:t>
+                      </a:r>
+                    </a:p>
+                  </a:txBody>
+                  <a:tcPr marL="114300" marR="76200" marT="63500" marB="50800" anchor="ctr">
+                    <a:lnL w="6350" cmpd="sng">
+                      <a:solidFill>
+                        <a:srgbClr val="D8DFD0"/>
+                      </a:solidFill>
+                    </a:lnL>
+                    <a:lnR w="6350" cmpd="sng">
+                      <a:solidFill>
+                        <a:srgbClr val="D8DFD0"/>
+                      </a:solidFill>
+                    </a:lnR>
+                    <a:lnT w="6350" cmpd="sng">
+                      <a:solidFill>
+                        <a:srgbClr val="D8DFD0"/>
+                      </a:solidFill>
+                    </a:lnT>
+                    <a:lnB w="6350" cmpd="sng">
+                      <a:solidFill>
+                        <a:srgbClr val="D8DFD0"/>
+                      </a:solidFill>
+                    </a:lnB>
+                    <a:solidFill>
+                      <a:srgbClr val="FFFFFF"/>
+                    </a:solidFill>
+                  </a:tcPr>
+                </a:tc>
+                <a:tc>
+                  <a:txBody>
+                    <a:bodyPr/>
+                    <a:lstStyle/>
+                    <a:p>
+                      <a:r>
+                        <a:rPr lang="en-IN" sz="1800" b="0">
+                          <a:solidFill>
+                            <a:srgbClr val="20382A"/>
+                          </a:solidFill>
+                          <a:latin typeface="Arial" panose="020B0604020202020204" pitchFamily="34" charset="0"/>
+                        </a:rPr>
+                        <a:t>64.5%</a:t>
+                      </a:r>
+                    </a:p>
+                  </a:txBody>
+                  <a:tcPr marL="114300" marR="76200" marT="63500" marB="50800" anchor="ctr">
+                    <a:lnL w="6350" cmpd="sng">
+                      <a:solidFill>
+                        <a:srgbClr val="D8DFD0"/>
+                      </a:solidFill>
+                    </a:lnL>
+                    <a:lnR w="6350" cmpd="sng">
+                      <a:solidFill>
+                        <a:srgbClr val="D8DFD0"/>
+                      </a:solidFill>
+                    </a:lnR>
+                    <a:lnT w="6350" cmpd="sng">
+                      <a:solidFill>
+                        <a:srgbClr val="D8DFD0"/>
+                      </a:solidFill>
+                    </a:lnT>
+                    <a:lnB w="6350" cmpd="sng">
+                      <a:solidFill>
+                        <a:srgbClr val="D8DFD0"/>
+                      </a:solidFill>
+                    </a:lnB>
+                    <a:solidFill>
+                      <a:srgbClr val="FFFFFF"/>
+                    </a:solidFill>
+                  </a:tcPr>
+                </a:tc>
+                <a:extLst>
+                  <a:ext uri="{0D108BD9-81ED-4DB2-BD59-A6C34878D82A}">
+                    <a16:rowId xmlns:a16="http://schemas.microsoft.com/office/drawing/2014/main" val="61135143"/>
+                  </a:ext>
+                </a:extLst>
+              </a:tr>
+              <a:tr h="650875">
+                <a:tc>
+                  <a:txBody>
+                    <a:bodyPr/>
+                    <a:lstStyle/>
+                    <a:p>
+                      <a:r>
+                        <a:rPr lang="en-IN" sz="1800" b="0">
+                          <a:solidFill>
+                            <a:srgbClr val="20382A"/>
+                          </a:solidFill>
+                          <a:latin typeface="Arial" panose="020B0604020202020204" pitchFamily="34" charset="0"/>
+                        </a:rPr>
+                        <a:t>Learned constant</a:t>
+                      </a:r>
+                    </a:p>
+                  </a:txBody>
+                  <a:tcPr marL="114300" marR="76200" marT="63500" marB="50800" anchor="ctr">
+                    <a:lnL w="6350" cmpd="sng">
+                      <a:solidFill>
+                        <a:srgbClr val="D8DFD0"/>
+                      </a:solidFill>
+                    </a:lnL>
+                    <a:lnR w="6350" cmpd="sng">
+                      <a:solidFill>
+                        <a:srgbClr val="D8DFD0"/>
+                      </a:solidFill>
+                    </a:lnR>
+                    <a:lnT w="6350" cmpd="sng">
+                      <a:solidFill>
+                        <a:srgbClr val="D8DFD0"/>
+                      </a:solidFill>
+                    </a:lnT>
+                    <a:lnB w="6350" cmpd="sng">
+                      <a:solidFill>
+                        <a:srgbClr val="D8DFD0"/>
+                      </a:solidFill>
+                    </a:lnB>
+                    <a:solidFill>
+                      <a:srgbClr val="EEF2E7"/>
+                    </a:solidFill>
+                  </a:tcPr>
+                </a:tc>
+                <a:tc>
+                  <a:txBody>
+                    <a:bodyPr/>
+                    <a:lstStyle/>
+                    <a:p>
+                      <a:r>
+                        <a:rPr lang="en-IN" sz="1800" b="0">
+                          <a:solidFill>
+                            <a:srgbClr val="20382A"/>
+                          </a:solidFill>
+                          <a:latin typeface="Arial" panose="020B0604020202020204" pitchFamily="34" charset="0"/>
+                        </a:rPr>
+                        <a:t>78.8%</a:t>
+                      </a:r>
+                    </a:p>
+                  </a:txBody>
+                  <a:tcPr marL="114300" marR="76200" marT="63500" marB="50800" anchor="ctr">
+                    <a:lnL w="6350" cmpd="sng">
+                      <a:solidFill>
+                        <a:srgbClr val="D8DFD0"/>
+                      </a:solidFill>
+                    </a:lnL>
+                    <a:lnR w="6350" cmpd="sng">
+                      <a:solidFill>
+                        <a:srgbClr val="D8DFD0"/>
+                      </a:solidFill>
+                    </a:lnR>
+                    <a:lnT w="6350" cmpd="sng">
+                      <a:solidFill>
+                        <a:srgbClr val="D8DFD0"/>
+                      </a:solidFill>
+                    </a:lnT>
+                    <a:lnB w="6350" cmpd="sng">
+                      <a:solidFill>
+                        <a:srgbClr val="D8DFD0"/>
+                      </a:solidFill>
+                    </a:lnB>
+                    <a:solidFill>
+                      <a:srgbClr val="EEF2E7"/>
+                    </a:solidFill>
+                  </a:tcPr>
+                </a:tc>
+                <a:tc>
+                  <a:txBody>
+                    <a:bodyPr/>
+                    <a:lstStyle/>
+                    <a:p>
+                      <a:r>
+                        <a:rPr lang="en-IN" sz="1800" b="0">
+                          <a:solidFill>
+                            <a:srgbClr val="20382A"/>
+                          </a:solidFill>
+                          <a:latin typeface="Arial" panose="020B0604020202020204" pitchFamily="34" charset="0"/>
+                        </a:rPr>
+                        <a:t>65.4%</a:t>
+                      </a:r>
+                    </a:p>
+                  </a:txBody>
+                  <a:tcPr marL="114300" marR="76200" marT="63500" marB="50800" anchor="ctr">
+                    <a:lnL w="6350" cmpd="sng">
+                      <a:solidFill>
+                        <a:srgbClr val="D8DFD0"/>
+                      </a:solidFill>
+                    </a:lnL>
+                    <a:lnR w="6350" cmpd="sng">
+                      <a:solidFill>
+                        <a:srgbClr val="D8DFD0"/>
+                      </a:solidFill>
+                    </a:lnR>
+                    <a:lnT w="6350" cmpd="sng">
+                      <a:solidFill>
+                        <a:srgbClr val="D8DFD0"/>
+                      </a:solidFill>
+                    </a:lnT>
+                    <a:lnB w="6350" cmpd="sng">
+                      <a:solidFill>
+                        <a:srgbClr val="D8DFD0"/>
+                      </a:solidFill>
+                    </a:lnB>
+                    <a:solidFill>
+                      <a:srgbClr val="EEF2E7"/>
+                    </a:solidFill>
+                  </a:tcPr>
+                </a:tc>
+                <a:tc>
+                  <a:txBody>
+                    <a:bodyPr/>
+                    <a:lstStyle/>
+                    <a:p>
+                      <a:r>
+                        <a:rPr lang="en-IN" sz="1800" b="0">
+                          <a:solidFill>
+                            <a:srgbClr val="20382A"/>
+                          </a:solidFill>
+                          <a:latin typeface="Arial" panose="020B0604020202020204" pitchFamily="34" charset="0"/>
+                        </a:rPr>
+                        <a:t>64.8%</a:t>
+                      </a:r>
+                    </a:p>
+                  </a:txBody>
+                  <a:tcPr marL="114300" marR="76200" marT="63500" marB="50800" anchor="ctr">
+                    <a:lnL w="6350" cmpd="sng">
+                      <a:solidFill>
+                        <a:srgbClr val="D8DFD0"/>
+                      </a:solidFill>
+                    </a:lnL>
+                    <a:lnR w="6350" cmpd="sng">
+                      <a:solidFill>
+                        <a:srgbClr val="D8DFD0"/>
+                      </a:solidFill>
+                    </a:lnR>
+                    <a:lnT w="6350" cmpd="sng">
+                      <a:solidFill>
+                        <a:srgbClr val="D8DFD0"/>
+                      </a:solidFill>
+                    </a:lnT>
+                    <a:lnB w="6350" cmpd="sng">
+                      <a:solidFill>
+                        <a:srgbClr val="D8DFD0"/>
+                      </a:solidFill>
+                    </a:lnB>
+                    <a:solidFill>
+                      <a:srgbClr val="EEF2E7"/>
+                    </a:solidFill>
+                  </a:tcPr>
+                </a:tc>
+                <a:extLst>
+                  <a:ext uri="{0D108BD9-81ED-4DB2-BD59-A6C34878D82A}">
+                    <a16:rowId xmlns:a16="http://schemas.microsoft.com/office/drawing/2014/main" val="892549171"/>
+                  </a:ext>
+                </a:extLst>
+              </a:tr>
+              <a:tr h="650875">
+                <a:tc>
+                  <a:txBody>
+                    <a:bodyPr/>
+                    <a:lstStyle/>
+                    <a:p>
+                      <a:r>
+                        <a:rPr lang="en-IN" sz="1800" b="0">
+                          <a:solidFill>
+                            <a:srgbClr val="20382A"/>
+                          </a:solidFill>
+                          <a:latin typeface="Arial" panose="020B0604020202020204" pitchFamily="34" charset="0"/>
+                        </a:rPr>
+                        <a:t>Learned adaptive</a:t>
+                      </a:r>
+                    </a:p>
+                  </a:txBody>
+                  <a:tcPr marL="114300" marR="76200" marT="63500" marB="50800" anchor="ctr">
+                    <a:lnL w="6350" cmpd="sng">
+                      <a:solidFill>
+                        <a:srgbClr val="D8DFD0"/>
+                      </a:solidFill>
+                    </a:lnL>
+                    <a:lnR w="6350" cmpd="sng">
+                      <a:solidFill>
+                        <a:srgbClr val="D8DFD0"/>
+                      </a:solidFill>
+                    </a:lnR>
+                    <a:lnT w="6350" cmpd="sng">
+                      <a:solidFill>
+                        <a:srgbClr val="D8DFD0"/>
+                      </a:solidFill>
+                    </a:lnT>
+                    <a:lnB w="6350" cmpd="sng">
+                      <a:solidFill>
+                        <a:srgbClr val="D8DFD0"/>
+                      </a:solidFill>
+                    </a:lnB>
+                    <a:solidFill>
+                      <a:srgbClr val="FFFFFF"/>
+                    </a:solidFill>
+                  </a:tcPr>
+                </a:tc>
+                <a:tc>
+                  <a:txBody>
+                    <a:bodyPr/>
+                    <a:lstStyle/>
+                    <a:p>
+                      <a:r>
+                        <a:rPr lang="en-IN" sz="1800" b="0">
+                          <a:solidFill>
+                            <a:srgbClr val="20382A"/>
+                          </a:solidFill>
+                          <a:latin typeface="Arial" panose="020B0604020202020204" pitchFamily="34" charset="0"/>
+                        </a:rPr>
+                        <a:t>78.8%</a:t>
+                      </a:r>
+                    </a:p>
+                  </a:txBody>
+                  <a:tcPr marL="114300" marR="76200" marT="63500" marB="50800" anchor="ctr">
+                    <a:lnL w="6350" cmpd="sng">
+                      <a:solidFill>
+                        <a:srgbClr val="D8DFD0"/>
+                      </a:solidFill>
+                    </a:lnL>
+                    <a:lnR w="6350" cmpd="sng">
+                      <a:solidFill>
+                        <a:srgbClr val="D8DFD0"/>
+                      </a:solidFill>
+                    </a:lnR>
+                    <a:lnT w="6350" cmpd="sng">
+                      <a:solidFill>
+                        <a:srgbClr val="D8DFD0"/>
+                      </a:solidFill>
+                    </a:lnT>
+                    <a:lnB w="6350" cmpd="sng">
+                      <a:solidFill>
+                        <a:srgbClr val="D8DFD0"/>
+                      </a:solidFill>
+                    </a:lnB>
+                    <a:solidFill>
+                      <a:srgbClr val="FFFFFF"/>
+                    </a:solidFill>
+                  </a:tcPr>
+                </a:tc>
+                <a:tc>
+                  <a:txBody>
+                    <a:bodyPr/>
+                    <a:lstStyle/>
+                    <a:p>
+                      <a:r>
+                        <a:rPr lang="en-IN" sz="1800" b="0">
+                          <a:solidFill>
+                            <a:srgbClr val="20382A"/>
+                          </a:solidFill>
+                          <a:latin typeface="Arial" panose="020B0604020202020204" pitchFamily="34" charset="0"/>
+                        </a:rPr>
+                        <a:t>65.4%</a:t>
+                      </a:r>
+                    </a:p>
+                  </a:txBody>
+                  <a:tcPr marL="114300" marR="76200" marT="63500" marB="50800" anchor="ctr">
+                    <a:lnL w="6350" cmpd="sng">
+                      <a:solidFill>
+                        <a:srgbClr val="D8DFD0"/>
+                      </a:solidFill>
+                    </a:lnL>
+                    <a:lnR w="6350" cmpd="sng">
+                      <a:solidFill>
+                        <a:srgbClr val="D8DFD0"/>
+                      </a:solidFill>
+                    </a:lnR>
+                    <a:lnT w="6350" cmpd="sng">
+                      <a:solidFill>
+                        <a:srgbClr val="D8DFD0"/>
+                      </a:solidFill>
+                    </a:lnT>
+                    <a:lnB w="6350" cmpd="sng">
+                      <a:solidFill>
+                        <a:srgbClr val="D8DFD0"/>
+                      </a:solidFill>
+                    </a:lnB>
+                    <a:solidFill>
+                      <a:srgbClr val="FFFFFF"/>
+                    </a:solidFill>
+                  </a:tcPr>
+                </a:tc>
+                <a:tc>
+                  <a:txBody>
+                    <a:bodyPr/>
+                    <a:lstStyle/>
+                    <a:p>
+                      <a:r>
+                        <a:rPr lang="en-IN" sz="1800" b="0">
+                          <a:solidFill>
+                            <a:srgbClr val="20382A"/>
+                          </a:solidFill>
+                          <a:latin typeface="Arial" panose="020B0604020202020204" pitchFamily="34" charset="0"/>
+                        </a:rPr>
+                        <a:t>64.8%</a:t>
+                      </a:r>
+                    </a:p>
+                  </a:txBody>
+                  <a:tcPr marL="114300" marR="76200" marT="63500" marB="50800" anchor="ctr">
+                    <a:lnL w="6350" cmpd="sng">
+                      <a:solidFill>
+                        <a:srgbClr val="D8DFD0"/>
+                      </a:solidFill>
+                    </a:lnL>
+                    <a:lnR w="6350" cmpd="sng">
+                      <a:solidFill>
+                        <a:srgbClr val="D8DFD0"/>
+                      </a:solidFill>
+                    </a:lnR>
+                    <a:lnT w="6350" cmpd="sng">
+                      <a:solidFill>
+                        <a:srgbClr val="D8DFD0"/>
+                      </a:solidFill>
+                    </a:lnT>
+                    <a:lnB w="6350" cmpd="sng">
+                      <a:solidFill>
+                        <a:srgbClr val="D8DFD0"/>
+                      </a:solidFill>
+                    </a:lnB>
+                    <a:solidFill>
+                      <a:srgbClr val="FFFFFF"/>
+                    </a:solidFill>
+                  </a:tcPr>
+                </a:tc>
+                <a:extLst>
+                  <a:ext uri="{0D108BD9-81ED-4DB2-BD59-A6C34878D82A}">
+                    <a16:rowId xmlns:a16="http://schemas.microsoft.com/office/drawing/2014/main" val="1109583631"/>
+                  </a:ext>
+                </a:extLst>
+              </a:tr>
+            </a:tbl>
+          </a:graphicData>
+        </a:graphic>
+      </p:graphicFrame>
+      <p:sp>
+        <p:nvSpPr>
+          <p:cNvPr id="6" name="TextBox 5">
+            <a:extLst>
+              <a:ext uri="{FF2B5EF4-FFF2-40B4-BE49-F238E27FC236}">
+                <a16:creationId xmlns:a16="http://schemas.microsoft.com/office/drawing/2014/main" id="{EFD6C838-4F0E-29D0-D766-75837E19390C}"/>
+              </a:ext>
+            </a:extLst>
+          </p:cNvPr>
+          <p:cNvSpPr txBox="1"/>
+          <p:nvPr/>
+        </p:nvSpPr>
+        <p:spPr>
+          <a:xfrm>
+            <a:off x="635000" y="5702299"/>
+            <a:ext cx="10858500" cy="533400"/>
+          </a:xfrm>
+          <a:prstGeom prst="rect">
+            <a:avLst/>
+          </a:prstGeom>
+          <a:noFill/>
+        </p:spPr>
+        <p:txBody>
+          <a:bodyPr vert="horz" wrap="square" lIns="0" tIns="0" rIns="0" bIns="0" rtlCol="0">
+            <a:noAutofit/>
+          </a:bodyPr>
+          <a:lstStyle/>
+          <a:p>
+            <a:pPr>
+              <a:spcAft>
+                <a:spcPts val="800"/>
+              </a:spcAft>
+            </a:pPr>
+            <a:r>
+              <a:rPr lang="en-US" sz="1600">
+                <a:solidFill>
+                  <a:srgbClr val="AF623E"/>
+                </a:solidFill>
+                <a:latin typeface="Arial" panose="020B0604020202020204" pitchFamily="34" charset="0"/>
+              </a:rPr>
+              <a:t>No improvement over simpler fusion. The demo retains contrast (619/945).</a:t>
+            </a:r>
+            <a:endParaRPr lang="en-IN" sz="1600">
+              <a:solidFill>
+                <a:srgbClr val="AF623E"/>
+              </a:solidFill>
+              <a:latin typeface="Arial" panose="020B0604020202020204" pitchFamily="34" charset="0"/>
+            </a:endParaRPr>
+          </a:p>
+        </p:txBody>
+      </p:sp>
+      <p:sp>
+        <p:nvSpPr>
+          <p:cNvPr id="7" name="TextBox 6">
+            <a:extLst>
+              <a:ext uri="{FF2B5EF4-FFF2-40B4-BE49-F238E27FC236}">
+                <a16:creationId xmlns:a16="http://schemas.microsoft.com/office/drawing/2014/main" id="{8EC922E8-6A3F-6493-A395-5704E3A72A4D}"/>
+              </a:ext>
+            </a:extLst>
+          </p:cNvPr>
+          <p:cNvSpPr txBox="1"/>
+          <p:nvPr/>
+        </p:nvSpPr>
+        <p:spPr>
+          <a:xfrm>
+            <a:off x="635000" y="6489700"/>
+            <a:ext cx="9525000" cy="190500"/>
+          </a:xfrm>
+          <a:prstGeom prst="rect">
+            <a:avLst/>
+          </a:prstGeom>
+          <a:noFill/>
+        </p:spPr>
+        <p:txBody>
+          <a:bodyPr vert="horz" wrap="square" lIns="0" tIns="0" rIns="0" bIns="0" rtlCol="0">
+            <a:noAutofit/>
+          </a:bodyPr>
+          <a:lstStyle/>
+          <a:p>
+            <a:pPr>
+              <a:spcAft>
+                <a:spcPts val="800"/>
+              </a:spcAft>
+            </a:pPr>
+            <a:r>
+              <a:rPr lang="en-IN" sz="800">
+                <a:solidFill>
+                  <a:srgbClr val="72806B"/>
+                </a:solidFill>
+                <a:latin typeface="Arial" panose="020B0604020202020204" pitchFamily="34" charset="0"/>
+              </a:rPr>
+              <a:t>CRICKET SHOT RECOGNITION / EE604</a:t>
+            </a:r>
+          </a:p>
+        </p:txBody>
+      </p:sp>
+      <p:sp>
+        <p:nvSpPr>
+          <p:cNvPr id="8" name="TextBox 7">
+            <a:extLst>
+              <a:ext uri="{FF2B5EF4-FFF2-40B4-BE49-F238E27FC236}">
+                <a16:creationId xmlns:a16="http://schemas.microsoft.com/office/drawing/2014/main" id="{64C1D8BD-2A7A-D887-4CF7-89C1CF11B4F4}"/>
+              </a:ext>
+            </a:extLst>
+          </p:cNvPr>
+          <p:cNvSpPr txBox="1"/>
+          <p:nvPr/>
+        </p:nvSpPr>
+        <p:spPr>
+          <a:xfrm>
+            <a:off x="11214100" y="6451600"/>
+            <a:ext cx="317500" cy="228600"/>
+          </a:xfrm>
+          <a:prstGeom prst="rect">
+            <a:avLst/>
+          </a:prstGeom>
+          <a:noFill/>
+        </p:spPr>
+        <p:txBody>
+          <a:bodyPr vert="horz" wrap="square" lIns="0" tIns="0" rIns="0" bIns="0" rtlCol="0">
+            <a:noAutofit/>
+          </a:bodyPr>
+          <a:lstStyle/>
+          <a:p>
+            <a:pPr>
+              <a:spcAft>
+                <a:spcPts val="800"/>
+              </a:spcAft>
+            </a:pPr>
+            <a:r>
+              <a:rPr lang="en-IN" sz="1000">
+                <a:solidFill>
+                  <a:srgbClr val="72806B"/>
+                </a:solidFill>
+                <a:latin typeface="Arial" panose="020B0604020202020204" pitchFamily="34" charset="0"/>
+              </a:rPr>
+              <a:t>16</a:t>
+            </a:r>
+          </a:p>
+        </p:txBody>
+      </p:sp>
+    </p:spTree>
+    <p:extLst>
+      <p:ext uri="{BB962C8B-B14F-4D97-AF65-F5344CB8AC3E}">
+        <p14:creationId xmlns:p14="http://schemas.microsoft.com/office/powerpoint/2010/main" val="3994283891"/>
+      </p:ext>
+    </p:extLst>
+  </p:cSld>
+  <p:clrMapOvr>
+    <a:masterClrMapping/>
+  </p:clrMapOvr>
+</p:sld>
+</file>
+
+<file path=ppt/slides/slide17.xml><?xml version="1.0" encoding="utf-8"?>
+<p:sld xmlns:a="http://schemas.openxmlformats.org/drawingml/2006/main" xmlns:r="http://schemas.openxmlformats.org/officeDocument/2006/relationships" xmlns:p="http://schemas.openxmlformats.org/presentationml/2006/main">
+  <p:cSld>
+    <p:bg>
+      <p:bgPr>
+        <a:solidFill>
+          <a:srgbClr val="F7F8F1"/>
+        </a:solidFill>
+        <a:effectLst/>
+      </p:bgPr>
+    </p:bg>
+    <p:spTree>
+      <p:nvGrpSpPr>
+        <p:cNvPr id="1" name=""/>
+        <p:cNvGrpSpPr/>
+        <p:nvPr/>
+      </p:nvGrpSpPr>
+      <p:grpSpPr>
+        <a:xfrm>
+          <a:off x="0" y="0"/>
+          <a:ext cx="0" cy="0"/>
+          <a:chOff x="0" y="0"/>
+          <a:chExt cx="0" cy="0"/>
+        </a:xfrm>
+      </p:grpSpPr>
+      <p:sp>
+        <p:nvSpPr>
+          <p:cNvPr id="2" name="TextBox 1">
+            <a:extLst>
+              <a:ext uri="{FF2B5EF4-FFF2-40B4-BE49-F238E27FC236}">
+                <a16:creationId xmlns:a16="http://schemas.microsoft.com/office/drawing/2014/main" id="{05F37411-EBF4-C149-A4A9-2CA5D2CFE1C1}"/>
               </a:ext>
             </a:extLst>
           </p:cNvPr>
@@ -9900,7 +11081,7 @@
           <p:cNvPr id="3" name="TextBox 2">
             <a:extLst>
               <a:ext uri="{FF2B5EF4-FFF2-40B4-BE49-F238E27FC236}">
-                <a16:creationId xmlns:a16="http://schemas.microsoft.com/office/drawing/2014/main" id="{4EB4B66E-6C03-F341-CA4F-3DC0E0209087}"/>
+                <a16:creationId xmlns:a16="http://schemas.microsoft.com/office/drawing/2014/main" id="{B155BF02-B132-50D2-6CAC-818D68877E8F}"/>
               </a:ext>
             </a:extLst>
           </p:cNvPr>
@@ -9951,7 +11132,7 @@
           <p:cNvPr id="4" name="TextBox 3">
             <a:extLst>
               <a:ext uri="{FF2B5EF4-FFF2-40B4-BE49-F238E27FC236}">
-                <a16:creationId xmlns:a16="http://schemas.microsoft.com/office/drawing/2014/main" id="{55436288-FDD5-BD95-559F-7E6B3607FCAF}"/>
+                <a16:creationId xmlns:a16="http://schemas.microsoft.com/office/drawing/2014/main" id="{49CA2941-4292-574D-F848-C9DE3C517E57}"/>
               </a:ext>
             </a:extLst>
           </p:cNvPr>
@@ -10003,7 +11184,7 @@
           <p:cNvPr id="5" name="Table 4">
             <a:extLst>
               <a:ext uri="{FF2B5EF4-FFF2-40B4-BE49-F238E27FC236}">
-                <a16:creationId xmlns:a16="http://schemas.microsoft.com/office/drawing/2014/main" id="{FCC879BD-36CA-BF78-C412-FFD45A4BE4E8}"/>
+                <a16:creationId xmlns:a16="http://schemas.microsoft.com/office/drawing/2014/main" id="{E84FA85A-F4F8-6D8A-E782-2C58595A57E3}"/>
               </a:ext>
             </a:extLst>
           </p:cNvPr>
@@ -10013,7 +11194,7 @@
           <p:nvPr>
             <p:extLst>
               <p:ext uri="{D42A27DB-BD31-4B8C-83A1-F6EECF244321}">
-                <p14:modId xmlns:p14="http://schemas.microsoft.com/office/powerpoint/2010/main" val="3387001524"/>
+                <p14:modId xmlns:p14="http://schemas.microsoft.com/office/powerpoint/2010/main" val="2909183236"/>
               </p:ext>
             </p:extLst>
           </p:nvPr>
@@ -10032,21 +11213,21 @@
                 <a:gridCol w="5715000">
                   <a:extLst>
                     <a:ext uri="{9D8B030D-6E8A-4147-A177-3AD203B41FA5}">
-                      <a16:colId xmlns:a16="http://schemas.microsoft.com/office/drawing/2014/main" val="948693385"/>
+                      <a16:colId xmlns:a16="http://schemas.microsoft.com/office/drawing/2014/main" val="259443737"/>
                     </a:ext>
                   </a:extLst>
                 </a:gridCol>
                 <a:gridCol w="2603500">
                   <a:extLst>
                     <a:ext uri="{9D8B030D-6E8A-4147-A177-3AD203B41FA5}">
-                      <a16:colId xmlns:a16="http://schemas.microsoft.com/office/drawing/2014/main" val="3169428359"/>
+                      <a16:colId xmlns:a16="http://schemas.microsoft.com/office/drawing/2014/main" val="1978443700"/>
                     </a:ext>
                   </a:extLst>
                 </a:gridCol>
                 <a:gridCol w="2603500">
                   <a:extLst>
                     <a:ext uri="{9D8B030D-6E8A-4147-A177-3AD203B41FA5}">
-                      <a16:colId xmlns:a16="http://schemas.microsoft.com/office/drawing/2014/main" val="4931970"/>
+                      <a16:colId xmlns:a16="http://schemas.microsoft.com/office/drawing/2014/main" val="1840925961"/>
                     </a:ext>
                   </a:extLst>
                 </a:gridCol>
@@ -10180,7 +11361,7 @@
                 </a:tc>
                 <a:extLst>
                   <a:ext uri="{0D108BD9-81ED-4DB2-BD59-A6C34878D82A}">
-                    <a16:rowId xmlns:a16="http://schemas.microsoft.com/office/drawing/2014/main" val="3584294335"/>
+                    <a16:rowId xmlns:a16="http://schemas.microsoft.com/office/drawing/2014/main" val="196141472"/>
                   </a:ext>
                 </a:extLst>
               </a:tr>
@@ -10313,7 +11494,7 @@
                 </a:tc>
                 <a:extLst>
                   <a:ext uri="{0D108BD9-81ED-4DB2-BD59-A6C34878D82A}">
-                    <a16:rowId xmlns:a16="http://schemas.microsoft.com/office/drawing/2014/main" val="1349346348"/>
+                    <a16:rowId xmlns:a16="http://schemas.microsoft.com/office/drawing/2014/main" val="1748093619"/>
                   </a:ext>
                 </a:extLst>
               </a:tr>
@@ -10446,7 +11627,7 @@
                 </a:tc>
                 <a:extLst>
                   <a:ext uri="{0D108BD9-81ED-4DB2-BD59-A6C34878D82A}">
-                    <a16:rowId xmlns:a16="http://schemas.microsoft.com/office/drawing/2014/main" val="2364236726"/>
+                    <a16:rowId xmlns:a16="http://schemas.microsoft.com/office/drawing/2014/main" val="838454932"/>
                   </a:ext>
                 </a:extLst>
               </a:tr>
@@ -10579,7 +11760,7 @@
                 </a:tc>
                 <a:extLst>
                   <a:ext uri="{0D108BD9-81ED-4DB2-BD59-A6C34878D82A}">
-                    <a16:rowId xmlns:a16="http://schemas.microsoft.com/office/drawing/2014/main" val="2329282436"/>
+                    <a16:rowId xmlns:a16="http://schemas.microsoft.com/office/drawing/2014/main" val="1867238904"/>
                   </a:ext>
                 </a:extLst>
               </a:tr>
@@ -10592,7 +11773,7 @@
           <p:cNvPr id="6" name="TextBox 5">
             <a:extLst>
               <a:ext uri="{FF2B5EF4-FFF2-40B4-BE49-F238E27FC236}">
-                <a16:creationId xmlns:a16="http://schemas.microsoft.com/office/drawing/2014/main" id="{9C3F29F0-5C82-1EF9-51F3-737936AF38EE}"/>
+                <a16:creationId xmlns:a16="http://schemas.microsoft.com/office/drawing/2014/main" id="{16921A1A-6D51-3073-A3ED-83DFF40BE7EB}"/>
               </a:ext>
             </a:extLst>
           </p:cNvPr>
@@ -10637,7 +11818,7 @@
           <p:cNvPr id="7" name="TextBox 6">
             <a:extLst>
               <a:ext uri="{FF2B5EF4-FFF2-40B4-BE49-F238E27FC236}">
-                <a16:creationId xmlns:a16="http://schemas.microsoft.com/office/drawing/2014/main" id="{5B9B2B93-F585-3BCD-7DC6-A2B4C5BAE9B2}"/>
+                <a16:creationId xmlns:a16="http://schemas.microsoft.com/office/drawing/2014/main" id="{E61B1D1D-B626-5409-DAA9-ED86459D536A}"/>
               </a:ext>
             </a:extLst>
           </p:cNvPr>
@@ -10672,7 +11853,7 @@
                 </a:solidFill>
                 <a:latin typeface="Arial" panose="020B0604020202020204" pitchFamily="34" charset="0"/>
               </a:rPr>
-              <a:t>16</a:t>
+              <a:t>17</a:t>
             </a:r>
           </a:p>
         </p:txBody>
@@ -10680,7 +11861,7 @@
     </p:spTree>
     <p:extLst>
       <p:ext uri="{BB962C8B-B14F-4D97-AF65-F5344CB8AC3E}">
-        <p14:creationId xmlns:p14="http://schemas.microsoft.com/office/powerpoint/2010/main" val="2884471481"/>
+        <p14:creationId xmlns:p14="http://schemas.microsoft.com/office/powerpoint/2010/main" val="2028197391"/>
       </p:ext>
     </p:extLst>
   </p:cSld>
@@ -10720,7 +11901,7 @@
           <p:cNvPr id="2" name="TextBox 1">
             <a:extLst>
               <a:ext uri="{FF2B5EF4-FFF2-40B4-BE49-F238E27FC236}">
-                <a16:creationId xmlns:a16="http://schemas.microsoft.com/office/drawing/2014/main" id="{081C9969-90C9-A0E8-CE99-A3192A99888D}"/>
+                <a16:creationId xmlns:a16="http://schemas.microsoft.com/office/drawing/2014/main" id="{2F2080C1-3CDB-F433-9EFF-81DAFF9FBFB5}"/>
               </a:ext>
             </a:extLst>
           </p:cNvPr>
@@ -10765,7 +11946,7 @@
           <p:cNvPr id="3" name="TextBox 2">
             <a:extLst>
               <a:ext uri="{FF2B5EF4-FFF2-40B4-BE49-F238E27FC236}">
-                <a16:creationId xmlns:a16="http://schemas.microsoft.com/office/drawing/2014/main" id="{67D0545A-F5C5-0460-AAB1-F9D54E500394}"/>
+                <a16:creationId xmlns:a16="http://schemas.microsoft.com/office/drawing/2014/main" id="{74082120-20FA-122D-6663-1014E3BD1B34}"/>
               </a:ext>
             </a:extLst>
           </p:cNvPr>
@@ -10816,7 +11997,7 @@
           <p:cNvPr id="4" name="TextBox 3">
             <a:extLst>
               <a:ext uri="{FF2B5EF4-FFF2-40B4-BE49-F238E27FC236}">
-                <a16:creationId xmlns:a16="http://schemas.microsoft.com/office/drawing/2014/main" id="{C78D9CFE-5FF4-A058-AE8D-698058481DD6}"/>
+                <a16:creationId xmlns:a16="http://schemas.microsoft.com/office/drawing/2014/main" id="{79A1AD5C-518B-10B4-5274-CF737BD06FB4}"/>
               </a:ext>
             </a:extLst>
           </p:cNvPr>
@@ -10870,7 +12051,7 @@
           <p:cNvPr id="5" name="TextBox 4">
             <a:extLst>
               <a:ext uri="{FF2B5EF4-FFF2-40B4-BE49-F238E27FC236}">
-                <a16:creationId xmlns:a16="http://schemas.microsoft.com/office/drawing/2014/main" id="{A6188B30-24C6-7DF4-67A7-8E2B0D17881D}"/>
+                <a16:creationId xmlns:a16="http://schemas.microsoft.com/office/drawing/2014/main" id="{B3A1B45B-44D2-24FB-0245-CE6122E74F8D}"/>
               </a:ext>
             </a:extLst>
           </p:cNvPr>
@@ -10923,7 +12104,7 @@
           <p:cNvPr id="7" name="Picture 6">
             <a:extLst>
               <a:ext uri="{FF2B5EF4-FFF2-40B4-BE49-F238E27FC236}">
-                <a16:creationId xmlns:a16="http://schemas.microsoft.com/office/drawing/2014/main" id="{740969B3-2C15-BC58-54B9-F93EAF889637}"/>
+                <a16:creationId xmlns:a16="http://schemas.microsoft.com/office/drawing/2014/main" id="{6F1FABA9-29F0-43AB-664A-FFEBA7BC34D4}"/>
               </a:ext>
             </a:extLst>
           </p:cNvPr>
@@ -10959,7 +12140,7 @@
           <p:cNvPr id="8" name="TextBox 7">
             <a:extLst>
               <a:ext uri="{FF2B5EF4-FFF2-40B4-BE49-F238E27FC236}">
-                <a16:creationId xmlns:a16="http://schemas.microsoft.com/office/drawing/2014/main" id="{B8BEDB02-B1B0-F341-FCC9-118632C1A12B}"/>
+                <a16:creationId xmlns:a16="http://schemas.microsoft.com/office/drawing/2014/main" id="{C4E1A229-67E8-4F0E-85E6-FE1A9D70D1CC}"/>
               </a:ext>
             </a:extLst>
           </p:cNvPr>
@@ -11004,7 +12185,7 @@
           <p:cNvPr id="9" name="TextBox 8">
             <a:extLst>
               <a:ext uri="{FF2B5EF4-FFF2-40B4-BE49-F238E27FC236}">
-                <a16:creationId xmlns:a16="http://schemas.microsoft.com/office/drawing/2014/main" id="{C7C5ABA1-02E3-F223-603B-71E3B89AA021}"/>
+                <a16:creationId xmlns:a16="http://schemas.microsoft.com/office/drawing/2014/main" id="{D8355807-0983-4E2A-2F55-676DF742243A}"/>
               </a:ext>
             </a:extLst>
           </p:cNvPr>
@@ -11047,7 +12228,7 @@
     </p:spTree>
     <p:extLst>
       <p:ext uri="{BB962C8B-B14F-4D97-AF65-F5344CB8AC3E}">
-        <p14:creationId xmlns:p14="http://schemas.microsoft.com/office/powerpoint/2010/main" val="3995080891"/>
+        <p14:creationId xmlns:p14="http://schemas.microsoft.com/office/powerpoint/2010/main" val="389173811"/>
       </p:ext>
     </p:extLst>
   </p:cSld>
@@ -11087,7 +12268,7 @@
           <p:cNvPr id="2" name="TextBox 1">
             <a:extLst>
               <a:ext uri="{FF2B5EF4-FFF2-40B4-BE49-F238E27FC236}">
-                <a16:creationId xmlns:a16="http://schemas.microsoft.com/office/drawing/2014/main" id="{7093CBB9-74B9-1BAB-530C-C775061E361B}"/>
+                <a16:creationId xmlns:a16="http://schemas.microsoft.com/office/drawing/2014/main" id="{16308C61-5D4F-D8B8-DBF5-EAB2CED3740B}"/>
               </a:ext>
             </a:extLst>
           </p:cNvPr>
@@ -11132,7 +12313,7 @@
           <p:cNvPr id="3" name="TextBox 2">
             <a:extLst>
               <a:ext uri="{FF2B5EF4-FFF2-40B4-BE49-F238E27FC236}">
-                <a16:creationId xmlns:a16="http://schemas.microsoft.com/office/drawing/2014/main" id="{73F8022A-EF72-265E-7CEF-65122C11DFD7}"/>
+                <a16:creationId xmlns:a16="http://schemas.microsoft.com/office/drawing/2014/main" id="{9EEF89F6-B29C-52C5-54E3-6815888B8F5D}"/>
               </a:ext>
             </a:extLst>
           </p:cNvPr>
@@ -11183,7 +12364,7 @@
           <p:cNvPr id="4" name="TextBox 3">
             <a:extLst>
               <a:ext uri="{FF2B5EF4-FFF2-40B4-BE49-F238E27FC236}">
-                <a16:creationId xmlns:a16="http://schemas.microsoft.com/office/drawing/2014/main" id="{FFB22E3B-DF31-7E04-0946-8D32DE33BAB8}"/>
+                <a16:creationId xmlns:a16="http://schemas.microsoft.com/office/drawing/2014/main" id="{404932AA-AED6-76CF-3BD0-D0915A87B106}"/>
               </a:ext>
             </a:extLst>
           </p:cNvPr>
@@ -11228,7 +12409,7 @@
           <p:cNvPr id="5" name="Table 4">
             <a:extLst>
               <a:ext uri="{FF2B5EF4-FFF2-40B4-BE49-F238E27FC236}">
-                <a16:creationId xmlns:a16="http://schemas.microsoft.com/office/drawing/2014/main" id="{2B09F4F2-37E5-3E05-49A7-756880028B1F}"/>
+                <a16:creationId xmlns:a16="http://schemas.microsoft.com/office/drawing/2014/main" id="{EA3A6F0F-34AE-562B-F2AD-0152B1F1579B}"/>
               </a:ext>
             </a:extLst>
           </p:cNvPr>
@@ -11238,7 +12419,7 @@
           <p:nvPr>
             <p:extLst>
               <p:ext uri="{D42A27DB-BD31-4B8C-83A1-F6EECF244321}">
-                <p14:modId xmlns:p14="http://schemas.microsoft.com/office/powerpoint/2010/main" val="1430504644"/>
+                <p14:modId xmlns:p14="http://schemas.microsoft.com/office/powerpoint/2010/main" val="564499652"/>
               </p:ext>
             </p:extLst>
           </p:nvPr>
@@ -11257,21 +12438,21 @@
                 <a:gridCol w="2603500">
                   <a:extLst>
                     <a:ext uri="{9D8B030D-6E8A-4147-A177-3AD203B41FA5}">
-                      <a16:colId xmlns:a16="http://schemas.microsoft.com/office/drawing/2014/main" val="3950320502"/>
+                      <a16:colId xmlns:a16="http://schemas.microsoft.com/office/drawing/2014/main" val="3446046829"/>
                     </a:ext>
                   </a:extLst>
                 </a:gridCol>
                 <a:gridCol w="4191000">
                   <a:extLst>
                     <a:ext uri="{9D8B030D-6E8A-4147-A177-3AD203B41FA5}">
-                      <a16:colId xmlns:a16="http://schemas.microsoft.com/office/drawing/2014/main" val="868020415"/>
+                      <a16:colId xmlns:a16="http://schemas.microsoft.com/office/drawing/2014/main" val="2709394010"/>
                     </a:ext>
                   </a:extLst>
                 </a:gridCol>
                 <a:gridCol w="4127500">
                   <a:extLst>
                     <a:ext uri="{9D8B030D-6E8A-4147-A177-3AD203B41FA5}">
-                      <a16:colId xmlns:a16="http://schemas.microsoft.com/office/drawing/2014/main" val="1316956723"/>
+                      <a16:colId xmlns:a16="http://schemas.microsoft.com/office/drawing/2014/main" val="2717998459"/>
                     </a:ext>
                   </a:extLst>
                 </a:gridCol>
@@ -11405,7 +12586,7 @@
                 </a:tc>
                 <a:extLst>
                   <a:ext uri="{0D108BD9-81ED-4DB2-BD59-A6C34878D82A}">
-                    <a16:rowId xmlns:a16="http://schemas.microsoft.com/office/drawing/2014/main" val="196126918"/>
+                    <a16:rowId xmlns:a16="http://schemas.microsoft.com/office/drawing/2014/main" val="348043410"/>
                   </a:ext>
                 </a:extLst>
               </a:tr>
@@ -11552,7 +12733,7 @@
                 </a:tc>
                 <a:extLst>
                   <a:ext uri="{0D108BD9-81ED-4DB2-BD59-A6C34878D82A}">
-                    <a16:rowId xmlns:a16="http://schemas.microsoft.com/office/drawing/2014/main" val="2717118345"/>
+                    <a16:rowId xmlns:a16="http://schemas.microsoft.com/office/drawing/2014/main" val="2733395364"/>
                   </a:ext>
                 </a:extLst>
               </a:tr>
@@ -11701,7 +12882,7 @@
                 </a:tc>
                 <a:extLst>
                   <a:ext uri="{0D108BD9-81ED-4DB2-BD59-A6C34878D82A}">
-                    <a16:rowId xmlns:a16="http://schemas.microsoft.com/office/drawing/2014/main" val="1426222621"/>
+                    <a16:rowId xmlns:a16="http://schemas.microsoft.com/office/drawing/2014/main" val="4065325065"/>
                   </a:ext>
                 </a:extLst>
               </a:tr>
@@ -11714,7 +12895,7 @@
           <p:cNvPr id="6" name="TextBox 5">
             <a:extLst>
               <a:ext uri="{FF2B5EF4-FFF2-40B4-BE49-F238E27FC236}">
-                <a16:creationId xmlns:a16="http://schemas.microsoft.com/office/drawing/2014/main" id="{0B93C31F-9EB9-4D4D-ED08-080EC5838F36}"/>
+                <a16:creationId xmlns:a16="http://schemas.microsoft.com/office/drawing/2014/main" id="{B9155C5E-D14F-0405-98F5-0C223DB1911A}"/>
               </a:ext>
             </a:extLst>
           </p:cNvPr>
@@ -11765,7 +12946,7 @@
           <p:cNvPr id="7" name="TextBox 6">
             <a:extLst>
               <a:ext uri="{FF2B5EF4-FFF2-40B4-BE49-F238E27FC236}">
-                <a16:creationId xmlns:a16="http://schemas.microsoft.com/office/drawing/2014/main" id="{70FD8DF0-AD51-E4B0-79A7-D1C933228F8D}"/>
+                <a16:creationId xmlns:a16="http://schemas.microsoft.com/office/drawing/2014/main" id="{1C17F858-0ED2-BC9A-91D6-DB202EA5ED25}"/>
               </a:ext>
             </a:extLst>
           </p:cNvPr>
@@ -11810,7 +12991,7 @@
           <p:cNvPr id="8" name="TextBox 7">
             <a:extLst>
               <a:ext uri="{FF2B5EF4-FFF2-40B4-BE49-F238E27FC236}">
-                <a16:creationId xmlns:a16="http://schemas.microsoft.com/office/drawing/2014/main" id="{B32CFBB0-4ACE-CE32-A41B-C2DFF826E323}"/>
+                <a16:creationId xmlns:a16="http://schemas.microsoft.com/office/drawing/2014/main" id="{C29DE25C-25EC-4711-AC49-BCFC4FC21D2C}"/>
               </a:ext>
             </a:extLst>
           </p:cNvPr>
@@ -11853,7 +13034,7 @@
     </p:spTree>
     <p:extLst>
       <p:ext uri="{BB962C8B-B14F-4D97-AF65-F5344CB8AC3E}">
-        <p14:creationId xmlns:p14="http://schemas.microsoft.com/office/powerpoint/2010/main" val="2024908939"/>
+        <p14:creationId xmlns:p14="http://schemas.microsoft.com/office/powerpoint/2010/main" val="4008385910"/>
       </p:ext>
     </p:extLst>
   </p:cSld>
@@ -11893,7 +13074,7 @@
           <p:cNvPr id="2" name="TextBox 1">
             <a:extLst>
               <a:ext uri="{FF2B5EF4-FFF2-40B4-BE49-F238E27FC236}">
-                <a16:creationId xmlns:a16="http://schemas.microsoft.com/office/drawing/2014/main" id="{C3A92D6F-119C-8F4E-3E69-91BD59B3A1E5}"/>
+                <a16:creationId xmlns:a16="http://schemas.microsoft.com/office/drawing/2014/main" id="{421AEC14-6E81-08D8-63F2-578E1C7D434F}"/>
               </a:ext>
             </a:extLst>
           </p:cNvPr>
@@ -11944,7 +13125,7 @@
           <p:cNvPr id="3" name="TextBox 2">
             <a:extLst>
               <a:ext uri="{FF2B5EF4-FFF2-40B4-BE49-F238E27FC236}">
-                <a16:creationId xmlns:a16="http://schemas.microsoft.com/office/drawing/2014/main" id="{E6CF889F-4D4B-70C1-8D3C-DB9F0A25CBDB}"/>
+                <a16:creationId xmlns:a16="http://schemas.microsoft.com/office/drawing/2014/main" id="{0D6A8D7D-8F34-45DE-B601-1AFC23C75DC2}"/>
               </a:ext>
             </a:extLst>
           </p:cNvPr>
@@ -11995,7 +13176,7 @@
           <p:cNvPr id="4" name="TextBox 3">
             <a:extLst>
               <a:ext uri="{FF2B5EF4-FFF2-40B4-BE49-F238E27FC236}">
-                <a16:creationId xmlns:a16="http://schemas.microsoft.com/office/drawing/2014/main" id="{3CF15159-C9F0-BD56-5DF8-EFFC42C4CFE3}"/>
+                <a16:creationId xmlns:a16="http://schemas.microsoft.com/office/drawing/2014/main" id="{524A6E4B-CD42-F4F1-654E-6583698910FB}"/>
               </a:ext>
             </a:extLst>
           </p:cNvPr>
@@ -12047,7 +13228,7 @@
           <p:cNvPr id="5" name="Table 4">
             <a:extLst>
               <a:ext uri="{FF2B5EF4-FFF2-40B4-BE49-F238E27FC236}">
-                <a16:creationId xmlns:a16="http://schemas.microsoft.com/office/drawing/2014/main" id="{E06D0556-379B-3F23-4710-06B22B8DA2EC}"/>
+                <a16:creationId xmlns:a16="http://schemas.microsoft.com/office/drawing/2014/main" id="{B40478EF-A25C-A043-2C87-BC29D3250BBC}"/>
               </a:ext>
             </a:extLst>
           </p:cNvPr>
@@ -12057,7 +13238,7 @@
           <p:nvPr>
             <p:extLst>
               <p:ext uri="{D42A27DB-BD31-4B8C-83A1-F6EECF244321}">
-                <p14:modId xmlns:p14="http://schemas.microsoft.com/office/powerpoint/2010/main" val="3747710869"/>
+                <p14:modId xmlns:p14="http://schemas.microsoft.com/office/powerpoint/2010/main" val="1182239654"/>
               </p:ext>
             </p:extLst>
           </p:nvPr>
@@ -12076,28 +13257,28 @@
                 <a:gridCol w="4064000">
                   <a:extLst>
                     <a:ext uri="{9D8B030D-6E8A-4147-A177-3AD203B41FA5}">
-                      <a16:colId xmlns:a16="http://schemas.microsoft.com/office/drawing/2014/main" val="4240250660"/>
+                      <a16:colId xmlns:a16="http://schemas.microsoft.com/office/drawing/2014/main" val="51852827"/>
                     </a:ext>
                   </a:extLst>
                 </a:gridCol>
                 <a:gridCol w="2286000">
                   <a:extLst>
                     <a:ext uri="{9D8B030D-6E8A-4147-A177-3AD203B41FA5}">
-                      <a16:colId xmlns:a16="http://schemas.microsoft.com/office/drawing/2014/main" val="3280819196"/>
+                      <a16:colId xmlns:a16="http://schemas.microsoft.com/office/drawing/2014/main" val="247636588"/>
                     </a:ext>
                   </a:extLst>
                 </a:gridCol>
                 <a:gridCol w="2286000">
                   <a:extLst>
                     <a:ext uri="{9D8B030D-6E8A-4147-A177-3AD203B41FA5}">
-                      <a16:colId xmlns:a16="http://schemas.microsoft.com/office/drawing/2014/main" val="3455703620"/>
+                      <a16:colId xmlns:a16="http://schemas.microsoft.com/office/drawing/2014/main" val="1714982424"/>
                     </a:ext>
                   </a:extLst>
                 </a:gridCol>
                 <a:gridCol w="2286000">
                   <a:extLst>
                     <a:ext uri="{9D8B030D-6E8A-4147-A177-3AD203B41FA5}">
-                      <a16:colId xmlns:a16="http://schemas.microsoft.com/office/drawing/2014/main" val="936531746"/>
+                      <a16:colId xmlns:a16="http://schemas.microsoft.com/office/drawing/2014/main" val="3596683838"/>
                     </a:ext>
                   </a:extLst>
                 </a:gridCol>
@@ -12273,7 +13454,7 @@
                 </a:tc>
                 <a:extLst>
                   <a:ext uri="{0D108BD9-81ED-4DB2-BD59-A6C34878D82A}">
-                    <a16:rowId xmlns:a16="http://schemas.microsoft.com/office/drawing/2014/main" val="1304179206"/>
+                    <a16:rowId xmlns:a16="http://schemas.microsoft.com/office/drawing/2014/main" val="193349694"/>
                   </a:ext>
                 </a:extLst>
               </a:tr>
@@ -12448,7 +13629,7 @@
                 </a:tc>
                 <a:extLst>
                   <a:ext uri="{0D108BD9-81ED-4DB2-BD59-A6C34878D82A}">
-                    <a16:rowId xmlns:a16="http://schemas.microsoft.com/office/drawing/2014/main" val="1468912456"/>
+                    <a16:rowId xmlns:a16="http://schemas.microsoft.com/office/drawing/2014/main" val="2116204715"/>
                   </a:ext>
                 </a:extLst>
               </a:tr>
@@ -12623,7 +13804,7 @@
                 </a:tc>
                 <a:extLst>
                   <a:ext uri="{0D108BD9-81ED-4DB2-BD59-A6C34878D82A}">
-                    <a16:rowId xmlns:a16="http://schemas.microsoft.com/office/drawing/2014/main" val="1551063131"/>
+                    <a16:rowId xmlns:a16="http://schemas.microsoft.com/office/drawing/2014/main" val="1635081204"/>
                   </a:ext>
                 </a:extLst>
               </a:tr>
@@ -12798,7 +13979,7 @@
                 </a:tc>
                 <a:extLst>
                   <a:ext uri="{0D108BD9-81ED-4DB2-BD59-A6C34878D82A}">
-                    <a16:rowId xmlns:a16="http://schemas.microsoft.com/office/drawing/2014/main" val="1347555616"/>
+                    <a16:rowId xmlns:a16="http://schemas.microsoft.com/office/drawing/2014/main" val="3883683791"/>
                   </a:ext>
                 </a:extLst>
               </a:tr>
@@ -12973,7 +14154,7 @@
                 </a:tc>
                 <a:extLst>
                   <a:ext uri="{0D108BD9-81ED-4DB2-BD59-A6C34878D82A}">
-                    <a16:rowId xmlns:a16="http://schemas.microsoft.com/office/drawing/2014/main" val="1768019722"/>
+                    <a16:rowId xmlns:a16="http://schemas.microsoft.com/office/drawing/2014/main" val="3800439291"/>
                   </a:ext>
                 </a:extLst>
               </a:tr>
@@ -12986,7 +14167,7 @@
           <p:cNvPr id="6" name="TextBox 5">
             <a:extLst>
               <a:ext uri="{FF2B5EF4-FFF2-40B4-BE49-F238E27FC236}">
-                <a16:creationId xmlns:a16="http://schemas.microsoft.com/office/drawing/2014/main" id="{5474F76D-4812-6AE5-088E-1876BA9831F7}"/>
+                <a16:creationId xmlns:a16="http://schemas.microsoft.com/office/drawing/2014/main" id="{4616BE09-4BDC-5A65-4920-97B906418D83}"/>
               </a:ext>
             </a:extLst>
           </p:cNvPr>
@@ -13031,7 +14212,7 @@
           <p:cNvPr id="7" name="TextBox 6">
             <a:extLst>
               <a:ext uri="{FF2B5EF4-FFF2-40B4-BE49-F238E27FC236}">
-                <a16:creationId xmlns:a16="http://schemas.microsoft.com/office/drawing/2014/main" id="{9EC6AFBC-F7C6-BB9D-E9B1-E70991310DA9}"/>
+                <a16:creationId xmlns:a16="http://schemas.microsoft.com/office/drawing/2014/main" id="{FE64A3C2-E395-7D1A-A5E4-A9702D63E8DD}"/>
               </a:ext>
             </a:extLst>
           </p:cNvPr>
@@ -13074,7 +14255,7 @@
     </p:spTree>
     <p:extLst>
       <p:ext uri="{BB962C8B-B14F-4D97-AF65-F5344CB8AC3E}">
-        <p14:creationId xmlns:p14="http://schemas.microsoft.com/office/powerpoint/2010/main" val="3146023693"/>
+        <p14:creationId xmlns:p14="http://schemas.microsoft.com/office/powerpoint/2010/main" val="2076556371"/>
       </p:ext>
     </p:extLst>
   </p:cSld>
@@ -13114,7 +14295,7 @@
           <p:cNvPr id="2" name="TextBox 1">
             <a:extLst>
               <a:ext uri="{FF2B5EF4-FFF2-40B4-BE49-F238E27FC236}">
-                <a16:creationId xmlns:a16="http://schemas.microsoft.com/office/drawing/2014/main" id="{2B5F9FD1-865E-518F-73F4-105B2F7ECCE0}"/>
+                <a16:creationId xmlns:a16="http://schemas.microsoft.com/office/drawing/2014/main" id="{8D226672-D290-40A5-5F38-AA57FC13EC92}"/>
               </a:ext>
             </a:extLst>
           </p:cNvPr>
@@ -13165,7 +14346,7 @@
           <p:cNvPr id="3" name="TextBox 2">
             <a:extLst>
               <a:ext uri="{FF2B5EF4-FFF2-40B4-BE49-F238E27FC236}">
-                <a16:creationId xmlns:a16="http://schemas.microsoft.com/office/drawing/2014/main" id="{8BE4C6D6-5FDD-995D-0643-7D6BAE3ED292}"/>
+                <a16:creationId xmlns:a16="http://schemas.microsoft.com/office/drawing/2014/main" id="{089C8662-2FAC-99BC-B64D-9466DF430684}"/>
               </a:ext>
             </a:extLst>
           </p:cNvPr>
@@ -13216,7 +14397,7 @@
           <p:cNvPr id="4" name="Table 3">
             <a:extLst>
               <a:ext uri="{FF2B5EF4-FFF2-40B4-BE49-F238E27FC236}">
-                <a16:creationId xmlns:a16="http://schemas.microsoft.com/office/drawing/2014/main" id="{C86929ED-79A9-4D58-C762-D19E510A255E}"/>
+                <a16:creationId xmlns:a16="http://schemas.microsoft.com/office/drawing/2014/main" id="{E80F4386-CE45-9F8B-1A3E-049A0D4170DF}"/>
               </a:ext>
             </a:extLst>
           </p:cNvPr>
@@ -13226,7 +14407,7 @@
           <p:nvPr>
             <p:extLst>
               <p:ext uri="{D42A27DB-BD31-4B8C-83A1-F6EECF244321}">
-                <p14:modId xmlns:p14="http://schemas.microsoft.com/office/powerpoint/2010/main" val="1256962775"/>
+                <p14:modId xmlns:p14="http://schemas.microsoft.com/office/powerpoint/2010/main" val="4094439080"/>
               </p:ext>
             </p:extLst>
           </p:nvPr>
@@ -13245,21 +14426,21 @@
                 <a:gridCol w="3810000">
                   <a:extLst>
                     <a:ext uri="{9D8B030D-6E8A-4147-A177-3AD203B41FA5}">
-                      <a16:colId xmlns:a16="http://schemas.microsoft.com/office/drawing/2014/main" val="2326982087"/>
+                      <a16:colId xmlns:a16="http://schemas.microsoft.com/office/drawing/2014/main" val="69029476"/>
                     </a:ext>
                   </a:extLst>
                 </a:gridCol>
                 <a:gridCol w="3302000">
                   <a:extLst>
                     <a:ext uri="{9D8B030D-6E8A-4147-A177-3AD203B41FA5}">
-                      <a16:colId xmlns:a16="http://schemas.microsoft.com/office/drawing/2014/main" val="3515128273"/>
+                      <a16:colId xmlns:a16="http://schemas.microsoft.com/office/drawing/2014/main" val="758016958"/>
                     </a:ext>
                   </a:extLst>
                 </a:gridCol>
                 <a:gridCol w="3810000">
                   <a:extLst>
                     <a:ext uri="{9D8B030D-6E8A-4147-A177-3AD203B41FA5}">
-                      <a16:colId xmlns:a16="http://schemas.microsoft.com/office/drawing/2014/main" val="3019342547"/>
+                      <a16:colId xmlns:a16="http://schemas.microsoft.com/office/drawing/2014/main" val="3207620416"/>
                     </a:ext>
                   </a:extLst>
                 </a:gridCol>
@@ -13393,7 +14574,7 @@
                 </a:tc>
                 <a:extLst>
                   <a:ext uri="{0D108BD9-81ED-4DB2-BD59-A6C34878D82A}">
-                    <a16:rowId xmlns:a16="http://schemas.microsoft.com/office/drawing/2014/main" val="3137844428"/>
+                    <a16:rowId xmlns:a16="http://schemas.microsoft.com/office/drawing/2014/main" val="423366103"/>
                   </a:ext>
                 </a:extLst>
               </a:tr>
@@ -13526,7 +14707,7 @@
                 </a:tc>
                 <a:extLst>
                   <a:ext uri="{0D108BD9-81ED-4DB2-BD59-A6C34878D82A}">
-                    <a16:rowId xmlns:a16="http://schemas.microsoft.com/office/drawing/2014/main" val="512638069"/>
+                    <a16:rowId xmlns:a16="http://schemas.microsoft.com/office/drawing/2014/main" val="1256394020"/>
                   </a:ext>
                 </a:extLst>
               </a:tr>
@@ -13665,7 +14846,7 @@
                 </a:tc>
                 <a:extLst>
                   <a:ext uri="{0D108BD9-81ED-4DB2-BD59-A6C34878D82A}">
-                    <a16:rowId xmlns:a16="http://schemas.microsoft.com/office/drawing/2014/main" val="3989803062"/>
+                    <a16:rowId xmlns:a16="http://schemas.microsoft.com/office/drawing/2014/main" val="1300193859"/>
                   </a:ext>
                 </a:extLst>
               </a:tr>
@@ -13798,7 +14979,7 @@
                 </a:tc>
                 <a:extLst>
                   <a:ext uri="{0D108BD9-81ED-4DB2-BD59-A6C34878D82A}">
-                    <a16:rowId xmlns:a16="http://schemas.microsoft.com/office/drawing/2014/main" val="1638595399"/>
+                    <a16:rowId xmlns:a16="http://schemas.microsoft.com/office/drawing/2014/main" val="264132339"/>
                   </a:ext>
                 </a:extLst>
               </a:tr>
@@ -13937,7 +15118,7 @@
                 </a:tc>
                 <a:extLst>
                   <a:ext uri="{0D108BD9-81ED-4DB2-BD59-A6C34878D82A}">
-                    <a16:rowId xmlns:a16="http://schemas.microsoft.com/office/drawing/2014/main" val="2247959618"/>
+                    <a16:rowId xmlns:a16="http://schemas.microsoft.com/office/drawing/2014/main" val="1014041085"/>
                   </a:ext>
                 </a:extLst>
               </a:tr>
@@ -13950,7 +15131,7 @@
           <p:cNvPr id="5" name="TextBox 4">
             <a:extLst>
               <a:ext uri="{FF2B5EF4-FFF2-40B4-BE49-F238E27FC236}">
-                <a16:creationId xmlns:a16="http://schemas.microsoft.com/office/drawing/2014/main" id="{851F107E-C93F-6FA8-8795-36A7B67BE928}"/>
+                <a16:creationId xmlns:a16="http://schemas.microsoft.com/office/drawing/2014/main" id="{5562C74D-E921-4F59-7F78-096780C6BA41}"/>
               </a:ext>
             </a:extLst>
           </p:cNvPr>
@@ -14001,7 +15182,7 @@
           <p:cNvPr id="6" name="TextBox 5">
             <a:extLst>
               <a:ext uri="{FF2B5EF4-FFF2-40B4-BE49-F238E27FC236}">
-                <a16:creationId xmlns:a16="http://schemas.microsoft.com/office/drawing/2014/main" id="{DA25196B-9EB0-6717-ACD3-2F1FA357151D}"/>
+                <a16:creationId xmlns:a16="http://schemas.microsoft.com/office/drawing/2014/main" id="{39CD496D-FE83-51DB-26FF-02B0DCBBA1A6}"/>
               </a:ext>
             </a:extLst>
           </p:cNvPr>
@@ -14046,7 +15227,7 @@
           <p:cNvPr id="7" name="TextBox 6">
             <a:extLst>
               <a:ext uri="{FF2B5EF4-FFF2-40B4-BE49-F238E27FC236}">
-                <a16:creationId xmlns:a16="http://schemas.microsoft.com/office/drawing/2014/main" id="{713AF0BE-BB33-D985-36B0-C389A49425F6}"/>
+                <a16:creationId xmlns:a16="http://schemas.microsoft.com/office/drawing/2014/main" id="{BFBC28AA-83FA-F9A1-4B9C-7CAA085C03F0}"/>
               </a:ext>
             </a:extLst>
           </p:cNvPr>
@@ -14089,7 +15270,7 @@
     </p:spTree>
     <p:extLst>
       <p:ext uri="{BB962C8B-B14F-4D97-AF65-F5344CB8AC3E}">
-        <p14:creationId xmlns:p14="http://schemas.microsoft.com/office/powerpoint/2010/main" val="3241774398"/>
+        <p14:creationId xmlns:p14="http://schemas.microsoft.com/office/powerpoint/2010/main" val="2826811538"/>
       </p:ext>
     </p:extLst>
   </p:cSld>
@@ -14129,7 +15310,7 @@
           <p:cNvPr id="2" name="TextBox 1">
             <a:extLst>
               <a:ext uri="{FF2B5EF4-FFF2-40B4-BE49-F238E27FC236}">
-                <a16:creationId xmlns:a16="http://schemas.microsoft.com/office/drawing/2014/main" id="{B1177534-9845-7A6D-79A7-CA3E25702C91}"/>
+                <a16:creationId xmlns:a16="http://schemas.microsoft.com/office/drawing/2014/main" id="{E3EF35A5-DEB2-4556-F72B-DB774AC173D5}"/>
               </a:ext>
             </a:extLst>
           </p:cNvPr>
@@ -14174,7 +15355,7 @@
           <p:cNvPr id="3" name="TextBox 2">
             <a:extLst>
               <a:ext uri="{FF2B5EF4-FFF2-40B4-BE49-F238E27FC236}">
-                <a16:creationId xmlns:a16="http://schemas.microsoft.com/office/drawing/2014/main" id="{E01C27BC-C535-449B-FB1A-083ED58598E2}"/>
+                <a16:creationId xmlns:a16="http://schemas.microsoft.com/office/drawing/2014/main" id="{661F9EE7-A79A-2AFE-9C5D-C0A1C3613899}"/>
               </a:ext>
             </a:extLst>
           </p:cNvPr>
@@ -14225,7 +15406,7 @@
           <p:cNvPr id="5" name="Picture 4">
             <a:extLst>
               <a:ext uri="{FF2B5EF4-FFF2-40B4-BE49-F238E27FC236}">
-                <a16:creationId xmlns:a16="http://schemas.microsoft.com/office/drawing/2014/main" id="{2D021BDF-5B64-50C1-5430-C63F6058CEAA}"/>
+                <a16:creationId xmlns:a16="http://schemas.microsoft.com/office/drawing/2014/main" id="{B76E3F6F-2E3C-5D73-117B-46E6625B8AB7}"/>
               </a:ext>
             </a:extLst>
           </p:cNvPr>
@@ -14261,7 +15442,7 @@
           <p:cNvPr id="6" name="TextBox 5">
             <a:extLst>
               <a:ext uri="{FF2B5EF4-FFF2-40B4-BE49-F238E27FC236}">
-                <a16:creationId xmlns:a16="http://schemas.microsoft.com/office/drawing/2014/main" id="{AFBB1E70-C412-6146-5090-026236A3F3A2}"/>
+                <a16:creationId xmlns:a16="http://schemas.microsoft.com/office/drawing/2014/main" id="{8B351DFE-843A-808E-EBFA-A2027EBDEFAB}"/>
               </a:ext>
             </a:extLst>
           </p:cNvPr>
@@ -14312,7 +15493,7 @@
           <p:cNvPr id="7" name="TextBox 6">
             <a:extLst>
               <a:ext uri="{FF2B5EF4-FFF2-40B4-BE49-F238E27FC236}">
-                <a16:creationId xmlns:a16="http://schemas.microsoft.com/office/drawing/2014/main" id="{90B352BD-8303-4FEA-4838-7F030976896B}"/>
+                <a16:creationId xmlns:a16="http://schemas.microsoft.com/office/drawing/2014/main" id="{1B2A3CD3-F3C8-2A5F-9DE6-673014D47EA4}"/>
               </a:ext>
             </a:extLst>
           </p:cNvPr>
@@ -14357,7 +15538,7 @@
           <p:cNvPr id="8" name="TextBox 7">
             <a:extLst>
               <a:ext uri="{FF2B5EF4-FFF2-40B4-BE49-F238E27FC236}">
-                <a16:creationId xmlns:a16="http://schemas.microsoft.com/office/drawing/2014/main" id="{352FD84C-AC3A-F553-CDE1-29785ADB4E48}"/>
+                <a16:creationId xmlns:a16="http://schemas.microsoft.com/office/drawing/2014/main" id="{AF5470AD-E4E2-3557-5ACF-992214F54CFC}"/>
               </a:ext>
             </a:extLst>
           </p:cNvPr>
@@ -14400,7 +15581,7 @@
     </p:spTree>
     <p:extLst>
       <p:ext uri="{BB962C8B-B14F-4D97-AF65-F5344CB8AC3E}">
-        <p14:creationId xmlns:p14="http://schemas.microsoft.com/office/powerpoint/2010/main" val="2730475874"/>
+        <p14:creationId xmlns:p14="http://schemas.microsoft.com/office/powerpoint/2010/main" val="3853846565"/>
       </p:ext>
     </p:extLst>
   </p:cSld>
@@ -14440,7 +15621,7 @@
           <p:cNvPr id="2" name="TextBox 1">
             <a:extLst>
               <a:ext uri="{FF2B5EF4-FFF2-40B4-BE49-F238E27FC236}">
-                <a16:creationId xmlns:a16="http://schemas.microsoft.com/office/drawing/2014/main" id="{89E67D05-A244-FDB6-F2F2-680F37107249}"/>
+                <a16:creationId xmlns:a16="http://schemas.microsoft.com/office/drawing/2014/main" id="{BE731B54-E805-8220-60EA-2E2EECFE0F23}"/>
               </a:ext>
             </a:extLst>
           </p:cNvPr>
@@ -14491,7 +15672,7 @@
           <p:cNvPr id="3" name="TextBox 2">
             <a:extLst>
               <a:ext uri="{FF2B5EF4-FFF2-40B4-BE49-F238E27FC236}">
-                <a16:creationId xmlns:a16="http://schemas.microsoft.com/office/drawing/2014/main" id="{B2B3F2C9-FFC0-3CB8-CC19-B537CE5B5ED5}"/>
+                <a16:creationId xmlns:a16="http://schemas.microsoft.com/office/drawing/2014/main" id="{31F1845C-C32F-249D-4EDA-6CE9A88B0B50}"/>
               </a:ext>
             </a:extLst>
           </p:cNvPr>
@@ -14542,7 +15723,7 @@
           <p:cNvPr id="5" name="Picture 4">
             <a:extLst>
               <a:ext uri="{FF2B5EF4-FFF2-40B4-BE49-F238E27FC236}">
-                <a16:creationId xmlns:a16="http://schemas.microsoft.com/office/drawing/2014/main" id="{DCB5A3EB-109B-9FA3-7545-0F82E55D6A5B}"/>
+                <a16:creationId xmlns:a16="http://schemas.microsoft.com/office/drawing/2014/main" id="{72F41A71-CFFA-0F40-DC23-ABA30838204C}"/>
               </a:ext>
             </a:extLst>
           </p:cNvPr>
@@ -14578,7 +15759,7 @@
           <p:cNvPr id="6" name="Table 5">
             <a:extLst>
               <a:ext uri="{FF2B5EF4-FFF2-40B4-BE49-F238E27FC236}">
-                <a16:creationId xmlns:a16="http://schemas.microsoft.com/office/drawing/2014/main" id="{C204978F-1231-0D03-9A28-1503B190830A}"/>
+                <a16:creationId xmlns:a16="http://schemas.microsoft.com/office/drawing/2014/main" id="{3E43B0A3-FCEA-77FC-182D-6837D076482C}"/>
               </a:ext>
             </a:extLst>
           </p:cNvPr>
@@ -14588,7 +15769,7 @@
           <p:nvPr>
             <p:extLst>
               <p:ext uri="{D42A27DB-BD31-4B8C-83A1-F6EECF244321}">
-                <p14:modId xmlns:p14="http://schemas.microsoft.com/office/powerpoint/2010/main" val="2810868110"/>
+                <p14:modId xmlns:p14="http://schemas.microsoft.com/office/powerpoint/2010/main" val="3191640866"/>
               </p:ext>
             </p:extLst>
           </p:nvPr>
@@ -14607,14 +15788,14 @@
                 <a:gridCol w="2095500">
                   <a:extLst>
                     <a:ext uri="{9D8B030D-6E8A-4147-A177-3AD203B41FA5}">
-                      <a16:colId xmlns:a16="http://schemas.microsoft.com/office/drawing/2014/main" val="3757413207"/>
+                      <a16:colId xmlns:a16="http://schemas.microsoft.com/office/drawing/2014/main" val="3493810504"/>
                     </a:ext>
                   </a:extLst>
                 </a:gridCol>
                 <a:gridCol w="3683000">
                   <a:extLst>
                     <a:ext uri="{9D8B030D-6E8A-4147-A177-3AD203B41FA5}">
-                      <a16:colId xmlns:a16="http://schemas.microsoft.com/office/drawing/2014/main" val="2775934503"/>
+                      <a16:colId xmlns:a16="http://schemas.microsoft.com/office/drawing/2014/main" val="2675876793"/>
                     </a:ext>
                   </a:extLst>
                 </a:gridCol>
@@ -14706,7 +15887,7 @@
                 </a:tc>
                 <a:extLst>
                   <a:ext uri="{0D108BD9-81ED-4DB2-BD59-A6C34878D82A}">
-                    <a16:rowId xmlns:a16="http://schemas.microsoft.com/office/drawing/2014/main" val="3017170068"/>
+                    <a16:rowId xmlns:a16="http://schemas.microsoft.com/office/drawing/2014/main" val="3031441284"/>
                   </a:ext>
                 </a:extLst>
               </a:tr>
@@ -14797,7 +15978,7 @@
                 </a:tc>
                 <a:extLst>
                   <a:ext uri="{0D108BD9-81ED-4DB2-BD59-A6C34878D82A}">
-                    <a16:rowId xmlns:a16="http://schemas.microsoft.com/office/drawing/2014/main" val="1772222138"/>
+                    <a16:rowId xmlns:a16="http://schemas.microsoft.com/office/drawing/2014/main" val="2730262386"/>
                   </a:ext>
                 </a:extLst>
               </a:tr>
@@ -14888,7 +16069,7 @@
                 </a:tc>
                 <a:extLst>
                   <a:ext uri="{0D108BD9-81ED-4DB2-BD59-A6C34878D82A}">
-                    <a16:rowId xmlns:a16="http://schemas.microsoft.com/office/drawing/2014/main" val="977965795"/>
+                    <a16:rowId xmlns:a16="http://schemas.microsoft.com/office/drawing/2014/main" val="791308707"/>
                   </a:ext>
                 </a:extLst>
               </a:tr>
@@ -14985,7 +16166,7 @@
                 </a:tc>
                 <a:extLst>
                   <a:ext uri="{0D108BD9-81ED-4DB2-BD59-A6C34878D82A}">
-                    <a16:rowId xmlns:a16="http://schemas.microsoft.com/office/drawing/2014/main" val="3380548906"/>
+                    <a16:rowId xmlns:a16="http://schemas.microsoft.com/office/drawing/2014/main" val="2166898490"/>
                   </a:ext>
                 </a:extLst>
               </a:tr>
@@ -15076,7 +16257,7 @@
                 </a:tc>
                 <a:extLst>
                   <a:ext uri="{0D108BD9-81ED-4DB2-BD59-A6C34878D82A}">
-                    <a16:rowId xmlns:a16="http://schemas.microsoft.com/office/drawing/2014/main" val="2057878320"/>
+                    <a16:rowId xmlns:a16="http://schemas.microsoft.com/office/drawing/2014/main" val="523706423"/>
                   </a:ext>
                 </a:extLst>
               </a:tr>
@@ -15173,7 +16354,7 @@
                 </a:tc>
                 <a:extLst>
                   <a:ext uri="{0D108BD9-81ED-4DB2-BD59-A6C34878D82A}">
-                    <a16:rowId xmlns:a16="http://schemas.microsoft.com/office/drawing/2014/main" val="182976912"/>
+                    <a16:rowId xmlns:a16="http://schemas.microsoft.com/office/drawing/2014/main" val="144826843"/>
                   </a:ext>
                 </a:extLst>
               </a:tr>
@@ -15186,7 +16367,7 @@
           <p:cNvPr id="7" name="TextBox 6">
             <a:extLst>
               <a:ext uri="{FF2B5EF4-FFF2-40B4-BE49-F238E27FC236}">
-                <a16:creationId xmlns:a16="http://schemas.microsoft.com/office/drawing/2014/main" id="{3D376E5C-A807-2830-3F89-0C14F488F350}"/>
+                <a16:creationId xmlns:a16="http://schemas.microsoft.com/office/drawing/2014/main" id="{3CB50D89-A6FA-F243-9802-17A6A9A970DF}"/>
               </a:ext>
             </a:extLst>
           </p:cNvPr>
@@ -15237,7 +16418,7 @@
           <p:cNvPr id="8" name="TextBox 7">
             <a:extLst>
               <a:ext uri="{FF2B5EF4-FFF2-40B4-BE49-F238E27FC236}">
-                <a16:creationId xmlns:a16="http://schemas.microsoft.com/office/drawing/2014/main" id="{DD25A54E-9795-3AC9-1764-3E51DD1B1D1F}"/>
+                <a16:creationId xmlns:a16="http://schemas.microsoft.com/office/drawing/2014/main" id="{90D2D411-9E49-1D49-D0EF-31E6BCFFE0C3}"/>
               </a:ext>
             </a:extLst>
           </p:cNvPr>
@@ -15282,7 +16463,7 @@
           <p:cNvPr id="9" name="TextBox 8">
             <a:extLst>
               <a:ext uri="{FF2B5EF4-FFF2-40B4-BE49-F238E27FC236}">
-                <a16:creationId xmlns:a16="http://schemas.microsoft.com/office/drawing/2014/main" id="{10D9A29D-026D-9900-0B6C-23D4D714F8D8}"/>
+                <a16:creationId xmlns:a16="http://schemas.microsoft.com/office/drawing/2014/main" id="{984FBE04-CADD-5F49-AE67-E32790342A37}"/>
               </a:ext>
             </a:extLst>
           </p:cNvPr>
@@ -15325,7 +16506,7 @@
     </p:spTree>
     <p:extLst>
       <p:ext uri="{BB962C8B-B14F-4D97-AF65-F5344CB8AC3E}">
-        <p14:creationId xmlns:p14="http://schemas.microsoft.com/office/powerpoint/2010/main" val="3827166992"/>
+        <p14:creationId xmlns:p14="http://schemas.microsoft.com/office/powerpoint/2010/main" val="116421532"/>
       </p:ext>
     </p:extLst>
   </p:cSld>
@@ -15365,7 +16546,7 @@
           <p:cNvPr id="2" name="TextBox 1">
             <a:extLst>
               <a:ext uri="{FF2B5EF4-FFF2-40B4-BE49-F238E27FC236}">
-                <a16:creationId xmlns:a16="http://schemas.microsoft.com/office/drawing/2014/main" id="{4243E131-17AE-2C61-8098-CC0F892428C6}"/>
+                <a16:creationId xmlns:a16="http://schemas.microsoft.com/office/drawing/2014/main" id="{BC885A81-0695-4012-536D-D12053AF7A0F}"/>
               </a:ext>
             </a:extLst>
           </p:cNvPr>
@@ -15416,7 +16597,7 @@
           <p:cNvPr id="3" name="TextBox 2">
             <a:extLst>
               <a:ext uri="{FF2B5EF4-FFF2-40B4-BE49-F238E27FC236}">
-                <a16:creationId xmlns:a16="http://schemas.microsoft.com/office/drawing/2014/main" id="{8E6D1A39-401A-A307-A78B-72E25AC41821}"/>
+                <a16:creationId xmlns:a16="http://schemas.microsoft.com/office/drawing/2014/main" id="{518C91E1-EB55-9A73-0AAE-2730BD14ACF5}"/>
               </a:ext>
             </a:extLst>
           </p:cNvPr>
@@ -15467,7 +16648,7 @@
           <p:cNvPr id="4" name="TextBox 3">
             <a:extLst>
               <a:ext uri="{FF2B5EF4-FFF2-40B4-BE49-F238E27FC236}">
-                <a16:creationId xmlns:a16="http://schemas.microsoft.com/office/drawing/2014/main" id="{3E400F46-8FA7-C273-F888-EE78ADF8B3CB}"/>
+                <a16:creationId xmlns:a16="http://schemas.microsoft.com/office/drawing/2014/main" id="{1F408630-9D30-EB41-DF44-22429CD4075D}"/>
               </a:ext>
             </a:extLst>
           </p:cNvPr>
@@ -15519,7 +16700,7 @@
           <p:cNvPr id="5" name="Table 4">
             <a:extLst>
               <a:ext uri="{FF2B5EF4-FFF2-40B4-BE49-F238E27FC236}">
-                <a16:creationId xmlns:a16="http://schemas.microsoft.com/office/drawing/2014/main" id="{810EAC42-0669-44A8-0753-E3D7681CA9F4}"/>
+                <a16:creationId xmlns:a16="http://schemas.microsoft.com/office/drawing/2014/main" id="{2909899B-3729-E9FA-83ED-2B1D7BF98781}"/>
               </a:ext>
             </a:extLst>
           </p:cNvPr>
@@ -15529,7 +16710,7 @@
           <p:nvPr>
             <p:extLst>
               <p:ext uri="{D42A27DB-BD31-4B8C-83A1-F6EECF244321}">
-                <p14:modId xmlns:p14="http://schemas.microsoft.com/office/powerpoint/2010/main" val="2892003583"/>
+                <p14:modId xmlns:p14="http://schemas.microsoft.com/office/powerpoint/2010/main" val="409092027"/>
               </p:ext>
             </p:extLst>
           </p:nvPr>
@@ -15548,21 +16729,21 @@
                 <a:gridCol w="3810000">
                   <a:extLst>
                     <a:ext uri="{9D8B030D-6E8A-4147-A177-3AD203B41FA5}">
-                      <a16:colId xmlns:a16="http://schemas.microsoft.com/office/drawing/2014/main" val="3842377772"/>
+                      <a16:colId xmlns:a16="http://schemas.microsoft.com/office/drawing/2014/main" val="2810859001"/>
                     </a:ext>
                   </a:extLst>
                 </a:gridCol>
                 <a:gridCol w="4572000">
                   <a:extLst>
                     <a:ext uri="{9D8B030D-6E8A-4147-A177-3AD203B41FA5}">
-                      <a16:colId xmlns:a16="http://schemas.microsoft.com/office/drawing/2014/main" val="451885387"/>
+                      <a16:colId xmlns:a16="http://schemas.microsoft.com/office/drawing/2014/main" val="19413319"/>
                     </a:ext>
                   </a:extLst>
                 </a:gridCol>
                 <a:gridCol w="2540000">
                   <a:extLst>
                     <a:ext uri="{9D8B030D-6E8A-4147-A177-3AD203B41FA5}">
-                      <a16:colId xmlns:a16="http://schemas.microsoft.com/office/drawing/2014/main" val="1933106445"/>
+                      <a16:colId xmlns:a16="http://schemas.microsoft.com/office/drawing/2014/main" val="3514906362"/>
                     </a:ext>
                   </a:extLst>
                 </a:gridCol>
@@ -15696,7 +16877,7 @@
                 </a:tc>
                 <a:extLst>
                   <a:ext uri="{0D108BD9-81ED-4DB2-BD59-A6C34878D82A}">
-                    <a16:rowId xmlns:a16="http://schemas.microsoft.com/office/drawing/2014/main" val="1418020894"/>
+                    <a16:rowId xmlns:a16="http://schemas.microsoft.com/office/drawing/2014/main" val="1169514602"/>
                   </a:ext>
                 </a:extLst>
               </a:tr>
@@ -15829,7 +17010,7 @@
                 </a:tc>
                 <a:extLst>
                   <a:ext uri="{0D108BD9-81ED-4DB2-BD59-A6C34878D82A}">
-                    <a16:rowId xmlns:a16="http://schemas.microsoft.com/office/drawing/2014/main" val="4156437194"/>
+                    <a16:rowId xmlns:a16="http://schemas.microsoft.com/office/drawing/2014/main" val="1793120236"/>
                   </a:ext>
                 </a:extLst>
               </a:tr>
@@ -15962,7 +17143,7 @@
                 </a:tc>
                 <a:extLst>
                   <a:ext uri="{0D108BD9-81ED-4DB2-BD59-A6C34878D82A}">
-                    <a16:rowId xmlns:a16="http://schemas.microsoft.com/office/drawing/2014/main" val="2752199131"/>
+                    <a16:rowId xmlns:a16="http://schemas.microsoft.com/office/drawing/2014/main" val="1432322939"/>
                   </a:ext>
                 </a:extLst>
               </a:tr>
@@ -16095,7 +17276,7 @@
                 </a:tc>
                 <a:extLst>
                   <a:ext uri="{0D108BD9-81ED-4DB2-BD59-A6C34878D82A}">
-                    <a16:rowId xmlns:a16="http://schemas.microsoft.com/office/drawing/2014/main" val="3035348186"/>
+                    <a16:rowId xmlns:a16="http://schemas.microsoft.com/office/drawing/2014/main" val="3461550511"/>
                   </a:ext>
                 </a:extLst>
               </a:tr>
@@ -16228,7 +17409,7 @@
                 </a:tc>
                 <a:extLst>
                   <a:ext uri="{0D108BD9-81ED-4DB2-BD59-A6C34878D82A}">
-                    <a16:rowId xmlns:a16="http://schemas.microsoft.com/office/drawing/2014/main" val="2322666053"/>
+                    <a16:rowId xmlns:a16="http://schemas.microsoft.com/office/drawing/2014/main" val="3282168290"/>
                   </a:ext>
                 </a:extLst>
               </a:tr>
@@ -16241,7 +17422,7 @@
           <p:cNvPr id="6" name="TextBox 5">
             <a:extLst>
               <a:ext uri="{FF2B5EF4-FFF2-40B4-BE49-F238E27FC236}">
-                <a16:creationId xmlns:a16="http://schemas.microsoft.com/office/drawing/2014/main" id="{BBDFB472-41E9-004B-6C01-5AEA93B55158}"/>
+                <a16:creationId xmlns:a16="http://schemas.microsoft.com/office/drawing/2014/main" id="{7248D453-FE69-87AA-F1FF-BCD0FDF1492E}"/>
               </a:ext>
             </a:extLst>
           </p:cNvPr>
@@ -16286,7 +17467,7 @@
           <p:cNvPr id="7" name="TextBox 6">
             <a:extLst>
               <a:ext uri="{FF2B5EF4-FFF2-40B4-BE49-F238E27FC236}">
-                <a16:creationId xmlns:a16="http://schemas.microsoft.com/office/drawing/2014/main" id="{3256E32D-E1A6-0992-8FD8-B8D94141E8ED}"/>
+                <a16:creationId xmlns:a16="http://schemas.microsoft.com/office/drawing/2014/main" id="{B836EFC9-B99A-FE2D-47F3-00F33692BDC8}"/>
               </a:ext>
             </a:extLst>
           </p:cNvPr>
@@ -16329,7 +17510,7 @@
     </p:spTree>
     <p:extLst>
       <p:ext uri="{BB962C8B-B14F-4D97-AF65-F5344CB8AC3E}">
-        <p14:creationId xmlns:p14="http://schemas.microsoft.com/office/powerpoint/2010/main" val="3160738275"/>
+        <p14:creationId xmlns:p14="http://schemas.microsoft.com/office/powerpoint/2010/main" val="3994622029"/>
       </p:ext>
     </p:extLst>
   </p:cSld>
@@ -16369,7 +17550,7 @@
           <p:cNvPr id="2" name="TextBox 1">
             <a:extLst>
               <a:ext uri="{FF2B5EF4-FFF2-40B4-BE49-F238E27FC236}">
-                <a16:creationId xmlns:a16="http://schemas.microsoft.com/office/drawing/2014/main" id="{6754BA4F-2081-6184-CADA-B1BB1B456DF7}"/>
+                <a16:creationId xmlns:a16="http://schemas.microsoft.com/office/drawing/2014/main" id="{797519FE-1363-A121-5331-474C92696FCD}"/>
               </a:ext>
             </a:extLst>
           </p:cNvPr>
@@ -16414,7 +17595,7 @@
           <p:cNvPr id="3" name="TextBox 2">
             <a:extLst>
               <a:ext uri="{FF2B5EF4-FFF2-40B4-BE49-F238E27FC236}">
-                <a16:creationId xmlns:a16="http://schemas.microsoft.com/office/drawing/2014/main" id="{96C0138E-FD65-9CAC-375B-68D8326ED1A6}"/>
+                <a16:creationId xmlns:a16="http://schemas.microsoft.com/office/drawing/2014/main" id="{107B6E85-7F0F-5811-517F-5A13C2F2EE34}"/>
               </a:ext>
             </a:extLst>
           </p:cNvPr>
@@ -16465,7 +17646,7 @@
           <p:cNvPr id="4" name="Table 3">
             <a:extLst>
               <a:ext uri="{FF2B5EF4-FFF2-40B4-BE49-F238E27FC236}">
-                <a16:creationId xmlns:a16="http://schemas.microsoft.com/office/drawing/2014/main" id="{06773C2D-0F05-4D4F-D982-43565BC41D90}"/>
+                <a16:creationId xmlns:a16="http://schemas.microsoft.com/office/drawing/2014/main" id="{C0E850F9-928C-6489-8A52-C4BA0F12C4AC}"/>
               </a:ext>
             </a:extLst>
           </p:cNvPr>
@@ -16475,7 +17656,7 @@
           <p:nvPr>
             <p:extLst>
               <p:ext uri="{D42A27DB-BD31-4B8C-83A1-F6EECF244321}">
-                <p14:modId xmlns:p14="http://schemas.microsoft.com/office/powerpoint/2010/main" val="959667966"/>
+                <p14:modId xmlns:p14="http://schemas.microsoft.com/office/powerpoint/2010/main" val="2854085564"/>
               </p:ext>
             </p:extLst>
           </p:nvPr>
@@ -16494,35 +17675,35 @@
                 <a:gridCol w="3810000">
                   <a:extLst>
                     <a:ext uri="{9D8B030D-6E8A-4147-A177-3AD203B41FA5}">
-                      <a16:colId xmlns:a16="http://schemas.microsoft.com/office/drawing/2014/main" val="48464989"/>
+                      <a16:colId xmlns:a16="http://schemas.microsoft.com/office/drawing/2014/main" val="3516369988"/>
                     </a:ext>
                   </a:extLst>
                 </a:gridCol>
                 <a:gridCol w="1016000">
                   <a:extLst>
                     <a:ext uri="{9D8B030D-6E8A-4147-A177-3AD203B41FA5}">
-                      <a16:colId xmlns:a16="http://schemas.microsoft.com/office/drawing/2014/main" val="2021075385"/>
+                      <a16:colId xmlns:a16="http://schemas.microsoft.com/office/drawing/2014/main" val="559975301"/>
                     </a:ext>
                   </a:extLst>
                 </a:gridCol>
                 <a:gridCol w="2032000">
                   <a:extLst>
                     <a:ext uri="{9D8B030D-6E8A-4147-A177-3AD203B41FA5}">
-                      <a16:colId xmlns:a16="http://schemas.microsoft.com/office/drawing/2014/main" val="2017696373"/>
+                      <a16:colId xmlns:a16="http://schemas.microsoft.com/office/drawing/2014/main" val="2455341719"/>
                     </a:ext>
                   </a:extLst>
                 </a:gridCol>
                 <a:gridCol w="2032000">
                   <a:extLst>
                     <a:ext uri="{9D8B030D-6E8A-4147-A177-3AD203B41FA5}">
-                      <a16:colId xmlns:a16="http://schemas.microsoft.com/office/drawing/2014/main" val="3276573649"/>
+                      <a16:colId xmlns:a16="http://schemas.microsoft.com/office/drawing/2014/main" val="227727977"/>
                     </a:ext>
                   </a:extLst>
                 </a:gridCol>
                 <a:gridCol w="2032000">
                   <a:extLst>
                     <a:ext uri="{9D8B030D-6E8A-4147-A177-3AD203B41FA5}">
-                      <a16:colId xmlns:a16="http://schemas.microsoft.com/office/drawing/2014/main" val="1496618332"/>
+                      <a16:colId xmlns:a16="http://schemas.microsoft.com/office/drawing/2014/main" val="1708841700"/>
                     </a:ext>
                   </a:extLst>
                 </a:gridCol>
@@ -16740,7 +17921,7 @@
                 </a:tc>
                 <a:extLst>
                   <a:ext uri="{0D108BD9-81ED-4DB2-BD59-A6C34878D82A}">
-                    <a16:rowId xmlns:a16="http://schemas.microsoft.com/office/drawing/2014/main" val="1541756970"/>
+                    <a16:rowId xmlns:a16="http://schemas.microsoft.com/office/drawing/2014/main" val="833538895"/>
                   </a:ext>
                 </a:extLst>
               </a:tr>
@@ -16957,7 +18138,7 @@
                 </a:tc>
                 <a:extLst>
                   <a:ext uri="{0D108BD9-81ED-4DB2-BD59-A6C34878D82A}">
-                    <a16:rowId xmlns:a16="http://schemas.microsoft.com/office/drawing/2014/main" val="3695385704"/>
+                    <a16:rowId xmlns:a16="http://schemas.microsoft.com/office/drawing/2014/main" val="1924183128"/>
                   </a:ext>
                 </a:extLst>
               </a:tr>
@@ -17174,7 +18355,7 @@
                 </a:tc>
                 <a:extLst>
                   <a:ext uri="{0D108BD9-81ED-4DB2-BD59-A6C34878D82A}">
-                    <a16:rowId xmlns:a16="http://schemas.microsoft.com/office/drawing/2014/main" val="2143837066"/>
+                    <a16:rowId xmlns:a16="http://schemas.microsoft.com/office/drawing/2014/main" val="2532238401"/>
                   </a:ext>
                 </a:extLst>
               </a:tr>
@@ -17391,7 +18572,7 @@
                 </a:tc>
                 <a:extLst>
                   <a:ext uri="{0D108BD9-81ED-4DB2-BD59-A6C34878D82A}">
-                    <a16:rowId xmlns:a16="http://schemas.microsoft.com/office/drawing/2014/main" val="2730495830"/>
+                    <a16:rowId xmlns:a16="http://schemas.microsoft.com/office/drawing/2014/main" val="1913551000"/>
                   </a:ext>
                 </a:extLst>
               </a:tr>
@@ -17608,7 +18789,7 @@
                 </a:tc>
                 <a:extLst>
                   <a:ext uri="{0D108BD9-81ED-4DB2-BD59-A6C34878D82A}">
-                    <a16:rowId xmlns:a16="http://schemas.microsoft.com/office/drawing/2014/main" val="3294962298"/>
+                    <a16:rowId xmlns:a16="http://schemas.microsoft.com/office/drawing/2014/main" val="1517836891"/>
                   </a:ext>
                 </a:extLst>
               </a:tr>
@@ -17825,7 +19006,7 @@
                 </a:tc>
                 <a:extLst>
                   <a:ext uri="{0D108BD9-81ED-4DB2-BD59-A6C34878D82A}">
-                    <a16:rowId xmlns:a16="http://schemas.microsoft.com/office/drawing/2014/main" val="4053149952"/>
+                    <a16:rowId xmlns:a16="http://schemas.microsoft.com/office/drawing/2014/main" val="3588157338"/>
                   </a:ext>
                 </a:extLst>
               </a:tr>
@@ -17838,7 +19019,7 @@
           <p:cNvPr id="5" name="TextBox 4">
             <a:extLst>
               <a:ext uri="{FF2B5EF4-FFF2-40B4-BE49-F238E27FC236}">
-                <a16:creationId xmlns:a16="http://schemas.microsoft.com/office/drawing/2014/main" id="{E5CE15E1-73EA-51D2-115C-41080844E63C}"/>
+                <a16:creationId xmlns:a16="http://schemas.microsoft.com/office/drawing/2014/main" id="{452502CC-591A-C7B1-94F5-3B85505F7778}"/>
               </a:ext>
             </a:extLst>
           </p:cNvPr>
@@ -17889,7 +19070,7 @@
           <p:cNvPr id="6" name="TextBox 5">
             <a:extLst>
               <a:ext uri="{FF2B5EF4-FFF2-40B4-BE49-F238E27FC236}">
-                <a16:creationId xmlns:a16="http://schemas.microsoft.com/office/drawing/2014/main" id="{DD1BB334-010A-803C-4B89-C19C80B13100}"/>
+                <a16:creationId xmlns:a16="http://schemas.microsoft.com/office/drawing/2014/main" id="{8CACB467-4200-F708-5EDD-A1DEC4819EE8}"/>
               </a:ext>
             </a:extLst>
           </p:cNvPr>
@@ -17934,7 +19115,7 @@
           <p:cNvPr id="7" name="TextBox 6">
             <a:extLst>
               <a:ext uri="{FF2B5EF4-FFF2-40B4-BE49-F238E27FC236}">
-                <a16:creationId xmlns:a16="http://schemas.microsoft.com/office/drawing/2014/main" id="{CA47ACCF-AC19-864D-EC59-3BCED631FA44}"/>
+                <a16:creationId xmlns:a16="http://schemas.microsoft.com/office/drawing/2014/main" id="{295CF2CA-09BE-202A-6006-A92F2D45A009}"/>
               </a:ext>
             </a:extLst>
           </p:cNvPr>
@@ -17977,7 +19158,7 @@
     </p:spTree>
     <p:extLst>
       <p:ext uri="{BB962C8B-B14F-4D97-AF65-F5344CB8AC3E}">
-        <p14:creationId xmlns:p14="http://schemas.microsoft.com/office/powerpoint/2010/main" val="1700884233"/>
+        <p14:creationId xmlns:p14="http://schemas.microsoft.com/office/powerpoint/2010/main" val="3452411671"/>
       </p:ext>
     </p:extLst>
   </p:cSld>

--- a/submission/CricketShot_Presentation.pptx
+++ b/submission/CricketShot_Presentation.pptx
@@ -206,7 +206,7 @@
             </a:lvl1pPr>
           </a:lstStyle>
           <a:p>
-            <a:fld id="{2AB85FD1-3046-4769-AE0B-D618BF128588}" type="datetimeFigureOut">
+            <a:fld id="{FDF46840-DA6F-4679-9483-D303AF8DFB97}" type="datetimeFigureOut">
               <a:rPr lang="en-IN" smtClean="0"/>
               <a:t>19-10-2026</a:t>
             </a:fld>
@@ -365,7 +365,7 @@
             </a:lvl1pPr>
           </a:lstStyle>
           <a:p>
-            <a:fld id="{4AA5213A-272A-46DE-A19A-34290041A493}" type="slidenum">
+            <a:fld id="{96044500-47D4-41DA-AA38-06BE861875DF}" type="slidenum">
               <a:rPr lang="en-IN" smtClean="0"/>
               <a:t>‹#›</a:t>
             </a:fld>
@@ -376,7 +376,7 @@
     </p:spTree>
     <p:extLst>
       <p:ext uri="{BB962C8B-B14F-4D97-AF65-F5344CB8AC3E}">
-        <p14:creationId xmlns:p14="http://schemas.microsoft.com/office/powerpoint/2010/main" val="2188669798"/>
+        <p14:creationId xmlns:p14="http://schemas.microsoft.com/office/powerpoint/2010/main" val="2517420712"/>
       </p:ext>
     </p:extLst>
   </p:cSld>
@@ -543,7 +543,7 @@
           <a:bodyPr/>
           <a:lstStyle/>
           <a:p>
-            <a:fld id="{4AA5213A-272A-46DE-A19A-34290041A493}" type="slidenum">
+            <a:fld id="{96044500-47D4-41DA-AA38-06BE861875DF}" type="slidenum">
               <a:rPr lang="en-IN" smtClean="0"/>
               <a:t>1</a:t>
             </a:fld>
@@ -554,7 +554,7 @@
     </p:spTree>
     <p:extLst>
       <p:ext uri="{BB962C8B-B14F-4D97-AF65-F5344CB8AC3E}">
-        <p14:creationId xmlns:p14="http://schemas.microsoft.com/office/powerpoint/2010/main" val="4194381756"/>
+        <p14:creationId xmlns:p14="http://schemas.microsoft.com/office/powerpoint/2010/main" val="1780990021"/>
       </p:ext>
     </p:extLst>
   </p:cSld>
@@ -631,7 +631,7 @@
           <a:bodyPr/>
           <a:lstStyle/>
           <a:p>
-            <a:fld id="{4AA5213A-272A-46DE-A19A-34290041A493}" type="slidenum">
+            <a:fld id="{96044500-47D4-41DA-AA38-06BE861875DF}" type="slidenum">
               <a:rPr lang="en-IN" smtClean="0"/>
               <a:t>10</a:t>
             </a:fld>
@@ -642,7 +642,7 @@
     </p:spTree>
     <p:extLst>
       <p:ext uri="{BB962C8B-B14F-4D97-AF65-F5344CB8AC3E}">
-        <p14:creationId xmlns:p14="http://schemas.microsoft.com/office/powerpoint/2010/main" val="1237195612"/>
+        <p14:creationId xmlns:p14="http://schemas.microsoft.com/office/powerpoint/2010/main" val="742003854"/>
       </p:ext>
     </p:extLst>
   </p:cSld>
@@ -719,7 +719,7 @@
           <a:bodyPr/>
           <a:lstStyle/>
           <a:p>
-            <a:fld id="{4AA5213A-272A-46DE-A19A-34290041A493}" type="slidenum">
+            <a:fld id="{96044500-47D4-41DA-AA38-06BE861875DF}" type="slidenum">
               <a:rPr lang="en-IN" smtClean="0"/>
               <a:t>11</a:t>
             </a:fld>
@@ -730,7 +730,7 @@
     </p:spTree>
     <p:extLst>
       <p:ext uri="{BB962C8B-B14F-4D97-AF65-F5344CB8AC3E}">
-        <p14:creationId xmlns:p14="http://schemas.microsoft.com/office/powerpoint/2010/main" val="3210066702"/>
+        <p14:creationId xmlns:p14="http://schemas.microsoft.com/office/powerpoint/2010/main" val="1848936868"/>
       </p:ext>
     </p:extLst>
   </p:cSld>
@@ -807,7 +807,7 @@
           <a:bodyPr/>
           <a:lstStyle/>
           <a:p>
-            <a:fld id="{4AA5213A-272A-46DE-A19A-34290041A493}" type="slidenum">
+            <a:fld id="{96044500-47D4-41DA-AA38-06BE861875DF}" type="slidenum">
               <a:rPr lang="en-IN" smtClean="0"/>
               <a:t>12</a:t>
             </a:fld>
@@ -818,7 +818,7 @@
     </p:spTree>
     <p:extLst>
       <p:ext uri="{BB962C8B-B14F-4D97-AF65-F5344CB8AC3E}">
-        <p14:creationId xmlns:p14="http://schemas.microsoft.com/office/powerpoint/2010/main" val="2705128930"/>
+        <p14:creationId xmlns:p14="http://schemas.microsoft.com/office/powerpoint/2010/main" val="1426464195"/>
       </p:ext>
     </p:extLst>
   </p:cSld>
@@ -895,7 +895,7 @@
           <a:bodyPr/>
           <a:lstStyle/>
           <a:p>
-            <a:fld id="{4AA5213A-272A-46DE-A19A-34290041A493}" type="slidenum">
+            <a:fld id="{96044500-47D4-41DA-AA38-06BE861875DF}" type="slidenum">
               <a:rPr lang="en-IN" smtClean="0"/>
               <a:t>13</a:t>
             </a:fld>
@@ -906,7 +906,7 @@
     </p:spTree>
     <p:extLst>
       <p:ext uri="{BB962C8B-B14F-4D97-AF65-F5344CB8AC3E}">
-        <p14:creationId xmlns:p14="http://schemas.microsoft.com/office/powerpoint/2010/main" val="3932707134"/>
+        <p14:creationId xmlns:p14="http://schemas.microsoft.com/office/powerpoint/2010/main" val="1289506741"/>
       </p:ext>
     </p:extLst>
   </p:cSld>
@@ -983,7 +983,7 @@
           <a:bodyPr/>
           <a:lstStyle/>
           <a:p>
-            <a:fld id="{4AA5213A-272A-46DE-A19A-34290041A493}" type="slidenum">
+            <a:fld id="{96044500-47D4-41DA-AA38-06BE861875DF}" type="slidenum">
               <a:rPr lang="en-IN" smtClean="0"/>
               <a:t>14</a:t>
             </a:fld>
@@ -994,7 +994,7 @@
     </p:spTree>
     <p:extLst>
       <p:ext uri="{BB962C8B-B14F-4D97-AF65-F5344CB8AC3E}">
-        <p14:creationId xmlns:p14="http://schemas.microsoft.com/office/powerpoint/2010/main" val="561185659"/>
+        <p14:creationId xmlns:p14="http://schemas.microsoft.com/office/powerpoint/2010/main" val="1484321723"/>
       </p:ext>
     </p:extLst>
   </p:cSld>
@@ -1050,7 +1050,7 @@
           <a:p>
             <a:r>
               <a:rPr lang="en-US"/>
-              <a:t>The implemented contribution is the controlled comparison and inspectable integration of two-view absolute differences and diagnostic agreement. Components are established; HOG itself is not new. The measured gain is uncertain, so do not claim a new architecture, detector or state-of-the-art result. The audit also corrects an optimistic initial result, and calibration fails to transfer. Mention possible missed copies and unverified labels. Course mapping and viva guide contain page references and a measured trace. Team identities and repository URL are on the cover.</a:t>
+              <a:t>The implemented contribution is the controlled comparison and inspectable integration of two-view absolute differences and diagnostic agreement. Components are established; HOG itself is not new. The measured gain is uncertain, so do not claim a new architecture, detector or state-of-the-art result. The audit also corrects an optimistic initial result, and calibration fails to transfer. Mention possible missed copies and unverified labels. See docs/model_card.md for the limits, docs/demo_guide.md for the demonstration sequence, and results/revision/worked_trace.json for a measured trace. Team identities and repository URL are on the cover.</a:t>
             </a:r>
             <a:endParaRPr lang="en-IN"/>
           </a:p>
@@ -1071,7 +1071,7 @@
           <a:bodyPr/>
           <a:lstStyle/>
           <a:p>
-            <a:fld id="{4AA5213A-272A-46DE-A19A-34290041A493}" type="slidenum">
+            <a:fld id="{96044500-47D4-41DA-AA38-06BE861875DF}" type="slidenum">
               <a:rPr lang="en-IN" smtClean="0"/>
               <a:t>15</a:t>
             </a:fld>
@@ -1082,7 +1082,7 @@
     </p:spTree>
     <p:extLst>
       <p:ext uri="{BB962C8B-B14F-4D97-AF65-F5344CB8AC3E}">
-        <p14:creationId xmlns:p14="http://schemas.microsoft.com/office/powerpoint/2010/main" val="4136491437"/>
+        <p14:creationId xmlns:p14="http://schemas.microsoft.com/office/powerpoint/2010/main" val="167418254"/>
       </p:ext>
     </p:extLst>
   </p:cSld>
@@ -1159,7 +1159,7 @@
           <a:bodyPr/>
           <a:lstStyle/>
           <a:p>
-            <a:fld id="{4AA5213A-272A-46DE-A19A-34290041A493}" type="slidenum">
+            <a:fld id="{96044500-47D4-41DA-AA38-06BE861875DF}" type="slidenum">
               <a:rPr lang="en-IN" smtClean="0"/>
               <a:t>16</a:t>
             </a:fld>
@@ -1170,7 +1170,7 @@
     </p:spTree>
     <p:extLst>
       <p:ext uri="{BB962C8B-B14F-4D97-AF65-F5344CB8AC3E}">
-        <p14:creationId xmlns:p14="http://schemas.microsoft.com/office/powerpoint/2010/main" val="397433071"/>
+        <p14:creationId xmlns:p14="http://schemas.microsoft.com/office/powerpoint/2010/main" val="3631531938"/>
       </p:ext>
     </p:extLst>
   </p:cSld>
@@ -1247,7 +1247,7 @@
           <a:bodyPr/>
           <a:lstStyle/>
           <a:p>
-            <a:fld id="{4AA5213A-272A-46DE-A19A-34290041A493}" type="slidenum">
+            <a:fld id="{96044500-47D4-41DA-AA38-06BE861875DF}" type="slidenum">
               <a:rPr lang="en-IN" smtClean="0"/>
               <a:t>17</a:t>
             </a:fld>
@@ -1258,7 +1258,7 @@
     </p:spTree>
     <p:extLst>
       <p:ext uri="{BB962C8B-B14F-4D97-AF65-F5344CB8AC3E}">
-        <p14:creationId xmlns:p14="http://schemas.microsoft.com/office/powerpoint/2010/main" val="1667817277"/>
+        <p14:creationId xmlns:p14="http://schemas.microsoft.com/office/powerpoint/2010/main" val="3126484929"/>
       </p:ext>
     </p:extLst>
   </p:cSld>
@@ -1335,7 +1335,7 @@
           <a:bodyPr/>
           <a:lstStyle/>
           <a:p>
-            <a:fld id="{4AA5213A-272A-46DE-A19A-34290041A493}" type="slidenum">
+            <a:fld id="{96044500-47D4-41DA-AA38-06BE861875DF}" type="slidenum">
               <a:rPr lang="en-IN" smtClean="0"/>
               <a:t>2</a:t>
             </a:fld>
@@ -1346,7 +1346,7 @@
     </p:spTree>
     <p:extLst>
       <p:ext uri="{BB962C8B-B14F-4D97-AF65-F5344CB8AC3E}">
-        <p14:creationId xmlns:p14="http://schemas.microsoft.com/office/powerpoint/2010/main" val="3201299443"/>
+        <p14:creationId xmlns:p14="http://schemas.microsoft.com/office/powerpoint/2010/main" val="3824324069"/>
       </p:ext>
     </p:extLst>
   </p:cSld>
@@ -1422,7 +1422,7 @@
           <a:bodyPr/>
           <a:lstStyle/>
           <a:p>
-            <a:fld id="{4AA5213A-272A-46DE-A19A-34290041A493}" type="slidenum">
+            <a:fld id="{96044500-47D4-41DA-AA38-06BE861875DF}" type="slidenum">
               <a:rPr lang="en-IN" smtClean="0"/>
               <a:t>3</a:t>
             </a:fld>
@@ -1433,7 +1433,7 @@
     </p:spTree>
     <p:extLst>
       <p:ext uri="{BB962C8B-B14F-4D97-AF65-F5344CB8AC3E}">
-        <p14:creationId xmlns:p14="http://schemas.microsoft.com/office/powerpoint/2010/main" val="864504012"/>
+        <p14:creationId xmlns:p14="http://schemas.microsoft.com/office/powerpoint/2010/main" val="3414639109"/>
       </p:ext>
     </p:extLst>
   </p:cSld>
@@ -1510,7 +1510,7 @@
           <a:bodyPr/>
           <a:lstStyle/>
           <a:p>
-            <a:fld id="{4AA5213A-272A-46DE-A19A-34290041A493}" type="slidenum">
+            <a:fld id="{96044500-47D4-41DA-AA38-06BE861875DF}" type="slidenum">
               <a:rPr lang="en-IN" smtClean="0"/>
               <a:t>4</a:t>
             </a:fld>
@@ -1521,7 +1521,7 @@
     </p:spTree>
     <p:extLst>
       <p:ext uri="{BB962C8B-B14F-4D97-AF65-F5344CB8AC3E}">
-        <p14:creationId xmlns:p14="http://schemas.microsoft.com/office/powerpoint/2010/main" val="2507618464"/>
+        <p14:creationId xmlns:p14="http://schemas.microsoft.com/office/powerpoint/2010/main" val="723678728"/>
       </p:ext>
     </p:extLst>
   </p:cSld>
@@ -1598,7 +1598,7 @@
           <a:bodyPr/>
           <a:lstStyle/>
           <a:p>
-            <a:fld id="{4AA5213A-272A-46DE-A19A-34290041A493}" type="slidenum">
+            <a:fld id="{96044500-47D4-41DA-AA38-06BE861875DF}" type="slidenum">
               <a:rPr lang="en-IN" smtClean="0"/>
               <a:t>5</a:t>
             </a:fld>
@@ -1609,7 +1609,7 @@
     </p:spTree>
     <p:extLst>
       <p:ext uri="{BB962C8B-B14F-4D97-AF65-F5344CB8AC3E}">
-        <p14:creationId xmlns:p14="http://schemas.microsoft.com/office/powerpoint/2010/main" val="50751310"/>
+        <p14:creationId xmlns:p14="http://schemas.microsoft.com/office/powerpoint/2010/main" val="3407129209"/>
       </p:ext>
     </p:extLst>
   </p:cSld>
@@ -1665,7 +1665,7 @@
           <a:p>
             <a:r>
               <a:rPr lang="en-US"/>
-              <a:t>Explain the two branches. HOG and CNN global inputs have identical aspect-preserving 224 square geometry. The fixed crop reduces some background without training a detector, but can miss an off-center batter. Keeping the global view preserves a second source of context, although square center fitting also removes peripheral pixels. MobileNetV2 is an efficient ImageNet backbone selected for CPU use; freezing limits cricket fitting to small heads on only 221 training groups. This is design reasoning, not proof that freezing or this model is optimal. CNN has two view passes; its heads share features. Source: actual implemented pipeline, https://arxiv.org/abs/1801.04381 , and docs/course_mapping.md.</a:t>
+              <a:t>Explain the two branches. HOG and CNN global inputs have identical aspect-preserving 224 square geometry. The fixed crop reduces some background without training a detector, but can miss an off-center batter. Keeping the global view preserves a second source of context, although square center fitting also removes peripheral pixels. MobileNetV2 is an efficient ImageNet backbone selected for CPU use; freezing limits cricket fitting to small heads on only 221 training groups. This is design reasoning, not proof that freezing or this model is optimal. CNN has two view passes; its heads share features. Source: actual implemented pipeline, https://arxiv.org/abs/1801.04381 , and docs/model_card.md.</a:t>
             </a:r>
             <a:endParaRPr lang="en-IN"/>
           </a:p>
@@ -1686,7 +1686,7 @@
           <a:bodyPr/>
           <a:lstStyle/>
           <a:p>
-            <a:fld id="{4AA5213A-272A-46DE-A19A-34290041A493}" type="slidenum">
+            <a:fld id="{96044500-47D4-41DA-AA38-06BE861875DF}" type="slidenum">
               <a:rPr lang="en-IN" smtClean="0"/>
               <a:t>6</a:t>
             </a:fld>
@@ -1697,7 +1697,7 @@
     </p:spTree>
     <p:extLst>
       <p:ext uri="{BB962C8B-B14F-4D97-AF65-F5344CB8AC3E}">
-        <p14:creationId xmlns:p14="http://schemas.microsoft.com/office/powerpoint/2010/main" val="904135411"/>
+        <p14:creationId xmlns:p14="http://schemas.microsoft.com/office/powerpoint/2010/main" val="3165210734"/>
       </p:ext>
     </p:extLst>
   </p:cSld>
@@ -1774,7 +1774,7 @@
           <a:bodyPr/>
           <a:lstStyle/>
           <a:p>
-            <a:fld id="{4AA5213A-272A-46DE-A19A-34290041A493}" type="slidenum">
+            <a:fld id="{96044500-47D4-41DA-AA38-06BE861875DF}" type="slidenum">
               <a:rPr lang="en-IN" smtClean="0"/>
               <a:t>7</a:t>
             </a:fld>
@@ -1785,7 +1785,7 @@
     </p:spTree>
     <p:extLst>
       <p:ext uri="{BB962C8B-B14F-4D97-AF65-F5344CB8AC3E}">
-        <p14:creationId xmlns:p14="http://schemas.microsoft.com/office/powerpoint/2010/main" val="2450398750"/>
+        <p14:creationId xmlns:p14="http://schemas.microsoft.com/office/powerpoint/2010/main" val="260950304"/>
       </p:ext>
     </p:extLst>
   </p:cSld>
@@ -1862,7 +1862,7 @@
           <a:bodyPr/>
           <a:lstStyle/>
           <a:p>
-            <a:fld id="{4AA5213A-272A-46DE-A19A-34290041A493}" type="slidenum">
+            <a:fld id="{96044500-47D4-41DA-AA38-06BE861875DF}" type="slidenum">
               <a:rPr lang="en-IN" smtClean="0"/>
               <a:t>8</a:t>
             </a:fld>
@@ -1873,7 +1873,7 @@
     </p:spTree>
     <p:extLst>
       <p:ext uri="{BB962C8B-B14F-4D97-AF65-F5344CB8AC3E}">
-        <p14:creationId xmlns:p14="http://schemas.microsoft.com/office/powerpoint/2010/main" val="4029942261"/>
+        <p14:creationId xmlns:p14="http://schemas.microsoft.com/office/powerpoint/2010/main" val="842801177"/>
       </p:ext>
     </p:extLst>
   </p:cSld>
@@ -1950,7 +1950,7 @@
           <a:bodyPr/>
           <a:lstStyle/>
           <a:p>
-            <a:fld id="{4AA5213A-272A-46DE-A19A-34290041A493}" type="slidenum">
+            <a:fld id="{96044500-47D4-41DA-AA38-06BE861875DF}" type="slidenum">
               <a:rPr lang="en-IN" smtClean="0"/>
               <a:t>9</a:t>
             </a:fld>
@@ -1961,7 +1961,7 @@
     </p:spTree>
     <p:extLst>
       <p:ext uri="{BB962C8B-B14F-4D97-AF65-F5344CB8AC3E}">
-        <p14:creationId xmlns:p14="http://schemas.microsoft.com/office/powerpoint/2010/main" val="1013084671"/>
+        <p14:creationId xmlns:p14="http://schemas.microsoft.com/office/powerpoint/2010/main" val="2486728342"/>
       </p:ext>
     </p:extLst>
   </p:cSld>
@@ -1993,7 +1993,7 @@
           <p:cNvPr id="2" name="Title 1">
             <a:extLst>
               <a:ext uri="{FF2B5EF4-FFF2-40B4-BE49-F238E27FC236}">
-                <a16:creationId xmlns:a16="http://schemas.microsoft.com/office/drawing/2014/main" id="{F481EC0F-7120-514A-8F49-A997FBADA31F}"/>
+                <a16:creationId xmlns:a16="http://schemas.microsoft.com/office/drawing/2014/main" id="{32E3B9FB-405D-7602-8182-427EC535C603}"/>
               </a:ext>
             </a:extLst>
           </p:cNvPr>
@@ -2031,7 +2031,7 @@
           <p:cNvPr id="3" name="Subtitle 2">
             <a:extLst>
               <a:ext uri="{FF2B5EF4-FFF2-40B4-BE49-F238E27FC236}">
-                <a16:creationId xmlns:a16="http://schemas.microsoft.com/office/drawing/2014/main" id="{491E7FF8-C664-9818-B1C1-44B09DCA81A1}"/>
+                <a16:creationId xmlns:a16="http://schemas.microsoft.com/office/drawing/2014/main" id="{3AD404EC-A263-2AB9-DC0A-DC0E6833A5A1}"/>
               </a:ext>
             </a:extLst>
           </p:cNvPr>
@@ -2102,7 +2102,7 @@
           <p:cNvPr id="4" name="Date Placeholder 3">
             <a:extLst>
               <a:ext uri="{FF2B5EF4-FFF2-40B4-BE49-F238E27FC236}">
-                <a16:creationId xmlns:a16="http://schemas.microsoft.com/office/drawing/2014/main" id="{EA122A85-E50E-B6C1-55CB-983104B37036}"/>
+                <a16:creationId xmlns:a16="http://schemas.microsoft.com/office/drawing/2014/main" id="{349B51BC-32F7-7102-81CA-9A42EFA97583}"/>
               </a:ext>
             </a:extLst>
           </p:cNvPr>
@@ -2118,7 +2118,7 @@
           <a:bodyPr/>
           <a:lstStyle/>
           <a:p>
-            <a:fld id="{E76C1D1B-AA06-4462-8688-FBED31F28147}" type="datetimeFigureOut">
+            <a:fld id="{CF77B9CA-A32C-4D1D-B50C-352A4AF66B49}" type="datetimeFigureOut">
               <a:rPr lang="en-IN" smtClean="0"/>
               <a:t>19-10-2026</a:t>
             </a:fld>
@@ -2131,7 +2131,7 @@
           <p:cNvPr id="5" name="Footer Placeholder 4">
             <a:extLst>
               <a:ext uri="{FF2B5EF4-FFF2-40B4-BE49-F238E27FC236}">
-                <a16:creationId xmlns:a16="http://schemas.microsoft.com/office/drawing/2014/main" id="{D21A4E10-B8BB-8588-4EEF-F3F72361960A}"/>
+                <a16:creationId xmlns:a16="http://schemas.microsoft.com/office/drawing/2014/main" id="{BDC88FB0-4B38-D5D4-5B3A-1F6CDC7FBBCB}"/>
               </a:ext>
             </a:extLst>
           </p:cNvPr>
@@ -2156,7 +2156,7 @@
           <p:cNvPr id="6" name="Slide Number Placeholder 5">
             <a:extLst>
               <a:ext uri="{FF2B5EF4-FFF2-40B4-BE49-F238E27FC236}">
-                <a16:creationId xmlns:a16="http://schemas.microsoft.com/office/drawing/2014/main" id="{B5C22462-5038-5229-C3C5-D64DB616C78F}"/>
+                <a16:creationId xmlns:a16="http://schemas.microsoft.com/office/drawing/2014/main" id="{4C148A91-47A7-6845-EBE8-58760AFBF981}"/>
               </a:ext>
             </a:extLst>
           </p:cNvPr>
@@ -2172,7 +2172,7 @@
           <a:bodyPr/>
           <a:lstStyle/>
           <a:p>
-            <a:fld id="{3A465F51-8CAF-4CA4-B81F-97E2B4F072C2}" type="slidenum">
+            <a:fld id="{7BDC2CD4-1CF7-449C-939F-B74BB9422D7B}" type="slidenum">
               <a:rPr lang="en-IN" smtClean="0"/>
               <a:t>‹#›</a:t>
             </a:fld>
@@ -2183,7 +2183,7 @@
     </p:spTree>
     <p:extLst>
       <p:ext uri="{BB962C8B-B14F-4D97-AF65-F5344CB8AC3E}">
-        <p14:creationId xmlns:p14="http://schemas.microsoft.com/office/powerpoint/2010/main" val="3221950894"/>
+        <p14:creationId xmlns:p14="http://schemas.microsoft.com/office/powerpoint/2010/main" val="449963003"/>
       </p:ext>
     </p:extLst>
   </p:cSld>
@@ -2215,7 +2215,7 @@
           <p:cNvPr id="2" name="Title 1">
             <a:extLst>
               <a:ext uri="{FF2B5EF4-FFF2-40B4-BE49-F238E27FC236}">
-                <a16:creationId xmlns:a16="http://schemas.microsoft.com/office/drawing/2014/main" id="{B0625B52-BBB6-F396-D12E-A5A3CF42B820}"/>
+                <a16:creationId xmlns:a16="http://schemas.microsoft.com/office/drawing/2014/main" id="{0043DB1B-A6D2-D803-8E38-F0D43116D6BD}"/>
               </a:ext>
             </a:extLst>
           </p:cNvPr>
@@ -2244,7 +2244,7 @@
           <p:cNvPr id="3" name="Vertical Text Placeholder 2">
             <a:extLst>
               <a:ext uri="{FF2B5EF4-FFF2-40B4-BE49-F238E27FC236}">
-                <a16:creationId xmlns:a16="http://schemas.microsoft.com/office/drawing/2014/main" id="{9C87811D-15D8-2E63-9951-AF6AC65269AE}"/>
+                <a16:creationId xmlns:a16="http://schemas.microsoft.com/office/drawing/2014/main" id="{09341084-A7EC-6EB3-F727-9B561002A29F}"/>
               </a:ext>
             </a:extLst>
           </p:cNvPr>
@@ -2302,7 +2302,7 @@
           <p:cNvPr id="4" name="Date Placeholder 3">
             <a:extLst>
               <a:ext uri="{FF2B5EF4-FFF2-40B4-BE49-F238E27FC236}">
-                <a16:creationId xmlns:a16="http://schemas.microsoft.com/office/drawing/2014/main" id="{78058160-46E2-06D9-3645-485D8030144C}"/>
+                <a16:creationId xmlns:a16="http://schemas.microsoft.com/office/drawing/2014/main" id="{52C510A1-5368-0111-910D-1962CED5926F}"/>
               </a:ext>
             </a:extLst>
           </p:cNvPr>
@@ -2318,7 +2318,7 @@
           <a:bodyPr/>
           <a:lstStyle/>
           <a:p>
-            <a:fld id="{E76C1D1B-AA06-4462-8688-FBED31F28147}" type="datetimeFigureOut">
+            <a:fld id="{CF77B9CA-A32C-4D1D-B50C-352A4AF66B49}" type="datetimeFigureOut">
               <a:rPr lang="en-IN" smtClean="0"/>
               <a:t>19-10-2026</a:t>
             </a:fld>
@@ -2331,7 +2331,7 @@
           <p:cNvPr id="5" name="Footer Placeholder 4">
             <a:extLst>
               <a:ext uri="{FF2B5EF4-FFF2-40B4-BE49-F238E27FC236}">
-                <a16:creationId xmlns:a16="http://schemas.microsoft.com/office/drawing/2014/main" id="{CD74A6D5-C18C-C6E6-4761-885D2830B807}"/>
+                <a16:creationId xmlns:a16="http://schemas.microsoft.com/office/drawing/2014/main" id="{32505051-38EA-8252-FA28-61FB2422D770}"/>
               </a:ext>
             </a:extLst>
           </p:cNvPr>
@@ -2356,7 +2356,7 @@
           <p:cNvPr id="6" name="Slide Number Placeholder 5">
             <a:extLst>
               <a:ext uri="{FF2B5EF4-FFF2-40B4-BE49-F238E27FC236}">
-                <a16:creationId xmlns:a16="http://schemas.microsoft.com/office/drawing/2014/main" id="{F7FB4500-D7FB-1B19-C5EE-F114AF0720A6}"/>
+                <a16:creationId xmlns:a16="http://schemas.microsoft.com/office/drawing/2014/main" id="{C4A7F37C-721F-EB2F-E9A6-9607AAC2B2E7}"/>
               </a:ext>
             </a:extLst>
           </p:cNvPr>
@@ -2372,7 +2372,7 @@
           <a:bodyPr/>
           <a:lstStyle/>
           <a:p>
-            <a:fld id="{3A465F51-8CAF-4CA4-B81F-97E2B4F072C2}" type="slidenum">
+            <a:fld id="{7BDC2CD4-1CF7-449C-939F-B74BB9422D7B}" type="slidenum">
               <a:rPr lang="en-IN" smtClean="0"/>
               <a:t>‹#›</a:t>
             </a:fld>
@@ -2383,7 +2383,7 @@
     </p:spTree>
     <p:extLst>
       <p:ext uri="{BB962C8B-B14F-4D97-AF65-F5344CB8AC3E}">
-        <p14:creationId xmlns:p14="http://schemas.microsoft.com/office/powerpoint/2010/main" val="3102081504"/>
+        <p14:creationId xmlns:p14="http://schemas.microsoft.com/office/powerpoint/2010/main" val="3142512368"/>
       </p:ext>
     </p:extLst>
   </p:cSld>
@@ -2415,7 +2415,7 @@
           <p:cNvPr id="2" name="Vertical Title 1">
             <a:extLst>
               <a:ext uri="{FF2B5EF4-FFF2-40B4-BE49-F238E27FC236}">
-                <a16:creationId xmlns:a16="http://schemas.microsoft.com/office/drawing/2014/main" id="{CFC98674-F19F-9D15-B4CC-339B7440F265}"/>
+                <a16:creationId xmlns:a16="http://schemas.microsoft.com/office/drawing/2014/main" id="{1F1C8345-6971-8913-0E9E-EBAFF26FA0CF}"/>
               </a:ext>
             </a:extLst>
           </p:cNvPr>
@@ -2449,7 +2449,7 @@
           <p:cNvPr id="3" name="Vertical Text Placeholder 2">
             <a:extLst>
               <a:ext uri="{FF2B5EF4-FFF2-40B4-BE49-F238E27FC236}">
-                <a16:creationId xmlns:a16="http://schemas.microsoft.com/office/drawing/2014/main" id="{5E87178C-7669-D6CB-35C1-E5E998F03782}"/>
+                <a16:creationId xmlns:a16="http://schemas.microsoft.com/office/drawing/2014/main" id="{09166412-46E0-2D44-7AC3-F5093B946734}"/>
               </a:ext>
             </a:extLst>
           </p:cNvPr>
@@ -2512,7 +2512,7 @@
           <p:cNvPr id="4" name="Date Placeholder 3">
             <a:extLst>
               <a:ext uri="{FF2B5EF4-FFF2-40B4-BE49-F238E27FC236}">
-                <a16:creationId xmlns:a16="http://schemas.microsoft.com/office/drawing/2014/main" id="{E5A105C8-4737-1F72-D9B1-9DC0A2A7C8F6}"/>
+                <a16:creationId xmlns:a16="http://schemas.microsoft.com/office/drawing/2014/main" id="{7EC35946-66F5-E6AF-4EDE-02A2D1A5240E}"/>
               </a:ext>
             </a:extLst>
           </p:cNvPr>
@@ -2528,7 +2528,7 @@
           <a:bodyPr/>
           <a:lstStyle/>
           <a:p>
-            <a:fld id="{E76C1D1B-AA06-4462-8688-FBED31F28147}" type="datetimeFigureOut">
+            <a:fld id="{CF77B9CA-A32C-4D1D-B50C-352A4AF66B49}" type="datetimeFigureOut">
               <a:rPr lang="en-IN" smtClean="0"/>
               <a:t>19-10-2026</a:t>
             </a:fld>
@@ -2541,7 +2541,7 @@
           <p:cNvPr id="5" name="Footer Placeholder 4">
             <a:extLst>
               <a:ext uri="{FF2B5EF4-FFF2-40B4-BE49-F238E27FC236}">
-                <a16:creationId xmlns:a16="http://schemas.microsoft.com/office/drawing/2014/main" id="{ECF44B8D-6392-93FF-4E29-0C906AEC7884}"/>
+                <a16:creationId xmlns:a16="http://schemas.microsoft.com/office/drawing/2014/main" id="{89929D82-0FA8-22B1-3DBE-A743E4194156}"/>
               </a:ext>
             </a:extLst>
           </p:cNvPr>
@@ -2566,7 +2566,7 @@
           <p:cNvPr id="6" name="Slide Number Placeholder 5">
             <a:extLst>
               <a:ext uri="{FF2B5EF4-FFF2-40B4-BE49-F238E27FC236}">
-                <a16:creationId xmlns:a16="http://schemas.microsoft.com/office/drawing/2014/main" id="{8D7CF9FF-4779-CAEF-E91D-6F0F3FDC138F}"/>
+                <a16:creationId xmlns:a16="http://schemas.microsoft.com/office/drawing/2014/main" id="{A6691BC0-7231-1AF2-C035-B61DD13D0A41}"/>
               </a:ext>
             </a:extLst>
           </p:cNvPr>
@@ -2582,7 +2582,7 @@
           <a:bodyPr/>
           <a:lstStyle/>
           <a:p>
-            <a:fld id="{3A465F51-8CAF-4CA4-B81F-97E2B4F072C2}" type="slidenum">
+            <a:fld id="{7BDC2CD4-1CF7-449C-939F-B74BB9422D7B}" type="slidenum">
               <a:rPr lang="en-IN" smtClean="0"/>
               <a:t>‹#›</a:t>
             </a:fld>
@@ -2593,7 +2593,7 @@
     </p:spTree>
     <p:extLst>
       <p:ext uri="{BB962C8B-B14F-4D97-AF65-F5344CB8AC3E}">
-        <p14:creationId xmlns:p14="http://schemas.microsoft.com/office/powerpoint/2010/main" val="385738295"/>
+        <p14:creationId xmlns:p14="http://schemas.microsoft.com/office/powerpoint/2010/main" val="2295046"/>
       </p:ext>
     </p:extLst>
   </p:cSld>
@@ -2625,7 +2625,7 @@
           <p:cNvPr id="2" name="Title 1">
             <a:extLst>
               <a:ext uri="{FF2B5EF4-FFF2-40B4-BE49-F238E27FC236}">
-                <a16:creationId xmlns:a16="http://schemas.microsoft.com/office/drawing/2014/main" id="{8090D4BE-60E8-235A-190A-EA41B3A8D415}"/>
+                <a16:creationId xmlns:a16="http://schemas.microsoft.com/office/drawing/2014/main" id="{F7C5A256-4C0E-F6A8-80DD-2086F118B073}"/>
               </a:ext>
             </a:extLst>
           </p:cNvPr>
@@ -2654,7 +2654,7 @@
           <p:cNvPr id="3" name="Content Placeholder 2">
             <a:extLst>
               <a:ext uri="{FF2B5EF4-FFF2-40B4-BE49-F238E27FC236}">
-                <a16:creationId xmlns:a16="http://schemas.microsoft.com/office/drawing/2014/main" id="{E0F75527-3256-6DE3-4EE2-0161C0482179}"/>
+                <a16:creationId xmlns:a16="http://schemas.microsoft.com/office/drawing/2014/main" id="{7ED5BD42-73F0-8491-9CB3-545441AD6F52}"/>
               </a:ext>
             </a:extLst>
           </p:cNvPr>
@@ -2712,7 +2712,7 @@
           <p:cNvPr id="4" name="Date Placeholder 3">
             <a:extLst>
               <a:ext uri="{FF2B5EF4-FFF2-40B4-BE49-F238E27FC236}">
-                <a16:creationId xmlns:a16="http://schemas.microsoft.com/office/drawing/2014/main" id="{45FABFEB-B6D0-D0A5-024A-4F5E9225A8F0}"/>
+                <a16:creationId xmlns:a16="http://schemas.microsoft.com/office/drawing/2014/main" id="{0EA0B859-0CBC-F1B9-0984-08FC747D9BF9}"/>
               </a:ext>
             </a:extLst>
           </p:cNvPr>
@@ -2728,7 +2728,7 @@
           <a:bodyPr/>
           <a:lstStyle/>
           <a:p>
-            <a:fld id="{E76C1D1B-AA06-4462-8688-FBED31F28147}" type="datetimeFigureOut">
+            <a:fld id="{CF77B9CA-A32C-4D1D-B50C-352A4AF66B49}" type="datetimeFigureOut">
               <a:rPr lang="en-IN" smtClean="0"/>
               <a:t>19-10-2026</a:t>
             </a:fld>
@@ -2741,7 +2741,7 @@
           <p:cNvPr id="5" name="Footer Placeholder 4">
             <a:extLst>
               <a:ext uri="{FF2B5EF4-FFF2-40B4-BE49-F238E27FC236}">
-                <a16:creationId xmlns:a16="http://schemas.microsoft.com/office/drawing/2014/main" id="{5109E4CC-52D8-49D6-1416-E4467DB3E11C}"/>
+                <a16:creationId xmlns:a16="http://schemas.microsoft.com/office/drawing/2014/main" id="{B4588016-4D42-B5CC-62E4-5801DAD90D46}"/>
               </a:ext>
             </a:extLst>
           </p:cNvPr>
@@ -2766,7 +2766,7 @@
           <p:cNvPr id="6" name="Slide Number Placeholder 5">
             <a:extLst>
               <a:ext uri="{FF2B5EF4-FFF2-40B4-BE49-F238E27FC236}">
-                <a16:creationId xmlns:a16="http://schemas.microsoft.com/office/drawing/2014/main" id="{D165522A-F974-011B-F7F2-C14AB7C54D7A}"/>
+                <a16:creationId xmlns:a16="http://schemas.microsoft.com/office/drawing/2014/main" id="{053380CD-5899-EB40-7AA2-3F49AADDCA2A}"/>
               </a:ext>
             </a:extLst>
           </p:cNvPr>
@@ -2782,7 +2782,7 @@
           <a:bodyPr/>
           <a:lstStyle/>
           <a:p>
-            <a:fld id="{3A465F51-8CAF-4CA4-B81F-97E2B4F072C2}" type="slidenum">
+            <a:fld id="{7BDC2CD4-1CF7-449C-939F-B74BB9422D7B}" type="slidenum">
               <a:rPr lang="en-IN" smtClean="0"/>
               <a:t>‹#›</a:t>
             </a:fld>
@@ -2793,7 +2793,7 @@
     </p:spTree>
     <p:extLst>
       <p:ext uri="{BB962C8B-B14F-4D97-AF65-F5344CB8AC3E}">
-        <p14:creationId xmlns:p14="http://schemas.microsoft.com/office/powerpoint/2010/main" val="4181409426"/>
+        <p14:creationId xmlns:p14="http://schemas.microsoft.com/office/powerpoint/2010/main" val="4233872060"/>
       </p:ext>
     </p:extLst>
   </p:cSld>
@@ -2825,7 +2825,7 @@
           <p:cNvPr id="2" name="Title 1">
             <a:extLst>
               <a:ext uri="{FF2B5EF4-FFF2-40B4-BE49-F238E27FC236}">
-                <a16:creationId xmlns:a16="http://schemas.microsoft.com/office/drawing/2014/main" id="{E043EAEA-B0C7-3E07-5FF3-CA088E9CB4E8}"/>
+                <a16:creationId xmlns:a16="http://schemas.microsoft.com/office/drawing/2014/main" id="{C832BC52-B2A2-5E3C-2C59-A04E57DD3240}"/>
               </a:ext>
             </a:extLst>
           </p:cNvPr>
@@ -2863,7 +2863,7 @@
           <p:cNvPr id="3" name="Text Placeholder 2">
             <a:extLst>
               <a:ext uri="{FF2B5EF4-FFF2-40B4-BE49-F238E27FC236}">
-                <a16:creationId xmlns:a16="http://schemas.microsoft.com/office/drawing/2014/main" id="{5C07B916-2EF4-B9EA-04CB-635DFC61E041}"/>
+                <a16:creationId xmlns:a16="http://schemas.microsoft.com/office/drawing/2014/main" id="{14278C9C-D9BB-7AD4-6D82-981F59DAB108}"/>
               </a:ext>
             </a:extLst>
           </p:cNvPr>
@@ -2988,7 +2988,7 @@
           <p:cNvPr id="4" name="Date Placeholder 3">
             <a:extLst>
               <a:ext uri="{FF2B5EF4-FFF2-40B4-BE49-F238E27FC236}">
-                <a16:creationId xmlns:a16="http://schemas.microsoft.com/office/drawing/2014/main" id="{4A2580D5-BC59-0A73-CCB5-AAC894ABE22E}"/>
+                <a16:creationId xmlns:a16="http://schemas.microsoft.com/office/drawing/2014/main" id="{7F7B04C8-2EE7-CEFE-7CB7-9010B5156348}"/>
               </a:ext>
             </a:extLst>
           </p:cNvPr>
@@ -3004,7 +3004,7 @@
           <a:bodyPr/>
           <a:lstStyle/>
           <a:p>
-            <a:fld id="{E76C1D1B-AA06-4462-8688-FBED31F28147}" type="datetimeFigureOut">
+            <a:fld id="{CF77B9CA-A32C-4D1D-B50C-352A4AF66B49}" type="datetimeFigureOut">
               <a:rPr lang="en-IN" smtClean="0"/>
               <a:t>19-10-2026</a:t>
             </a:fld>
@@ -3017,7 +3017,7 @@
           <p:cNvPr id="5" name="Footer Placeholder 4">
             <a:extLst>
               <a:ext uri="{FF2B5EF4-FFF2-40B4-BE49-F238E27FC236}">
-                <a16:creationId xmlns:a16="http://schemas.microsoft.com/office/drawing/2014/main" id="{24A00842-BE5A-C3FF-8F67-6D5A45466C21}"/>
+                <a16:creationId xmlns:a16="http://schemas.microsoft.com/office/drawing/2014/main" id="{AC2FEED0-6380-3209-4BFD-0166351EAF13}"/>
               </a:ext>
             </a:extLst>
           </p:cNvPr>
@@ -3042,7 +3042,7 @@
           <p:cNvPr id="6" name="Slide Number Placeholder 5">
             <a:extLst>
               <a:ext uri="{FF2B5EF4-FFF2-40B4-BE49-F238E27FC236}">
-                <a16:creationId xmlns:a16="http://schemas.microsoft.com/office/drawing/2014/main" id="{883D34F2-5435-D072-D47D-BCD076D5E04C}"/>
+                <a16:creationId xmlns:a16="http://schemas.microsoft.com/office/drawing/2014/main" id="{4428FFB6-46E9-BD1F-4C9A-7E598999DCCC}"/>
               </a:ext>
             </a:extLst>
           </p:cNvPr>
@@ -3058,7 +3058,7 @@
           <a:bodyPr/>
           <a:lstStyle/>
           <a:p>
-            <a:fld id="{3A465F51-8CAF-4CA4-B81F-97E2B4F072C2}" type="slidenum">
+            <a:fld id="{7BDC2CD4-1CF7-449C-939F-B74BB9422D7B}" type="slidenum">
               <a:rPr lang="en-IN" smtClean="0"/>
               <a:t>‹#›</a:t>
             </a:fld>
@@ -3069,7 +3069,7 @@
     </p:spTree>
     <p:extLst>
       <p:ext uri="{BB962C8B-B14F-4D97-AF65-F5344CB8AC3E}">
-        <p14:creationId xmlns:p14="http://schemas.microsoft.com/office/powerpoint/2010/main" val="1588132546"/>
+        <p14:creationId xmlns:p14="http://schemas.microsoft.com/office/powerpoint/2010/main" val="1360610038"/>
       </p:ext>
     </p:extLst>
   </p:cSld>
@@ -3101,7 +3101,7 @@
           <p:cNvPr id="2" name="Title 1">
             <a:extLst>
               <a:ext uri="{FF2B5EF4-FFF2-40B4-BE49-F238E27FC236}">
-                <a16:creationId xmlns:a16="http://schemas.microsoft.com/office/drawing/2014/main" id="{7960E171-542C-A5A8-0A10-B4E09F902D78}"/>
+                <a16:creationId xmlns:a16="http://schemas.microsoft.com/office/drawing/2014/main" id="{02A192C2-FB21-FBEA-B434-66FE0DC963BB}"/>
               </a:ext>
             </a:extLst>
           </p:cNvPr>
@@ -3130,7 +3130,7 @@
           <p:cNvPr id="3" name="Content Placeholder 2">
             <a:extLst>
               <a:ext uri="{FF2B5EF4-FFF2-40B4-BE49-F238E27FC236}">
-                <a16:creationId xmlns:a16="http://schemas.microsoft.com/office/drawing/2014/main" id="{A94181B6-EA6F-B186-0702-772E0D57253D}"/>
+                <a16:creationId xmlns:a16="http://schemas.microsoft.com/office/drawing/2014/main" id="{3E045E04-7B6A-C7E1-87ED-5D36280698B9}"/>
               </a:ext>
             </a:extLst>
           </p:cNvPr>
@@ -3193,7 +3193,7 @@
           <p:cNvPr id="4" name="Content Placeholder 3">
             <a:extLst>
               <a:ext uri="{FF2B5EF4-FFF2-40B4-BE49-F238E27FC236}">
-                <a16:creationId xmlns:a16="http://schemas.microsoft.com/office/drawing/2014/main" id="{BAFC398C-8661-D019-C3F4-4A976E2A64DA}"/>
+                <a16:creationId xmlns:a16="http://schemas.microsoft.com/office/drawing/2014/main" id="{52956A9C-1463-095B-CA5B-A806DA00984C}"/>
               </a:ext>
             </a:extLst>
           </p:cNvPr>
@@ -3256,7 +3256,7 @@
           <p:cNvPr id="5" name="Date Placeholder 4">
             <a:extLst>
               <a:ext uri="{FF2B5EF4-FFF2-40B4-BE49-F238E27FC236}">
-                <a16:creationId xmlns:a16="http://schemas.microsoft.com/office/drawing/2014/main" id="{7B59C235-830A-33D0-B137-4874C98ECD57}"/>
+                <a16:creationId xmlns:a16="http://schemas.microsoft.com/office/drawing/2014/main" id="{77888EB7-4565-98E7-440E-B1650F4E0C6D}"/>
               </a:ext>
             </a:extLst>
           </p:cNvPr>
@@ -3272,7 +3272,7 @@
           <a:bodyPr/>
           <a:lstStyle/>
           <a:p>
-            <a:fld id="{E76C1D1B-AA06-4462-8688-FBED31F28147}" type="datetimeFigureOut">
+            <a:fld id="{CF77B9CA-A32C-4D1D-B50C-352A4AF66B49}" type="datetimeFigureOut">
               <a:rPr lang="en-IN" smtClean="0"/>
               <a:t>19-10-2026</a:t>
             </a:fld>
@@ -3285,7 +3285,7 @@
           <p:cNvPr id="6" name="Footer Placeholder 5">
             <a:extLst>
               <a:ext uri="{FF2B5EF4-FFF2-40B4-BE49-F238E27FC236}">
-                <a16:creationId xmlns:a16="http://schemas.microsoft.com/office/drawing/2014/main" id="{DEA1105E-EA44-A3C4-20DE-5CF58D6B5C2F}"/>
+                <a16:creationId xmlns:a16="http://schemas.microsoft.com/office/drawing/2014/main" id="{BA908C9D-6781-B58B-E1E1-5090E54AC80D}"/>
               </a:ext>
             </a:extLst>
           </p:cNvPr>
@@ -3310,7 +3310,7 @@
           <p:cNvPr id="7" name="Slide Number Placeholder 6">
             <a:extLst>
               <a:ext uri="{FF2B5EF4-FFF2-40B4-BE49-F238E27FC236}">
-                <a16:creationId xmlns:a16="http://schemas.microsoft.com/office/drawing/2014/main" id="{048C5936-9FDC-26DF-8E45-85F8450B1254}"/>
+                <a16:creationId xmlns:a16="http://schemas.microsoft.com/office/drawing/2014/main" id="{40F5D2FD-367C-80DA-3410-463B9003491F}"/>
               </a:ext>
             </a:extLst>
           </p:cNvPr>
@@ -3326,7 +3326,7 @@
           <a:bodyPr/>
           <a:lstStyle/>
           <a:p>
-            <a:fld id="{3A465F51-8CAF-4CA4-B81F-97E2B4F072C2}" type="slidenum">
+            <a:fld id="{7BDC2CD4-1CF7-449C-939F-B74BB9422D7B}" type="slidenum">
               <a:rPr lang="en-IN" smtClean="0"/>
               <a:t>‹#›</a:t>
             </a:fld>
@@ -3337,7 +3337,7 @@
     </p:spTree>
     <p:extLst>
       <p:ext uri="{BB962C8B-B14F-4D97-AF65-F5344CB8AC3E}">
-        <p14:creationId xmlns:p14="http://schemas.microsoft.com/office/powerpoint/2010/main" val="4146848975"/>
+        <p14:creationId xmlns:p14="http://schemas.microsoft.com/office/powerpoint/2010/main" val="1358383898"/>
       </p:ext>
     </p:extLst>
   </p:cSld>
@@ -3369,7 +3369,7 @@
           <p:cNvPr id="2" name="Title 1">
             <a:extLst>
               <a:ext uri="{FF2B5EF4-FFF2-40B4-BE49-F238E27FC236}">
-                <a16:creationId xmlns:a16="http://schemas.microsoft.com/office/drawing/2014/main" id="{060C36B3-B242-5C90-3C70-F26ABBFFBDB6}"/>
+                <a16:creationId xmlns:a16="http://schemas.microsoft.com/office/drawing/2014/main" id="{47E4BF26-27D5-3FB8-FD5B-CE8AF1317817}"/>
               </a:ext>
             </a:extLst>
           </p:cNvPr>
@@ -3403,7 +3403,7 @@
           <p:cNvPr id="3" name="Text Placeholder 2">
             <a:extLst>
               <a:ext uri="{FF2B5EF4-FFF2-40B4-BE49-F238E27FC236}">
-                <a16:creationId xmlns:a16="http://schemas.microsoft.com/office/drawing/2014/main" id="{A2857304-C8F2-CC8A-5B92-7795EEBBE454}"/>
+                <a16:creationId xmlns:a16="http://schemas.microsoft.com/office/drawing/2014/main" id="{222172C9-FFF8-970E-48B2-BF6442F4743C}"/>
               </a:ext>
             </a:extLst>
           </p:cNvPr>
@@ -3474,7 +3474,7 @@
           <p:cNvPr id="4" name="Content Placeholder 3">
             <a:extLst>
               <a:ext uri="{FF2B5EF4-FFF2-40B4-BE49-F238E27FC236}">
-                <a16:creationId xmlns:a16="http://schemas.microsoft.com/office/drawing/2014/main" id="{EBEBDF62-69E0-A7B4-C293-029E19DC749E}"/>
+                <a16:creationId xmlns:a16="http://schemas.microsoft.com/office/drawing/2014/main" id="{3EC2E463-80DA-2A78-4299-195AC3A404B0}"/>
               </a:ext>
             </a:extLst>
           </p:cNvPr>
@@ -3537,7 +3537,7 @@
           <p:cNvPr id="5" name="Text Placeholder 4">
             <a:extLst>
               <a:ext uri="{FF2B5EF4-FFF2-40B4-BE49-F238E27FC236}">
-                <a16:creationId xmlns:a16="http://schemas.microsoft.com/office/drawing/2014/main" id="{FE69FAD4-746C-2697-0BA7-53199275EB8A}"/>
+                <a16:creationId xmlns:a16="http://schemas.microsoft.com/office/drawing/2014/main" id="{29F76374-A3B7-42B6-96B4-5448CE764CB1}"/>
               </a:ext>
             </a:extLst>
           </p:cNvPr>
@@ -3608,7 +3608,7 @@
           <p:cNvPr id="6" name="Content Placeholder 5">
             <a:extLst>
               <a:ext uri="{FF2B5EF4-FFF2-40B4-BE49-F238E27FC236}">
-                <a16:creationId xmlns:a16="http://schemas.microsoft.com/office/drawing/2014/main" id="{98B45219-90A8-5C50-B01D-033830FA8D28}"/>
+                <a16:creationId xmlns:a16="http://schemas.microsoft.com/office/drawing/2014/main" id="{45EC0AD9-BF51-4CC9-AE56-97F65E0AF52C}"/>
               </a:ext>
             </a:extLst>
           </p:cNvPr>
@@ -3671,7 +3671,7 @@
           <p:cNvPr id="7" name="Date Placeholder 6">
             <a:extLst>
               <a:ext uri="{FF2B5EF4-FFF2-40B4-BE49-F238E27FC236}">
-                <a16:creationId xmlns:a16="http://schemas.microsoft.com/office/drawing/2014/main" id="{FC21A295-20E0-82C6-3957-E25FE9445FF6}"/>
+                <a16:creationId xmlns:a16="http://schemas.microsoft.com/office/drawing/2014/main" id="{17844642-84D7-D695-7AC1-F8367CA72FEA}"/>
               </a:ext>
             </a:extLst>
           </p:cNvPr>
@@ -3687,7 +3687,7 @@
           <a:bodyPr/>
           <a:lstStyle/>
           <a:p>
-            <a:fld id="{E76C1D1B-AA06-4462-8688-FBED31F28147}" type="datetimeFigureOut">
+            <a:fld id="{CF77B9CA-A32C-4D1D-B50C-352A4AF66B49}" type="datetimeFigureOut">
               <a:rPr lang="en-IN" smtClean="0"/>
               <a:t>19-10-2026</a:t>
             </a:fld>
@@ -3700,7 +3700,7 @@
           <p:cNvPr id="8" name="Footer Placeholder 7">
             <a:extLst>
               <a:ext uri="{FF2B5EF4-FFF2-40B4-BE49-F238E27FC236}">
-                <a16:creationId xmlns:a16="http://schemas.microsoft.com/office/drawing/2014/main" id="{1415EE14-FF03-61CF-0C53-7DD9C104FF1D}"/>
+                <a16:creationId xmlns:a16="http://schemas.microsoft.com/office/drawing/2014/main" id="{05C72175-0510-CD99-5381-B5A4EB9758DA}"/>
               </a:ext>
             </a:extLst>
           </p:cNvPr>
@@ -3725,7 +3725,7 @@
           <p:cNvPr id="9" name="Slide Number Placeholder 8">
             <a:extLst>
               <a:ext uri="{FF2B5EF4-FFF2-40B4-BE49-F238E27FC236}">
-                <a16:creationId xmlns:a16="http://schemas.microsoft.com/office/drawing/2014/main" id="{CFC3DD40-7048-5588-0370-67DEC622C548}"/>
+                <a16:creationId xmlns:a16="http://schemas.microsoft.com/office/drawing/2014/main" id="{CB2D9482-AA95-DE6A-DADF-170E314A8793}"/>
               </a:ext>
             </a:extLst>
           </p:cNvPr>
@@ -3741,7 +3741,7 @@
           <a:bodyPr/>
           <a:lstStyle/>
           <a:p>
-            <a:fld id="{3A465F51-8CAF-4CA4-B81F-97E2B4F072C2}" type="slidenum">
+            <a:fld id="{7BDC2CD4-1CF7-449C-939F-B74BB9422D7B}" type="slidenum">
               <a:rPr lang="en-IN" smtClean="0"/>
               <a:t>‹#›</a:t>
             </a:fld>
@@ -3752,7 +3752,7 @@
     </p:spTree>
     <p:extLst>
       <p:ext uri="{BB962C8B-B14F-4D97-AF65-F5344CB8AC3E}">
-        <p14:creationId xmlns:p14="http://schemas.microsoft.com/office/powerpoint/2010/main" val="1639068902"/>
+        <p14:creationId xmlns:p14="http://schemas.microsoft.com/office/powerpoint/2010/main" val="793452269"/>
       </p:ext>
     </p:extLst>
   </p:cSld>
@@ -3784,7 +3784,7 @@
           <p:cNvPr id="2" name="Title 1">
             <a:extLst>
               <a:ext uri="{FF2B5EF4-FFF2-40B4-BE49-F238E27FC236}">
-                <a16:creationId xmlns:a16="http://schemas.microsoft.com/office/drawing/2014/main" id="{70106098-9544-AD2B-E8D6-117B313BA5FD}"/>
+                <a16:creationId xmlns:a16="http://schemas.microsoft.com/office/drawing/2014/main" id="{0D8C5E02-3081-8F2A-5AB3-9DA83D4F22F1}"/>
               </a:ext>
             </a:extLst>
           </p:cNvPr>
@@ -3813,7 +3813,7 @@
           <p:cNvPr id="3" name="Date Placeholder 2">
             <a:extLst>
               <a:ext uri="{FF2B5EF4-FFF2-40B4-BE49-F238E27FC236}">
-                <a16:creationId xmlns:a16="http://schemas.microsoft.com/office/drawing/2014/main" id="{B4E4F078-BBBF-2A9E-B202-A35BDE64D079}"/>
+                <a16:creationId xmlns:a16="http://schemas.microsoft.com/office/drawing/2014/main" id="{E40CA8DB-2590-B117-E9AA-25ACAA756B9E}"/>
               </a:ext>
             </a:extLst>
           </p:cNvPr>
@@ -3829,7 +3829,7 @@
           <a:bodyPr/>
           <a:lstStyle/>
           <a:p>
-            <a:fld id="{E76C1D1B-AA06-4462-8688-FBED31F28147}" type="datetimeFigureOut">
+            <a:fld id="{CF77B9CA-A32C-4D1D-B50C-352A4AF66B49}" type="datetimeFigureOut">
               <a:rPr lang="en-IN" smtClean="0"/>
               <a:t>19-10-2026</a:t>
             </a:fld>
@@ -3842,7 +3842,7 @@
           <p:cNvPr id="4" name="Footer Placeholder 3">
             <a:extLst>
               <a:ext uri="{FF2B5EF4-FFF2-40B4-BE49-F238E27FC236}">
-                <a16:creationId xmlns:a16="http://schemas.microsoft.com/office/drawing/2014/main" id="{75D3D041-4580-3A0D-BD4B-00DE3E786978}"/>
+                <a16:creationId xmlns:a16="http://schemas.microsoft.com/office/drawing/2014/main" id="{B2A22503-4B82-6E4E-7716-38D66B5F6E76}"/>
               </a:ext>
             </a:extLst>
           </p:cNvPr>
@@ -3867,7 +3867,7 @@
           <p:cNvPr id="5" name="Slide Number Placeholder 4">
             <a:extLst>
               <a:ext uri="{FF2B5EF4-FFF2-40B4-BE49-F238E27FC236}">
-                <a16:creationId xmlns:a16="http://schemas.microsoft.com/office/drawing/2014/main" id="{E78875B9-E67A-3C22-EF2B-6B8FBB204F0B}"/>
+                <a16:creationId xmlns:a16="http://schemas.microsoft.com/office/drawing/2014/main" id="{02FBFB4F-0971-ECB9-D468-40AE496ECCCA}"/>
               </a:ext>
             </a:extLst>
           </p:cNvPr>
@@ -3883,7 +3883,7 @@
           <a:bodyPr/>
           <a:lstStyle/>
           <a:p>
-            <a:fld id="{3A465F51-8CAF-4CA4-B81F-97E2B4F072C2}" type="slidenum">
+            <a:fld id="{7BDC2CD4-1CF7-449C-939F-B74BB9422D7B}" type="slidenum">
               <a:rPr lang="en-IN" smtClean="0"/>
               <a:t>‹#›</a:t>
             </a:fld>
@@ -3894,7 +3894,7 @@
     </p:spTree>
     <p:extLst>
       <p:ext uri="{BB962C8B-B14F-4D97-AF65-F5344CB8AC3E}">
-        <p14:creationId xmlns:p14="http://schemas.microsoft.com/office/powerpoint/2010/main" val="488765615"/>
+        <p14:creationId xmlns:p14="http://schemas.microsoft.com/office/powerpoint/2010/main" val="3103182643"/>
       </p:ext>
     </p:extLst>
   </p:cSld>
@@ -3926,7 +3926,7 @@
           <p:cNvPr id="2" name="Date Placeholder 1">
             <a:extLst>
               <a:ext uri="{FF2B5EF4-FFF2-40B4-BE49-F238E27FC236}">
-                <a16:creationId xmlns:a16="http://schemas.microsoft.com/office/drawing/2014/main" id="{A39D0E0A-3314-27A2-83A4-738DFC77C56B}"/>
+                <a16:creationId xmlns:a16="http://schemas.microsoft.com/office/drawing/2014/main" id="{F728D725-B25C-C9B8-FAD6-B0D0123520C8}"/>
               </a:ext>
             </a:extLst>
           </p:cNvPr>
@@ -3942,7 +3942,7 @@
           <a:bodyPr/>
           <a:lstStyle/>
           <a:p>
-            <a:fld id="{E76C1D1B-AA06-4462-8688-FBED31F28147}" type="datetimeFigureOut">
+            <a:fld id="{CF77B9CA-A32C-4D1D-B50C-352A4AF66B49}" type="datetimeFigureOut">
               <a:rPr lang="en-IN" smtClean="0"/>
               <a:t>19-10-2026</a:t>
             </a:fld>
@@ -3955,7 +3955,7 @@
           <p:cNvPr id="3" name="Footer Placeholder 2">
             <a:extLst>
               <a:ext uri="{FF2B5EF4-FFF2-40B4-BE49-F238E27FC236}">
-                <a16:creationId xmlns:a16="http://schemas.microsoft.com/office/drawing/2014/main" id="{056F6249-FB37-F794-0563-FBE6EFE13F39}"/>
+                <a16:creationId xmlns:a16="http://schemas.microsoft.com/office/drawing/2014/main" id="{355E80C9-BCE7-ECAC-BC93-4E1380149C42}"/>
               </a:ext>
             </a:extLst>
           </p:cNvPr>
@@ -3980,7 +3980,7 @@
           <p:cNvPr id="4" name="Slide Number Placeholder 3">
             <a:extLst>
               <a:ext uri="{FF2B5EF4-FFF2-40B4-BE49-F238E27FC236}">
-                <a16:creationId xmlns:a16="http://schemas.microsoft.com/office/drawing/2014/main" id="{2DFF9891-773F-5281-3EB9-584D3A71500B}"/>
+                <a16:creationId xmlns:a16="http://schemas.microsoft.com/office/drawing/2014/main" id="{95FC4F15-6278-14E9-0697-77ACFD3BF558}"/>
               </a:ext>
             </a:extLst>
           </p:cNvPr>
@@ -3996,7 +3996,7 @@
           <a:bodyPr/>
           <a:lstStyle/>
           <a:p>
-            <a:fld id="{3A465F51-8CAF-4CA4-B81F-97E2B4F072C2}" type="slidenum">
+            <a:fld id="{7BDC2CD4-1CF7-449C-939F-B74BB9422D7B}" type="slidenum">
               <a:rPr lang="en-IN" smtClean="0"/>
               <a:t>‹#›</a:t>
             </a:fld>
@@ -4007,7 +4007,7 @@
     </p:spTree>
     <p:extLst>
       <p:ext uri="{BB962C8B-B14F-4D97-AF65-F5344CB8AC3E}">
-        <p14:creationId xmlns:p14="http://schemas.microsoft.com/office/powerpoint/2010/main" val="1606054591"/>
+        <p14:creationId xmlns:p14="http://schemas.microsoft.com/office/powerpoint/2010/main" val="3216806047"/>
       </p:ext>
     </p:extLst>
   </p:cSld>
@@ -4039,7 +4039,7 @@
           <p:cNvPr id="2" name="Title 1">
             <a:extLst>
               <a:ext uri="{FF2B5EF4-FFF2-40B4-BE49-F238E27FC236}">
-                <a16:creationId xmlns:a16="http://schemas.microsoft.com/office/drawing/2014/main" id="{CA0759EB-FF34-EFA3-D28D-1AF68A428827}"/>
+                <a16:creationId xmlns:a16="http://schemas.microsoft.com/office/drawing/2014/main" id="{20AA4AFE-4514-8D07-B44F-6B5EF1D0E651}"/>
               </a:ext>
             </a:extLst>
           </p:cNvPr>
@@ -4077,7 +4077,7 @@
           <p:cNvPr id="3" name="Content Placeholder 2">
             <a:extLst>
               <a:ext uri="{FF2B5EF4-FFF2-40B4-BE49-F238E27FC236}">
-                <a16:creationId xmlns:a16="http://schemas.microsoft.com/office/drawing/2014/main" id="{783D45A6-B26F-DC44-B07E-24DC1BAEA426}"/>
+                <a16:creationId xmlns:a16="http://schemas.microsoft.com/office/drawing/2014/main" id="{3974EC29-E89C-A96B-52DF-0C5494E1EFFD}"/>
               </a:ext>
             </a:extLst>
           </p:cNvPr>
@@ -4168,7 +4168,7 @@
           <p:cNvPr id="4" name="Text Placeholder 3">
             <a:extLst>
               <a:ext uri="{FF2B5EF4-FFF2-40B4-BE49-F238E27FC236}">
-                <a16:creationId xmlns:a16="http://schemas.microsoft.com/office/drawing/2014/main" id="{8891B74B-843D-DDB7-C2C3-A34AAAF0B65B}"/>
+                <a16:creationId xmlns:a16="http://schemas.microsoft.com/office/drawing/2014/main" id="{1DBD037B-1A26-7823-B111-D75492F8CABD}"/>
               </a:ext>
             </a:extLst>
           </p:cNvPr>
@@ -4239,7 +4239,7 @@
           <p:cNvPr id="5" name="Date Placeholder 4">
             <a:extLst>
               <a:ext uri="{FF2B5EF4-FFF2-40B4-BE49-F238E27FC236}">
-                <a16:creationId xmlns:a16="http://schemas.microsoft.com/office/drawing/2014/main" id="{410222DD-ACE3-4D6C-E5C0-B5819DA87812}"/>
+                <a16:creationId xmlns:a16="http://schemas.microsoft.com/office/drawing/2014/main" id="{BFA13510-B364-BE62-8968-23076FADA0A1}"/>
               </a:ext>
             </a:extLst>
           </p:cNvPr>
@@ -4255,7 +4255,7 @@
           <a:bodyPr/>
           <a:lstStyle/>
           <a:p>
-            <a:fld id="{E76C1D1B-AA06-4462-8688-FBED31F28147}" type="datetimeFigureOut">
+            <a:fld id="{CF77B9CA-A32C-4D1D-B50C-352A4AF66B49}" type="datetimeFigureOut">
               <a:rPr lang="en-IN" smtClean="0"/>
               <a:t>19-10-2026</a:t>
             </a:fld>
@@ -4268,7 +4268,7 @@
           <p:cNvPr id="6" name="Footer Placeholder 5">
             <a:extLst>
               <a:ext uri="{FF2B5EF4-FFF2-40B4-BE49-F238E27FC236}">
-                <a16:creationId xmlns:a16="http://schemas.microsoft.com/office/drawing/2014/main" id="{59C84945-50BF-4249-9992-70DE0088B285}"/>
+                <a16:creationId xmlns:a16="http://schemas.microsoft.com/office/drawing/2014/main" id="{5E663329-12B4-E5FA-2A56-425DDA0F9E99}"/>
               </a:ext>
             </a:extLst>
           </p:cNvPr>
@@ -4293,7 +4293,7 @@
           <p:cNvPr id="7" name="Slide Number Placeholder 6">
             <a:extLst>
               <a:ext uri="{FF2B5EF4-FFF2-40B4-BE49-F238E27FC236}">
-                <a16:creationId xmlns:a16="http://schemas.microsoft.com/office/drawing/2014/main" id="{A90EA504-CE8C-5F3B-0528-6E0DF79CC98F}"/>
+                <a16:creationId xmlns:a16="http://schemas.microsoft.com/office/drawing/2014/main" id="{06770956-6B88-99A0-13D9-BAFEB8058A06}"/>
               </a:ext>
             </a:extLst>
           </p:cNvPr>
@@ -4309,7 +4309,7 @@
           <a:bodyPr/>
           <a:lstStyle/>
           <a:p>
-            <a:fld id="{3A465F51-8CAF-4CA4-B81F-97E2B4F072C2}" type="slidenum">
+            <a:fld id="{7BDC2CD4-1CF7-449C-939F-B74BB9422D7B}" type="slidenum">
               <a:rPr lang="en-IN" smtClean="0"/>
               <a:t>‹#›</a:t>
             </a:fld>
@@ -4320,7 +4320,7 @@
     </p:spTree>
     <p:extLst>
       <p:ext uri="{BB962C8B-B14F-4D97-AF65-F5344CB8AC3E}">
-        <p14:creationId xmlns:p14="http://schemas.microsoft.com/office/powerpoint/2010/main" val="3832691587"/>
+        <p14:creationId xmlns:p14="http://schemas.microsoft.com/office/powerpoint/2010/main" val="3053002709"/>
       </p:ext>
     </p:extLst>
   </p:cSld>
@@ -4352,7 +4352,7 @@
           <p:cNvPr id="2" name="Title 1">
             <a:extLst>
               <a:ext uri="{FF2B5EF4-FFF2-40B4-BE49-F238E27FC236}">
-                <a16:creationId xmlns:a16="http://schemas.microsoft.com/office/drawing/2014/main" id="{53EF4962-DD4B-AC57-BB5C-452EEA6C16E2}"/>
+                <a16:creationId xmlns:a16="http://schemas.microsoft.com/office/drawing/2014/main" id="{5F83F5A0-C231-BFC3-A322-FDCE5CC1CA32}"/>
               </a:ext>
             </a:extLst>
           </p:cNvPr>
@@ -4390,7 +4390,7 @@
           <p:cNvPr id="3" name="Picture Placeholder 2">
             <a:extLst>
               <a:ext uri="{FF2B5EF4-FFF2-40B4-BE49-F238E27FC236}">
-                <a16:creationId xmlns:a16="http://schemas.microsoft.com/office/drawing/2014/main" id="{5F7B1136-CA26-6BC6-DFED-46F0B3DD82C0}"/>
+                <a16:creationId xmlns:a16="http://schemas.microsoft.com/office/drawing/2014/main" id="{59ADDA76-B29D-89FE-CAB0-860F96B8EA5B}"/>
               </a:ext>
             </a:extLst>
           </p:cNvPr>
@@ -4457,7 +4457,7 @@
           <p:cNvPr id="4" name="Text Placeholder 3">
             <a:extLst>
               <a:ext uri="{FF2B5EF4-FFF2-40B4-BE49-F238E27FC236}">
-                <a16:creationId xmlns:a16="http://schemas.microsoft.com/office/drawing/2014/main" id="{D9F5B096-3152-8E97-F2DA-43CB4A082CA7}"/>
+                <a16:creationId xmlns:a16="http://schemas.microsoft.com/office/drawing/2014/main" id="{879432B7-3373-06F5-E076-670E137F75C9}"/>
               </a:ext>
             </a:extLst>
           </p:cNvPr>
@@ -4528,7 +4528,7 @@
           <p:cNvPr id="5" name="Date Placeholder 4">
             <a:extLst>
               <a:ext uri="{FF2B5EF4-FFF2-40B4-BE49-F238E27FC236}">
-                <a16:creationId xmlns:a16="http://schemas.microsoft.com/office/drawing/2014/main" id="{C93B5233-AD25-EF7C-91B7-61AF9980A7F8}"/>
+                <a16:creationId xmlns:a16="http://schemas.microsoft.com/office/drawing/2014/main" id="{C9769B86-B7F5-348F-53D7-6ECE1818289E}"/>
               </a:ext>
             </a:extLst>
           </p:cNvPr>
@@ -4544,7 +4544,7 @@
           <a:bodyPr/>
           <a:lstStyle/>
           <a:p>
-            <a:fld id="{E76C1D1B-AA06-4462-8688-FBED31F28147}" type="datetimeFigureOut">
+            <a:fld id="{CF77B9CA-A32C-4D1D-B50C-352A4AF66B49}" type="datetimeFigureOut">
               <a:rPr lang="en-IN" smtClean="0"/>
               <a:t>19-10-2026</a:t>
             </a:fld>
@@ -4557,7 +4557,7 @@
           <p:cNvPr id="6" name="Footer Placeholder 5">
             <a:extLst>
               <a:ext uri="{FF2B5EF4-FFF2-40B4-BE49-F238E27FC236}">
-                <a16:creationId xmlns:a16="http://schemas.microsoft.com/office/drawing/2014/main" id="{80668771-472C-DC65-EAE6-1CA858D719BF}"/>
+                <a16:creationId xmlns:a16="http://schemas.microsoft.com/office/drawing/2014/main" id="{C9FF08C5-62AE-0D7D-1E9A-CA3A1E7D049C}"/>
               </a:ext>
             </a:extLst>
           </p:cNvPr>
@@ -4582,7 +4582,7 @@
           <p:cNvPr id="7" name="Slide Number Placeholder 6">
             <a:extLst>
               <a:ext uri="{FF2B5EF4-FFF2-40B4-BE49-F238E27FC236}">
-                <a16:creationId xmlns:a16="http://schemas.microsoft.com/office/drawing/2014/main" id="{20737601-30BA-1686-4098-79ACE49DA681}"/>
+                <a16:creationId xmlns:a16="http://schemas.microsoft.com/office/drawing/2014/main" id="{88B8E923-E888-BEEA-9190-94C857B0CD1D}"/>
               </a:ext>
             </a:extLst>
           </p:cNvPr>
@@ -4598,7 +4598,7 @@
           <a:bodyPr/>
           <a:lstStyle/>
           <a:p>
-            <a:fld id="{3A465F51-8CAF-4CA4-B81F-97E2B4F072C2}" type="slidenum">
+            <a:fld id="{7BDC2CD4-1CF7-449C-939F-B74BB9422D7B}" type="slidenum">
               <a:rPr lang="en-IN" smtClean="0"/>
               <a:t>‹#›</a:t>
             </a:fld>
@@ -4609,7 +4609,7 @@
     </p:spTree>
     <p:extLst>
       <p:ext uri="{BB962C8B-B14F-4D97-AF65-F5344CB8AC3E}">
-        <p14:creationId xmlns:p14="http://schemas.microsoft.com/office/powerpoint/2010/main" val="1552822637"/>
+        <p14:creationId xmlns:p14="http://schemas.microsoft.com/office/powerpoint/2010/main" val="3571039038"/>
       </p:ext>
     </p:extLst>
   </p:cSld>
@@ -4646,7 +4646,7 @@
           <p:cNvPr id="2" name="Title Placeholder 1">
             <a:extLst>
               <a:ext uri="{FF2B5EF4-FFF2-40B4-BE49-F238E27FC236}">
-                <a16:creationId xmlns:a16="http://schemas.microsoft.com/office/drawing/2014/main" id="{9E2BD6C4-6030-8606-BA11-B9BFB401C523}"/>
+                <a16:creationId xmlns:a16="http://schemas.microsoft.com/office/drawing/2014/main" id="{D21A6811-8840-A224-6BAE-59E3DA9B203C}"/>
               </a:ext>
             </a:extLst>
           </p:cNvPr>
@@ -4685,7 +4685,7 @@
           <p:cNvPr id="3" name="Text Placeholder 2">
             <a:extLst>
               <a:ext uri="{FF2B5EF4-FFF2-40B4-BE49-F238E27FC236}">
-                <a16:creationId xmlns:a16="http://schemas.microsoft.com/office/drawing/2014/main" id="{EEE2270F-3E22-9401-518E-F5BBF3DABF0B}"/>
+                <a16:creationId xmlns:a16="http://schemas.microsoft.com/office/drawing/2014/main" id="{B84965A0-4AE0-6A8B-C47F-D6272E6F83BD}"/>
               </a:ext>
             </a:extLst>
           </p:cNvPr>
@@ -4753,7 +4753,7 @@
           <p:cNvPr id="4" name="Date Placeholder 3">
             <a:extLst>
               <a:ext uri="{FF2B5EF4-FFF2-40B4-BE49-F238E27FC236}">
-                <a16:creationId xmlns:a16="http://schemas.microsoft.com/office/drawing/2014/main" id="{3C893608-AAF1-8E92-E8E6-8CC1D04AFA33}"/>
+                <a16:creationId xmlns:a16="http://schemas.microsoft.com/office/drawing/2014/main" id="{4D318750-23B1-2757-C4F6-49A727A500DF}"/>
               </a:ext>
             </a:extLst>
           </p:cNvPr>
@@ -4787,7 +4787,7 @@
             </a:lvl1pPr>
           </a:lstStyle>
           <a:p>
-            <a:fld id="{E76C1D1B-AA06-4462-8688-FBED31F28147}" type="datetimeFigureOut">
+            <a:fld id="{CF77B9CA-A32C-4D1D-B50C-352A4AF66B49}" type="datetimeFigureOut">
               <a:rPr lang="en-IN" smtClean="0"/>
               <a:t>19-10-2026</a:t>
             </a:fld>
@@ -4800,7 +4800,7 @@
           <p:cNvPr id="5" name="Footer Placeholder 4">
             <a:extLst>
               <a:ext uri="{FF2B5EF4-FFF2-40B4-BE49-F238E27FC236}">
-                <a16:creationId xmlns:a16="http://schemas.microsoft.com/office/drawing/2014/main" id="{46730A2E-EA64-39CD-2EF4-78040EF0B731}"/>
+                <a16:creationId xmlns:a16="http://schemas.microsoft.com/office/drawing/2014/main" id="{3550D5F0-44E8-8272-E5E3-1810A2BE1FEC}"/>
               </a:ext>
             </a:extLst>
           </p:cNvPr>
@@ -4843,7 +4843,7 @@
           <p:cNvPr id="6" name="Slide Number Placeholder 5">
             <a:extLst>
               <a:ext uri="{FF2B5EF4-FFF2-40B4-BE49-F238E27FC236}">
-                <a16:creationId xmlns:a16="http://schemas.microsoft.com/office/drawing/2014/main" id="{721FBA20-BB44-7CC1-3DD8-3A3C7B601D82}"/>
+                <a16:creationId xmlns:a16="http://schemas.microsoft.com/office/drawing/2014/main" id="{6410D6FC-FD0C-A48C-D669-22015CB871C3}"/>
               </a:ext>
             </a:extLst>
           </p:cNvPr>
@@ -4877,7 +4877,7 @@
             </a:lvl1pPr>
           </a:lstStyle>
           <a:p>
-            <a:fld id="{3A465F51-8CAF-4CA4-B81F-97E2B4F072C2}" type="slidenum">
+            <a:fld id="{7BDC2CD4-1CF7-449C-939F-B74BB9422D7B}" type="slidenum">
               <a:rPr lang="en-IN" smtClean="0"/>
               <a:t>‹#›</a:t>
             </a:fld>
@@ -4888,7 +4888,7 @@
     </p:spTree>
     <p:extLst>
       <p:ext uri="{BB962C8B-B14F-4D97-AF65-F5344CB8AC3E}">
-        <p14:creationId xmlns:p14="http://schemas.microsoft.com/office/powerpoint/2010/main" val="1567021486"/>
+        <p14:creationId xmlns:p14="http://schemas.microsoft.com/office/powerpoint/2010/main" val="4285398560"/>
       </p:ext>
     </p:extLst>
   </p:cSld>
@@ -5219,7 +5219,7 @@
           <p:cNvPr id="2" name="TextBox 1">
             <a:extLst>
               <a:ext uri="{FF2B5EF4-FFF2-40B4-BE49-F238E27FC236}">
-                <a16:creationId xmlns:a16="http://schemas.microsoft.com/office/drawing/2014/main" id="{CF54EC84-BB02-78AB-D98E-82FA50F39018}"/>
+                <a16:creationId xmlns:a16="http://schemas.microsoft.com/office/drawing/2014/main" id="{9456C3C6-C892-C9DB-5D75-7C4BF6B55BB0}"/>
               </a:ext>
             </a:extLst>
           </p:cNvPr>
@@ -5264,7 +5264,7 @@
           <p:cNvPr id="3" name="TextBox 2">
             <a:extLst>
               <a:ext uri="{FF2B5EF4-FFF2-40B4-BE49-F238E27FC236}">
-                <a16:creationId xmlns:a16="http://schemas.microsoft.com/office/drawing/2014/main" id="{BCC0291C-D964-CB1F-612F-39544EBA1F3B}"/>
+                <a16:creationId xmlns:a16="http://schemas.microsoft.com/office/drawing/2014/main" id="{EFE335A4-BE95-06BE-946C-08CCB0DBEEA8}"/>
               </a:ext>
             </a:extLst>
           </p:cNvPr>
@@ -5310,7 +5310,7 @@
           <p:cNvPr id="4" name="TextBox 3">
             <a:extLst>
               <a:ext uri="{FF2B5EF4-FFF2-40B4-BE49-F238E27FC236}">
-                <a16:creationId xmlns:a16="http://schemas.microsoft.com/office/drawing/2014/main" id="{0E90A975-EF49-CA29-0013-E0AEDB18FF3E}"/>
+                <a16:creationId xmlns:a16="http://schemas.microsoft.com/office/drawing/2014/main" id="{01CA8F02-7714-0280-477C-608F51EFD26E}"/>
               </a:ext>
             </a:extLst>
           </p:cNvPr>
@@ -5362,7 +5362,7 @@
           <p:cNvPr id="6" name="Picture 5">
             <a:extLst>
               <a:ext uri="{FF2B5EF4-FFF2-40B4-BE49-F238E27FC236}">
-                <a16:creationId xmlns:a16="http://schemas.microsoft.com/office/drawing/2014/main" id="{15AFFA4A-A5D4-D3D4-50A9-F1D7D6D6AF2F}"/>
+                <a16:creationId xmlns:a16="http://schemas.microsoft.com/office/drawing/2014/main" id="{EA5A23D6-29A3-2CAF-CFC5-9A8AF0597088}"/>
               </a:ext>
             </a:extLst>
           </p:cNvPr>
@@ -5398,7 +5398,7 @@
           <p:cNvPr id="7" name="TextBox 6">
             <a:extLst>
               <a:ext uri="{FF2B5EF4-FFF2-40B4-BE49-F238E27FC236}">
-                <a16:creationId xmlns:a16="http://schemas.microsoft.com/office/drawing/2014/main" id="{68AF3DC9-27B6-DDC1-306E-BF342A82796E}"/>
+                <a16:creationId xmlns:a16="http://schemas.microsoft.com/office/drawing/2014/main" id="{0F2B32E6-CAEF-371F-CA2E-6FEC1E59A497}"/>
               </a:ext>
             </a:extLst>
           </p:cNvPr>
@@ -5445,7 +5445,7 @@
           <p:cNvPr id="8" name="TextBox 7">
             <a:extLst>
               <a:ext uri="{FF2B5EF4-FFF2-40B4-BE49-F238E27FC236}">
-                <a16:creationId xmlns:a16="http://schemas.microsoft.com/office/drawing/2014/main" id="{BAF1F141-19FC-5A39-61C1-458B440406F5}"/>
+                <a16:creationId xmlns:a16="http://schemas.microsoft.com/office/drawing/2014/main" id="{54E88744-BA7F-04A9-8B84-254402B00A4A}"/>
               </a:ext>
             </a:extLst>
           </p:cNvPr>
@@ -5488,7 +5488,7 @@
     </p:spTree>
     <p:extLst>
       <p:ext uri="{BB962C8B-B14F-4D97-AF65-F5344CB8AC3E}">
-        <p14:creationId xmlns:p14="http://schemas.microsoft.com/office/powerpoint/2010/main" val="3609827800"/>
+        <p14:creationId xmlns:p14="http://schemas.microsoft.com/office/powerpoint/2010/main" val="1487526783"/>
       </p:ext>
     </p:extLst>
   </p:cSld>
@@ -5528,7 +5528,7 @@
           <p:cNvPr id="2" name="TextBox 1">
             <a:extLst>
               <a:ext uri="{FF2B5EF4-FFF2-40B4-BE49-F238E27FC236}">
-                <a16:creationId xmlns:a16="http://schemas.microsoft.com/office/drawing/2014/main" id="{AAAA0061-7AE8-D7A6-0549-9DE172A21843}"/>
+                <a16:creationId xmlns:a16="http://schemas.microsoft.com/office/drawing/2014/main" id="{9578B67C-F461-C1C5-ACB0-01215BA9D74A}"/>
               </a:ext>
             </a:extLst>
           </p:cNvPr>
@@ -5573,7 +5573,7 @@
           <p:cNvPr id="3" name="TextBox 2">
             <a:extLst>
               <a:ext uri="{FF2B5EF4-FFF2-40B4-BE49-F238E27FC236}">
-                <a16:creationId xmlns:a16="http://schemas.microsoft.com/office/drawing/2014/main" id="{D9466E73-238D-F574-6D76-0CB732EBE4CA}"/>
+                <a16:creationId xmlns:a16="http://schemas.microsoft.com/office/drawing/2014/main" id="{FC465E30-8F76-46C4-3A67-63F9C2A490A1}"/>
               </a:ext>
             </a:extLst>
           </p:cNvPr>
@@ -5624,7 +5624,7 @@
           <p:cNvPr id="4" name="TextBox 3">
             <a:extLst>
               <a:ext uri="{FF2B5EF4-FFF2-40B4-BE49-F238E27FC236}">
-                <a16:creationId xmlns:a16="http://schemas.microsoft.com/office/drawing/2014/main" id="{A98D82D2-F617-5BE1-03CD-32DE3C7255A3}"/>
+                <a16:creationId xmlns:a16="http://schemas.microsoft.com/office/drawing/2014/main" id="{F09B4161-9098-8FC6-FB5B-EEE6716A7674}"/>
               </a:ext>
             </a:extLst>
           </p:cNvPr>
@@ -5676,7 +5676,7 @@
           <p:cNvPr id="5" name="Table 4">
             <a:extLst>
               <a:ext uri="{FF2B5EF4-FFF2-40B4-BE49-F238E27FC236}">
-                <a16:creationId xmlns:a16="http://schemas.microsoft.com/office/drawing/2014/main" id="{97CA1E1D-A110-B33E-EB6A-74A082242EFB}"/>
+                <a16:creationId xmlns:a16="http://schemas.microsoft.com/office/drawing/2014/main" id="{A4B3E8B0-02A3-D947-9337-6E1ED26981DB}"/>
               </a:ext>
             </a:extLst>
           </p:cNvPr>
@@ -5686,7 +5686,7 @@
           <p:nvPr>
             <p:extLst>
               <p:ext uri="{D42A27DB-BD31-4B8C-83A1-F6EECF244321}">
-                <p14:modId xmlns:p14="http://schemas.microsoft.com/office/powerpoint/2010/main" val="687454500"/>
+                <p14:modId xmlns:p14="http://schemas.microsoft.com/office/powerpoint/2010/main" val="2713599568"/>
               </p:ext>
             </p:extLst>
           </p:nvPr>
@@ -5705,28 +5705,28 @@
                 <a:gridCol w="4064000">
                   <a:extLst>
                     <a:ext uri="{9D8B030D-6E8A-4147-A177-3AD203B41FA5}">
-                      <a16:colId xmlns:a16="http://schemas.microsoft.com/office/drawing/2014/main" val="4291281191"/>
+                      <a16:colId xmlns:a16="http://schemas.microsoft.com/office/drawing/2014/main" val="1481894426"/>
                     </a:ext>
                   </a:extLst>
                 </a:gridCol>
                 <a:gridCol w="1524000">
                   <a:extLst>
                     <a:ext uri="{9D8B030D-6E8A-4147-A177-3AD203B41FA5}">
-                      <a16:colId xmlns:a16="http://schemas.microsoft.com/office/drawing/2014/main" val="3223815234"/>
+                      <a16:colId xmlns:a16="http://schemas.microsoft.com/office/drawing/2014/main" val="21233148"/>
                     </a:ext>
                   </a:extLst>
                 </a:gridCol>
                 <a:gridCol w="2667000">
                   <a:extLst>
                     <a:ext uri="{9D8B030D-6E8A-4147-A177-3AD203B41FA5}">
-                      <a16:colId xmlns:a16="http://schemas.microsoft.com/office/drawing/2014/main" val="312261753"/>
+                      <a16:colId xmlns:a16="http://schemas.microsoft.com/office/drawing/2014/main" val="3969191749"/>
                     </a:ext>
                   </a:extLst>
                 </a:gridCol>
                 <a:gridCol w="2667000">
                   <a:extLst>
                     <a:ext uri="{9D8B030D-6E8A-4147-A177-3AD203B41FA5}">
-                      <a16:colId xmlns:a16="http://schemas.microsoft.com/office/drawing/2014/main" val="3638284303"/>
+                      <a16:colId xmlns:a16="http://schemas.microsoft.com/office/drawing/2014/main" val="1291040500"/>
                     </a:ext>
                   </a:extLst>
                 </a:gridCol>
@@ -5902,7 +5902,7 @@
                 </a:tc>
                 <a:extLst>
                   <a:ext uri="{0D108BD9-81ED-4DB2-BD59-A6C34878D82A}">
-                    <a16:rowId xmlns:a16="http://schemas.microsoft.com/office/drawing/2014/main" val="3053548314"/>
+                    <a16:rowId xmlns:a16="http://schemas.microsoft.com/office/drawing/2014/main" val="3536775399"/>
                   </a:ext>
                 </a:extLst>
               </a:tr>
@@ -6077,7 +6077,7 @@
                 </a:tc>
                 <a:extLst>
                   <a:ext uri="{0D108BD9-81ED-4DB2-BD59-A6C34878D82A}">
-                    <a16:rowId xmlns:a16="http://schemas.microsoft.com/office/drawing/2014/main" val="1295736332"/>
+                    <a16:rowId xmlns:a16="http://schemas.microsoft.com/office/drawing/2014/main" val="1611026214"/>
                   </a:ext>
                 </a:extLst>
               </a:tr>
@@ -6252,7 +6252,7 @@
                 </a:tc>
                 <a:extLst>
                   <a:ext uri="{0D108BD9-81ED-4DB2-BD59-A6C34878D82A}">
-                    <a16:rowId xmlns:a16="http://schemas.microsoft.com/office/drawing/2014/main" val="1441638651"/>
+                    <a16:rowId xmlns:a16="http://schemas.microsoft.com/office/drawing/2014/main" val="4185962330"/>
                   </a:ext>
                 </a:extLst>
               </a:tr>
@@ -6427,7 +6427,7 @@
                 </a:tc>
                 <a:extLst>
                   <a:ext uri="{0D108BD9-81ED-4DB2-BD59-A6C34878D82A}">
-                    <a16:rowId xmlns:a16="http://schemas.microsoft.com/office/drawing/2014/main" val="1938105937"/>
+                    <a16:rowId xmlns:a16="http://schemas.microsoft.com/office/drawing/2014/main" val="433993620"/>
                   </a:ext>
                 </a:extLst>
               </a:tr>
@@ -6440,7 +6440,7 @@
           <p:cNvPr id="6" name="TextBox 5">
             <a:extLst>
               <a:ext uri="{FF2B5EF4-FFF2-40B4-BE49-F238E27FC236}">
-                <a16:creationId xmlns:a16="http://schemas.microsoft.com/office/drawing/2014/main" id="{992E9BD8-3AD0-70CA-E773-64FCF9746E66}"/>
+                <a16:creationId xmlns:a16="http://schemas.microsoft.com/office/drawing/2014/main" id="{EF72AF22-807A-3452-70F2-2B74C18DB679}"/>
               </a:ext>
             </a:extLst>
           </p:cNvPr>
@@ -6491,7 +6491,7 @@
           <p:cNvPr id="7" name="TextBox 6">
             <a:extLst>
               <a:ext uri="{FF2B5EF4-FFF2-40B4-BE49-F238E27FC236}">
-                <a16:creationId xmlns:a16="http://schemas.microsoft.com/office/drawing/2014/main" id="{0863A5CC-C14D-63D2-C973-6CCF6CF9794F}"/>
+                <a16:creationId xmlns:a16="http://schemas.microsoft.com/office/drawing/2014/main" id="{7A1D394E-C4F7-6E72-4A73-AC890DC9CE57}"/>
               </a:ext>
             </a:extLst>
           </p:cNvPr>
@@ -6536,7 +6536,7 @@
           <p:cNvPr id="8" name="TextBox 7">
             <a:extLst>
               <a:ext uri="{FF2B5EF4-FFF2-40B4-BE49-F238E27FC236}">
-                <a16:creationId xmlns:a16="http://schemas.microsoft.com/office/drawing/2014/main" id="{C670EDE1-2111-C967-9778-97214F2CAFD2}"/>
+                <a16:creationId xmlns:a16="http://schemas.microsoft.com/office/drawing/2014/main" id="{6487D1F7-C979-004C-8237-11AF7D5813B9}"/>
               </a:ext>
             </a:extLst>
           </p:cNvPr>
@@ -6579,7 +6579,7 @@
     </p:spTree>
     <p:extLst>
       <p:ext uri="{BB962C8B-B14F-4D97-AF65-F5344CB8AC3E}">
-        <p14:creationId xmlns:p14="http://schemas.microsoft.com/office/powerpoint/2010/main" val="4246246519"/>
+        <p14:creationId xmlns:p14="http://schemas.microsoft.com/office/powerpoint/2010/main" val="2661308005"/>
       </p:ext>
     </p:extLst>
   </p:cSld>
@@ -6619,7 +6619,7 @@
           <p:cNvPr id="2" name="TextBox 1">
             <a:extLst>
               <a:ext uri="{FF2B5EF4-FFF2-40B4-BE49-F238E27FC236}">
-                <a16:creationId xmlns:a16="http://schemas.microsoft.com/office/drawing/2014/main" id="{F9071AB0-AF21-FD95-C3EF-44E73417630A}"/>
+                <a16:creationId xmlns:a16="http://schemas.microsoft.com/office/drawing/2014/main" id="{C83AC24B-02EE-1281-E6A3-19E350058CBF}"/>
               </a:ext>
             </a:extLst>
           </p:cNvPr>
@@ -6664,7 +6664,7 @@
           <p:cNvPr id="3" name="TextBox 2">
             <a:extLst>
               <a:ext uri="{FF2B5EF4-FFF2-40B4-BE49-F238E27FC236}">
-                <a16:creationId xmlns:a16="http://schemas.microsoft.com/office/drawing/2014/main" id="{23906536-AD6B-E1E5-E3A5-F1B12D8D250C}"/>
+                <a16:creationId xmlns:a16="http://schemas.microsoft.com/office/drawing/2014/main" id="{7A803196-326B-B491-25F0-7ED15796F332}"/>
               </a:ext>
             </a:extLst>
           </p:cNvPr>
@@ -6715,7 +6715,7 @@
           <p:cNvPr id="4" name="Table 3">
             <a:extLst>
               <a:ext uri="{FF2B5EF4-FFF2-40B4-BE49-F238E27FC236}">
-                <a16:creationId xmlns:a16="http://schemas.microsoft.com/office/drawing/2014/main" id="{15C3F325-02F1-E6EF-D658-4885C36CF605}"/>
+                <a16:creationId xmlns:a16="http://schemas.microsoft.com/office/drawing/2014/main" id="{63A98385-7D77-9449-D005-A58930252469}"/>
               </a:ext>
             </a:extLst>
           </p:cNvPr>
@@ -6725,7 +6725,7 @@
           <p:nvPr>
             <p:extLst>
               <p:ext uri="{D42A27DB-BD31-4B8C-83A1-F6EECF244321}">
-                <p14:modId xmlns:p14="http://schemas.microsoft.com/office/powerpoint/2010/main" val="1094621118"/>
+                <p14:modId xmlns:p14="http://schemas.microsoft.com/office/powerpoint/2010/main" val="2289386824"/>
               </p:ext>
             </p:extLst>
           </p:nvPr>
@@ -6744,35 +6744,35 @@
                 <a:gridCol w="3302000">
                   <a:extLst>
                     <a:ext uri="{9D8B030D-6E8A-4147-A177-3AD203B41FA5}">
-                      <a16:colId xmlns:a16="http://schemas.microsoft.com/office/drawing/2014/main" val="1032132936"/>
+                      <a16:colId xmlns:a16="http://schemas.microsoft.com/office/drawing/2014/main" val="1681080546"/>
                     </a:ext>
                   </a:extLst>
                 </a:gridCol>
                 <a:gridCol w="1905000">
                   <a:extLst>
                     <a:ext uri="{9D8B030D-6E8A-4147-A177-3AD203B41FA5}">
-                      <a16:colId xmlns:a16="http://schemas.microsoft.com/office/drawing/2014/main" val="3016329069"/>
+                      <a16:colId xmlns:a16="http://schemas.microsoft.com/office/drawing/2014/main" val="4033563162"/>
                     </a:ext>
                   </a:extLst>
                 </a:gridCol>
                 <a:gridCol w="1905000">
                   <a:extLst>
                     <a:ext uri="{9D8B030D-6E8A-4147-A177-3AD203B41FA5}">
-                      <a16:colId xmlns:a16="http://schemas.microsoft.com/office/drawing/2014/main" val="2111555908"/>
+                      <a16:colId xmlns:a16="http://schemas.microsoft.com/office/drawing/2014/main" val="1576141682"/>
                     </a:ext>
                   </a:extLst>
                 </a:gridCol>
                 <a:gridCol w="1905000">
                   <a:extLst>
                     <a:ext uri="{9D8B030D-6E8A-4147-A177-3AD203B41FA5}">
-                      <a16:colId xmlns:a16="http://schemas.microsoft.com/office/drawing/2014/main" val="1647208920"/>
+                      <a16:colId xmlns:a16="http://schemas.microsoft.com/office/drawing/2014/main" val="1060651291"/>
                     </a:ext>
                   </a:extLst>
                 </a:gridCol>
                 <a:gridCol w="1905000">
                   <a:extLst>
                     <a:ext uri="{9D8B030D-6E8A-4147-A177-3AD203B41FA5}">
-                      <a16:colId xmlns:a16="http://schemas.microsoft.com/office/drawing/2014/main" val="100652350"/>
+                      <a16:colId xmlns:a16="http://schemas.microsoft.com/office/drawing/2014/main" val="3844919313"/>
                     </a:ext>
                   </a:extLst>
                 </a:gridCol>
@@ -6990,7 +6990,7 @@
                 </a:tc>
                 <a:extLst>
                   <a:ext uri="{0D108BD9-81ED-4DB2-BD59-A6C34878D82A}">
-                    <a16:rowId xmlns:a16="http://schemas.microsoft.com/office/drawing/2014/main" val="1378814693"/>
+                    <a16:rowId xmlns:a16="http://schemas.microsoft.com/office/drawing/2014/main" val="1103862316"/>
                   </a:ext>
                 </a:extLst>
               </a:tr>
@@ -7207,7 +7207,7 @@
                 </a:tc>
                 <a:extLst>
                   <a:ext uri="{0D108BD9-81ED-4DB2-BD59-A6C34878D82A}">
-                    <a16:rowId xmlns:a16="http://schemas.microsoft.com/office/drawing/2014/main" val="1904894850"/>
+                    <a16:rowId xmlns:a16="http://schemas.microsoft.com/office/drawing/2014/main" val="1088030646"/>
                   </a:ext>
                 </a:extLst>
               </a:tr>
@@ -7424,7 +7424,7 @@
                 </a:tc>
                 <a:extLst>
                   <a:ext uri="{0D108BD9-81ED-4DB2-BD59-A6C34878D82A}">
-                    <a16:rowId xmlns:a16="http://schemas.microsoft.com/office/drawing/2014/main" val="945078319"/>
+                    <a16:rowId xmlns:a16="http://schemas.microsoft.com/office/drawing/2014/main" val="659692559"/>
                   </a:ext>
                 </a:extLst>
               </a:tr>
@@ -7641,7 +7641,7 @@
                 </a:tc>
                 <a:extLst>
                   <a:ext uri="{0D108BD9-81ED-4DB2-BD59-A6C34878D82A}">
-                    <a16:rowId xmlns:a16="http://schemas.microsoft.com/office/drawing/2014/main" val="1622647789"/>
+                    <a16:rowId xmlns:a16="http://schemas.microsoft.com/office/drawing/2014/main" val="4147918392"/>
                   </a:ext>
                 </a:extLst>
               </a:tr>
@@ -7858,7 +7858,7 @@
                 </a:tc>
                 <a:extLst>
                   <a:ext uri="{0D108BD9-81ED-4DB2-BD59-A6C34878D82A}">
-                    <a16:rowId xmlns:a16="http://schemas.microsoft.com/office/drawing/2014/main" val="339253623"/>
+                    <a16:rowId xmlns:a16="http://schemas.microsoft.com/office/drawing/2014/main" val="1372393166"/>
                   </a:ext>
                 </a:extLst>
               </a:tr>
@@ -7871,7 +7871,7 @@
           <p:cNvPr id="5" name="TextBox 4">
             <a:extLst>
               <a:ext uri="{FF2B5EF4-FFF2-40B4-BE49-F238E27FC236}">
-                <a16:creationId xmlns:a16="http://schemas.microsoft.com/office/drawing/2014/main" id="{65C7C97A-B137-9102-7B74-ACE2BE87D510}"/>
+                <a16:creationId xmlns:a16="http://schemas.microsoft.com/office/drawing/2014/main" id="{65D97C66-0AE3-9623-A85E-08C340A2E1CB}"/>
               </a:ext>
             </a:extLst>
           </p:cNvPr>
@@ -7922,7 +7922,7 @@
           <p:cNvPr id="6" name="TextBox 5">
             <a:extLst>
               <a:ext uri="{FF2B5EF4-FFF2-40B4-BE49-F238E27FC236}">
-                <a16:creationId xmlns:a16="http://schemas.microsoft.com/office/drawing/2014/main" id="{54575D9B-AC45-C6AE-B3D8-B1F0FFC0E12B}"/>
+                <a16:creationId xmlns:a16="http://schemas.microsoft.com/office/drawing/2014/main" id="{FE19E9D5-1FB9-9CC1-18C5-8C0E440BDCA3}"/>
               </a:ext>
             </a:extLst>
           </p:cNvPr>
@@ -7967,7 +7967,7 @@
           <p:cNvPr id="7" name="TextBox 6">
             <a:extLst>
               <a:ext uri="{FF2B5EF4-FFF2-40B4-BE49-F238E27FC236}">
-                <a16:creationId xmlns:a16="http://schemas.microsoft.com/office/drawing/2014/main" id="{77827A39-F56C-973F-902F-013CAE7309A1}"/>
+                <a16:creationId xmlns:a16="http://schemas.microsoft.com/office/drawing/2014/main" id="{E77F620F-2BDE-73BD-C995-7DAC97AD4BB9}"/>
               </a:ext>
             </a:extLst>
           </p:cNvPr>
@@ -8010,7 +8010,7 @@
     </p:spTree>
     <p:extLst>
       <p:ext uri="{BB962C8B-B14F-4D97-AF65-F5344CB8AC3E}">
-        <p14:creationId xmlns:p14="http://schemas.microsoft.com/office/powerpoint/2010/main" val="3271634043"/>
+        <p14:creationId xmlns:p14="http://schemas.microsoft.com/office/powerpoint/2010/main" val="1169625338"/>
       </p:ext>
     </p:extLst>
   </p:cSld>
@@ -8050,7 +8050,7 @@
           <p:cNvPr id="2" name="TextBox 1">
             <a:extLst>
               <a:ext uri="{FF2B5EF4-FFF2-40B4-BE49-F238E27FC236}">
-                <a16:creationId xmlns:a16="http://schemas.microsoft.com/office/drawing/2014/main" id="{3D8F2EF2-3348-CA48-AD92-8F355BF070D7}"/>
+                <a16:creationId xmlns:a16="http://schemas.microsoft.com/office/drawing/2014/main" id="{F9874B0E-1168-CF91-46AF-B0D7F72BB912}"/>
               </a:ext>
             </a:extLst>
           </p:cNvPr>
@@ -8101,7 +8101,7 @@
           <p:cNvPr id="3" name="TextBox 2">
             <a:extLst>
               <a:ext uri="{FF2B5EF4-FFF2-40B4-BE49-F238E27FC236}">
-                <a16:creationId xmlns:a16="http://schemas.microsoft.com/office/drawing/2014/main" id="{A98F7637-CE1E-26DE-2ED1-DF0F3FB081AA}"/>
+                <a16:creationId xmlns:a16="http://schemas.microsoft.com/office/drawing/2014/main" id="{9C4BDE23-2FC8-D5C9-AF2E-26DE33092250}"/>
               </a:ext>
             </a:extLst>
           </p:cNvPr>
@@ -8152,7 +8152,7 @@
           <p:cNvPr id="4" name="TextBox 3">
             <a:extLst>
               <a:ext uri="{FF2B5EF4-FFF2-40B4-BE49-F238E27FC236}">
-                <a16:creationId xmlns:a16="http://schemas.microsoft.com/office/drawing/2014/main" id="{42A6280B-9E90-CEF0-C21A-55C56DFC8404}"/>
+                <a16:creationId xmlns:a16="http://schemas.microsoft.com/office/drawing/2014/main" id="{F9A26587-165C-CC45-77AF-C0A750686A61}"/>
               </a:ext>
             </a:extLst>
           </p:cNvPr>
@@ -8206,7 +8206,7 @@
           <p:cNvPr id="5" name="TextBox 4">
             <a:extLst>
               <a:ext uri="{FF2B5EF4-FFF2-40B4-BE49-F238E27FC236}">
-                <a16:creationId xmlns:a16="http://schemas.microsoft.com/office/drawing/2014/main" id="{B5CBFC1B-64E3-5327-00D4-1491A903FA32}"/>
+                <a16:creationId xmlns:a16="http://schemas.microsoft.com/office/drawing/2014/main" id="{9DB49414-803C-CD6E-63F5-E6F24961FFD6}"/>
               </a:ext>
             </a:extLst>
           </p:cNvPr>
@@ -8258,7 +8258,7 @@
           <p:cNvPr id="6" name="Table 5">
             <a:extLst>
               <a:ext uri="{FF2B5EF4-FFF2-40B4-BE49-F238E27FC236}">
-                <a16:creationId xmlns:a16="http://schemas.microsoft.com/office/drawing/2014/main" id="{F9B2B38B-DF79-0ADA-7024-EFF59663863A}"/>
+                <a16:creationId xmlns:a16="http://schemas.microsoft.com/office/drawing/2014/main" id="{19E6E8F7-87D6-0A02-499B-FBC1466A5B2D}"/>
               </a:ext>
             </a:extLst>
           </p:cNvPr>
@@ -8268,7 +8268,7 @@
           <p:nvPr>
             <p:extLst>
               <p:ext uri="{D42A27DB-BD31-4B8C-83A1-F6EECF244321}">
-                <p14:modId xmlns:p14="http://schemas.microsoft.com/office/powerpoint/2010/main" val="1851722445"/>
+                <p14:modId xmlns:p14="http://schemas.microsoft.com/office/powerpoint/2010/main" val="3137786756"/>
               </p:ext>
             </p:extLst>
           </p:nvPr>
@@ -8287,21 +8287,21 @@
                 <a:gridCol w="2540000">
                   <a:extLst>
                     <a:ext uri="{9D8B030D-6E8A-4147-A177-3AD203B41FA5}">
-                      <a16:colId xmlns:a16="http://schemas.microsoft.com/office/drawing/2014/main" val="3163166481"/>
+                      <a16:colId xmlns:a16="http://schemas.microsoft.com/office/drawing/2014/main" val="3768872106"/>
                     </a:ext>
                   </a:extLst>
                 </a:gridCol>
                 <a:gridCol w="1397000">
                   <a:extLst>
                     <a:ext uri="{9D8B030D-6E8A-4147-A177-3AD203B41FA5}">
-                      <a16:colId xmlns:a16="http://schemas.microsoft.com/office/drawing/2014/main" val="3557314426"/>
+                      <a16:colId xmlns:a16="http://schemas.microsoft.com/office/drawing/2014/main" val="1038718594"/>
                     </a:ext>
                   </a:extLst>
                 </a:gridCol>
                 <a:gridCol w="1397000">
                   <a:extLst>
                     <a:ext uri="{9D8B030D-6E8A-4147-A177-3AD203B41FA5}">
-                      <a16:colId xmlns:a16="http://schemas.microsoft.com/office/drawing/2014/main" val="2985992820"/>
+                      <a16:colId xmlns:a16="http://schemas.microsoft.com/office/drawing/2014/main" val="27011643"/>
                     </a:ext>
                   </a:extLst>
                 </a:gridCol>
@@ -8435,7 +8435,7 @@
                 </a:tc>
                 <a:extLst>
                   <a:ext uri="{0D108BD9-81ED-4DB2-BD59-A6C34878D82A}">
-                    <a16:rowId xmlns:a16="http://schemas.microsoft.com/office/drawing/2014/main" val="2426389894"/>
+                    <a16:rowId xmlns:a16="http://schemas.microsoft.com/office/drawing/2014/main" val="848554336"/>
                   </a:ext>
                 </a:extLst>
               </a:tr>
@@ -8568,7 +8568,7 @@
                 </a:tc>
                 <a:extLst>
                   <a:ext uri="{0D108BD9-81ED-4DB2-BD59-A6C34878D82A}">
-                    <a16:rowId xmlns:a16="http://schemas.microsoft.com/office/drawing/2014/main" val="1634184537"/>
+                    <a16:rowId xmlns:a16="http://schemas.microsoft.com/office/drawing/2014/main" val="1672018576"/>
                   </a:ext>
                 </a:extLst>
               </a:tr>
@@ -8701,7 +8701,7 @@
                 </a:tc>
                 <a:extLst>
                   <a:ext uri="{0D108BD9-81ED-4DB2-BD59-A6C34878D82A}">
-                    <a16:rowId xmlns:a16="http://schemas.microsoft.com/office/drawing/2014/main" val="171385201"/>
+                    <a16:rowId xmlns:a16="http://schemas.microsoft.com/office/drawing/2014/main" val="2601847967"/>
                   </a:ext>
                 </a:extLst>
               </a:tr>
@@ -8714,7 +8714,7 @@
           <p:cNvPr id="7" name="TextBox 6">
             <a:extLst>
               <a:ext uri="{FF2B5EF4-FFF2-40B4-BE49-F238E27FC236}">
-                <a16:creationId xmlns:a16="http://schemas.microsoft.com/office/drawing/2014/main" id="{54CB9CA4-2741-0F05-53BF-BD6DEF153367}"/>
+                <a16:creationId xmlns:a16="http://schemas.microsoft.com/office/drawing/2014/main" id="{D29A0C1C-058F-7076-E391-A5BB5239459B}"/>
               </a:ext>
             </a:extLst>
           </p:cNvPr>
@@ -8765,7 +8765,7 @@
           <p:cNvPr id="8" name="TextBox 7">
             <a:extLst>
               <a:ext uri="{FF2B5EF4-FFF2-40B4-BE49-F238E27FC236}">
-                <a16:creationId xmlns:a16="http://schemas.microsoft.com/office/drawing/2014/main" id="{FF7804B9-57E8-3625-1FA9-E142E39D6090}"/>
+                <a16:creationId xmlns:a16="http://schemas.microsoft.com/office/drawing/2014/main" id="{E6CA6302-D4CA-B0F3-DBE6-828ACF6D7F10}"/>
               </a:ext>
             </a:extLst>
           </p:cNvPr>
@@ -8810,7 +8810,7 @@
           <p:cNvPr id="9" name="TextBox 8">
             <a:extLst>
               <a:ext uri="{FF2B5EF4-FFF2-40B4-BE49-F238E27FC236}">
-                <a16:creationId xmlns:a16="http://schemas.microsoft.com/office/drawing/2014/main" id="{816E09EE-F6B5-3A39-6F89-D7C2A5BC9C7B}"/>
+                <a16:creationId xmlns:a16="http://schemas.microsoft.com/office/drawing/2014/main" id="{4638F4B7-DE79-CC93-9AF6-CD9A55C4FA06}"/>
               </a:ext>
             </a:extLst>
           </p:cNvPr>
@@ -8853,7 +8853,7 @@
     </p:spTree>
     <p:extLst>
       <p:ext uri="{BB962C8B-B14F-4D97-AF65-F5344CB8AC3E}">
-        <p14:creationId xmlns:p14="http://schemas.microsoft.com/office/powerpoint/2010/main" val="2856316675"/>
+        <p14:creationId xmlns:p14="http://schemas.microsoft.com/office/powerpoint/2010/main" val="3388505219"/>
       </p:ext>
     </p:extLst>
   </p:cSld>
@@ -8893,7 +8893,7 @@
           <p:cNvPr id="2" name="TextBox 1">
             <a:extLst>
               <a:ext uri="{FF2B5EF4-FFF2-40B4-BE49-F238E27FC236}">
-                <a16:creationId xmlns:a16="http://schemas.microsoft.com/office/drawing/2014/main" id="{357C8219-BEE7-C29E-D696-DE8A97687D37}"/>
+                <a16:creationId xmlns:a16="http://schemas.microsoft.com/office/drawing/2014/main" id="{4942BD92-0F8F-0227-9F18-8BA68D3F5162}"/>
               </a:ext>
             </a:extLst>
           </p:cNvPr>
@@ -8944,7 +8944,7 @@
           <p:cNvPr id="3" name="TextBox 2">
             <a:extLst>
               <a:ext uri="{FF2B5EF4-FFF2-40B4-BE49-F238E27FC236}">
-                <a16:creationId xmlns:a16="http://schemas.microsoft.com/office/drawing/2014/main" id="{9875FD38-A847-F8E7-EF99-9A78574BC466}"/>
+                <a16:creationId xmlns:a16="http://schemas.microsoft.com/office/drawing/2014/main" id="{9FF8EFCB-10D8-7B78-A053-FBE1AB78570F}"/>
               </a:ext>
             </a:extLst>
           </p:cNvPr>
@@ -8995,7 +8995,7 @@
           <p:cNvPr id="5" name="Picture 4">
             <a:extLst>
               <a:ext uri="{FF2B5EF4-FFF2-40B4-BE49-F238E27FC236}">
-                <a16:creationId xmlns:a16="http://schemas.microsoft.com/office/drawing/2014/main" id="{460A03D5-5738-0975-E50C-77923D13EDA2}"/>
+                <a16:creationId xmlns:a16="http://schemas.microsoft.com/office/drawing/2014/main" id="{BB02D7EF-653D-1C0F-09BE-79393C2AFD91}"/>
               </a:ext>
             </a:extLst>
           </p:cNvPr>
@@ -9031,7 +9031,7 @@
           <p:cNvPr id="6" name="TextBox 5">
             <a:extLst>
               <a:ext uri="{FF2B5EF4-FFF2-40B4-BE49-F238E27FC236}">
-                <a16:creationId xmlns:a16="http://schemas.microsoft.com/office/drawing/2014/main" id="{945F4A17-7DBC-4404-B0F9-6B87B5A947B4}"/>
+                <a16:creationId xmlns:a16="http://schemas.microsoft.com/office/drawing/2014/main" id="{656C053A-F344-58E8-2462-07C5B628DABA}"/>
               </a:ext>
             </a:extLst>
           </p:cNvPr>
@@ -9082,7 +9082,7 @@
           <p:cNvPr id="7" name="TextBox 6">
             <a:extLst>
               <a:ext uri="{FF2B5EF4-FFF2-40B4-BE49-F238E27FC236}">
-                <a16:creationId xmlns:a16="http://schemas.microsoft.com/office/drawing/2014/main" id="{8ECF35A7-B228-947B-CBD3-A120AA39AB83}"/>
+                <a16:creationId xmlns:a16="http://schemas.microsoft.com/office/drawing/2014/main" id="{6DF51341-7035-4DB3-D899-0D4B7F074480}"/>
               </a:ext>
             </a:extLst>
           </p:cNvPr>
@@ -9127,7 +9127,7 @@
           <p:cNvPr id="8" name="TextBox 7">
             <a:extLst>
               <a:ext uri="{FF2B5EF4-FFF2-40B4-BE49-F238E27FC236}">
-                <a16:creationId xmlns:a16="http://schemas.microsoft.com/office/drawing/2014/main" id="{DA6C8472-5042-EE9E-1844-2FDEB24CA342}"/>
+                <a16:creationId xmlns:a16="http://schemas.microsoft.com/office/drawing/2014/main" id="{2353C75F-6818-BBE1-28DD-AE9FCCF5F369}"/>
               </a:ext>
             </a:extLst>
           </p:cNvPr>
@@ -9170,7 +9170,7 @@
     </p:spTree>
     <p:extLst>
       <p:ext uri="{BB962C8B-B14F-4D97-AF65-F5344CB8AC3E}">
-        <p14:creationId xmlns:p14="http://schemas.microsoft.com/office/powerpoint/2010/main" val="3072076701"/>
+        <p14:creationId xmlns:p14="http://schemas.microsoft.com/office/powerpoint/2010/main" val="844605128"/>
       </p:ext>
     </p:extLst>
   </p:cSld>
@@ -9210,7 +9210,7 @@
           <p:cNvPr id="2" name="TextBox 1">
             <a:extLst>
               <a:ext uri="{FF2B5EF4-FFF2-40B4-BE49-F238E27FC236}">
-                <a16:creationId xmlns:a16="http://schemas.microsoft.com/office/drawing/2014/main" id="{1C7F8CC0-6D08-7B45-59F3-BBF15392E154}"/>
+                <a16:creationId xmlns:a16="http://schemas.microsoft.com/office/drawing/2014/main" id="{0BBF6775-AF82-56CC-6924-2E6BF5F14231}"/>
               </a:ext>
             </a:extLst>
           </p:cNvPr>
@@ -9255,7 +9255,7 @@
           <p:cNvPr id="3" name="TextBox 2">
             <a:extLst>
               <a:ext uri="{FF2B5EF4-FFF2-40B4-BE49-F238E27FC236}">
-                <a16:creationId xmlns:a16="http://schemas.microsoft.com/office/drawing/2014/main" id="{74AFFD9F-F7A0-588D-72FA-B46DFAF9F436}"/>
+                <a16:creationId xmlns:a16="http://schemas.microsoft.com/office/drawing/2014/main" id="{A6EFE83E-E89A-D17D-554E-FC117EC8B0DC}"/>
               </a:ext>
             </a:extLst>
           </p:cNvPr>
@@ -9306,7 +9306,7 @@
           <p:cNvPr id="5" name="Picture 4">
             <a:extLst>
               <a:ext uri="{FF2B5EF4-FFF2-40B4-BE49-F238E27FC236}">
-                <a16:creationId xmlns:a16="http://schemas.microsoft.com/office/drawing/2014/main" id="{E869BD7C-B754-B0AE-EB5F-C296E30F7171}"/>
+                <a16:creationId xmlns:a16="http://schemas.microsoft.com/office/drawing/2014/main" id="{3D559AD1-FD57-3F16-9B53-A94289835E19}"/>
               </a:ext>
             </a:extLst>
           </p:cNvPr>
@@ -9342,7 +9342,7 @@
           <p:cNvPr id="6" name="TextBox 5">
             <a:extLst>
               <a:ext uri="{FF2B5EF4-FFF2-40B4-BE49-F238E27FC236}">
-                <a16:creationId xmlns:a16="http://schemas.microsoft.com/office/drawing/2014/main" id="{E29206BC-A879-BDD0-25B5-0353882B28DF}"/>
+                <a16:creationId xmlns:a16="http://schemas.microsoft.com/office/drawing/2014/main" id="{407A34FA-23A7-2675-B220-B64D329460B3}"/>
               </a:ext>
             </a:extLst>
           </p:cNvPr>
@@ -9387,7 +9387,7 @@
           <p:cNvPr id="7" name="TextBox 6">
             <a:extLst>
               <a:ext uri="{FF2B5EF4-FFF2-40B4-BE49-F238E27FC236}">
-                <a16:creationId xmlns:a16="http://schemas.microsoft.com/office/drawing/2014/main" id="{5B86DCB1-F89E-8B1D-0B92-C5C266FB8956}"/>
+                <a16:creationId xmlns:a16="http://schemas.microsoft.com/office/drawing/2014/main" id="{0791FCC6-B14A-5564-F6AC-AAE43323DA7E}"/>
               </a:ext>
             </a:extLst>
           </p:cNvPr>
@@ -9430,7 +9430,7 @@
     </p:spTree>
     <p:extLst>
       <p:ext uri="{BB962C8B-B14F-4D97-AF65-F5344CB8AC3E}">
-        <p14:creationId xmlns:p14="http://schemas.microsoft.com/office/powerpoint/2010/main" val="3088250902"/>
+        <p14:creationId xmlns:p14="http://schemas.microsoft.com/office/powerpoint/2010/main" val="988857720"/>
       </p:ext>
     </p:extLst>
   </p:cSld>
@@ -9470,7 +9470,7 @@
           <p:cNvPr id="2" name="TextBox 1">
             <a:extLst>
               <a:ext uri="{FF2B5EF4-FFF2-40B4-BE49-F238E27FC236}">
-                <a16:creationId xmlns:a16="http://schemas.microsoft.com/office/drawing/2014/main" id="{F6514883-074A-C1E8-AEF0-8FFE749FB1A1}"/>
+                <a16:creationId xmlns:a16="http://schemas.microsoft.com/office/drawing/2014/main" id="{974FF162-6051-3BDB-EC80-8E9B67D1FAF9}"/>
               </a:ext>
             </a:extLst>
           </p:cNvPr>
@@ -9515,7 +9515,7 @@
           <p:cNvPr id="3" name="TextBox 2">
             <a:extLst>
               <a:ext uri="{FF2B5EF4-FFF2-40B4-BE49-F238E27FC236}">
-                <a16:creationId xmlns:a16="http://schemas.microsoft.com/office/drawing/2014/main" id="{8E183417-994D-5ECA-0FB8-79662CB9B9F6}"/>
+                <a16:creationId xmlns:a16="http://schemas.microsoft.com/office/drawing/2014/main" id="{EAA5610F-C3F0-86F8-FDC5-1582FA36C2F6}"/>
               </a:ext>
             </a:extLst>
           </p:cNvPr>
@@ -9566,7 +9566,7 @@
           <p:cNvPr id="4" name="TextBox 3">
             <a:extLst>
               <a:ext uri="{FF2B5EF4-FFF2-40B4-BE49-F238E27FC236}">
-                <a16:creationId xmlns:a16="http://schemas.microsoft.com/office/drawing/2014/main" id="{07F4ED5E-8D6A-7F32-D849-F951948BD9B4}"/>
+                <a16:creationId xmlns:a16="http://schemas.microsoft.com/office/drawing/2014/main" id="{44684A97-5F0B-9C13-7AF5-11E1153688CA}"/>
               </a:ext>
             </a:extLst>
           </p:cNvPr>
@@ -9611,7 +9611,7 @@
           <p:cNvPr id="5" name="TextBox 4">
             <a:extLst>
               <a:ext uri="{FF2B5EF4-FFF2-40B4-BE49-F238E27FC236}">
-                <a16:creationId xmlns:a16="http://schemas.microsoft.com/office/drawing/2014/main" id="{7C99308F-E152-857D-05FB-BFB82ADD489C}"/>
+                <a16:creationId xmlns:a16="http://schemas.microsoft.com/office/drawing/2014/main" id="{4239C669-333E-6036-B3A4-7C46D80FAFD8}"/>
               </a:ext>
             </a:extLst>
           </p:cNvPr>
@@ -9662,7 +9662,7 @@
           <p:cNvPr id="6" name="TextBox 5">
             <a:extLst>
               <a:ext uri="{FF2B5EF4-FFF2-40B4-BE49-F238E27FC236}">
-                <a16:creationId xmlns:a16="http://schemas.microsoft.com/office/drawing/2014/main" id="{B2672A35-1A0C-C8B6-091E-AE929FC38D46}"/>
+                <a16:creationId xmlns:a16="http://schemas.microsoft.com/office/drawing/2014/main" id="{F10B6344-45F1-B526-E702-5D9B40C93147}"/>
               </a:ext>
             </a:extLst>
           </p:cNvPr>
@@ -9707,7 +9707,7 @@
           <p:cNvPr id="7" name="TextBox 6">
             <a:extLst>
               <a:ext uri="{FF2B5EF4-FFF2-40B4-BE49-F238E27FC236}">
-                <a16:creationId xmlns:a16="http://schemas.microsoft.com/office/drawing/2014/main" id="{578022A8-64FD-026D-F893-09BABC198D16}"/>
+                <a16:creationId xmlns:a16="http://schemas.microsoft.com/office/drawing/2014/main" id="{DDBA458F-C0F1-F1A5-2D66-9583AD1CE493}"/>
               </a:ext>
             </a:extLst>
           </p:cNvPr>
@@ -9759,7 +9759,7 @@
           <p:cNvPr id="8" name="TextBox 7">
             <a:extLst>
               <a:ext uri="{FF2B5EF4-FFF2-40B4-BE49-F238E27FC236}">
-                <a16:creationId xmlns:a16="http://schemas.microsoft.com/office/drawing/2014/main" id="{382F9EF9-98A1-A6E5-8E6D-2198B851FEC7}"/>
+                <a16:creationId xmlns:a16="http://schemas.microsoft.com/office/drawing/2014/main" id="{DB178688-3E16-EF89-3620-5528CEFB3E09}"/>
               </a:ext>
             </a:extLst>
           </p:cNvPr>
@@ -9810,7 +9810,7 @@
           <p:cNvPr id="9" name="TextBox 8">
             <a:extLst>
               <a:ext uri="{FF2B5EF4-FFF2-40B4-BE49-F238E27FC236}">
-                <a16:creationId xmlns:a16="http://schemas.microsoft.com/office/drawing/2014/main" id="{27C57052-94AC-A0EF-6D20-BFDC914C4B17}"/>
+                <a16:creationId xmlns:a16="http://schemas.microsoft.com/office/drawing/2014/main" id="{2D914788-A688-43E3-2CFA-148E4436550E}"/>
               </a:ext>
             </a:extLst>
           </p:cNvPr>
@@ -9855,7 +9855,7 @@
           <p:cNvPr id="10" name="TextBox 9">
             <a:extLst>
               <a:ext uri="{FF2B5EF4-FFF2-40B4-BE49-F238E27FC236}">
-                <a16:creationId xmlns:a16="http://schemas.microsoft.com/office/drawing/2014/main" id="{71C67DD4-E9B5-E320-069B-4CBA2F66EEE0}"/>
+                <a16:creationId xmlns:a16="http://schemas.microsoft.com/office/drawing/2014/main" id="{DE7E90F8-B13A-11A7-8505-9CDE2AE2AF99}"/>
               </a:ext>
             </a:extLst>
           </p:cNvPr>
@@ -9898,7 +9898,7 @@
     </p:spTree>
     <p:extLst>
       <p:ext uri="{BB962C8B-B14F-4D97-AF65-F5344CB8AC3E}">
-        <p14:creationId xmlns:p14="http://schemas.microsoft.com/office/powerpoint/2010/main" val="1374742027"/>
+        <p14:creationId xmlns:p14="http://schemas.microsoft.com/office/powerpoint/2010/main" val="1029127983"/>
       </p:ext>
     </p:extLst>
   </p:cSld>
@@ -9938,7 +9938,7 @@
           <p:cNvPr id="2" name="TextBox 1">
             <a:extLst>
               <a:ext uri="{FF2B5EF4-FFF2-40B4-BE49-F238E27FC236}">
-                <a16:creationId xmlns:a16="http://schemas.microsoft.com/office/drawing/2014/main" id="{382F05F2-EBA0-7025-C5FD-E7D11816180D}"/>
+                <a16:creationId xmlns:a16="http://schemas.microsoft.com/office/drawing/2014/main" id="{32C4845A-2C1C-2BBC-EBA2-93559D8E9EE5}"/>
               </a:ext>
             </a:extLst>
           </p:cNvPr>
@@ -9983,7 +9983,7 @@
           <p:cNvPr id="3" name="TextBox 2">
             <a:extLst>
               <a:ext uri="{FF2B5EF4-FFF2-40B4-BE49-F238E27FC236}">
-                <a16:creationId xmlns:a16="http://schemas.microsoft.com/office/drawing/2014/main" id="{CA4C4C49-3F61-C3A1-9F8E-171561739717}"/>
+                <a16:creationId xmlns:a16="http://schemas.microsoft.com/office/drawing/2014/main" id="{4C07BB92-FDA3-5F64-C69A-AACA98504D9E}"/>
               </a:ext>
             </a:extLst>
           </p:cNvPr>
@@ -10034,7 +10034,7 @@
           <p:cNvPr id="4" name="TextBox 3">
             <a:extLst>
               <a:ext uri="{FF2B5EF4-FFF2-40B4-BE49-F238E27FC236}">
-                <a16:creationId xmlns:a16="http://schemas.microsoft.com/office/drawing/2014/main" id="{87B5A1B1-B507-6372-3BD4-1CD97B9F7A3A}"/>
+                <a16:creationId xmlns:a16="http://schemas.microsoft.com/office/drawing/2014/main" id="{0767E9A5-68CE-BC48-0D64-006B8F8EE613}"/>
               </a:ext>
             </a:extLst>
           </p:cNvPr>
@@ -10087,7 +10087,7 @@
           <p:cNvPr id="5" name="Table 4">
             <a:extLst>
               <a:ext uri="{FF2B5EF4-FFF2-40B4-BE49-F238E27FC236}">
-                <a16:creationId xmlns:a16="http://schemas.microsoft.com/office/drawing/2014/main" id="{9779DB11-F67A-7097-61DD-8EF7CC531FD3}"/>
+                <a16:creationId xmlns:a16="http://schemas.microsoft.com/office/drawing/2014/main" id="{B3C444E4-B523-B132-9EEB-5DADC42D24AC}"/>
               </a:ext>
             </a:extLst>
           </p:cNvPr>
@@ -10097,7 +10097,7 @@
           <p:nvPr>
             <p:extLst>
               <p:ext uri="{D42A27DB-BD31-4B8C-83A1-F6EECF244321}">
-                <p14:modId xmlns:p14="http://schemas.microsoft.com/office/powerpoint/2010/main" val="3293800946"/>
+                <p14:modId xmlns:p14="http://schemas.microsoft.com/office/powerpoint/2010/main" val="2724244093"/>
               </p:ext>
             </p:extLst>
           </p:nvPr>
@@ -10116,28 +10116,28 @@
                 <a:gridCol w="4445000">
                   <a:extLst>
                     <a:ext uri="{9D8B030D-6E8A-4147-A177-3AD203B41FA5}">
-                      <a16:colId xmlns:a16="http://schemas.microsoft.com/office/drawing/2014/main" val="386033133"/>
+                      <a16:colId xmlns:a16="http://schemas.microsoft.com/office/drawing/2014/main" val="260772016"/>
                     </a:ext>
                   </a:extLst>
                 </a:gridCol>
                 <a:gridCol w="2159000">
                   <a:extLst>
                     <a:ext uri="{9D8B030D-6E8A-4147-A177-3AD203B41FA5}">
-                      <a16:colId xmlns:a16="http://schemas.microsoft.com/office/drawing/2014/main" val="3552618037"/>
+                      <a16:colId xmlns:a16="http://schemas.microsoft.com/office/drawing/2014/main" val="2475083757"/>
                     </a:ext>
                   </a:extLst>
                 </a:gridCol>
                 <a:gridCol w="2159000">
                   <a:extLst>
                     <a:ext uri="{9D8B030D-6E8A-4147-A177-3AD203B41FA5}">
-                      <a16:colId xmlns:a16="http://schemas.microsoft.com/office/drawing/2014/main" val="4127341031"/>
+                      <a16:colId xmlns:a16="http://schemas.microsoft.com/office/drawing/2014/main" val="123148480"/>
                     </a:ext>
                   </a:extLst>
                 </a:gridCol>
                 <a:gridCol w="2159000">
                   <a:extLst>
                     <a:ext uri="{9D8B030D-6E8A-4147-A177-3AD203B41FA5}">
-                      <a16:colId xmlns:a16="http://schemas.microsoft.com/office/drawing/2014/main" val="60147"/>
+                      <a16:colId xmlns:a16="http://schemas.microsoft.com/office/drawing/2014/main" val="630114878"/>
                     </a:ext>
                   </a:extLst>
                 </a:gridCol>
@@ -10313,7 +10313,7 @@
                 </a:tc>
                 <a:extLst>
                   <a:ext uri="{0D108BD9-81ED-4DB2-BD59-A6C34878D82A}">
-                    <a16:rowId xmlns:a16="http://schemas.microsoft.com/office/drawing/2014/main" val="1550704346"/>
+                    <a16:rowId xmlns:a16="http://schemas.microsoft.com/office/drawing/2014/main" val="260850971"/>
                   </a:ext>
                 </a:extLst>
               </a:tr>
@@ -10488,7 +10488,7 @@
                 </a:tc>
                 <a:extLst>
                   <a:ext uri="{0D108BD9-81ED-4DB2-BD59-A6C34878D82A}">
-                    <a16:rowId xmlns:a16="http://schemas.microsoft.com/office/drawing/2014/main" val="61135143"/>
+                    <a16:rowId xmlns:a16="http://schemas.microsoft.com/office/drawing/2014/main" val="2076203786"/>
                   </a:ext>
                 </a:extLst>
               </a:tr>
@@ -10663,7 +10663,7 @@
                 </a:tc>
                 <a:extLst>
                   <a:ext uri="{0D108BD9-81ED-4DB2-BD59-A6C34878D82A}">
-                    <a16:rowId xmlns:a16="http://schemas.microsoft.com/office/drawing/2014/main" val="892549171"/>
+                    <a16:rowId xmlns:a16="http://schemas.microsoft.com/office/drawing/2014/main" val="1790284666"/>
                   </a:ext>
                 </a:extLst>
               </a:tr>
@@ -10838,7 +10838,7 @@
                 </a:tc>
                 <a:extLst>
                   <a:ext uri="{0D108BD9-81ED-4DB2-BD59-A6C34878D82A}">
-                    <a16:rowId xmlns:a16="http://schemas.microsoft.com/office/drawing/2014/main" val="1109583631"/>
+                    <a16:rowId xmlns:a16="http://schemas.microsoft.com/office/drawing/2014/main" val="1749727357"/>
                   </a:ext>
                 </a:extLst>
               </a:tr>
@@ -10851,7 +10851,7 @@
           <p:cNvPr id="6" name="TextBox 5">
             <a:extLst>
               <a:ext uri="{FF2B5EF4-FFF2-40B4-BE49-F238E27FC236}">
-                <a16:creationId xmlns:a16="http://schemas.microsoft.com/office/drawing/2014/main" id="{EFD6C838-4F0E-29D0-D766-75837E19390C}"/>
+                <a16:creationId xmlns:a16="http://schemas.microsoft.com/office/drawing/2014/main" id="{A0CE5B28-0EF9-0327-8BCD-FD6268208732}"/>
               </a:ext>
             </a:extLst>
           </p:cNvPr>
@@ -10902,7 +10902,7 @@
           <p:cNvPr id="7" name="TextBox 6">
             <a:extLst>
               <a:ext uri="{FF2B5EF4-FFF2-40B4-BE49-F238E27FC236}">
-                <a16:creationId xmlns:a16="http://schemas.microsoft.com/office/drawing/2014/main" id="{8EC922E8-6A3F-6493-A395-5704E3A72A4D}"/>
+                <a16:creationId xmlns:a16="http://schemas.microsoft.com/office/drawing/2014/main" id="{7BBF763D-BA43-F1D9-55E8-3FD57EC26286}"/>
               </a:ext>
             </a:extLst>
           </p:cNvPr>
@@ -10947,7 +10947,7 @@
           <p:cNvPr id="8" name="TextBox 7">
             <a:extLst>
               <a:ext uri="{FF2B5EF4-FFF2-40B4-BE49-F238E27FC236}">
-                <a16:creationId xmlns:a16="http://schemas.microsoft.com/office/drawing/2014/main" id="{64C1D8BD-2A7A-D887-4CF7-89C1CF11B4F4}"/>
+                <a16:creationId xmlns:a16="http://schemas.microsoft.com/office/drawing/2014/main" id="{CC09721C-7B40-78B2-E55E-754B589EE77C}"/>
               </a:ext>
             </a:extLst>
           </p:cNvPr>
@@ -10990,7 +10990,7 @@
     </p:spTree>
     <p:extLst>
       <p:ext uri="{BB962C8B-B14F-4D97-AF65-F5344CB8AC3E}">
-        <p14:creationId xmlns:p14="http://schemas.microsoft.com/office/powerpoint/2010/main" val="3994283891"/>
+        <p14:creationId xmlns:p14="http://schemas.microsoft.com/office/powerpoint/2010/main" val="1649750756"/>
       </p:ext>
     </p:extLst>
   </p:cSld>
@@ -11030,7 +11030,7 @@
           <p:cNvPr id="2" name="TextBox 1">
             <a:extLst>
               <a:ext uri="{FF2B5EF4-FFF2-40B4-BE49-F238E27FC236}">
-                <a16:creationId xmlns:a16="http://schemas.microsoft.com/office/drawing/2014/main" id="{05F37411-EBF4-C149-A4A9-2CA5D2CFE1C1}"/>
+                <a16:creationId xmlns:a16="http://schemas.microsoft.com/office/drawing/2014/main" id="{79DBAB7F-72B3-ED39-3DBD-3E9CE68456D6}"/>
               </a:ext>
             </a:extLst>
           </p:cNvPr>
@@ -11081,7 +11081,7 @@
           <p:cNvPr id="3" name="TextBox 2">
             <a:extLst>
               <a:ext uri="{FF2B5EF4-FFF2-40B4-BE49-F238E27FC236}">
-                <a16:creationId xmlns:a16="http://schemas.microsoft.com/office/drawing/2014/main" id="{B155BF02-B132-50D2-6CAC-818D68877E8F}"/>
+                <a16:creationId xmlns:a16="http://schemas.microsoft.com/office/drawing/2014/main" id="{56BA590F-ED35-5A42-A42E-24298A373912}"/>
               </a:ext>
             </a:extLst>
           </p:cNvPr>
@@ -11132,7 +11132,7 @@
           <p:cNvPr id="4" name="TextBox 3">
             <a:extLst>
               <a:ext uri="{FF2B5EF4-FFF2-40B4-BE49-F238E27FC236}">
-                <a16:creationId xmlns:a16="http://schemas.microsoft.com/office/drawing/2014/main" id="{49CA2941-4292-574D-F848-C9DE3C517E57}"/>
+                <a16:creationId xmlns:a16="http://schemas.microsoft.com/office/drawing/2014/main" id="{681B9544-1109-63A0-F16E-537DB94D9285}"/>
               </a:ext>
             </a:extLst>
           </p:cNvPr>
@@ -11184,7 +11184,7 @@
           <p:cNvPr id="5" name="Table 4">
             <a:extLst>
               <a:ext uri="{FF2B5EF4-FFF2-40B4-BE49-F238E27FC236}">
-                <a16:creationId xmlns:a16="http://schemas.microsoft.com/office/drawing/2014/main" id="{E84FA85A-F4F8-6D8A-E782-2C58595A57E3}"/>
+                <a16:creationId xmlns:a16="http://schemas.microsoft.com/office/drawing/2014/main" id="{6CC75628-7D8E-8D80-90F1-1AA9B8E8A98D}"/>
               </a:ext>
             </a:extLst>
           </p:cNvPr>
@@ -11194,7 +11194,7 @@
           <p:nvPr>
             <p:extLst>
               <p:ext uri="{D42A27DB-BD31-4B8C-83A1-F6EECF244321}">
-                <p14:modId xmlns:p14="http://schemas.microsoft.com/office/powerpoint/2010/main" val="2909183236"/>
+                <p14:modId xmlns:p14="http://schemas.microsoft.com/office/powerpoint/2010/main" val="1794093808"/>
               </p:ext>
             </p:extLst>
           </p:nvPr>
@@ -11213,21 +11213,21 @@
                 <a:gridCol w="5715000">
                   <a:extLst>
                     <a:ext uri="{9D8B030D-6E8A-4147-A177-3AD203B41FA5}">
-                      <a16:colId xmlns:a16="http://schemas.microsoft.com/office/drawing/2014/main" val="259443737"/>
+                      <a16:colId xmlns:a16="http://schemas.microsoft.com/office/drawing/2014/main" val="2318229228"/>
                     </a:ext>
                   </a:extLst>
                 </a:gridCol>
                 <a:gridCol w="2603500">
                   <a:extLst>
                     <a:ext uri="{9D8B030D-6E8A-4147-A177-3AD203B41FA5}">
-                      <a16:colId xmlns:a16="http://schemas.microsoft.com/office/drawing/2014/main" val="1978443700"/>
+                      <a16:colId xmlns:a16="http://schemas.microsoft.com/office/drawing/2014/main" val="1718718235"/>
                     </a:ext>
                   </a:extLst>
                 </a:gridCol>
                 <a:gridCol w="2603500">
                   <a:extLst>
                     <a:ext uri="{9D8B030D-6E8A-4147-A177-3AD203B41FA5}">
-                      <a16:colId xmlns:a16="http://schemas.microsoft.com/office/drawing/2014/main" val="1840925961"/>
+                      <a16:colId xmlns:a16="http://schemas.microsoft.com/office/drawing/2014/main" val="1907639692"/>
                     </a:ext>
                   </a:extLst>
                 </a:gridCol>
@@ -11361,7 +11361,7 @@
                 </a:tc>
                 <a:extLst>
                   <a:ext uri="{0D108BD9-81ED-4DB2-BD59-A6C34878D82A}">
-                    <a16:rowId xmlns:a16="http://schemas.microsoft.com/office/drawing/2014/main" val="196141472"/>
+                    <a16:rowId xmlns:a16="http://schemas.microsoft.com/office/drawing/2014/main" val="914590943"/>
                   </a:ext>
                 </a:extLst>
               </a:tr>
@@ -11494,7 +11494,7 @@
                 </a:tc>
                 <a:extLst>
                   <a:ext uri="{0D108BD9-81ED-4DB2-BD59-A6C34878D82A}">
-                    <a16:rowId xmlns:a16="http://schemas.microsoft.com/office/drawing/2014/main" val="1748093619"/>
+                    <a16:rowId xmlns:a16="http://schemas.microsoft.com/office/drawing/2014/main" val="1348732027"/>
                   </a:ext>
                 </a:extLst>
               </a:tr>
@@ -11627,7 +11627,7 @@
                 </a:tc>
                 <a:extLst>
                   <a:ext uri="{0D108BD9-81ED-4DB2-BD59-A6C34878D82A}">
-                    <a16:rowId xmlns:a16="http://schemas.microsoft.com/office/drawing/2014/main" val="838454932"/>
+                    <a16:rowId xmlns:a16="http://schemas.microsoft.com/office/drawing/2014/main" val="4014639575"/>
                   </a:ext>
                 </a:extLst>
               </a:tr>
@@ -11760,7 +11760,7 @@
                 </a:tc>
                 <a:extLst>
                   <a:ext uri="{0D108BD9-81ED-4DB2-BD59-A6C34878D82A}">
-                    <a16:rowId xmlns:a16="http://schemas.microsoft.com/office/drawing/2014/main" val="1867238904"/>
+                    <a16:rowId xmlns:a16="http://schemas.microsoft.com/office/drawing/2014/main" val="2920043770"/>
                   </a:ext>
                 </a:extLst>
               </a:tr>
@@ -11773,7 +11773,7 @@
           <p:cNvPr id="6" name="TextBox 5">
             <a:extLst>
               <a:ext uri="{FF2B5EF4-FFF2-40B4-BE49-F238E27FC236}">
-                <a16:creationId xmlns:a16="http://schemas.microsoft.com/office/drawing/2014/main" id="{16921A1A-6D51-3073-A3ED-83DFF40BE7EB}"/>
+                <a16:creationId xmlns:a16="http://schemas.microsoft.com/office/drawing/2014/main" id="{7EA182D3-AA4A-2B38-6912-CBE391BC69D6}"/>
               </a:ext>
             </a:extLst>
           </p:cNvPr>
@@ -11818,7 +11818,7 @@
           <p:cNvPr id="7" name="TextBox 6">
             <a:extLst>
               <a:ext uri="{FF2B5EF4-FFF2-40B4-BE49-F238E27FC236}">
-                <a16:creationId xmlns:a16="http://schemas.microsoft.com/office/drawing/2014/main" id="{E61B1D1D-B626-5409-DAA9-ED86459D536A}"/>
+                <a16:creationId xmlns:a16="http://schemas.microsoft.com/office/drawing/2014/main" id="{EC47BFEF-CF15-F083-CCA6-089893CF899F}"/>
               </a:ext>
             </a:extLst>
           </p:cNvPr>
@@ -11861,7 +11861,7 @@
     </p:spTree>
     <p:extLst>
       <p:ext uri="{BB962C8B-B14F-4D97-AF65-F5344CB8AC3E}">
-        <p14:creationId xmlns:p14="http://schemas.microsoft.com/office/powerpoint/2010/main" val="2028197391"/>
+        <p14:creationId xmlns:p14="http://schemas.microsoft.com/office/powerpoint/2010/main" val="1122890939"/>
       </p:ext>
     </p:extLst>
   </p:cSld>
@@ -11901,7 +11901,7 @@
           <p:cNvPr id="2" name="TextBox 1">
             <a:extLst>
               <a:ext uri="{FF2B5EF4-FFF2-40B4-BE49-F238E27FC236}">
-                <a16:creationId xmlns:a16="http://schemas.microsoft.com/office/drawing/2014/main" id="{2F2080C1-3CDB-F433-9EFF-81DAFF9FBFB5}"/>
+                <a16:creationId xmlns:a16="http://schemas.microsoft.com/office/drawing/2014/main" id="{D6F92A13-D234-5C20-7699-16FBEAB04122}"/>
               </a:ext>
             </a:extLst>
           </p:cNvPr>
@@ -11946,7 +11946,7 @@
           <p:cNvPr id="3" name="TextBox 2">
             <a:extLst>
               <a:ext uri="{FF2B5EF4-FFF2-40B4-BE49-F238E27FC236}">
-                <a16:creationId xmlns:a16="http://schemas.microsoft.com/office/drawing/2014/main" id="{74082120-20FA-122D-6663-1014E3BD1B34}"/>
+                <a16:creationId xmlns:a16="http://schemas.microsoft.com/office/drawing/2014/main" id="{383D02EC-1277-03DC-180D-494007789000}"/>
               </a:ext>
             </a:extLst>
           </p:cNvPr>
@@ -11997,7 +11997,7 @@
           <p:cNvPr id="4" name="TextBox 3">
             <a:extLst>
               <a:ext uri="{FF2B5EF4-FFF2-40B4-BE49-F238E27FC236}">
-                <a16:creationId xmlns:a16="http://schemas.microsoft.com/office/drawing/2014/main" id="{79A1AD5C-518B-10B4-5274-CF737BD06FB4}"/>
+                <a16:creationId xmlns:a16="http://schemas.microsoft.com/office/drawing/2014/main" id="{3659C08B-32A6-A4B0-D62B-9C2652469CE5}"/>
               </a:ext>
             </a:extLst>
           </p:cNvPr>
@@ -12051,7 +12051,7 @@
           <p:cNvPr id="5" name="TextBox 4">
             <a:extLst>
               <a:ext uri="{FF2B5EF4-FFF2-40B4-BE49-F238E27FC236}">
-                <a16:creationId xmlns:a16="http://schemas.microsoft.com/office/drawing/2014/main" id="{B3A1B45B-44D2-24FB-0245-CE6122E74F8D}"/>
+                <a16:creationId xmlns:a16="http://schemas.microsoft.com/office/drawing/2014/main" id="{081D08E0-C5CE-27E3-D237-2F7D9FF42BF7}"/>
               </a:ext>
             </a:extLst>
           </p:cNvPr>
@@ -12104,7 +12104,7 @@
           <p:cNvPr id="7" name="Picture 6">
             <a:extLst>
               <a:ext uri="{FF2B5EF4-FFF2-40B4-BE49-F238E27FC236}">
-                <a16:creationId xmlns:a16="http://schemas.microsoft.com/office/drawing/2014/main" id="{6F1FABA9-29F0-43AB-664A-FFEBA7BC34D4}"/>
+                <a16:creationId xmlns:a16="http://schemas.microsoft.com/office/drawing/2014/main" id="{CD02EFE2-BC2F-D084-E715-21BA3AC4FEEE}"/>
               </a:ext>
             </a:extLst>
           </p:cNvPr>
@@ -12140,7 +12140,7 @@
           <p:cNvPr id="8" name="TextBox 7">
             <a:extLst>
               <a:ext uri="{FF2B5EF4-FFF2-40B4-BE49-F238E27FC236}">
-                <a16:creationId xmlns:a16="http://schemas.microsoft.com/office/drawing/2014/main" id="{C4E1A229-67E8-4F0E-85E6-FE1A9D70D1CC}"/>
+                <a16:creationId xmlns:a16="http://schemas.microsoft.com/office/drawing/2014/main" id="{7815881B-5289-8591-EA61-DC27AF04C3B4}"/>
               </a:ext>
             </a:extLst>
           </p:cNvPr>
@@ -12185,7 +12185,7 @@
           <p:cNvPr id="9" name="TextBox 8">
             <a:extLst>
               <a:ext uri="{FF2B5EF4-FFF2-40B4-BE49-F238E27FC236}">
-                <a16:creationId xmlns:a16="http://schemas.microsoft.com/office/drawing/2014/main" id="{D8355807-0983-4E2A-2F55-676DF742243A}"/>
+                <a16:creationId xmlns:a16="http://schemas.microsoft.com/office/drawing/2014/main" id="{935745FA-9E70-1199-749C-9406E5BCD813}"/>
               </a:ext>
             </a:extLst>
           </p:cNvPr>
@@ -12228,7 +12228,7 @@
     </p:spTree>
     <p:extLst>
       <p:ext uri="{BB962C8B-B14F-4D97-AF65-F5344CB8AC3E}">
-        <p14:creationId xmlns:p14="http://schemas.microsoft.com/office/powerpoint/2010/main" val="389173811"/>
+        <p14:creationId xmlns:p14="http://schemas.microsoft.com/office/powerpoint/2010/main" val="4033057013"/>
       </p:ext>
     </p:extLst>
   </p:cSld>
@@ -12268,7 +12268,7 @@
           <p:cNvPr id="2" name="TextBox 1">
             <a:extLst>
               <a:ext uri="{FF2B5EF4-FFF2-40B4-BE49-F238E27FC236}">
-                <a16:creationId xmlns:a16="http://schemas.microsoft.com/office/drawing/2014/main" id="{16308C61-5D4F-D8B8-DBF5-EAB2CED3740B}"/>
+                <a16:creationId xmlns:a16="http://schemas.microsoft.com/office/drawing/2014/main" id="{D92CAC3B-9CB7-48E2-9D44-B255FE9D90B5}"/>
               </a:ext>
             </a:extLst>
           </p:cNvPr>
@@ -12313,7 +12313,7 @@
           <p:cNvPr id="3" name="TextBox 2">
             <a:extLst>
               <a:ext uri="{FF2B5EF4-FFF2-40B4-BE49-F238E27FC236}">
-                <a16:creationId xmlns:a16="http://schemas.microsoft.com/office/drawing/2014/main" id="{9EEF89F6-B29C-52C5-54E3-6815888B8F5D}"/>
+                <a16:creationId xmlns:a16="http://schemas.microsoft.com/office/drawing/2014/main" id="{73B07DBC-E0FF-C82A-D110-B1BEDA60CB9E}"/>
               </a:ext>
             </a:extLst>
           </p:cNvPr>
@@ -12364,7 +12364,7 @@
           <p:cNvPr id="4" name="TextBox 3">
             <a:extLst>
               <a:ext uri="{FF2B5EF4-FFF2-40B4-BE49-F238E27FC236}">
-                <a16:creationId xmlns:a16="http://schemas.microsoft.com/office/drawing/2014/main" id="{404932AA-AED6-76CF-3BD0-D0915A87B106}"/>
+                <a16:creationId xmlns:a16="http://schemas.microsoft.com/office/drawing/2014/main" id="{D0C54F80-752A-06AA-897C-C5B3D0D92BBC}"/>
               </a:ext>
             </a:extLst>
           </p:cNvPr>
@@ -12409,7 +12409,7 @@
           <p:cNvPr id="5" name="Table 4">
             <a:extLst>
               <a:ext uri="{FF2B5EF4-FFF2-40B4-BE49-F238E27FC236}">
-                <a16:creationId xmlns:a16="http://schemas.microsoft.com/office/drawing/2014/main" id="{EA3A6F0F-34AE-562B-F2AD-0152B1F1579B}"/>
+                <a16:creationId xmlns:a16="http://schemas.microsoft.com/office/drawing/2014/main" id="{9CBF0CEF-FE35-8DCE-6D15-6A13BDB8668E}"/>
               </a:ext>
             </a:extLst>
           </p:cNvPr>
@@ -12419,7 +12419,7 @@
           <p:nvPr>
             <p:extLst>
               <p:ext uri="{D42A27DB-BD31-4B8C-83A1-F6EECF244321}">
-                <p14:modId xmlns:p14="http://schemas.microsoft.com/office/powerpoint/2010/main" val="564499652"/>
+                <p14:modId xmlns:p14="http://schemas.microsoft.com/office/powerpoint/2010/main" val="1817675092"/>
               </p:ext>
             </p:extLst>
           </p:nvPr>
@@ -12438,21 +12438,21 @@
                 <a:gridCol w="2603500">
                   <a:extLst>
                     <a:ext uri="{9D8B030D-6E8A-4147-A177-3AD203B41FA5}">
-                      <a16:colId xmlns:a16="http://schemas.microsoft.com/office/drawing/2014/main" val="3446046829"/>
+                      <a16:colId xmlns:a16="http://schemas.microsoft.com/office/drawing/2014/main" val="268256143"/>
                     </a:ext>
                   </a:extLst>
                 </a:gridCol>
                 <a:gridCol w="4191000">
                   <a:extLst>
                     <a:ext uri="{9D8B030D-6E8A-4147-A177-3AD203B41FA5}">
-                      <a16:colId xmlns:a16="http://schemas.microsoft.com/office/drawing/2014/main" val="2709394010"/>
+                      <a16:colId xmlns:a16="http://schemas.microsoft.com/office/drawing/2014/main" val="28186568"/>
                     </a:ext>
                   </a:extLst>
                 </a:gridCol>
                 <a:gridCol w="4127500">
                   <a:extLst>
                     <a:ext uri="{9D8B030D-6E8A-4147-A177-3AD203B41FA5}">
-                      <a16:colId xmlns:a16="http://schemas.microsoft.com/office/drawing/2014/main" val="2717998459"/>
+                      <a16:colId xmlns:a16="http://schemas.microsoft.com/office/drawing/2014/main" val="1415995952"/>
                     </a:ext>
                   </a:extLst>
                 </a:gridCol>
@@ -12586,7 +12586,7 @@
                 </a:tc>
                 <a:extLst>
                   <a:ext uri="{0D108BD9-81ED-4DB2-BD59-A6C34878D82A}">
-                    <a16:rowId xmlns:a16="http://schemas.microsoft.com/office/drawing/2014/main" val="348043410"/>
+                    <a16:rowId xmlns:a16="http://schemas.microsoft.com/office/drawing/2014/main" val="2965983849"/>
                   </a:ext>
                 </a:extLst>
               </a:tr>
@@ -12733,7 +12733,7 @@
                 </a:tc>
                 <a:extLst>
                   <a:ext uri="{0D108BD9-81ED-4DB2-BD59-A6C34878D82A}">
-                    <a16:rowId xmlns:a16="http://schemas.microsoft.com/office/drawing/2014/main" val="2733395364"/>
+                    <a16:rowId xmlns:a16="http://schemas.microsoft.com/office/drawing/2014/main" val="2368419523"/>
                   </a:ext>
                 </a:extLst>
               </a:tr>
@@ -12882,7 +12882,7 @@
                 </a:tc>
                 <a:extLst>
                   <a:ext uri="{0D108BD9-81ED-4DB2-BD59-A6C34878D82A}">
-                    <a16:rowId xmlns:a16="http://schemas.microsoft.com/office/drawing/2014/main" val="4065325065"/>
+                    <a16:rowId xmlns:a16="http://schemas.microsoft.com/office/drawing/2014/main" val="664610044"/>
                   </a:ext>
                 </a:extLst>
               </a:tr>
@@ -12895,7 +12895,7 @@
           <p:cNvPr id="6" name="TextBox 5">
             <a:extLst>
               <a:ext uri="{FF2B5EF4-FFF2-40B4-BE49-F238E27FC236}">
-                <a16:creationId xmlns:a16="http://schemas.microsoft.com/office/drawing/2014/main" id="{B9155C5E-D14F-0405-98F5-0C223DB1911A}"/>
+                <a16:creationId xmlns:a16="http://schemas.microsoft.com/office/drawing/2014/main" id="{F9B6C7F8-C81D-E263-F75C-5DD254C0ED02}"/>
               </a:ext>
             </a:extLst>
           </p:cNvPr>
@@ -12946,7 +12946,7 @@
           <p:cNvPr id="7" name="TextBox 6">
             <a:extLst>
               <a:ext uri="{FF2B5EF4-FFF2-40B4-BE49-F238E27FC236}">
-                <a16:creationId xmlns:a16="http://schemas.microsoft.com/office/drawing/2014/main" id="{1C17F858-0ED2-BC9A-91D6-DB202EA5ED25}"/>
+                <a16:creationId xmlns:a16="http://schemas.microsoft.com/office/drawing/2014/main" id="{53001886-38C6-169B-1EC8-031FBE33A479}"/>
               </a:ext>
             </a:extLst>
           </p:cNvPr>
@@ -12991,7 +12991,7 @@
           <p:cNvPr id="8" name="TextBox 7">
             <a:extLst>
               <a:ext uri="{FF2B5EF4-FFF2-40B4-BE49-F238E27FC236}">
-                <a16:creationId xmlns:a16="http://schemas.microsoft.com/office/drawing/2014/main" id="{C29DE25C-25EC-4711-AC49-BCFC4FC21D2C}"/>
+                <a16:creationId xmlns:a16="http://schemas.microsoft.com/office/drawing/2014/main" id="{E41B022E-1559-16D0-B740-27F4061636C5}"/>
               </a:ext>
             </a:extLst>
           </p:cNvPr>
@@ -13034,7 +13034,7 @@
     </p:spTree>
     <p:extLst>
       <p:ext uri="{BB962C8B-B14F-4D97-AF65-F5344CB8AC3E}">
-        <p14:creationId xmlns:p14="http://schemas.microsoft.com/office/powerpoint/2010/main" val="4008385910"/>
+        <p14:creationId xmlns:p14="http://schemas.microsoft.com/office/powerpoint/2010/main" val="1150676143"/>
       </p:ext>
     </p:extLst>
   </p:cSld>
@@ -13074,7 +13074,7 @@
           <p:cNvPr id="2" name="TextBox 1">
             <a:extLst>
               <a:ext uri="{FF2B5EF4-FFF2-40B4-BE49-F238E27FC236}">
-                <a16:creationId xmlns:a16="http://schemas.microsoft.com/office/drawing/2014/main" id="{421AEC14-6E81-08D8-63F2-578E1C7D434F}"/>
+                <a16:creationId xmlns:a16="http://schemas.microsoft.com/office/drawing/2014/main" id="{59CD88FC-EF4C-7EE2-C38A-383244E5490F}"/>
               </a:ext>
             </a:extLst>
           </p:cNvPr>
@@ -13125,7 +13125,7 @@
           <p:cNvPr id="3" name="TextBox 2">
             <a:extLst>
               <a:ext uri="{FF2B5EF4-FFF2-40B4-BE49-F238E27FC236}">
-                <a16:creationId xmlns:a16="http://schemas.microsoft.com/office/drawing/2014/main" id="{0D6A8D7D-8F34-45DE-B601-1AFC23C75DC2}"/>
+                <a16:creationId xmlns:a16="http://schemas.microsoft.com/office/drawing/2014/main" id="{ED31910F-0165-8685-A8A7-CEE8FF94E0C3}"/>
               </a:ext>
             </a:extLst>
           </p:cNvPr>
@@ -13176,7 +13176,7 @@
           <p:cNvPr id="4" name="TextBox 3">
             <a:extLst>
               <a:ext uri="{FF2B5EF4-FFF2-40B4-BE49-F238E27FC236}">
-                <a16:creationId xmlns:a16="http://schemas.microsoft.com/office/drawing/2014/main" id="{524A6E4B-CD42-F4F1-654E-6583698910FB}"/>
+                <a16:creationId xmlns:a16="http://schemas.microsoft.com/office/drawing/2014/main" id="{C3C42191-0F81-760F-9F11-2FE08BD97606}"/>
               </a:ext>
             </a:extLst>
           </p:cNvPr>
@@ -13228,7 +13228,7 @@
           <p:cNvPr id="5" name="Table 4">
             <a:extLst>
               <a:ext uri="{FF2B5EF4-FFF2-40B4-BE49-F238E27FC236}">
-                <a16:creationId xmlns:a16="http://schemas.microsoft.com/office/drawing/2014/main" id="{B40478EF-A25C-A043-2C87-BC29D3250BBC}"/>
+                <a16:creationId xmlns:a16="http://schemas.microsoft.com/office/drawing/2014/main" id="{9FE6D821-7A6A-5243-90D0-413103D3190B}"/>
               </a:ext>
             </a:extLst>
           </p:cNvPr>
@@ -13238,7 +13238,7 @@
           <p:nvPr>
             <p:extLst>
               <p:ext uri="{D42A27DB-BD31-4B8C-83A1-F6EECF244321}">
-                <p14:modId xmlns:p14="http://schemas.microsoft.com/office/powerpoint/2010/main" val="1182239654"/>
+                <p14:modId xmlns:p14="http://schemas.microsoft.com/office/powerpoint/2010/main" val="4142817996"/>
               </p:ext>
             </p:extLst>
           </p:nvPr>
@@ -13257,28 +13257,28 @@
                 <a:gridCol w="4064000">
                   <a:extLst>
                     <a:ext uri="{9D8B030D-6E8A-4147-A177-3AD203B41FA5}">
-                      <a16:colId xmlns:a16="http://schemas.microsoft.com/office/drawing/2014/main" val="51852827"/>
+                      <a16:colId xmlns:a16="http://schemas.microsoft.com/office/drawing/2014/main" val="974904807"/>
                     </a:ext>
                   </a:extLst>
                 </a:gridCol>
                 <a:gridCol w="2286000">
                   <a:extLst>
                     <a:ext uri="{9D8B030D-6E8A-4147-A177-3AD203B41FA5}">
-                      <a16:colId xmlns:a16="http://schemas.microsoft.com/office/drawing/2014/main" val="247636588"/>
+                      <a16:colId xmlns:a16="http://schemas.microsoft.com/office/drawing/2014/main" val="3912473033"/>
                     </a:ext>
                   </a:extLst>
                 </a:gridCol>
                 <a:gridCol w="2286000">
                   <a:extLst>
                     <a:ext uri="{9D8B030D-6E8A-4147-A177-3AD203B41FA5}">
-                      <a16:colId xmlns:a16="http://schemas.microsoft.com/office/drawing/2014/main" val="1714982424"/>
+                      <a16:colId xmlns:a16="http://schemas.microsoft.com/office/drawing/2014/main" val="1780960874"/>
                     </a:ext>
                   </a:extLst>
                 </a:gridCol>
                 <a:gridCol w="2286000">
                   <a:extLst>
                     <a:ext uri="{9D8B030D-6E8A-4147-A177-3AD203B41FA5}">
-                      <a16:colId xmlns:a16="http://schemas.microsoft.com/office/drawing/2014/main" val="3596683838"/>
+                      <a16:colId xmlns:a16="http://schemas.microsoft.com/office/drawing/2014/main" val="290095599"/>
                     </a:ext>
                   </a:extLst>
                 </a:gridCol>
@@ -13454,7 +13454,7 @@
                 </a:tc>
                 <a:extLst>
                   <a:ext uri="{0D108BD9-81ED-4DB2-BD59-A6C34878D82A}">
-                    <a16:rowId xmlns:a16="http://schemas.microsoft.com/office/drawing/2014/main" val="193349694"/>
+                    <a16:rowId xmlns:a16="http://schemas.microsoft.com/office/drawing/2014/main" val="3826400507"/>
                   </a:ext>
                 </a:extLst>
               </a:tr>
@@ -13629,7 +13629,7 @@
                 </a:tc>
                 <a:extLst>
                   <a:ext uri="{0D108BD9-81ED-4DB2-BD59-A6C34878D82A}">
-                    <a16:rowId xmlns:a16="http://schemas.microsoft.com/office/drawing/2014/main" val="2116204715"/>
+                    <a16:rowId xmlns:a16="http://schemas.microsoft.com/office/drawing/2014/main" val="107230853"/>
                   </a:ext>
                 </a:extLst>
               </a:tr>
@@ -13804,7 +13804,7 @@
                 </a:tc>
                 <a:extLst>
                   <a:ext uri="{0D108BD9-81ED-4DB2-BD59-A6C34878D82A}">
-                    <a16:rowId xmlns:a16="http://schemas.microsoft.com/office/drawing/2014/main" val="1635081204"/>
+                    <a16:rowId xmlns:a16="http://schemas.microsoft.com/office/drawing/2014/main" val="1403060372"/>
                   </a:ext>
                 </a:extLst>
               </a:tr>
@@ -13979,7 +13979,7 @@
                 </a:tc>
                 <a:extLst>
                   <a:ext uri="{0D108BD9-81ED-4DB2-BD59-A6C34878D82A}">
-                    <a16:rowId xmlns:a16="http://schemas.microsoft.com/office/drawing/2014/main" val="3883683791"/>
+                    <a16:rowId xmlns:a16="http://schemas.microsoft.com/office/drawing/2014/main" val="1536898977"/>
                   </a:ext>
                 </a:extLst>
               </a:tr>
@@ -14154,7 +14154,7 @@
                 </a:tc>
                 <a:extLst>
                   <a:ext uri="{0D108BD9-81ED-4DB2-BD59-A6C34878D82A}">
-                    <a16:rowId xmlns:a16="http://schemas.microsoft.com/office/drawing/2014/main" val="3800439291"/>
+                    <a16:rowId xmlns:a16="http://schemas.microsoft.com/office/drawing/2014/main" val="3457525891"/>
                   </a:ext>
                 </a:extLst>
               </a:tr>
@@ -14167,7 +14167,7 @@
           <p:cNvPr id="6" name="TextBox 5">
             <a:extLst>
               <a:ext uri="{FF2B5EF4-FFF2-40B4-BE49-F238E27FC236}">
-                <a16:creationId xmlns:a16="http://schemas.microsoft.com/office/drawing/2014/main" id="{4616BE09-4BDC-5A65-4920-97B906418D83}"/>
+                <a16:creationId xmlns:a16="http://schemas.microsoft.com/office/drawing/2014/main" id="{EABF3DE7-ABA0-7206-9CD7-45CC9B4F872C}"/>
               </a:ext>
             </a:extLst>
           </p:cNvPr>
@@ -14212,7 +14212,7 @@
           <p:cNvPr id="7" name="TextBox 6">
             <a:extLst>
               <a:ext uri="{FF2B5EF4-FFF2-40B4-BE49-F238E27FC236}">
-                <a16:creationId xmlns:a16="http://schemas.microsoft.com/office/drawing/2014/main" id="{FE64A3C2-E395-7D1A-A5E4-A9702D63E8DD}"/>
+                <a16:creationId xmlns:a16="http://schemas.microsoft.com/office/drawing/2014/main" id="{16278DD0-4B8F-F0C5-06EB-6362CDE329A4}"/>
               </a:ext>
             </a:extLst>
           </p:cNvPr>
@@ -14255,7 +14255,7 @@
     </p:spTree>
     <p:extLst>
       <p:ext uri="{BB962C8B-B14F-4D97-AF65-F5344CB8AC3E}">
-        <p14:creationId xmlns:p14="http://schemas.microsoft.com/office/powerpoint/2010/main" val="2076556371"/>
+        <p14:creationId xmlns:p14="http://schemas.microsoft.com/office/powerpoint/2010/main" val="3152168727"/>
       </p:ext>
     </p:extLst>
   </p:cSld>
@@ -14295,7 +14295,7 @@
           <p:cNvPr id="2" name="TextBox 1">
             <a:extLst>
               <a:ext uri="{FF2B5EF4-FFF2-40B4-BE49-F238E27FC236}">
-                <a16:creationId xmlns:a16="http://schemas.microsoft.com/office/drawing/2014/main" id="{8D226672-D290-40A5-5F38-AA57FC13EC92}"/>
+                <a16:creationId xmlns:a16="http://schemas.microsoft.com/office/drawing/2014/main" id="{7427681B-DE70-1A5A-0B07-0C6507D825B7}"/>
               </a:ext>
             </a:extLst>
           </p:cNvPr>
@@ -14346,7 +14346,7 @@
           <p:cNvPr id="3" name="TextBox 2">
             <a:extLst>
               <a:ext uri="{FF2B5EF4-FFF2-40B4-BE49-F238E27FC236}">
-                <a16:creationId xmlns:a16="http://schemas.microsoft.com/office/drawing/2014/main" id="{089C8662-2FAC-99BC-B64D-9466DF430684}"/>
+                <a16:creationId xmlns:a16="http://schemas.microsoft.com/office/drawing/2014/main" id="{0F59A09F-FDBA-F89B-DBC9-2733E5494741}"/>
               </a:ext>
             </a:extLst>
           </p:cNvPr>
@@ -14397,7 +14397,7 @@
           <p:cNvPr id="4" name="Table 3">
             <a:extLst>
               <a:ext uri="{FF2B5EF4-FFF2-40B4-BE49-F238E27FC236}">
-                <a16:creationId xmlns:a16="http://schemas.microsoft.com/office/drawing/2014/main" id="{E80F4386-CE45-9F8B-1A3E-049A0D4170DF}"/>
+                <a16:creationId xmlns:a16="http://schemas.microsoft.com/office/drawing/2014/main" id="{3460A097-3395-6F91-B14A-91110CEE652D}"/>
               </a:ext>
             </a:extLst>
           </p:cNvPr>
@@ -14407,7 +14407,7 @@
           <p:nvPr>
             <p:extLst>
               <p:ext uri="{D42A27DB-BD31-4B8C-83A1-F6EECF244321}">
-                <p14:modId xmlns:p14="http://schemas.microsoft.com/office/powerpoint/2010/main" val="4094439080"/>
+                <p14:modId xmlns:p14="http://schemas.microsoft.com/office/powerpoint/2010/main" val="2560091700"/>
               </p:ext>
             </p:extLst>
           </p:nvPr>
@@ -14426,21 +14426,21 @@
                 <a:gridCol w="3810000">
                   <a:extLst>
                     <a:ext uri="{9D8B030D-6E8A-4147-A177-3AD203B41FA5}">
-                      <a16:colId xmlns:a16="http://schemas.microsoft.com/office/drawing/2014/main" val="69029476"/>
+                      <a16:colId xmlns:a16="http://schemas.microsoft.com/office/drawing/2014/main" val="1530089302"/>
                     </a:ext>
                   </a:extLst>
                 </a:gridCol>
                 <a:gridCol w="3302000">
                   <a:extLst>
                     <a:ext uri="{9D8B030D-6E8A-4147-A177-3AD203B41FA5}">
-                      <a16:colId xmlns:a16="http://schemas.microsoft.com/office/drawing/2014/main" val="758016958"/>
+                      <a16:colId xmlns:a16="http://schemas.microsoft.com/office/drawing/2014/main" val="351520668"/>
                     </a:ext>
                   </a:extLst>
                 </a:gridCol>
                 <a:gridCol w="3810000">
                   <a:extLst>
                     <a:ext uri="{9D8B030D-6E8A-4147-A177-3AD203B41FA5}">
-                      <a16:colId xmlns:a16="http://schemas.microsoft.com/office/drawing/2014/main" val="3207620416"/>
+                      <a16:colId xmlns:a16="http://schemas.microsoft.com/office/drawing/2014/main" val="898725276"/>
                     </a:ext>
                   </a:extLst>
                 </a:gridCol>
@@ -14574,7 +14574,7 @@
                 </a:tc>
                 <a:extLst>
                   <a:ext uri="{0D108BD9-81ED-4DB2-BD59-A6C34878D82A}">
-                    <a16:rowId xmlns:a16="http://schemas.microsoft.com/office/drawing/2014/main" val="423366103"/>
+                    <a16:rowId xmlns:a16="http://schemas.microsoft.com/office/drawing/2014/main" val="3589679137"/>
                   </a:ext>
                 </a:extLst>
               </a:tr>
@@ -14707,7 +14707,7 @@
                 </a:tc>
                 <a:extLst>
                   <a:ext uri="{0D108BD9-81ED-4DB2-BD59-A6C34878D82A}">
-                    <a16:rowId xmlns:a16="http://schemas.microsoft.com/office/drawing/2014/main" val="1256394020"/>
+                    <a16:rowId xmlns:a16="http://schemas.microsoft.com/office/drawing/2014/main" val="3328367624"/>
                   </a:ext>
                 </a:extLst>
               </a:tr>
@@ -14846,7 +14846,7 @@
                 </a:tc>
                 <a:extLst>
                   <a:ext uri="{0D108BD9-81ED-4DB2-BD59-A6C34878D82A}">
-                    <a16:rowId xmlns:a16="http://schemas.microsoft.com/office/drawing/2014/main" val="1300193859"/>
+                    <a16:rowId xmlns:a16="http://schemas.microsoft.com/office/drawing/2014/main" val="1131023998"/>
                   </a:ext>
                 </a:extLst>
               </a:tr>
@@ -14979,7 +14979,7 @@
                 </a:tc>
                 <a:extLst>
                   <a:ext uri="{0D108BD9-81ED-4DB2-BD59-A6C34878D82A}">
-                    <a16:rowId xmlns:a16="http://schemas.microsoft.com/office/drawing/2014/main" val="264132339"/>
+                    <a16:rowId xmlns:a16="http://schemas.microsoft.com/office/drawing/2014/main" val="685300200"/>
                   </a:ext>
                 </a:extLst>
               </a:tr>
@@ -15118,7 +15118,7 @@
                 </a:tc>
                 <a:extLst>
                   <a:ext uri="{0D108BD9-81ED-4DB2-BD59-A6C34878D82A}">
-                    <a16:rowId xmlns:a16="http://schemas.microsoft.com/office/drawing/2014/main" val="1014041085"/>
+                    <a16:rowId xmlns:a16="http://schemas.microsoft.com/office/drawing/2014/main" val="797364513"/>
                   </a:ext>
                 </a:extLst>
               </a:tr>
@@ -15131,7 +15131,7 @@
           <p:cNvPr id="5" name="TextBox 4">
             <a:extLst>
               <a:ext uri="{FF2B5EF4-FFF2-40B4-BE49-F238E27FC236}">
-                <a16:creationId xmlns:a16="http://schemas.microsoft.com/office/drawing/2014/main" id="{5562C74D-E921-4F59-7F78-096780C6BA41}"/>
+                <a16:creationId xmlns:a16="http://schemas.microsoft.com/office/drawing/2014/main" id="{D3BC3E4B-19F4-D134-0CDC-14C807A1861F}"/>
               </a:ext>
             </a:extLst>
           </p:cNvPr>
@@ -15182,7 +15182,7 @@
           <p:cNvPr id="6" name="TextBox 5">
             <a:extLst>
               <a:ext uri="{FF2B5EF4-FFF2-40B4-BE49-F238E27FC236}">
-                <a16:creationId xmlns:a16="http://schemas.microsoft.com/office/drawing/2014/main" id="{39CD496D-FE83-51DB-26FF-02B0DCBBA1A6}"/>
+                <a16:creationId xmlns:a16="http://schemas.microsoft.com/office/drawing/2014/main" id="{73FA8150-46A1-3B8C-FF55-9D8214275691}"/>
               </a:ext>
             </a:extLst>
           </p:cNvPr>
@@ -15227,7 +15227,7 @@
           <p:cNvPr id="7" name="TextBox 6">
             <a:extLst>
               <a:ext uri="{FF2B5EF4-FFF2-40B4-BE49-F238E27FC236}">
-                <a16:creationId xmlns:a16="http://schemas.microsoft.com/office/drawing/2014/main" id="{BFBC28AA-83FA-F9A1-4B9C-7CAA085C03F0}"/>
+                <a16:creationId xmlns:a16="http://schemas.microsoft.com/office/drawing/2014/main" id="{B9E58C4B-5923-DBC3-63AC-6FB5BC4D6DCC}"/>
               </a:ext>
             </a:extLst>
           </p:cNvPr>
@@ -15270,7 +15270,7 @@
     </p:spTree>
     <p:extLst>
       <p:ext uri="{BB962C8B-B14F-4D97-AF65-F5344CB8AC3E}">
-        <p14:creationId xmlns:p14="http://schemas.microsoft.com/office/powerpoint/2010/main" val="2826811538"/>
+        <p14:creationId xmlns:p14="http://schemas.microsoft.com/office/powerpoint/2010/main" val="336329458"/>
       </p:ext>
     </p:extLst>
   </p:cSld>
@@ -15310,7 +15310,7 @@
           <p:cNvPr id="2" name="TextBox 1">
             <a:extLst>
               <a:ext uri="{FF2B5EF4-FFF2-40B4-BE49-F238E27FC236}">
-                <a16:creationId xmlns:a16="http://schemas.microsoft.com/office/drawing/2014/main" id="{E3EF35A5-DEB2-4556-F72B-DB774AC173D5}"/>
+                <a16:creationId xmlns:a16="http://schemas.microsoft.com/office/drawing/2014/main" id="{DF830082-990D-6409-4108-D6007D7B192E}"/>
               </a:ext>
             </a:extLst>
           </p:cNvPr>
@@ -15355,7 +15355,7 @@
           <p:cNvPr id="3" name="TextBox 2">
             <a:extLst>
               <a:ext uri="{FF2B5EF4-FFF2-40B4-BE49-F238E27FC236}">
-                <a16:creationId xmlns:a16="http://schemas.microsoft.com/office/drawing/2014/main" id="{661F9EE7-A79A-2AFE-9C5D-C0A1C3613899}"/>
+                <a16:creationId xmlns:a16="http://schemas.microsoft.com/office/drawing/2014/main" id="{F9612C4B-DF0A-314B-0C66-7755F33BA723}"/>
               </a:ext>
             </a:extLst>
           </p:cNvPr>
@@ -15406,7 +15406,7 @@
           <p:cNvPr id="5" name="Picture 4">
             <a:extLst>
               <a:ext uri="{FF2B5EF4-FFF2-40B4-BE49-F238E27FC236}">
-                <a16:creationId xmlns:a16="http://schemas.microsoft.com/office/drawing/2014/main" id="{B76E3F6F-2E3C-5D73-117B-46E6625B8AB7}"/>
+                <a16:creationId xmlns:a16="http://schemas.microsoft.com/office/drawing/2014/main" id="{9699B7D8-6AA2-63BB-EC4C-8942A6BCD925}"/>
               </a:ext>
             </a:extLst>
           </p:cNvPr>
@@ -15442,7 +15442,7 @@
           <p:cNvPr id="6" name="TextBox 5">
             <a:extLst>
               <a:ext uri="{FF2B5EF4-FFF2-40B4-BE49-F238E27FC236}">
-                <a16:creationId xmlns:a16="http://schemas.microsoft.com/office/drawing/2014/main" id="{8B351DFE-843A-808E-EBFA-A2027EBDEFAB}"/>
+                <a16:creationId xmlns:a16="http://schemas.microsoft.com/office/drawing/2014/main" id="{B7A89EE0-D565-7840-62D3-D1FD04902AF6}"/>
               </a:ext>
             </a:extLst>
           </p:cNvPr>
@@ -15493,7 +15493,7 @@
           <p:cNvPr id="7" name="TextBox 6">
             <a:extLst>
               <a:ext uri="{FF2B5EF4-FFF2-40B4-BE49-F238E27FC236}">
-                <a16:creationId xmlns:a16="http://schemas.microsoft.com/office/drawing/2014/main" id="{1B2A3CD3-F3C8-2A5F-9DE6-673014D47EA4}"/>
+                <a16:creationId xmlns:a16="http://schemas.microsoft.com/office/drawing/2014/main" id="{E7D39B04-59CD-3277-C8D2-763C16ADD97E}"/>
               </a:ext>
             </a:extLst>
           </p:cNvPr>
@@ -15538,7 +15538,7 @@
           <p:cNvPr id="8" name="TextBox 7">
             <a:extLst>
               <a:ext uri="{FF2B5EF4-FFF2-40B4-BE49-F238E27FC236}">
-                <a16:creationId xmlns:a16="http://schemas.microsoft.com/office/drawing/2014/main" id="{AF5470AD-E4E2-3557-5ACF-992214F54CFC}"/>
+                <a16:creationId xmlns:a16="http://schemas.microsoft.com/office/drawing/2014/main" id="{0C090E10-9519-53D2-3411-C95701D25B83}"/>
               </a:ext>
             </a:extLst>
           </p:cNvPr>
@@ -15581,7 +15581,7 @@
     </p:spTree>
     <p:extLst>
       <p:ext uri="{BB962C8B-B14F-4D97-AF65-F5344CB8AC3E}">
-        <p14:creationId xmlns:p14="http://schemas.microsoft.com/office/powerpoint/2010/main" val="3853846565"/>
+        <p14:creationId xmlns:p14="http://schemas.microsoft.com/office/powerpoint/2010/main" val="3540473995"/>
       </p:ext>
     </p:extLst>
   </p:cSld>
@@ -15621,7 +15621,7 @@
           <p:cNvPr id="2" name="TextBox 1">
             <a:extLst>
               <a:ext uri="{FF2B5EF4-FFF2-40B4-BE49-F238E27FC236}">
-                <a16:creationId xmlns:a16="http://schemas.microsoft.com/office/drawing/2014/main" id="{BE731B54-E805-8220-60EA-2E2EECFE0F23}"/>
+                <a16:creationId xmlns:a16="http://schemas.microsoft.com/office/drawing/2014/main" id="{BAF232DF-551C-D45B-44CD-97D06BD34D47}"/>
               </a:ext>
             </a:extLst>
           </p:cNvPr>
@@ -15672,7 +15672,7 @@
           <p:cNvPr id="3" name="TextBox 2">
             <a:extLst>
               <a:ext uri="{FF2B5EF4-FFF2-40B4-BE49-F238E27FC236}">
-                <a16:creationId xmlns:a16="http://schemas.microsoft.com/office/drawing/2014/main" id="{31F1845C-C32F-249D-4EDA-6CE9A88B0B50}"/>
+                <a16:creationId xmlns:a16="http://schemas.microsoft.com/office/drawing/2014/main" id="{A09813FE-3255-B176-EA61-E4BA9B4EC9DB}"/>
               </a:ext>
             </a:extLst>
           </p:cNvPr>
@@ -15723,7 +15723,7 @@
           <p:cNvPr id="5" name="Picture 4">
             <a:extLst>
               <a:ext uri="{FF2B5EF4-FFF2-40B4-BE49-F238E27FC236}">
-                <a16:creationId xmlns:a16="http://schemas.microsoft.com/office/drawing/2014/main" id="{72F41A71-CFFA-0F40-DC23-ABA30838204C}"/>
+                <a16:creationId xmlns:a16="http://schemas.microsoft.com/office/drawing/2014/main" id="{F498C5AA-FA11-A4EA-2CBC-AEA9288B0B0D}"/>
               </a:ext>
             </a:extLst>
           </p:cNvPr>
@@ -15759,7 +15759,7 @@
           <p:cNvPr id="6" name="Table 5">
             <a:extLst>
               <a:ext uri="{FF2B5EF4-FFF2-40B4-BE49-F238E27FC236}">
-                <a16:creationId xmlns:a16="http://schemas.microsoft.com/office/drawing/2014/main" id="{3E43B0A3-FCEA-77FC-182D-6837D076482C}"/>
+                <a16:creationId xmlns:a16="http://schemas.microsoft.com/office/drawing/2014/main" id="{98022728-A0D3-A032-17F6-1D8061893AD9}"/>
               </a:ext>
             </a:extLst>
           </p:cNvPr>
@@ -15769,7 +15769,7 @@
           <p:nvPr>
             <p:extLst>
               <p:ext uri="{D42A27DB-BD31-4B8C-83A1-F6EECF244321}">
-                <p14:modId xmlns:p14="http://schemas.microsoft.com/office/powerpoint/2010/main" val="3191640866"/>
+                <p14:modId xmlns:p14="http://schemas.microsoft.com/office/powerpoint/2010/main" val="2433193298"/>
               </p:ext>
             </p:extLst>
           </p:nvPr>
@@ -15788,14 +15788,14 @@
                 <a:gridCol w="2095500">
                   <a:extLst>
                     <a:ext uri="{9D8B030D-6E8A-4147-A177-3AD203B41FA5}">
-                      <a16:colId xmlns:a16="http://schemas.microsoft.com/office/drawing/2014/main" val="3493810504"/>
+                      <a16:colId xmlns:a16="http://schemas.microsoft.com/office/drawing/2014/main" val="3256199766"/>
                     </a:ext>
                   </a:extLst>
                 </a:gridCol>
                 <a:gridCol w="3683000">
                   <a:extLst>
                     <a:ext uri="{9D8B030D-6E8A-4147-A177-3AD203B41FA5}">
-                      <a16:colId xmlns:a16="http://schemas.microsoft.com/office/drawing/2014/main" val="2675876793"/>
+                      <a16:colId xmlns:a16="http://schemas.microsoft.com/office/drawing/2014/main" val="4223032627"/>
                     </a:ext>
                   </a:extLst>
                 </a:gridCol>
@@ -15887,7 +15887,7 @@
                 </a:tc>
                 <a:extLst>
                   <a:ext uri="{0D108BD9-81ED-4DB2-BD59-A6C34878D82A}">
-                    <a16:rowId xmlns:a16="http://schemas.microsoft.com/office/drawing/2014/main" val="3031441284"/>
+                    <a16:rowId xmlns:a16="http://schemas.microsoft.com/office/drawing/2014/main" val="1518912802"/>
                   </a:ext>
                 </a:extLst>
               </a:tr>
@@ -15978,7 +15978,7 @@
                 </a:tc>
                 <a:extLst>
                   <a:ext uri="{0D108BD9-81ED-4DB2-BD59-A6C34878D82A}">
-                    <a16:rowId xmlns:a16="http://schemas.microsoft.com/office/drawing/2014/main" val="2730262386"/>
+                    <a16:rowId xmlns:a16="http://schemas.microsoft.com/office/drawing/2014/main" val="170291761"/>
                   </a:ext>
                 </a:extLst>
               </a:tr>
@@ -16069,7 +16069,7 @@
                 </a:tc>
                 <a:extLst>
                   <a:ext uri="{0D108BD9-81ED-4DB2-BD59-A6C34878D82A}">
-                    <a16:rowId xmlns:a16="http://schemas.microsoft.com/office/drawing/2014/main" val="791308707"/>
+                    <a16:rowId xmlns:a16="http://schemas.microsoft.com/office/drawing/2014/main" val="1071805114"/>
                   </a:ext>
                 </a:extLst>
               </a:tr>
@@ -16166,7 +16166,7 @@
                 </a:tc>
                 <a:extLst>
                   <a:ext uri="{0D108BD9-81ED-4DB2-BD59-A6C34878D82A}">
-                    <a16:rowId xmlns:a16="http://schemas.microsoft.com/office/drawing/2014/main" val="2166898490"/>
+                    <a16:rowId xmlns:a16="http://schemas.microsoft.com/office/drawing/2014/main" val="1751677349"/>
                   </a:ext>
                 </a:extLst>
               </a:tr>
@@ -16257,7 +16257,7 @@
                 </a:tc>
                 <a:extLst>
                   <a:ext uri="{0D108BD9-81ED-4DB2-BD59-A6C34878D82A}">
-                    <a16:rowId xmlns:a16="http://schemas.microsoft.com/office/drawing/2014/main" val="523706423"/>
+                    <a16:rowId xmlns:a16="http://schemas.microsoft.com/office/drawing/2014/main" val="3158158851"/>
                   </a:ext>
                 </a:extLst>
               </a:tr>
@@ -16354,7 +16354,7 @@
                 </a:tc>
                 <a:extLst>
                   <a:ext uri="{0D108BD9-81ED-4DB2-BD59-A6C34878D82A}">
-                    <a16:rowId xmlns:a16="http://schemas.microsoft.com/office/drawing/2014/main" val="144826843"/>
+                    <a16:rowId xmlns:a16="http://schemas.microsoft.com/office/drawing/2014/main" val="3389850117"/>
                   </a:ext>
                 </a:extLst>
               </a:tr>
@@ -16367,7 +16367,7 @@
           <p:cNvPr id="7" name="TextBox 6">
             <a:extLst>
               <a:ext uri="{FF2B5EF4-FFF2-40B4-BE49-F238E27FC236}">
-                <a16:creationId xmlns:a16="http://schemas.microsoft.com/office/drawing/2014/main" id="{3CB50D89-A6FA-F243-9802-17A6A9A970DF}"/>
+                <a16:creationId xmlns:a16="http://schemas.microsoft.com/office/drawing/2014/main" id="{6D96CE34-95CA-212C-BD23-9E47F535288E}"/>
               </a:ext>
             </a:extLst>
           </p:cNvPr>
@@ -16418,7 +16418,7 @@
           <p:cNvPr id="8" name="TextBox 7">
             <a:extLst>
               <a:ext uri="{FF2B5EF4-FFF2-40B4-BE49-F238E27FC236}">
-                <a16:creationId xmlns:a16="http://schemas.microsoft.com/office/drawing/2014/main" id="{90D2D411-9E49-1D49-D0EF-31E6BCFFE0C3}"/>
+                <a16:creationId xmlns:a16="http://schemas.microsoft.com/office/drawing/2014/main" id="{6E53992D-0647-DC2A-5B28-177989D19784}"/>
               </a:ext>
             </a:extLst>
           </p:cNvPr>
@@ -16463,7 +16463,7 @@
           <p:cNvPr id="9" name="TextBox 8">
             <a:extLst>
               <a:ext uri="{FF2B5EF4-FFF2-40B4-BE49-F238E27FC236}">
-                <a16:creationId xmlns:a16="http://schemas.microsoft.com/office/drawing/2014/main" id="{984FBE04-CADD-5F49-AE67-E32790342A37}"/>
+                <a16:creationId xmlns:a16="http://schemas.microsoft.com/office/drawing/2014/main" id="{42F57C48-861E-28F8-F786-AB4EB8B5A241}"/>
               </a:ext>
             </a:extLst>
           </p:cNvPr>
@@ -16506,7 +16506,7 @@
     </p:spTree>
     <p:extLst>
       <p:ext uri="{BB962C8B-B14F-4D97-AF65-F5344CB8AC3E}">
-        <p14:creationId xmlns:p14="http://schemas.microsoft.com/office/powerpoint/2010/main" val="116421532"/>
+        <p14:creationId xmlns:p14="http://schemas.microsoft.com/office/powerpoint/2010/main" val="1073197640"/>
       </p:ext>
     </p:extLst>
   </p:cSld>
@@ -16546,7 +16546,7 @@
           <p:cNvPr id="2" name="TextBox 1">
             <a:extLst>
               <a:ext uri="{FF2B5EF4-FFF2-40B4-BE49-F238E27FC236}">
-                <a16:creationId xmlns:a16="http://schemas.microsoft.com/office/drawing/2014/main" id="{BC885A81-0695-4012-536D-D12053AF7A0F}"/>
+                <a16:creationId xmlns:a16="http://schemas.microsoft.com/office/drawing/2014/main" id="{01753E3C-3D1F-2091-C1D4-A1B91AB26D7E}"/>
               </a:ext>
             </a:extLst>
           </p:cNvPr>
@@ -16597,7 +16597,7 @@
           <p:cNvPr id="3" name="TextBox 2">
             <a:extLst>
               <a:ext uri="{FF2B5EF4-FFF2-40B4-BE49-F238E27FC236}">
-                <a16:creationId xmlns:a16="http://schemas.microsoft.com/office/drawing/2014/main" id="{518C91E1-EB55-9A73-0AAE-2730BD14ACF5}"/>
+                <a16:creationId xmlns:a16="http://schemas.microsoft.com/office/drawing/2014/main" id="{16259C79-FC8F-2B68-EF0F-7683D8579305}"/>
               </a:ext>
             </a:extLst>
           </p:cNvPr>
@@ -16648,7 +16648,7 @@
           <p:cNvPr id="4" name="TextBox 3">
             <a:extLst>
               <a:ext uri="{FF2B5EF4-FFF2-40B4-BE49-F238E27FC236}">
-                <a16:creationId xmlns:a16="http://schemas.microsoft.com/office/drawing/2014/main" id="{1F408630-9D30-EB41-DF44-22429CD4075D}"/>
+                <a16:creationId xmlns:a16="http://schemas.microsoft.com/office/drawing/2014/main" id="{73AF0D58-FBAF-59AD-6D29-634E17A43DDB}"/>
               </a:ext>
             </a:extLst>
           </p:cNvPr>
@@ -16700,7 +16700,7 @@
           <p:cNvPr id="5" name="Table 4">
             <a:extLst>
               <a:ext uri="{FF2B5EF4-FFF2-40B4-BE49-F238E27FC236}">
-                <a16:creationId xmlns:a16="http://schemas.microsoft.com/office/drawing/2014/main" id="{2909899B-3729-E9FA-83ED-2B1D7BF98781}"/>
+                <a16:creationId xmlns:a16="http://schemas.microsoft.com/office/drawing/2014/main" id="{AEEC7B9F-E739-A67B-58ED-6A813D79954A}"/>
               </a:ext>
             </a:extLst>
           </p:cNvPr>
@@ -16710,7 +16710,7 @@
           <p:nvPr>
             <p:extLst>
               <p:ext uri="{D42A27DB-BD31-4B8C-83A1-F6EECF244321}">
-                <p14:modId xmlns:p14="http://schemas.microsoft.com/office/powerpoint/2010/main" val="409092027"/>
+                <p14:modId xmlns:p14="http://schemas.microsoft.com/office/powerpoint/2010/main" val="3640186762"/>
               </p:ext>
             </p:extLst>
           </p:nvPr>
@@ -16729,21 +16729,21 @@
                 <a:gridCol w="3810000">
                   <a:extLst>
                     <a:ext uri="{9D8B030D-6E8A-4147-A177-3AD203B41FA5}">
-                      <a16:colId xmlns:a16="http://schemas.microsoft.com/office/drawing/2014/main" val="2810859001"/>
+                      <a16:colId xmlns:a16="http://schemas.microsoft.com/office/drawing/2014/main" val="1696363584"/>
                     </a:ext>
                   </a:extLst>
                 </a:gridCol>
                 <a:gridCol w="4572000">
                   <a:extLst>
                     <a:ext uri="{9D8B030D-6E8A-4147-A177-3AD203B41FA5}">
-                      <a16:colId xmlns:a16="http://schemas.microsoft.com/office/drawing/2014/main" val="19413319"/>
+                      <a16:colId xmlns:a16="http://schemas.microsoft.com/office/drawing/2014/main" val="1461896834"/>
                     </a:ext>
                   </a:extLst>
                 </a:gridCol>
                 <a:gridCol w="2540000">
                   <a:extLst>
                     <a:ext uri="{9D8B030D-6E8A-4147-A177-3AD203B41FA5}">
-                      <a16:colId xmlns:a16="http://schemas.microsoft.com/office/drawing/2014/main" val="3514906362"/>
+                      <a16:colId xmlns:a16="http://schemas.microsoft.com/office/drawing/2014/main" val="3010731674"/>
                     </a:ext>
                   </a:extLst>
                 </a:gridCol>
@@ -16877,7 +16877,7 @@
                 </a:tc>
                 <a:extLst>
                   <a:ext uri="{0D108BD9-81ED-4DB2-BD59-A6C34878D82A}">
-                    <a16:rowId xmlns:a16="http://schemas.microsoft.com/office/drawing/2014/main" val="1169514602"/>
+                    <a16:rowId xmlns:a16="http://schemas.microsoft.com/office/drawing/2014/main" val="2273534156"/>
                   </a:ext>
                 </a:extLst>
               </a:tr>
@@ -17010,7 +17010,7 @@
                 </a:tc>
                 <a:extLst>
                   <a:ext uri="{0D108BD9-81ED-4DB2-BD59-A6C34878D82A}">
-                    <a16:rowId xmlns:a16="http://schemas.microsoft.com/office/drawing/2014/main" val="1793120236"/>
+                    <a16:rowId xmlns:a16="http://schemas.microsoft.com/office/drawing/2014/main" val="2432516027"/>
                   </a:ext>
                 </a:extLst>
               </a:tr>
@@ -17143,7 +17143,7 @@
                 </a:tc>
                 <a:extLst>
                   <a:ext uri="{0D108BD9-81ED-4DB2-BD59-A6C34878D82A}">
-                    <a16:rowId xmlns:a16="http://schemas.microsoft.com/office/drawing/2014/main" val="1432322939"/>
+                    <a16:rowId xmlns:a16="http://schemas.microsoft.com/office/drawing/2014/main" val="1726819657"/>
                   </a:ext>
                 </a:extLst>
               </a:tr>
@@ -17276,7 +17276,7 @@
                 </a:tc>
                 <a:extLst>
                   <a:ext uri="{0D108BD9-81ED-4DB2-BD59-A6C34878D82A}">
-                    <a16:rowId xmlns:a16="http://schemas.microsoft.com/office/drawing/2014/main" val="3461550511"/>
+                    <a16:rowId xmlns:a16="http://schemas.microsoft.com/office/drawing/2014/main" val="4294936998"/>
                   </a:ext>
                 </a:extLst>
               </a:tr>
@@ -17409,7 +17409,7 @@
                 </a:tc>
                 <a:extLst>
                   <a:ext uri="{0D108BD9-81ED-4DB2-BD59-A6C34878D82A}">
-                    <a16:rowId xmlns:a16="http://schemas.microsoft.com/office/drawing/2014/main" val="3282168290"/>
+                    <a16:rowId xmlns:a16="http://schemas.microsoft.com/office/drawing/2014/main" val="2880112249"/>
                   </a:ext>
                 </a:extLst>
               </a:tr>
@@ -17422,7 +17422,7 @@
           <p:cNvPr id="6" name="TextBox 5">
             <a:extLst>
               <a:ext uri="{FF2B5EF4-FFF2-40B4-BE49-F238E27FC236}">
-                <a16:creationId xmlns:a16="http://schemas.microsoft.com/office/drawing/2014/main" id="{7248D453-FE69-87AA-F1FF-BCD0FDF1492E}"/>
+                <a16:creationId xmlns:a16="http://schemas.microsoft.com/office/drawing/2014/main" id="{1A47472D-391A-63AF-559C-06DDE0709680}"/>
               </a:ext>
             </a:extLst>
           </p:cNvPr>
@@ -17467,7 +17467,7 @@
           <p:cNvPr id="7" name="TextBox 6">
             <a:extLst>
               <a:ext uri="{FF2B5EF4-FFF2-40B4-BE49-F238E27FC236}">
-                <a16:creationId xmlns:a16="http://schemas.microsoft.com/office/drawing/2014/main" id="{B836EFC9-B99A-FE2D-47F3-00F33692BDC8}"/>
+                <a16:creationId xmlns:a16="http://schemas.microsoft.com/office/drawing/2014/main" id="{72B5680B-1702-DD63-2871-2CF7409C24C6}"/>
               </a:ext>
             </a:extLst>
           </p:cNvPr>
@@ -17510,7 +17510,7 @@
     </p:spTree>
     <p:extLst>
       <p:ext uri="{BB962C8B-B14F-4D97-AF65-F5344CB8AC3E}">
-        <p14:creationId xmlns:p14="http://schemas.microsoft.com/office/powerpoint/2010/main" val="3994622029"/>
+        <p14:creationId xmlns:p14="http://schemas.microsoft.com/office/powerpoint/2010/main" val="2511359338"/>
       </p:ext>
     </p:extLst>
   </p:cSld>
@@ -17550,7 +17550,7 @@
           <p:cNvPr id="2" name="TextBox 1">
             <a:extLst>
               <a:ext uri="{FF2B5EF4-FFF2-40B4-BE49-F238E27FC236}">
-                <a16:creationId xmlns:a16="http://schemas.microsoft.com/office/drawing/2014/main" id="{797519FE-1363-A121-5331-474C92696FCD}"/>
+                <a16:creationId xmlns:a16="http://schemas.microsoft.com/office/drawing/2014/main" id="{063AA638-F2DA-E3D1-D31D-6F325803EB5B}"/>
               </a:ext>
             </a:extLst>
           </p:cNvPr>
@@ -17595,7 +17595,7 @@
           <p:cNvPr id="3" name="TextBox 2">
             <a:extLst>
               <a:ext uri="{FF2B5EF4-FFF2-40B4-BE49-F238E27FC236}">
-                <a16:creationId xmlns:a16="http://schemas.microsoft.com/office/drawing/2014/main" id="{107B6E85-7F0F-5811-517F-5A13C2F2EE34}"/>
+                <a16:creationId xmlns:a16="http://schemas.microsoft.com/office/drawing/2014/main" id="{A15D2CA2-506D-D2DE-7BCE-2A94AACCE3DE}"/>
               </a:ext>
             </a:extLst>
           </p:cNvPr>
@@ -17646,7 +17646,7 @@
           <p:cNvPr id="4" name="Table 3">
             <a:extLst>
               <a:ext uri="{FF2B5EF4-FFF2-40B4-BE49-F238E27FC236}">
-                <a16:creationId xmlns:a16="http://schemas.microsoft.com/office/drawing/2014/main" id="{C0E850F9-928C-6489-8A52-C4BA0F12C4AC}"/>
+                <a16:creationId xmlns:a16="http://schemas.microsoft.com/office/drawing/2014/main" id="{8EA0317C-38E6-73C1-7BE5-048648B307F4}"/>
               </a:ext>
             </a:extLst>
           </p:cNvPr>
@@ -17656,7 +17656,7 @@
           <p:nvPr>
             <p:extLst>
               <p:ext uri="{D42A27DB-BD31-4B8C-83A1-F6EECF244321}">
-                <p14:modId xmlns:p14="http://schemas.microsoft.com/office/powerpoint/2010/main" val="2854085564"/>
+                <p14:modId xmlns:p14="http://schemas.microsoft.com/office/powerpoint/2010/main" val="1136128216"/>
               </p:ext>
             </p:extLst>
           </p:nvPr>
@@ -17675,35 +17675,35 @@
                 <a:gridCol w="3810000">
                   <a:extLst>
                     <a:ext uri="{9D8B030D-6E8A-4147-A177-3AD203B41FA5}">
-                      <a16:colId xmlns:a16="http://schemas.microsoft.com/office/drawing/2014/main" val="3516369988"/>
+                      <a16:colId xmlns:a16="http://schemas.microsoft.com/office/drawing/2014/main" val="430288820"/>
                     </a:ext>
                   </a:extLst>
                 </a:gridCol>
                 <a:gridCol w="1016000">
                   <a:extLst>
                     <a:ext uri="{9D8B030D-6E8A-4147-A177-3AD203B41FA5}">
-                      <a16:colId xmlns:a16="http://schemas.microsoft.com/office/drawing/2014/main" val="559975301"/>
+                      <a16:colId xmlns:a16="http://schemas.microsoft.com/office/drawing/2014/main" val="667383876"/>
                     </a:ext>
                   </a:extLst>
                 </a:gridCol>
                 <a:gridCol w="2032000">
                   <a:extLst>
                     <a:ext uri="{9D8B030D-6E8A-4147-A177-3AD203B41FA5}">
-                      <a16:colId xmlns:a16="http://schemas.microsoft.com/office/drawing/2014/main" val="2455341719"/>
+                      <a16:colId xmlns:a16="http://schemas.microsoft.com/office/drawing/2014/main" val="799803659"/>
                     </a:ext>
                   </a:extLst>
                 </a:gridCol>
                 <a:gridCol w="2032000">
                   <a:extLst>
                     <a:ext uri="{9D8B030D-6E8A-4147-A177-3AD203B41FA5}">
-                      <a16:colId xmlns:a16="http://schemas.microsoft.com/office/drawing/2014/main" val="227727977"/>
+                      <a16:colId xmlns:a16="http://schemas.microsoft.com/office/drawing/2014/main" val="1828716532"/>
                     </a:ext>
                   </a:extLst>
                 </a:gridCol>
                 <a:gridCol w="2032000">
                   <a:extLst>
                     <a:ext uri="{9D8B030D-6E8A-4147-A177-3AD203B41FA5}">
-                      <a16:colId xmlns:a16="http://schemas.microsoft.com/office/drawing/2014/main" val="1708841700"/>
+                      <a16:colId xmlns:a16="http://schemas.microsoft.com/office/drawing/2014/main" val="3167932045"/>
                     </a:ext>
                   </a:extLst>
                 </a:gridCol>
@@ -17921,7 +17921,7 @@
                 </a:tc>
                 <a:extLst>
                   <a:ext uri="{0D108BD9-81ED-4DB2-BD59-A6C34878D82A}">
-                    <a16:rowId xmlns:a16="http://schemas.microsoft.com/office/drawing/2014/main" val="833538895"/>
+                    <a16:rowId xmlns:a16="http://schemas.microsoft.com/office/drawing/2014/main" val="1007857568"/>
                   </a:ext>
                 </a:extLst>
               </a:tr>
@@ -18138,7 +18138,7 @@
                 </a:tc>
                 <a:extLst>
                   <a:ext uri="{0D108BD9-81ED-4DB2-BD59-A6C34878D82A}">
-                    <a16:rowId xmlns:a16="http://schemas.microsoft.com/office/drawing/2014/main" val="1924183128"/>
+                    <a16:rowId xmlns:a16="http://schemas.microsoft.com/office/drawing/2014/main" val="840989148"/>
                   </a:ext>
                 </a:extLst>
               </a:tr>
@@ -18355,7 +18355,7 @@
                 </a:tc>
                 <a:extLst>
                   <a:ext uri="{0D108BD9-81ED-4DB2-BD59-A6C34878D82A}">
-                    <a16:rowId xmlns:a16="http://schemas.microsoft.com/office/drawing/2014/main" val="2532238401"/>
+                    <a16:rowId xmlns:a16="http://schemas.microsoft.com/office/drawing/2014/main" val="161381122"/>
                   </a:ext>
                 </a:extLst>
               </a:tr>
@@ -18572,7 +18572,7 @@
                 </a:tc>
                 <a:extLst>
                   <a:ext uri="{0D108BD9-81ED-4DB2-BD59-A6C34878D82A}">
-                    <a16:rowId xmlns:a16="http://schemas.microsoft.com/office/drawing/2014/main" val="1913551000"/>
+                    <a16:rowId xmlns:a16="http://schemas.microsoft.com/office/drawing/2014/main" val="3626938761"/>
                   </a:ext>
                 </a:extLst>
               </a:tr>
@@ -18789,7 +18789,7 @@
                 </a:tc>
                 <a:extLst>
                   <a:ext uri="{0D108BD9-81ED-4DB2-BD59-A6C34878D82A}">
-                    <a16:rowId xmlns:a16="http://schemas.microsoft.com/office/drawing/2014/main" val="1517836891"/>
+                    <a16:rowId xmlns:a16="http://schemas.microsoft.com/office/drawing/2014/main" val="453769095"/>
                   </a:ext>
                 </a:extLst>
               </a:tr>
@@ -19006,7 +19006,7 @@
                 </a:tc>
                 <a:extLst>
                   <a:ext uri="{0D108BD9-81ED-4DB2-BD59-A6C34878D82A}">
-                    <a16:rowId xmlns:a16="http://schemas.microsoft.com/office/drawing/2014/main" val="3588157338"/>
+                    <a16:rowId xmlns:a16="http://schemas.microsoft.com/office/drawing/2014/main" val="115387309"/>
                   </a:ext>
                 </a:extLst>
               </a:tr>
@@ -19019,7 +19019,7 @@
           <p:cNvPr id="5" name="TextBox 4">
             <a:extLst>
               <a:ext uri="{FF2B5EF4-FFF2-40B4-BE49-F238E27FC236}">
-                <a16:creationId xmlns:a16="http://schemas.microsoft.com/office/drawing/2014/main" id="{452502CC-591A-C7B1-94F5-3B85505F7778}"/>
+                <a16:creationId xmlns:a16="http://schemas.microsoft.com/office/drawing/2014/main" id="{AEA3A98B-C87D-01BB-47DF-ED82D1543B85}"/>
               </a:ext>
             </a:extLst>
           </p:cNvPr>
@@ -19070,7 +19070,7 @@
           <p:cNvPr id="6" name="TextBox 5">
             <a:extLst>
               <a:ext uri="{FF2B5EF4-FFF2-40B4-BE49-F238E27FC236}">
-                <a16:creationId xmlns:a16="http://schemas.microsoft.com/office/drawing/2014/main" id="{8CACB467-4200-F708-5EDD-A1DEC4819EE8}"/>
+                <a16:creationId xmlns:a16="http://schemas.microsoft.com/office/drawing/2014/main" id="{76223835-BF88-2229-BEC2-A365C833C1C6}"/>
               </a:ext>
             </a:extLst>
           </p:cNvPr>
@@ -19115,7 +19115,7 @@
           <p:cNvPr id="7" name="TextBox 6">
             <a:extLst>
               <a:ext uri="{FF2B5EF4-FFF2-40B4-BE49-F238E27FC236}">
-                <a16:creationId xmlns:a16="http://schemas.microsoft.com/office/drawing/2014/main" id="{295CF2CA-09BE-202A-6006-A92F2D45A009}"/>
+                <a16:creationId xmlns:a16="http://schemas.microsoft.com/office/drawing/2014/main" id="{028BB9D0-8C07-B9B7-86C2-58F8A068B2E4}"/>
               </a:ext>
             </a:extLst>
           </p:cNvPr>
@@ -19158,7 +19158,7 @@
     </p:spTree>
     <p:extLst>
       <p:ext uri="{BB962C8B-B14F-4D97-AF65-F5344CB8AC3E}">
-        <p14:creationId xmlns:p14="http://schemas.microsoft.com/office/powerpoint/2010/main" val="3452411671"/>
+        <p14:creationId xmlns:p14="http://schemas.microsoft.com/office/powerpoint/2010/main" val="3839651698"/>
       </p:ext>
     </p:extLst>
   </p:cSld>
